--- a/presentations/NATURE_Trial_2026.pptx
+++ b/presentations/NATURE_Trial_2026.pptx
@@ -16,9 +16,11 @@
     <p:sldId id="264" r:id="rId10"/>
     <p:sldId id="265" r:id="rId11"/>
     <p:sldId id="266" r:id="rId12"/>
+    <p:sldId id="267" r:id="rId13"/>
+    <p:sldId id="268" r:id="rId14"/>
   </p:sldIdLst>
   <p:notesMasterIdLst>
-    <p:notesMasterId r:id="rId13"/>
+    <p:notesMasterId r:id="rId15"/>
   </p:notesMasterIdLst>
   <p:sldSz cx="9144000" cy="5143500"/>
   <p:notesSz cx="5143500" cy="9144000"/>
@@ -1239,7 +1241,7 @@
           <a:p>
             <a:r>
               <a:rPr lang="en-US" dirty="0"/>
-              <a:t>Bottom line: in carefully selected STEMI patients with a large thrombus, stent-retriever thrombectomy before PCI reduced infarct size with no early safety penalty. It is a promising signal, but clinical-outcome data are needed before it changes guidelines.</a:t>
+              <a:t>Strengths: randomisation, a targeted population, and concordant endpoints. Limitations: small, surrogate primary endpoint, inherent lack of operator blinding, CMR only a trend, and sponsor involvement. The next step must be an adequately powered trial with clinical endpoints.</a:t>
             </a:r>
             <a:endParaRPr lang="en-US" dirty="0"/>
           </a:p>
@@ -1327,7 +1329,7 @@
           <a:p>
             <a:r>
               <a:rPr lang="en-US" dirty="0"/>
-              <a:t>Figures for NATURE are taken from the ESC 2026 late-breaking presentation and sponsor/press reports; check the peer-reviewed publication for final values.</a:t>
+              <a:t>Three findings: a significant reduction in enzymatic infarct size, a concordant MRI signal with no early safety penalty, and a result that applies to a selected population — large thrombus, early presentation.</a:t>
             </a:r>
             <a:endParaRPr lang="en-US" dirty="0"/>
           </a:p>
@@ -1351,6 +1353,182 @@
             <a:fld id="{F7021451-1387-4CA6-816F-3879F97B5CBC}" type="slidenum">
               <a:rPr lang="en-US"/>
               <a:t>11</a:t>
+            </a:fld>
+            <a:endParaRPr lang="en-US"/>
+          </a:p>
+        </p:txBody>
+      </p:sp>
+    </p:spTree>
+    <p:extLst>
+      <p:ext uri="{BB962C8B-B14F-4D97-AF65-F5344CB8AC3E}">
+        <p14:creationId xmlns:p14="http://schemas.microsoft.com/office/powerpoint/2010/main" val="1024086991"/>
+      </p:ext>
+    </p:extLst>
+  </p:cSld>
+  <p:clrMapOvr>
+    <a:masterClrMapping/>
+  </p:clrMapOvr>
+</p:notes>
+</file>
+
+<file path=ppt/notesSlides/notesSlide12.xml><?xml version="1.0" encoding="utf-8"?>
+<p:notes xmlns:a="http://schemas.openxmlformats.org/drawingml/2006/main" xmlns:r="http://schemas.openxmlformats.org/officeDocument/2006/relationships" xmlns:p="http://schemas.openxmlformats.org/presentationml/2006/main">
+  <p:cSld>
+    <p:spTree>
+      <p:nvGrpSpPr>
+        <p:cNvPr id="1" name=""/>
+        <p:cNvGrpSpPr/>
+        <p:nvPr/>
+      </p:nvGrpSpPr>
+      <p:grpSpPr>
+        <a:xfrm>
+          <a:off x="0" y="0"/>
+          <a:ext cx="0" cy="0"/>
+          <a:chOff x="0" y="0"/>
+          <a:chExt cx="0" cy="0"/>
+        </a:xfrm>
+      </p:grpSpPr>
+      <p:sp>
+        <p:nvSpPr>
+          <p:cNvPr id="2" name="Slide Image Placeholder 1"/>
+          <p:cNvSpPr>
+            <a:spLocks noGrp="1" noRot="1" noChangeAspect="1"/>
+          </p:cNvSpPr>
+          <p:nvPr>
+            <p:ph type="sldImg"/>
+          </p:nvPr>
+        </p:nvSpPr>
+        <p:spPr/>
+      </p:sp>
+      <p:sp>
+        <p:nvSpPr>
+          <p:cNvPr id="3" name="Notes Placeholder 2"/>
+          <p:cNvSpPr>
+            <a:spLocks noGrp="1"/>
+          </p:cNvSpPr>
+          <p:nvPr>
+            <p:ph type="body" idx="1"/>
+          </p:nvPr>
+        </p:nvSpPr>
+        <p:spPr/>
+        <p:txBody>
+          <a:bodyPr/>
+          <a:lstStyle/>
+          <a:p>
+            <a:r>
+              <a:rPr lang="en-US" dirty="0"/>
+              <a:t>Conclusion: NATURE met its superiority hypothesis on infarct size. enVast-assisted thrombectomy before PCI reduced infarct size in large-thrombus STEMI, and 30-day safety was reassuring. Because the trial was small and used a surrogate endpoint, it should not yet change routine practice; the next step is an outcomes trial.</a:t>
+            </a:r>
+            <a:endParaRPr lang="en-US" dirty="0"/>
+          </a:p>
+        </p:txBody>
+      </p:sp>
+      <p:sp>
+        <p:nvSpPr>
+          <p:cNvPr id="4" name="Slide Number Placeholder 3"/>
+          <p:cNvSpPr>
+            <a:spLocks noGrp="1"/>
+          </p:cNvSpPr>
+          <p:nvPr>
+            <p:ph type="sldNum" sz="quarter" idx="10"/>
+          </p:nvPr>
+        </p:nvSpPr>
+        <p:spPr/>
+        <p:txBody>
+          <a:bodyPr/>
+          <a:lstStyle/>
+          <a:p>
+            <a:fld id="{F7021451-1387-4CA6-816F-3879F97B5CBC}" type="slidenum">
+              <a:rPr lang="en-US"/>
+              <a:t>12</a:t>
+            </a:fld>
+            <a:endParaRPr lang="en-US"/>
+          </a:p>
+        </p:txBody>
+      </p:sp>
+    </p:spTree>
+    <p:extLst>
+      <p:ext uri="{BB962C8B-B14F-4D97-AF65-F5344CB8AC3E}">
+        <p14:creationId xmlns:p14="http://schemas.microsoft.com/office/powerpoint/2010/main" val="1024086991"/>
+      </p:ext>
+    </p:extLst>
+  </p:cSld>
+  <p:clrMapOvr>
+    <a:masterClrMapping/>
+  </p:clrMapOvr>
+</p:notes>
+</file>
+
+<file path=ppt/notesSlides/notesSlide13.xml><?xml version="1.0" encoding="utf-8"?>
+<p:notes xmlns:a="http://schemas.openxmlformats.org/drawingml/2006/main" xmlns:r="http://schemas.openxmlformats.org/officeDocument/2006/relationships" xmlns:p="http://schemas.openxmlformats.org/presentationml/2006/main">
+  <p:cSld>
+    <p:spTree>
+      <p:nvGrpSpPr>
+        <p:cNvPr id="1" name=""/>
+        <p:cNvGrpSpPr/>
+        <p:nvPr/>
+      </p:nvGrpSpPr>
+      <p:grpSpPr>
+        <a:xfrm>
+          <a:off x="0" y="0"/>
+          <a:ext cx="0" cy="0"/>
+          <a:chOff x="0" y="0"/>
+          <a:chExt cx="0" cy="0"/>
+        </a:xfrm>
+      </p:grpSpPr>
+      <p:sp>
+        <p:nvSpPr>
+          <p:cNvPr id="2" name="Slide Image Placeholder 1"/>
+          <p:cNvSpPr>
+            <a:spLocks noGrp="1" noRot="1" noChangeAspect="1"/>
+          </p:cNvSpPr>
+          <p:nvPr>
+            <p:ph type="sldImg"/>
+          </p:nvPr>
+        </p:nvSpPr>
+        <p:spPr/>
+      </p:sp>
+      <p:sp>
+        <p:nvSpPr>
+          <p:cNvPr id="3" name="Notes Placeholder 2"/>
+          <p:cNvSpPr>
+            <a:spLocks noGrp="1"/>
+          </p:cNvSpPr>
+          <p:nvPr>
+            <p:ph type="body" idx="1"/>
+          </p:nvPr>
+        </p:nvSpPr>
+        <p:spPr/>
+        <p:txBody>
+          <a:bodyPr/>
+          <a:lstStyle/>
+          <a:p>
+            <a:r>
+              <a:rPr lang="en-US" dirty="0"/>
+              <a:t>Figures for NATURE are taken from the ESC 2026 late-breaking presentation and sponsor/press reports; check the peer-reviewed publication for final values.</a:t>
+            </a:r>
+            <a:endParaRPr lang="en-US" dirty="0"/>
+          </a:p>
+        </p:txBody>
+      </p:sp>
+      <p:sp>
+        <p:nvSpPr>
+          <p:cNvPr id="4" name="Slide Number Placeholder 3"/>
+          <p:cNvSpPr>
+            <a:spLocks noGrp="1"/>
+          </p:cNvSpPr>
+          <p:nvPr>
+            <p:ph type="sldNum" sz="quarter" idx="10"/>
+          </p:nvPr>
+        </p:nvSpPr>
+        <p:spPr/>
+        <p:txBody>
+          <a:bodyPr/>
+          <a:lstStyle/>
+          <a:p>
+            <a:fld id="{F7021451-1387-4CA6-816F-3879F97B5CBC}" type="slidenum">
+              <a:rPr lang="en-US"/>
+              <a:t>13</a:t>
             </a:fld>
             <a:endParaRPr lang="en-US"/>
           </a:p>
@@ -1679,7 +1857,7 @@
           <a:p>
             <a:r>
               <a:rPr lang="en-US" dirty="0"/>
-              <a:t>Patients were selected for a large thrombus (TIMI thrombus grade 3 or more); occluded vessels were re-graded after wiring. The primary endpoint is a physiological one — enzymatic infarct size — backed by CMR infarct size as a secondary, with 30-day safety events.</a:t>
+              <a:t>Eligibility as listed on ClinicalTrials.gov (NCT04969471). The key enrichment criterion is a TIMI thrombus grade of 3 or more; in occluded vessels (grade 5, TIMI 0 flow) the grade had to be re-confirmed after wiring. Patients had to be treated within 8 hours of symptom onset. Exclusions remove small, heavily calcified or tortuous vessels where a retriever is hard to deliver, stent thrombosis, prior infarction in the same territory and unconscious patients.</a:t>
             </a:r>
             <a:endParaRPr lang="en-US" dirty="0"/>
           </a:p>
@@ -1767,7 +1945,7 @@
           <a:p>
             <a:r>
               <a:rPr lang="en-US" dirty="0"/>
-              <a:t>The trial met its primary endpoint: enzymatic infarct size by CK-MB area under the curve was about 26% lower with enVast (P = 0.001). The chart shows the relative effect indexed to control; absolute CK-MB values are in the primary presentation/publication.</a:t>
+              <a:t>TIMI thrombus grade 3 means a definite thrombus longer than half the vessel diameter; this is the population in which thrombectomy has the most to offer. The primary endpoint is a physiological one — enzymatic infarct size — backed by CMR infarct size as a secondary, with 30-day safety events.</a:t>
             </a:r>
             <a:endParaRPr lang="en-US" dirty="0"/>
           </a:p>
@@ -1855,7 +2033,7 @@
           <a:p>
             <a:r>
               <a:rPr lang="en-US" dirty="0"/>
-              <a:t>CMR at day 3 showed about a 25% relative reduction in infarct size as a percentage of LV mass — a positive trend rather than a formally significant result, but concordant with the biomarker finding, which supports a real biological effect.</a:t>
+              <a:t>The trial met its primary endpoint: enzymatic infarct size by CK-MB area under the curve was about 26% lower with enVast (P = 0.001). The chart shows the relative effect indexed to control; absolute CK-MB values are in the primary presentation/publication.</a:t>
             </a:r>
             <a:endParaRPr lang="en-US" dirty="0"/>
           </a:p>
@@ -1943,7 +2121,7 @@
           <a:p>
             <a:r>
               <a:rPr lang="en-US" dirty="0"/>
-              <a:t>At 30 days: stroke 0% vs 1.3%, death 0% vs 2.6%, MACE 1.3% vs 3.8% (enVast vs control). Reassuring given the stroke concern with aspiration in TOTAL — but these are very small numbers of events and should be treated as hypothesis-generating.</a:t>
+              <a:t>CMR at day 3 showed about a 25% relative reduction in infarct size as a percentage of LV mass — a positive trend rather than a formally significant result, but concordant with the biomarker finding, which supports a real biological effect.</a:t>
             </a:r>
             <a:endParaRPr lang="en-US" dirty="0"/>
           </a:p>
@@ -2031,7 +2209,7 @@
           <a:p>
             <a:r>
               <a:rPr lang="en-US" dirty="0"/>
-              <a:t>Strengths: randomisation, a targeted population, and concordant endpoints. Limitations: small, surrogate primary endpoint, inherent lack of operator blinding, CMR only a trend, and sponsor involvement. The next step must be an adequately powered trial with clinical endpoints.</a:t>
+              <a:t>At 30 days: stroke 0% vs 1.3%, death 0% vs 2.6%, MACE 1.3% vs 3.8% (enVast vs control). Reassuring given the stroke concern with aspiration in TOTAL — but these are very small numbers of events and should be treated as hypothesis-generating.</a:t>
             </a:r>
             <a:endParaRPr lang="en-US" dirty="0"/>
           </a:p>
@@ -2461,7 +2639,7 @@
                 <a:ea typeface="Calibri" pitchFamily="34" charset="-122"/>
                 <a:cs typeface="Calibri" pitchFamily="34" charset="-120"/>
               </a:rPr>
-              <a:t>01 / 11</a:t>
+              <a:t>01 / 13</a:t>
             </a:r>
             <a:endParaRPr lang="en-US" sz="900" dirty="0"/>
           </a:p>
@@ -2972,6 +3150,740 @@
 <file path=ppt/slides/slide10.xml><?xml version="1.0" encoding="utf-8"?>
 <p:sld xmlns:a="http://schemas.openxmlformats.org/drawingml/2006/main" xmlns:r="http://schemas.openxmlformats.org/officeDocument/2006/relationships" xmlns:p="http://schemas.openxmlformats.org/presentationml/2006/main">
   <p:cSld name="Slide 10">
+    <p:bg>
+      <p:bgPr>
+        <a:solidFill>
+          <a:srgbClr val="FFFFFF"/>
+        </a:solidFill>
+      </p:bgPr>
+    </p:bg>
+    <p:spTree>
+      <p:nvGrpSpPr>
+        <p:cNvPr id="1" name=""/>
+        <p:cNvGrpSpPr/>
+        <p:nvPr/>
+      </p:nvGrpSpPr>
+      <p:grpSpPr>
+        <a:xfrm>
+          <a:off x="0" y="0"/>
+          <a:ext cx="0" cy="0"/>
+          <a:chOff x="0" y="0"/>
+          <a:chExt cx="0" cy="0"/>
+        </a:xfrm>
+      </p:grpSpPr>
+      <p:pic>
+        <p:nvPicPr>
+          <p:cNvPr id="2" name="Image 0" descr="preencoded.png">    </p:cNvPr>
+          <p:cNvPicPr>
+            <a:picLocks noChangeAspect="1"/>
+          </p:cNvPicPr>
+          <p:nvPr/>
+        </p:nvPicPr>
+        <p:blipFill>
+          <a:blip r:embed="rId1"/>
+          <a:stretch>
+            <a:fillRect/>
+          </a:stretch>
+        </p:blipFill>
+        <p:spPr>
+          <a:xfrm>
+            <a:off x="7818120" y="4727448"/>
+            <a:ext cx="685800" cy="137160"/>
+          </a:xfrm>
+          <a:prstGeom prst="rect">
+            <a:avLst/>
+          </a:prstGeom>
+        </p:spPr>
+      </p:pic>
+      <p:sp>
+        <p:nvSpPr>
+          <p:cNvPr id="3" name="Text 0"/>
+          <p:cNvSpPr txBox="1"/>
+          <p:nvPr/>
+        </p:nvSpPr>
+        <p:spPr>
+          <a:xfrm>
+            <a:off x="8503920" y="4663440"/>
+            <a:ext cx="548640" cy="274320"/>
+          </a:xfrm>
+          <a:prstGeom prst="rect">
+            <a:avLst/>
+          </a:prstGeom>
+          <a:noFill/>
+          <a:ln/>
+        </p:spPr>
+        <p:txBody>
+          <a:bodyPr wrap="square" lIns="0" tIns="0" rIns="0" bIns="0" rtlCol="0" anchor="ctr"/>
+          <a:lstStyle/>
+          <a:p>
+            <a:pPr algn="r" indent="0" marL="0">
+              <a:buNone/>
+            </a:pPr>
+            <a:r>
+              <a:rPr lang="en-US" sz="900" dirty="0">
+                <a:solidFill>
+                  <a:srgbClr val="5E6778"/>
+                </a:solidFill>
+                <a:latin typeface="Calibri" pitchFamily="34" charset="0"/>
+                <a:ea typeface="Calibri" pitchFamily="34" charset="-122"/>
+                <a:cs typeface="Calibri" pitchFamily="34" charset="-120"/>
+              </a:rPr>
+              <a:t>10 / 13</a:t>
+            </a:r>
+            <a:endParaRPr lang="en-US" sz="900" dirty="0"/>
+          </a:p>
+        </p:txBody>
+      </p:sp>
+      <p:sp>
+        <p:nvSpPr>
+          <p:cNvPr id="4" name="Text 1"/>
+          <p:cNvSpPr txBox="1"/>
+          <p:nvPr/>
+        </p:nvSpPr>
+        <p:spPr>
+          <a:xfrm>
+            <a:off x="457200" y="4663440"/>
+            <a:ext cx="2743200" cy="274320"/>
+          </a:xfrm>
+          <a:prstGeom prst="rect">
+            <a:avLst/>
+          </a:prstGeom>
+          <a:noFill/>
+          <a:ln/>
+        </p:spPr>
+        <p:txBody>
+          <a:bodyPr wrap="square" lIns="0" tIns="0" rIns="0" bIns="0" rtlCol="0" anchor="ctr"/>
+          <a:lstStyle/>
+          <a:p>
+            <a:pPr indent="0" marL="0">
+              <a:buNone/>
+            </a:pPr>
+            <a:r>
+              <a:rPr lang="en-US" sz="900" spc="200" kern="0" dirty="0">
+                <a:solidFill>
+                  <a:srgbClr val="5E6778"/>
+                </a:solidFill>
+                <a:latin typeface="Calibri" pitchFamily="34" charset="0"/>
+                <a:ea typeface="Calibri" pitchFamily="34" charset="-122"/>
+                <a:cs typeface="Calibri" pitchFamily="34" charset="-120"/>
+              </a:rPr>
+              <a:t>NATURE · ESC 2026</a:t>
+            </a:r>
+            <a:endParaRPr lang="en-US" sz="900" dirty="0"/>
+          </a:p>
+        </p:txBody>
+      </p:sp>
+      <p:sp>
+        <p:nvSpPr>
+          <p:cNvPr id="5" name="Text 2"/>
+          <p:cNvSpPr txBox="1"/>
+          <p:nvPr/>
+        </p:nvSpPr>
+        <p:spPr>
+          <a:xfrm>
+            <a:off x="457200" y="320040"/>
+            <a:ext cx="8229600" cy="274320"/>
+          </a:xfrm>
+          <a:prstGeom prst="rect">
+            <a:avLst/>
+          </a:prstGeom>
+          <a:noFill/>
+          <a:ln/>
+        </p:spPr>
+        <p:txBody>
+          <a:bodyPr wrap="square" lIns="0" tIns="0" rIns="0" bIns="0" rtlCol="0" anchor="ctr"/>
+          <a:lstStyle/>
+          <a:p>
+            <a:pPr indent="0" marL="0">
+              <a:buNone/>
+            </a:pPr>
+            <a:r>
+              <a:rPr lang="en-US" sz="1100" b="1" spc="400" kern="0" dirty="0">
+                <a:solidFill>
+                  <a:srgbClr val="E5383B"/>
+                </a:solidFill>
+                <a:latin typeface="Calibri" pitchFamily="34" charset="0"/>
+                <a:ea typeface="Calibri" pitchFamily="34" charset="-122"/>
+                <a:cs typeface="Calibri" pitchFamily="34" charset="-120"/>
+              </a:rPr>
+              <a:t>CRITICAL APPRAISAL</a:t>
+            </a:r>
+            <a:endParaRPr lang="en-US" sz="1100" dirty="0"/>
+          </a:p>
+        </p:txBody>
+      </p:sp>
+      <p:sp>
+        <p:nvSpPr>
+          <p:cNvPr id="6" name="Text 3"/>
+          <p:cNvSpPr txBox="1"/>
+          <p:nvPr/>
+        </p:nvSpPr>
+        <p:spPr>
+          <a:xfrm>
+            <a:off x="457200" y="594360"/>
+            <a:ext cx="8229600" cy="640080"/>
+          </a:xfrm>
+          <a:prstGeom prst="rect">
+            <a:avLst/>
+          </a:prstGeom>
+          <a:noFill/>
+          <a:ln/>
+        </p:spPr>
+        <p:txBody>
+          <a:bodyPr wrap="square" lIns="0" tIns="0" rIns="0" bIns="0" rtlCol="0" anchor="t"/>
+          <a:lstStyle/>
+          <a:p>
+            <a:pPr indent="0" marL="0">
+              <a:buNone/>
+            </a:pPr>
+            <a:r>
+              <a:rPr lang="en-US" sz="3000" b="1" dirty="0">
+                <a:solidFill>
+                  <a:srgbClr val="1B2230"/>
+                </a:solidFill>
+                <a:latin typeface="Cambria" pitchFamily="34" charset="0"/>
+                <a:ea typeface="Cambria" pitchFamily="34" charset="-122"/>
+                <a:cs typeface="Cambria" pitchFamily="34" charset="-120"/>
+              </a:rPr>
+              <a:t>Strong signal, early evidence</a:t>
+            </a:r>
+            <a:endParaRPr lang="en-US" sz="3000" dirty="0"/>
+          </a:p>
+        </p:txBody>
+      </p:sp>
+      <p:sp>
+        <p:nvSpPr>
+          <p:cNvPr id="7" name="Shape 4"/>
+          <p:cNvSpPr/>
+          <p:nvPr/>
+        </p:nvSpPr>
+        <p:spPr>
+          <a:xfrm>
+            <a:off x="457200" y="1371600"/>
+            <a:ext cx="4023360" cy="2514600"/>
+          </a:xfrm>
+          <a:prstGeom prst="roundRect">
+            <a:avLst>
+              <a:gd name="adj" fmla="val 4364"/>
+            </a:avLst>
+          </a:prstGeom>
+          <a:solidFill>
+            <a:srgbClr val="F6F7F9"/>
+          </a:solidFill>
+          <a:ln w="12700">
+            <a:solidFill>
+              <a:srgbClr val="F6F7F9"/>
+            </a:solidFill>
+            <a:prstDash val="solid"/>
+          </a:ln>
+        </p:spPr>
+      </p:sp>
+      <p:sp>
+        <p:nvSpPr>
+          <p:cNvPr id="8" name="Shape 5"/>
+          <p:cNvSpPr/>
+          <p:nvPr/>
+        </p:nvSpPr>
+        <p:spPr>
+          <a:xfrm>
+            <a:off x="731520" y="1572768"/>
+            <a:ext cx="502920" cy="502920"/>
+          </a:xfrm>
+          <a:prstGeom prst="ellipse">
+            <a:avLst/>
+          </a:prstGeom>
+          <a:solidFill>
+            <a:srgbClr val="1FA99C"/>
+          </a:solidFill>
+          <a:ln w="12700">
+            <a:solidFill>
+              <a:srgbClr val="1FA99C"/>
+            </a:solidFill>
+            <a:prstDash val="solid"/>
+          </a:ln>
+        </p:spPr>
+      </p:sp>
+      <p:pic>
+        <p:nvPicPr>
+          <p:cNvPr id="9" name="Image 1" descr="preencoded.png">    </p:cNvPr>
+          <p:cNvPicPr>
+            <a:picLocks noChangeAspect="1"/>
+          </p:cNvPicPr>
+          <p:nvPr/>
+        </p:nvPicPr>
+        <p:blipFill>
+          <a:blip r:embed="rId2"/>
+          <a:stretch>
+            <a:fillRect/>
+          </a:stretch>
+        </p:blipFill>
+        <p:spPr>
+          <a:xfrm>
+            <a:off x="862279" y="1703527"/>
+            <a:ext cx="241402" cy="241402"/>
+          </a:xfrm>
+          <a:prstGeom prst="rect">
+            <a:avLst/>
+          </a:prstGeom>
+        </p:spPr>
+      </p:pic>
+      <p:sp>
+        <p:nvSpPr>
+          <p:cNvPr id="10" name="Text 6"/>
+          <p:cNvSpPr txBox="1"/>
+          <p:nvPr/>
+        </p:nvSpPr>
+        <p:spPr>
+          <a:xfrm>
+            <a:off x="1371600" y="1572768"/>
+            <a:ext cx="2926080" cy="502920"/>
+          </a:xfrm>
+          <a:prstGeom prst="rect">
+            <a:avLst/>
+          </a:prstGeom>
+          <a:noFill/>
+          <a:ln/>
+        </p:spPr>
+        <p:txBody>
+          <a:bodyPr wrap="square" lIns="0" tIns="0" rIns="0" bIns="0" rtlCol="0" anchor="ctr"/>
+          <a:lstStyle/>
+          <a:p>
+            <a:pPr indent="0" marL="0">
+              <a:buNone/>
+            </a:pPr>
+            <a:r>
+              <a:rPr lang="en-US" sz="1900" b="1" dirty="0">
+                <a:solidFill>
+                  <a:srgbClr val="1B2230"/>
+                </a:solidFill>
+                <a:latin typeface="Cambria" pitchFamily="34" charset="0"/>
+                <a:ea typeface="Cambria" pitchFamily="34" charset="-122"/>
+                <a:cs typeface="Cambria" pitchFamily="34" charset="-120"/>
+              </a:rPr>
+              <a:t>Strengths</a:t>
+            </a:r>
+            <a:endParaRPr lang="en-US" sz="1900" dirty="0"/>
+          </a:p>
+        </p:txBody>
+      </p:sp>
+      <p:sp>
+        <p:nvSpPr>
+          <p:cNvPr id="11" name="Text 7"/>
+          <p:cNvSpPr txBox="1"/>
+          <p:nvPr/>
+        </p:nvSpPr>
+        <p:spPr>
+          <a:xfrm>
+            <a:off x="731520" y="2240280"/>
+            <a:ext cx="3566160" cy="1554480"/>
+          </a:xfrm>
+          <a:prstGeom prst="rect">
+            <a:avLst/>
+          </a:prstGeom>
+          <a:noFill/>
+          <a:ln/>
+        </p:spPr>
+        <p:txBody>
+          <a:bodyPr wrap="square" lIns="0" tIns="0" rIns="0" bIns="0" rtlCol="0" anchor="t"/>
+          <a:lstStyle/>
+          <a:p>
+            <a:pPr marL="342900" indent="-342900">
+              <a:spcAft>
+                <a:spcPts val="800"/>
+              </a:spcAft>
+              <a:buSzPct val="100000"/>
+              <a:buChar char="•"/>
+            </a:pPr>
+            <a:r>
+              <a:rPr lang="en-US" sz="1300" dirty="0">
+                <a:solidFill>
+                  <a:srgbClr val="1B2230"/>
+                </a:solidFill>
+                <a:latin typeface="Calibri" pitchFamily="34" charset="0"/>
+                <a:ea typeface="Calibri" pitchFamily="34" charset="-122"/>
+                <a:cs typeface="Calibri" pitchFamily="34" charset="-120"/>
+              </a:rPr>
+              <a:t>Randomised, multicentre design</a:t>
+            </a:r>
+            <a:endParaRPr lang="en-US" sz="1300" dirty="0"/>
+          </a:p>
+          <a:p>
+            <a:pPr marL="342900" indent="-342900">
+              <a:spcAft>
+                <a:spcPts val="800"/>
+              </a:spcAft>
+              <a:buSzPct val="100000"/>
+              <a:buChar char="•"/>
+            </a:pPr>
+            <a:r>
+              <a:rPr lang="en-US" sz="1300" dirty="0">
+                <a:solidFill>
+                  <a:srgbClr val="1B2230"/>
+                </a:solidFill>
+                <a:latin typeface="Calibri" pitchFamily="34" charset="0"/>
+                <a:ea typeface="Calibri" pitchFamily="34" charset="-122"/>
+                <a:cs typeface="Calibri" pitchFamily="34" charset="-120"/>
+              </a:rPr>
+              <a:t>Population enriched for large thrombus — where benefit is most plausible</a:t>
+            </a:r>
+            <a:endParaRPr lang="en-US" sz="1300" dirty="0"/>
+          </a:p>
+          <a:p>
+            <a:pPr marL="342900" indent="-342900">
+              <a:spcAft>
+                <a:spcPts val="800"/>
+              </a:spcAft>
+              <a:buSzPct val="100000"/>
+              <a:buChar char="•"/>
+            </a:pPr>
+            <a:r>
+              <a:rPr lang="en-US" sz="1300" dirty="0">
+                <a:solidFill>
+                  <a:srgbClr val="1B2230"/>
+                </a:solidFill>
+                <a:latin typeface="Calibri" pitchFamily="34" charset="0"/>
+                <a:ea typeface="Calibri" pitchFamily="34" charset="-122"/>
+                <a:cs typeface="Calibri" pitchFamily="34" charset="-120"/>
+              </a:rPr>
+              <a:t>Biomarker and CMR results agree</a:t>
+            </a:r>
+            <a:endParaRPr lang="en-US" sz="1300" dirty="0"/>
+          </a:p>
+          <a:p>
+            <a:pPr marL="342900" indent="-342900">
+              <a:spcAft>
+                <a:spcPts val="800"/>
+              </a:spcAft>
+              <a:buSzPct val="100000"/>
+              <a:buChar char="•"/>
+            </a:pPr>
+            <a:r>
+              <a:rPr lang="en-US" sz="1300" dirty="0">
+                <a:solidFill>
+                  <a:srgbClr val="1B2230"/>
+                </a:solidFill>
+                <a:latin typeface="Calibri" pitchFamily="34" charset="0"/>
+                <a:ea typeface="Calibri" pitchFamily="34" charset="-122"/>
+                <a:cs typeface="Calibri" pitchFamily="34" charset="-120"/>
+              </a:rPr>
+              <a:t>No stroke or death signal at 30 days</a:t>
+            </a:r>
+            <a:endParaRPr lang="en-US" sz="1300" dirty="0"/>
+          </a:p>
+        </p:txBody>
+      </p:sp>
+      <p:sp>
+        <p:nvSpPr>
+          <p:cNvPr id="12" name="Shape 8"/>
+          <p:cNvSpPr/>
+          <p:nvPr/>
+        </p:nvSpPr>
+        <p:spPr>
+          <a:xfrm>
+            <a:off x="4663440" y="1371600"/>
+            <a:ext cx="4023360" cy="2514600"/>
+          </a:xfrm>
+          <a:prstGeom prst="roundRect">
+            <a:avLst>
+              <a:gd name="adj" fmla="val 4364"/>
+            </a:avLst>
+          </a:prstGeom>
+          <a:solidFill>
+            <a:srgbClr val="F6F7F9"/>
+          </a:solidFill>
+          <a:ln w="12700">
+            <a:solidFill>
+              <a:srgbClr val="F6F7F9"/>
+            </a:solidFill>
+            <a:prstDash val="solid"/>
+          </a:ln>
+        </p:spPr>
+      </p:sp>
+      <p:sp>
+        <p:nvSpPr>
+          <p:cNvPr id="13" name="Shape 9"/>
+          <p:cNvSpPr/>
+          <p:nvPr/>
+        </p:nvSpPr>
+        <p:spPr>
+          <a:xfrm>
+            <a:off x="4937760" y="1572768"/>
+            <a:ext cx="502920" cy="502920"/>
+          </a:xfrm>
+          <a:prstGeom prst="ellipse">
+            <a:avLst/>
+          </a:prstGeom>
+          <a:solidFill>
+            <a:srgbClr val="E5383B"/>
+          </a:solidFill>
+          <a:ln w="12700">
+            <a:solidFill>
+              <a:srgbClr val="E5383B"/>
+            </a:solidFill>
+            <a:prstDash val="solid"/>
+          </a:ln>
+        </p:spPr>
+      </p:sp>
+      <p:pic>
+        <p:nvPicPr>
+          <p:cNvPr id="14" name="Image 2" descr="preencoded.png">    </p:cNvPr>
+          <p:cNvPicPr>
+            <a:picLocks noChangeAspect="1"/>
+          </p:cNvPicPr>
+          <p:nvPr/>
+        </p:nvPicPr>
+        <p:blipFill>
+          <a:blip r:embed="rId3"/>
+          <a:stretch>
+            <a:fillRect/>
+          </a:stretch>
+        </p:blipFill>
+        <p:spPr>
+          <a:xfrm>
+            <a:off x="5068519" y="1703527"/>
+            <a:ext cx="241402" cy="241402"/>
+          </a:xfrm>
+          <a:prstGeom prst="rect">
+            <a:avLst/>
+          </a:prstGeom>
+        </p:spPr>
+      </p:pic>
+      <p:sp>
+        <p:nvSpPr>
+          <p:cNvPr id="15" name="Text 10"/>
+          <p:cNvSpPr txBox="1"/>
+          <p:nvPr/>
+        </p:nvSpPr>
+        <p:spPr>
+          <a:xfrm>
+            <a:off x="5577840" y="1572768"/>
+            <a:ext cx="2926080" cy="502920"/>
+          </a:xfrm>
+          <a:prstGeom prst="rect">
+            <a:avLst/>
+          </a:prstGeom>
+          <a:noFill/>
+          <a:ln/>
+        </p:spPr>
+        <p:txBody>
+          <a:bodyPr wrap="square" lIns="0" tIns="0" rIns="0" bIns="0" rtlCol="0" anchor="ctr"/>
+          <a:lstStyle/>
+          <a:p>
+            <a:pPr indent="0" marL="0">
+              <a:buNone/>
+            </a:pPr>
+            <a:r>
+              <a:rPr lang="en-US" sz="1900" b="1" dirty="0">
+                <a:solidFill>
+                  <a:srgbClr val="1B2230"/>
+                </a:solidFill>
+                <a:latin typeface="Cambria" pitchFamily="34" charset="0"/>
+                <a:ea typeface="Cambria" pitchFamily="34" charset="-122"/>
+                <a:cs typeface="Cambria" pitchFamily="34" charset="-120"/>
+              </a:rPr>
+              <a:t>Limitations</a:t>
+            </a:r>
+            <a:endParaRPr lang="en-US" sz="1900" dirty="0"/>
+          </a:p>
+        </p:txBody>
+      </p:sp>
+      <p:sp>
+        <p:nvSpPr>
+          <p:cNvPr id="16" name="Text 11"/>
+          <p:cNvSpPr txBox="1"/>
+          <p:nvPr/>
+        </p:nvSpPr>
+        <p:spPr>
+          <a:xfrm>
+            <a:off x="4937760" y="2240280"/>
+            <a:ext cx="3566160" cy="1554480"/>
+          </a:xfrm>
+          <a:prstGeom prst="rect">
+            <a:avLst/>
+          </a:prstGeom>
+          <a:noFill/>
+          <a:ln/>
+        </p:spPr>
+        <p:txBody>
+          <a:bodyPr wrap="square" lIns="0" tIns="0" rIns="0" bIns="0" rtlCol="0" anchor="t"/>
+          <a:lstStyle/>
+          <a:p>
+            <a:pPr marL="342900" indent="-342900">
+              <a:spcAft>
+                <a:spcPts val="800"/>
+              </a:spcAft>
+              <a:buSzPct val="100000"/>
+              <a:buChar char="•"/>
+            </a:pPr>
+            <a:r>
+              <a:rPr lang="en-US" sz="1300" dirty="0">
+                <a:solidFill>
+                  <a:srgbClr val="1B2230"/>
+                </a:solidFill>
+                <a:latin typeface="Calibri" pitchFamily="34" charset="0"/>
+                <a:ea typeface="Calibri" pitchFamily="34" charset="-122"/>
+                <a:cs typeface="Calibri" pitchFamily="34" charset="-120"/>
+              </a:rPr>
+              <a:t>Modest sample (n = 154)</a:t>
+            </a:r>
+            <a:endParaRPr lang="en-US" sz="1300" dirty="0"/>
+          </a:p>
+          <a:p>
+            <a:pPr marL="342900" indent="-342900">
+              <a:spcAft>
+                <a:spcPts val="800"/>
+              </a:spcAft>
+              <a:buSzPct val="100000"/>
+              <a:buChar char="•"/>
+            </a:pPr>
+            <a:r>
+              <a:rPr lang="en-US" sz="1300" dirty="0">
+                <a:solidFill>
+                  <a:srgbClr val="1B2230"/>
+                </a:solidFill>
+                <a:latin typeface="Calibri" pitchFamily="34" charset="0"/>
+                <a:ea typeface="Calibri" pitchFamily="34" charset="-122"/>
+                <a:cs typeface="Calibri" pitchFamily="34" charset="-120"/>
+              </a:rPr>
+              <a:t>Surrogate primary endpoint, not hard outcomes</a:t>
+            </a:r>
+            <a:endParaRPr lang="en-US" sz="1300" dirty="0"/>
+          </a:p>
+          <a:p>
+            <a:pPr marL="342900" indent="-342900">
+              <a:spcAft>
+                <a:spcPts val="800"/>
+              </a:spcAft>
+              <a:buSzPct val="100000"/>
+              <a:buChar char="•"/>
+            </a:pPr>
+            <a:r>
+              <a:rPr lang="en-US" sz="1300" dirty="0">
+                <a:solidFill>
+                  <a:srgbClr val="1B2230"/>
+                </a:solidFill>
+                <a:latin typeface="Calibri" pitchFamily="34" charset="0"/>
+                <a:ea typeface="Calibri" pitchFamily="34" charset="-122"/>
+                <a:cs typeface="Calibri" pitchFamily="34" charset="-120"/>
+              </a:rPr>
+              <a:t>Operators cannot be blinded to device use</a:t>
+            </a:r>
+            <a:endParaRPr lang="en-US" sz="1300" dirty="0"/>
+          </a:p>
+          <a:p>
+            <a:pPr marL="342900" indent="-342900">
+              <a:spcAft>
+                <a:spcPts val="800"/>
+              </a:spcAft>
+              <a:buSzPct val="100000"/>
+              <a:buChar char="•"/>
+            </a:pPr>
+            <a:r>
+              <a:rPr lang="en-US" sz="1300" dirty="0">
+                <a:solidFill>
+                  <a:srgbClr val="1B2230"/>
+                </a:solidFill>
+                <a:latin typeface="Calibri" pitchFamily="34" charset="0"/>
+                <a:ea typeface="Calibri" pitchFamily="34" charset="-122"/>
+                <a:cs typeface="Calibri" pitchFamily="34" charset="-120"/>
+              </a:rPr>
+              <a:t>CMR effect a trend; industry-sponsored</a:t>
+            </a:r>
+            <a:endParaRPr lang="en-US" sz="1300" dirty="0"/>
+          </a:p>
+        </p:txBody>
+      </p:sp>
+      <p:sp>
+        <p:nvSpPr>
+          <p:cNvPr id="17" name="Shape 12"/>
+          <p:cNvSpPr/>
+          <p:nvPr/>
+        </p:nvSpPr>
+        <p:spPr>
+          <a:xfrm>
+            <a:off x="457200" y="4023360"/>
+            <a:ext cx="8229600" cy="457200"/>
+          </a:xfrm>
+          <a:prstGeom prst="roundRect">
+            <a:avLst>
+              <a:gd name="adj" fmla="val 50000"/>
+            </a:avLst>
+          </a:prstGeom>
+          <a:solidFill>
+            <a:srgbClr val="0E1117"/>
+          </a:solidFill>
+          <a:ln w="12700">
+            <a:solidFill>
+              <a:srgbClr val="0E1117"/>
+            </a:solidFill>
+            <a:prstDash val="solid"/>
+          </a:ln>
+        </p:spPr>
+      </p:sp>
+      <p:sp>
+        <p:nvSpPr>
+          <p:cNvPr id="18" name="Text 13"/>
+          <p:cNvSpPr txBox="1"/>
+          <p:nvPr/>
+        </p:nvSpPr>
+        <p:spPr>
+          <a:xfrm>
+            <a:off x="731520" y="4023360"/>
+            <a:ext cx="7772400" cy="457200"/>
+          </a:xfrm>
+          <a:prstGeom prst="rect">
+            <a:avLst/>
+          </a:prstGeom>
+          <a:noFill/>
+          <a:ln/>
+        </p:spPr>
+        <p:txBody>
+          <a:bodyPr wrap="square" lIns="0" tIns="0" rIns="0" bIns="0" rtlCol="0" anchor="ctr"/>
+          <a:lstStyle/>
+          <a:p>
+            <a:pPr indent="0" marL="0">
+              <a:buNone/>
+            </a:pPr>
+            <a:r>
+              <a:rPr lang="en-US" sz="1250" b="1" spc="300" kern="0" dirty="0">
+                <a:solidFill>
+                  <a:srgbClr val="F4B6BB"/>
+                </a:solidFill>
+                <a:latin typeface="Calibri" pitchFamily="34" charset="0"/>
+                <a:ea typeface="Calibri" pitchFamily="34" charset="-122"/>
+                <a:cs typeface="Calibri" pitchFamily="34" charset="-120"/>
+              </a:rPr>
+              <a:t>VERDICT   </a:t>
+            </a:r>
+            <a:pPr indent="0" marL="0">
+              <a:buNone/>
+            </a:pPr>
+            <a:r>
+              <a:rPr lang="en-US" sz="1250" dirty="0">
+                <a:solidFill>
+                  <a:srgbClr val="FFFFFF"/>
+                </a:solidFill>
+                <a:latin typeface="Calibri" pitchFamily="34" charset="0"/>
+                <a:ea typeface="Calibri" pitchFamily="34" charset="-122"/>
+                <a:cs typeface="Calibri" pitchFamily="34" charset="-120"/>
+              </a:rPr>
+              <a:t>Confirms the hypothesis on infarct size; generates the hypothesis for clinical outcomes.</a:t>
+            </a:r>
+            <a:endParaRPr lang="en-US" sz="1250" dirty="0"/>
+          </a:p>
+        </p:txBody>
+      </p:sp>
+    </p:spTree>
+  </p:cSld>
+  <p:clrMapOvr>
+    <a:masterClrMapping/>
+  </p:clrMapOvr>
+</p:sld>
+</file>
+
+<file path=ppt/slides/slide11.xml><?xml version="1.0" encoding="utf-8"?>
+<p:sld xmlns:a="http://schemas.openxmlformats.org/drawingml/2006/main" xmlns:r="http://schemas.openxmlformats.org/officeDocument/2006/relationships" xmlns:p="http://schemas.openxmlformats.org/presentationml/2006/main">
+  <p:cSld name="Slide 11">
     <p:bg>
       <p:bgPr>
         <a:solidFill>
@@ -3050,7 +3962,7 @@
                 <a:ea typeface="Calibri" pitchFamily="34" charset="-122"/>
                 <a:cs typeface="Calibri" pitchFamily="34" charset="-120"/>
               </a:rPr>
-              <a:t>10 / 11</a:t>
+              <a:t>11 / 13</a:t>
             </a:r>
             <a:endParaRPr lang="en-US" sz="900" dirty="0"/>
           </a:p>
@@ -3154,7 +4066,7 @@
                 <a:ea typeface="Calibri" pitchFamily="34" charset="-122"/>
                 <a:cs typeface="Calibri" pitchFamily="34" charset="-120"/>
               </a:rPr>
-              <a:t>TAKE-HOME</a:t>
+              <a:t>KEY FINDINGS</a:t>
             </a:r>
             <a:endParaRPr lang="en-US" sz="1100" dirty="0"/>
           </a:p>
@@ -3193,7 +4105,7 @@
                 <a:ea typeface="Cambria" pitchFamily="34" charset="-122"/>
                 <a:cs typeface="Cambria" pitchFamily="34" charset="-120"/>
               </a:rPr>
-              <a:t>What NATURE means for the cath lab</a:t>
+              <a:t>Three things NATURE showed</a:t>
             </a:r>
             <a:endParaRPr lang="en-US" sz="3000" dirty="0"/>
           </a:p>
@@ -3586,7 +4498,7 @@
                 <a:ea typeface="Cambria" pitchFamily="34" charset="-122"/>
                 <a:cs typeface="Cambria" pitchFamily="34" charset="-120"/>
               </a:rPr>
-              <a:t>Not yet practice-changing</a:t>
+              <a:t>Right patient, right time</a:t>
             </a:r>
             <a:endParaRPr lang="en-US" sz="1500" dirty="0"/>
           </a:p>
@@ -3625,7 +4537,7 @@
                 <a:ea typeface="Calibri" pitchFamily="34" charset="-122"/>
                 <a:cs typeface="Calibri" pitchFamily="34" charset="-120"/>
               </a:rPr>
-              <a:t>A larger outcomes trial is needed before routine use — selective, not universal.</a:t>
+              <a:t>Benefit shown where it is most plausible: a large thrombus, treated within 8 hours of symptom onset.</a:t>
             </a:r>
             <a:endParaRPr lang="en-US" sz="1200" dirty="0"/>
           </a:p>
@@ -3639,9 +4551,607 @@
 </p:sld>
 </file>
 
-<file path=ppt/slides/slide11.xml><?xml version="1.0" encoding="utf-8"?>
+<file path=ppt/slides/slide12.xml><?xml version="1.0" encoding="utf-8"?>
 <p:sld xmlns:a="http://schemas.openxmlformats.org/drawingml/2006/main" xmlns:r="http://schemas.openxmlformats.org/officeDocument/2006/relationships" xmlns:p="http://schemas.openxmlformats.org/presentationml/2006/main">
-  <p:cSld name="Slide 11">
+  <p:cSld name="Slide 12">
+    <p:bg>
+      <p:bgPr>
+        <a:solidFill>
+          <a:srgbClr val="0E1117"/>
+        </a:solidFill>
+      </p:bgPr>
+    </p:bg>
+    <p:spTree>
+      <p:nvGrpSpPr>
+        <p:cNvPr id="1" name=""/>
+        <p:cNvGrpSpPr/>
+        <p:nvPr/>
+      </p:nvGrpSpPr>
+      <p:grpSpPr>
+        <a:xfrm>
+          <a:off x="0" y="0"/>
+          <a:ext cx="0" cy="0"/>
+          <a:chOff x="0" y="0"/>
+          <a:chExt cx="0" cy="0"/>
+        </a:xfrm>
+      </p:grpSpPr>
+      <p:pic>
+        <p:nvPicPr>
+          <p:cNvPr id="2" name="Image 0" descr="preencoded.png">    </p:cNvPr>
+          <p:cNvPicPr>
+            <a:picLocks noChangeAspect="1"/>
+          </p:cNvPicPr>
+          <p:nvPr/>
+        </p:nvPicPr>
+        <p:blipFill>
+          <a:blip r:embed="rId1"/>
+          <a:stretch>
+            <a:fillRect/>
+          </a:stretch>
+        </p:blipFill>
+        <p:spPr>
+          <a:xfrm>
+            <a:off x="7818120" y="4727448"/>
+            <a:ext cx="685800" cy="137160"/>
+          </a:xfrm>
+          <a:prstGeom prst="rect">
+            <a:avLst/>
+          </a:prstGeom>
+        </p:spPr>
+      </p:pic>
+      <p:sp>
+        <p:nvSpPr>
+          <p:cNvPr id="3" name="Text 0"/>
+          <p:cNvSpPr txBox="1"/>
+          <p:nvPr/>
+        </p:nvSpPr>
+        <p:spPr>
+          <a:xfrm>
+            <a:off x="8503920" y="4663440"/>
+            <a:ext cx="548640" cy="274320"/>
+          </a:xfrm>
+          <a:prstGeom prst="rect">
+            <a:avLst/>
+          </a:prstGeom>
+          <a:noFill/>
+          <a:ln/>
+        </p:spPr>
+        <p:txBody>
+          <a:bodyPr wrap="square" lIns="0" tIns="0" rIns="0" bIns="0" rtlCol="0" anchor="ctr"/>
+          <a:lstStyle/>
+          <a:p>
+            <a:pPr algn="r" indent="0" marL="0">
+              <a:buNone/>
+            </a:pPr>
+            <a:r>
+              <a:rPr lang="en-US" sz="900" dirty="0">
+                <a:solidFill>
+                  <a:srgbClr val="8A93A6"/>
+                </a:solidFill>
+                <a:latin typeface="Calibri" pitchFamily="34" charset="0"/>
+                <a:ea typeface="Calibri" pitchFamily="34" charset="-122"/>
+                <a:cs typeface="Calibri" pitchFamily="34" charset="-120"/>
+              </a:rPr>
+              <a:t>12 / 13</a:t>
+            </a:r>
+            <a:endParaRPr lang="en-US" sz="900" dirty="0"/>
+          </a:p>
+        </p:txBody>
+      </p:sp>
+      <p:sp>
+        <p:nvSpPr>
+          <p:cNvPr id="4" name="Text 1"/>
+          <p:cNvSpPr txBox="1"/>
+          <p:nvPr/>
+        </p:nvSpPr>
+        <p:spPr>
+          <a:xfrm>
+            <a:off x="457200" y="4663440"/>
+            <a:ext cx="2743200" cy="274320"/>
+          </a:xfrm>
+          <a:prstGeom prst="rect">
+            <a:avLst/>
+          </a:prstGeom>
+          <a:noFill/>
+          <a:ln/>
+        </p:spPr>
+        <p:txBody>
+          <a:bodyPr wrap="square" lIns="0" tIns="0" rIns="0" bIns="0" rtlCol="0" anchor="ctr"/>
+          <a:lstStyle/>
+          <a:p>
+            <a:pPr indent="0" marL="0">
+              <a:buNone/>
+            </a:pPr>
+            <a:r>
+              <a:rPr lang="en-US" sz="900" spc="200" kern="0" dirty="0">
+                <a:solidFill>
+                  <a:srgbClr val="8A93A6"/>
+                </a:solidFill>
+                <a:latin typeface="Calibri" pitchFamily="34" charset="0"/>
+                <a:ea typeface="Calibri" pitchFamily="34" charset="-122"/>
+                <a:cs typeface="Calibri" pitchFamily="34" charset="-120"/>
+              </a:rPr>
+              <a:t>NATURE · ESC 2026</a:t>
+            </a:r>
+            <a:endParaRPr lang="en-US" sz="900" dirty="0"/>
+          </a:p>
+        </p:txBody>
+      </p:sp>
+      <p:pic>
+        <p:nvPicPr>
+          <p:cNvPr id="5" name="Image 1" descr="preencoded.png">    </p:cNvPr>
+          <p:cNvPicPr>
+            <a:picLocks noChangeAspect="1"/>
+          </p:cNvPicPr>
+          <p:nvPr/>
+        </p:nvPicPr>
+        <p:blipFill>
+          <a:blip r:embed="rId2">
+            <a:alphaModFix amt="35000"/>
+          </a:blip>
+          <a:stretch>
+            <a:fillRect/>
+          </a:stretch>
+        </p:blipFill>
+        <p:spPr>
+          <a:xfrm>
+            <a:off x="-182880" y="1874520"/>
+            <a:ext cx="9509760" cy="548640"/>
+          </a:xfrm>
+          <a:prstGeom prst="rect">
+            <a:avLst/>
+          </a:prstGeom>
+        </p:spPr>
+      </p:pic>
+      <p:sp>
+        <p:nvSpPr>
+          <p:cNvPr id="6" name="Text 2"/>
+          <p:cNvSpPr txBox="1"/>
+          <p:nvPr/>
+        </p:nvSpPr>
+        <p:spPr>
+          <a:xfrm>
+            <a:off x="457200" y="320040"/>
+            <a:ext cx="8229600" cy="274320"/>
+          </a:xfrm>
+          <a:prstGeom prst="rect">
+            <a:avLst/>
+          </a:prstGeom>
+          <a:noFill/>
+          <a:ln/>
+        </p:spPr>
+        <p:txBody>
+          <a:bodyPr wrap="square" lIns="0" tIns="0" rIns="0" bIns="0" rtlCol="0" anchor="ctr"/>
+          <a:lstStyle/>
+          <a:p>
+            <a:pPr indent="0" marL="0">
+              <a:buNone/>
+            </a:pPr>
+            <a:r>
+              <a:rPr lang="en-US" sz="1100" b="1" spc="400" kern="0" dirty="0">
+                <a:solidFill>
+                  <a:srgbClr val="E5383B"/>
+                </a:solidFill>
+                <a:latin typeface="Calibri" pitchFamily="34" charset="0"/>
+                <a:ea typeface="Calibri" pitchFamily="34" charset="-122"/>
+                <a:cs typeface="Calibri" pitchFamily="34" charset="-120"/>
+              </a:rPr>
+              <a:t>CONCLUSION</a:t>
+            </a:r>
+            <a:endParaRPr lang="en-US" sz="1100" dirty="0"/>
+          </a:p>
+        </p:txBody>
+      </p:sp>
+      <p:pic>
+        <p:nvPicPr>
+          <p:cNvPr id="7" name="Image 2" descr="preencoded.png">    </p:cNvPr>
+          <p:cNvPicPr>
+            <a:picLocks noChangeAspect="1"/>
+          </p:cNvPicPr>
+          <p:nvPr/>
+        </p:nvPicPr>
+        <p:blipFill>
+          <a:blip r:embed="rId3"/>
+          <a:stretch>
+            <a:fillRect/>
+          </a:stretch>
+        </p:blipFill>
+        <p:spPr>
+          <a:xfrm>
+            <a:off x="457200" y="777240"/>
+            <a:ext cx="411480" cy="411480"/>
+          </a:xfrm>
+          <a:prstGeom prst="rect">
+            <a:avLst/>
+          </a:prstGeom>
+        </p:spPr>
+      </p:pic>
+      <p:sp>
+        <p:nvSpPr>
+          <p:cNvPr id="8" name="Text 3"/>
+          <p:cNvSpPr txBox="1"/>
+          <p:nvPr/>
+        </p:nvSpPr>
+        <p:spPr>
+          <a:xfrm>
+            <a:off x="1051560" y="731520"/>
+            <a:ext cx="7589520" cy="1463040"/>
+          </a:xfrm>
+          <a:prstGeom prst="rect">
+            <a:avLst/>
+          </a:prstGeom>
+          <a:noFill/>
+          <a:ln/>
+        </p:spPr>
+        <p:txBody>
+          <a:bodyPr wrap="square" lIns="0" tIns="0" rIns="0" bIns="0" rtlCol="0" anchor="t"/>
+          <a:lstStyle/>
+          <a:p>
+            <a:pPr indent="0" marL="0">
+              <a:buNone/>
+            </a:pPr>
+            <a:r>
+              <a:rPr lang="en-US" sz="2400" i="1" dirty="0">
+                <a:solidFill>
+                  <a:srgbClr val="FFFFFF"/>
+                </a:solidFill>
+                <a:latin typeface="Cambria" pitchFamily="34" charset="0"/>
+                <a:ea typeface="Cambria" pitchFamily="34" charset="-122"/>
+                <a:cs typeface="Cambria" pitchFamily="34" charset="-120"/>
+              </a:rPr>
+              <a:t>In STEMI with a large thrombus burden, enVast-assisted thrombectomy before PCI was </a:t>
+            </a:r>
+            <a:pPr indent="0" marL="0">
+              <a:buNone/>
+            </a:pPr>
+            <a:r>
+              <a:rPr lang="en-US" sz="2400" b="1" i="1" dirty="0">
+                <a:solidFill>
+                  <a:srgbClr val="E5383B"/>
+                </a:solidFill>
+                <a:latin typeface="Cambria" pitchFamily="34" charset="0"/>
+                <a:ea typeface="Cambria" pitchFamily="34" charset="-122"/>
+                <a:cs typeface="Cambria" pitchFamily="34" charset="-120"/>
+              </a:rPr>
+              <a:t>superior to standard PCI</a:t>
+            </a:r>
+            <a:pPr indent="0" marL="0">
+              <a:buNone/>
+            </a:pPr>
+            <a:r>
+              <a:rPr lang="en-US" sz="2400" i="1" dirty="0">
+                <a:solidFill>
+                  <a:srgbClr val="FFFFFF"/>
+                </a:solidFill>
+                <a:latin typeface="Cambria" pitchFamily="34" charset="0"/>
+                <a:ea typeface="Cambria" pitchFamily="34" charset="-122"/>
+                <a:cs typeface="Cambria" pitchFamily="34" charset="-120"/>
+              </a:rPr>
+              <a:t> in reducing infarct size, with no early safety penalty.</a:t>
+            </a:r>
+            <a:endParaRPr lang="en-US" sz="2400" dirty="0"/>
+          </a:p>
+        </p:txBody>
+      </p:sp>
+      <p:sp>
+        <p:nvSpPr>
+          <p:cNvPr id="9" name="Shape 4"/>
+          <p:cNvSpPr/>
+          <p:nvPr/>
+        </p:nvSpPr>
+        <p:spPr>
+          <a:xfrm>
+            <a:off x="457200" y="2514600"/>
+            <a:ext cx="4023360" cy="1783080"/>
+          </a:xfrm>
+          <a:prstGeom prst="roundRect">
+            <a:avLst>
+              <a:gd name="adj" fmla="val 6154"/>
+            </a:avLst>
+          </a:prstGeom>
+          <a:solidFill>
+            <a:srgbClr val="1A1F2B"/>
+          </a:solidFill>
+          <a:ln w="12700">
+            <a:solidFill>
+              <a:srgbClr val="1A1F2B"/>
+            </a:solidFill>
+            <a:prstDash val="solid"/>
+          </a:ln>
+        </p:spPr>
+      </p:sp>
+      <p:sp>
+        <p:nvSpPr>
+          <p:cNvPr id="10" name="Shape 5"/>
+          <p:cNvSpPr/>
+          <p:nvPr/>
+        </p:nvSpPr>
+        <p:spPr>
+          <a:xfrm>
+            <a:off x="685800" y="2697480"/>
+            <a:ext cx="457200" cy="457200"/>
+          </a:xfrm>
+          <a:prstGeom prst="ellipse">
+            <a:avLst/>
+          </a:prstGeom>
+          <a:solidFill>
+            <a:srgbClr val="1FA99C"/>
+          </a:solidFill>
+          <a:ln w="12700">
+            <a:solidFill>
+              <a:srgbClr val="1FA99C"/>
+            </a:solidFill>
+            <a:prstDash val="solid"/>
+          </a:ln>
+        </p:spPr>
+      </p:sp>
+      <p:pic>
+        <p:nvPicPr>
+          <p:cNvPr id="11" name="Image 3" descr="preencoded.png">    </p:cNvPr>
+          <p:cNvPicPr>
+            <a:picLocks noChangeAspect="1"/>
+          </p:cNvPicPr>
+          <p:nvPr/>
+        </p:nvPicPr>
+        <p:blipFill>
+          <a:blip r:embed="rId4"/>
+          <a:stretch>
+            <a:fillRect/>
+          </a:stretch>
+        </p:blipFill>
+        <p:spPr>
+          <a:xfrm>
+            <a:off x="804672" y="2816352"/>
+            <a:ext cx="219456" cy="219456"/>
+          </a:xfrm>
+          <a:prstGeom prst="rect">
+            <a:avLst/>
+          </a:prstGeom>
+        </p:spPr>
+      </p:pic>
+      <p:sp>
+        <p:nvSpPr>
+          <p:cNvPr id="12" name="Text 6"/>
+          <p:cNvSpPr txBox="1"/>
+          <p:nvPr/>
+        </p:nvSpPr>
+        <p:spPr>
+          <a:xfrm>
+            <a:off x="1280160" y="2697480"/>
+            <a:ext cx="3017520" cy="457200"/>
+          </a:xfrm>
+          <a:prstGeom prst="rect">
+            <a:avLst/>
+          </a:prstGeom>
+          <a:noFill/>
+          <a:ln/>
+        </p:spPr>
+        <p:txBody>
+          <a:bodyPr wrap="square" lIns="0" tIns="0" rIns="0" bIns="0" rtlCol="0" anchor="ctr"/>
+          <a:lstStyle/>
+          <a:p>
+            <a:pPr indent="0" marL="0">
+              <a:buNone/>
+            </a:pPr>
+            <a:r>
+              <a:rPr lang="en-US" sz="1600" b="1" dirty="0">
+                <a:solidFill>
+                  <a:srgbClr val="FFFFFF"/>
+                </a:solidFill>
+                <a:latin typeface="Cambria" pitchFamily="34" charset="0"/>
+                <a:ea typeface="Cambria" pitchFamily="34" charset="-122"/>
+                <a:cs typeface="Cambria" pitchFamily="34" charset="-120"/>
+              </a:rPr>
+              <a:t>For practice today</a:t>
+            </a:r>
+            <a:endParaRPr lang="en-US" sz="1600" dirty="0"/>
+          </a:p>
+        </p:txBody>
+      </p:sp>
+      <p:sp>
+        <p:nvSpPr>
+          <p:cNvPr id="13" name="Text 7"/>
+          <p:cNvSpPr txBox="1"/>
+          <p:nvPr/>
+        </p:nvSpPr>
+        <p:spPr>
+          <a:xfrm>
+            <a:off x="685800" y="3291840"/>
+            <a:ext cx="3611880" cy="914400"/>
+          </a:xfrm>
+          <a:prstGeom prst="rect">
+            <a:avLst/>
+          </a:prstGeom>
+          <a:noFill/>
+          <a:ln/>
+        </p:spPr>
+        <p:txBody>
+          <a:bodyPr wrap="square" lIns="0" tIns="0" rIns="0" bIns="0" rtlCol="0" anchor="t"/>
+          <a:lstStyle/>
+          <a:p>
+            <a:pPr indent="0" marL="0">
+              <a:buNone/>
+            </a:pPr>
+            <a:r>
+              <a:rPr lang="en-US" sz="1250" dirty="0">
+                <a:solidFill>
+                  <a:srgbClr val="C9CFDA"/>
+                </a:solidFill>
+                <a:latin typeface="Calibri" pitchFamily="34" charset="0"/>
+                <a:ea typeface="Calibri" pitchFamily="34" charset="-122"/>
+                <a:cs typeface="Calibri" pitchFamily="34" charset="-120"/>
+              </a:rPr>
+              <a:t>A promising option for selected large-thrombus cases, not yet a routine strategy. Guidelines stay unchanged until outcome data arrive.</a:t>
+            </a:r>
+            <a:endParaRPr lang="en-US" sz="1250" dirty="0"/>
+          </a:p>
+        </p:txBody>
+      </p:sp>
+      <p:sp>
+        <p:nvSpPr>
+          <p:cNvPr id="14" name="Shape 8"/>
+          <p:cNvSpPr/>
+          <p:nvPr/>
+        </p:nvSpPr>
+        <p:spPr>
+          <a:xfrm>
+            <a:off x="4663440" y="2514600"/>
+            <a:ext cx="4023360" cy="1783080"/>
+          </a:xfrm>
+          <a:prstGeom prst="roundRect">
+            <a:avLst>
+              <a:gd name="adj" fmla="val 6154"/>
+            </a:avLst>
+          </a:prstGeom>
+          <a:solidFill>
+            <a:srgbClr val="1A1F2B"/>
+          </a:solidFill>
+          <a:ln w="12700">
+            <a:solidFill>
+              <a:srgbClr val="1A1F2B"/>
+            </a:solidFill>
+            <a:prstDash val="solid"/>
+          </a:ln>
+        </p:spPr>
+      </p:sp>
+      <p:sp>
+        <p:nvSpPr>
+          <p:cNvPr id="15" name="Shape 9"/>
+          <p:cNvSpPr/>
+          <p:nvPr/>
+        </p:nvSpPr>
+        <p:spPr>
+          <a:xfrm>
+            <a:off x="4892040" y="2697480"/>
+            <a:ext cx="457200" cy="457200"/>
+          </a:xfrm>
+          <a:prstGeom prst="ellipse">
+            <a:avLst/>
+          </a:prstGeom>
+          <a:solidFill>
+            <a:srgbClr val="E5383B"/>
+          </a:solidFill>
+          <a:ln w="12700">
+            <a:solidFill>
+              <a:srgbClr val="E5383B"/>
+            </a:solidFill>
+            <a:prstDash val="solid"/>
+          </a:ln>
+        </p:spPr>
+      </p:sp>
+      <p:pic>
+        <p:nvPicPr>
+          <p:cNvPr id="16" name="Image 4" descr="preencoded.png">    </p:cNvPr>
+          <p:cNvPicPr>
+            <a:picLocks noChangeAspect="1"/>
+          </p:cNvPicPr>
+          <p:nvPr/>
+        </p:nvPicPr>
+        <p:blipFill>
+          <a:blip r:embed="rId5"/>
+          <a:stretch>
+            <a:fillRect/>
+          </a:stretch>
+        </p:blipFill>
+        <p:spPr>
+          <a:xfrm>
+            <a:off x="5010912" y="2816352"/>
+            <a:ext cx="219456" cy="219456"/>
+          </a:xfrm>
+          <a:prstGeom prst="rect">
+            <a:avLst/>
+          </a:prstGeom>
+        </p:spPr>
+      </p:pic>
+      <p:sp>
+        <p:nvSpPr>
+          <p:cNvPr id="17" name="Text 10"/>
+          <p:cNvSpPr txBox="1"/>
+          <p:nvPr/>
+        </p:nvSpPr>
+        <p:spPr>
+          <a:xfrm>
+            <a:off x="5486400" y="2697480"/>
+            <a:ext cx="3017520" cy="457200"/>
+          </a:xfrm>
+          <a:prstGeom prst="rect">
+            <a:avLst/>
+          </a:prstGeom>
+          <a:noFill/>
+          <a:ln/>
+        </p:spPr>
+        <p:txBody>
+          <a:bodyPr wrap="square" lIns="0" tIns="0" rIns="0" bIns="0" rtlCol="0" anchor="ctr"/>
+          <a:lstStyle/>
+          <a:p>
+            <a:pPr indent="0" marL="0">
+              <a:buNone/>
+            </a:pPr>
+            <a:r>
+              <a:rPr lang="en-US" sz="1600" b="1" dirty="0">
+                <a:solidFill>
+                  <a:srgbClr val="FFFFFF"/>
+                </a:solidFill>
+                <a:latin typeface="Cambria" pitchFamily="34" charset="0"/>
+                <a:ea typeface="Cambria" pitchFamily="34" charset="-122"/>
+                <a:cs typeface="Cambria" pitchFamily="34" charset="-120"/>
+              </a:rPr>
+              <a:t>For research next</a:t>
+            </a:r>
+            <a:endParaRPr lang="en-US" sz="1600" dirty="0"/>
+          </a:p>
+        </p:txBody>
+      </p:sp>
+      <p:sp>
+        <p:nvSpPr>
+          <p:cNvPr id="18" name="Text 11"/>
+          <p:cNvSpPr txBox="1"/>
+          <p:nvPr/>
+        </p:nvSpPr>
+        <p:spPr>
+          <a:xfrm>
+            <a:off x="4892040" y="3291840"/>
+            <a:ext cx="3611880" cy="914400"/>
+          </a:xfrm>
+          <a:prstGeom prst="rect">
+            <a:avLst/>
+          </a:prstGeom>
+          <a:noFill/>
+          <a:ln/>
+        </p:spPr>
+        <p:txBody>
+          <a:bodyPr wrap="square" lIns="0" tIns="0" rIns="0" bIns="0" rtlCol="0" anchor="t"/>
+          <a:lstStyle/>
+          <a:p>
+            <a:pPr indent="0" marL="0">
+              <a:buNone/>
+            </a:pPr>
+            <a:r>
+              <a:rPr lang="en-US" sz="1250" dirty="0">
+                <a:solidFill>
+                  <a:srgbClr val="C9CFDA"/>
+                </a:solidFill>
+                <a:latin typeface="Calibri" pitchFamily="34" charset="0"/>
+                <a:ea typeface="Calibri" pitchFamily="34" charset="-122"/>
+                <a:cs typeface="Calibri" pitchFamily="34" charset="-120"/>
+              </a:rPr>
+              <a:t>An adequately powered randomised trial with hard clinical endpoints: death, heart failure and stroke.</a:t>
+            </a:r>
+            <a:endParaRPr lang="en-US" sz="1250" dirty="0"/>
+          </a:p>
+        </p:txBody>
+      </p:sp>
+    </p:spTree>
+  </p:cSld>
+  <p:clrMapOvr>
+    <a:masterClrMapping/>
+  </p:clrMapOvr>
+</p:sld>
+</file>
+
+<file path=ppt/slides/slide13.xml><?xml version="1.0" encoding="utf-8"?>
+<p:sld xmlns:a="http://schemas.openxmlformats.org/drawingml/2006/main" xmlns:r="http://schemas.openxmlformats.org/officeDocument/2006/relationships" xmlns:p="http://schemas.openxmlformats.org/presentationml/2006/main">
+  <p:cSld name="Slide 13">
     <p:bg>
       <p:bgPr>
         <a:solidFill>
@@ -3720,7 +5230,7 @@
                 <a:ea typeface="Calibri" pitchFamily="34" charset="-122"/>
                 <a:cs typeface="Calibri" pitchFamily="34" charset="-120"/>
               </a:rPr>
-              <a:t>11 / 11</a:t>
+              <a:t>13 / 13</a:t>
             </a:r>
             <a:endParaRPr lang="en-US" sz="900" dirty="0"/>
           </a:p>
@@ -4135,7 +5645,7 @@
                 <a:ea typeface="Calibri" pitchFamily="34" charset="-122"/>
                 <a:cs typeface="Calibri" pitchFamily="34" charset="-120"/>
               </a:rPr>
-              <a:t>02 / 11</a:t>
+              <a:t>02 / 13</a:t>
             </a:r>
             <a:endParaRPr lang="en-US" sz="900" dirty="0"/>
           </a:p>
@@ -5287,7 +6797,7 @@
                 <a:ea typeface="Calibri" pitchFamily="34" charset="-122"/>
                 <a:cs typeface="Calibri" pitchFamily="34" charset="-120"/>
               </a:rPr>
-              <a:t>03 / 11</a:t>
+              <a:t>03 / 13</a:t>
             </a:r>
             <a:endParaRPr lang="en-US" sz="900" dirty="0"/>
           </a:p>
@@ -6186,7 +7696,7 @@
                 <a:ea typeface="Calibri" pitchFamily="34" charset="-122"/>
                 <a:cs typeface="Calibri" pitchFamily="34" charset="-120"/>
               </a:rPr>
-              <a:t>04 / 11</a:t>
+              <a:t>04 / 13</a:t>
             </a:r>
             <a:endParaRPr lang="en-US" sz="900" dirty="0"/>
           </a:p>
@@ -7187,7 +8697,7 @@
                 <a:ea typeface="Calibri" pitchFamily="34" charset="-122"/>
                 <a:cs typeface="Calibri" pitchFamily="34" charset="-120"/>
               </a:rPr>
-              <a:t>05 / 11</a:t>
+              <a:t>05 / 13</a:t>
             </a:r>
             <a:endParaRPr lang="en-US" sz="900" dirty="0"/>
           </a:p>
@@ -7265,7 +8775,7 @@
                 <a:ea typeface="Calibri" pitchFamily="34" charset="-122"/>
                 <a:cs typeface="Calibri" pitchFamily="34" charset="-120"/>
               </a:rPr>
-              <a:t>POPULATION &amp; ENDPOINTS</a:t>
+              <a:t>ELIGIBILITY</a:t>
             </a:r>
             <a:endParaRPr lang="en-US" sz="1100" dirty="0"/>
           </a:p>
@@ -7304,7 +8814,7 @@
                 <a:ea typeface="Cambria" pitchFamily="34" charset="-122"/>
                 <a:cs typeface="Cambria" pitchFamily="34" charset="-120"/>
               </a:rPr>
-              <a:t>Enriched for clot; judged on infarct size</a:t>
+              <a:t>Inclusion and exclusion criteria</a:t>
             </a:r>
             <a:endParaRPr lang="en-US" sz="3000" dirty="0"/>
           </a:p>
@@ -7318,202 +8828,12 @@
         </p:nvSpPr>
         <p:spPr>
           <a:xfrm>
-            <a:off x="457200" y="1371600"/>
-            <a:ext cx="3566160" cy="3017520"/>
+            <a:off x="457200" y="1325880"/>
+            <a:ext cx="4023360" cy="3154680"/>
           </a:xfrm>
           <a:prstGeom prst="roundRect">
             <a:avLst>
-              <a:gd name="adj" fmla="val 3636"/>
-            </a:avLst>
-          </a:prstGeom>
-          <a:solidFill>
-            <a:srgbClr val="0E1117"/>
-          </a:solidFill>
-          <a:ln w="12700">
-            <a:solidFill>
-              <a:srgbClr val="0E1117"/>
-            </a:solidFill>
-            <a:prstDash val="solid"/>
-          </a:ln>
-        </p:spPr>
-      </p:sp>
-      <p:sp>
-        <p:nvSpPr>
-          <p:cNvPr id="8" name="Text 5"/>
-          <p:cNvSpPr txBox="1"/>
-          <p:nvPr/>
-        </p:nvSpPr>
-        <p:spPr>
-          <a:xfrm>
-            <a:off x="731520" y="1554480"/>
-            <a:ext cx="3017520" cy="274320"/>
-          </a:xfrm>
-          <a:prstGeom prst="rect">
-            <a:avLst/>
-          </a:prstGeom>
-          <a:noFill/>
-          <a:ln/>
-        </p:spPr>
-        <p:txBody>
-          <a:bodyPr wrap="square" lIns="0" tIns="0" rIns="0" bIns="0" rtlCol="0" anchor="ctr"/>
-          <a:lstStyle/>
-          <a:p>
-            <a:pPr indent="0" marL="0">
-              <a:buNone/>
-            </a:pPr>
-            <a:r>
-              <a:rPr lang="en-US" sz="1100" b="1" spc="400" kern="0" dirty="0">
-                <a:solidFill>
-                  <a:srgbClr val="F4B6BB"/>
-                </a:solidFill>
-                <a:latin typeface="Calibri" pitchFamily="34" charset="0"/>
-                <a:ea typeface="Calibri" pitchFamily="34" charset="-122"/>
-                <a:cs typeface="Calibri" pitchFamily="34" charset="-120"/>
-              </a:rPr>
-              <a:t>KEY INCLUSION</a:t>
-            </a:r>
-            <a:endParaRPr lang="en-US" sz="1100" dirty="0"/>
-          </a:p>
-        </p:txBody>
-      </p:sp>
-      <p:sp>
-        <p:nvSpPr>
-          <p:cNvPr id="9" name="Text 6"/>
-          <p:cNvSpPr txBox="1"/>
-          <p:nvPr/>
-        </p:nvSpPr>
-        <p:spPr>
-          <a:xfrm>
-            <a:off x="731520" y="1920240"/>
-            <a:ext cx="3108960" cy="2286000"/>
-          </a:xfrm>
-          <a:prstGeom prst="rect">
-            <a:avLst/>
-          </a:prstGeom>
-          <a:noFill/>
-          <a:ln/>
-        </p:spPr>
-        <p:txBody>
-          <a:bodyPr wrap="square" lIns="0" tIns="0" rIns="0" bIns="0" rtlCol="0" anchor="t"/>
-          <a:lstStyle/>
-          <a:p>
-            <a:pPr marL="342900" indent="-342900">
-              <a:spcAft>
-                <a:spcPts val="1000"/>
-              </a:spcAft>
-              <a:buSzPct val="100000"/>
-              <a:buChar char="•"/>
-            </a:pPr>
-            <a:r>
-              <a:rPr lang="en-US" sz="1350" dirty="0">
-                <a:solidFill>
-                  <a:srgbClr val="FFFFFF"/>
-                </a:solidFill>
-                <a:latin typeface="Calibri" pitchFamily="34" charset="0"/>
-                <a:ea typeface="Calibri" pitchFamily="34" charset="-122"/>
-                <a:cs typeface="Calibri" pitchFamily="34" charset="-120"/>
-              </a:rPr>
-              <a:t>STEMI undergoing primary PCI</a:t>
-            </a:r>
-            <a:endParaRPr lang="en-US" sz="1350" dirty="0"/>
-          </a:p>
-          <a:p>
-            <a:pPr marL="342900" indent="-342900">
-              <a:spcAft>
-                <a:spcPts val="1000"/>
-              </a:spcAft>
-              <a:buSzPct val="100000"/>
-              <a:buChar char="•"/>
-            </a:pPr>
-            <a:r>
-              <a:rPr lang="en-US" sz="1350" dirty="0">
-                <a:solidFill>
-                  <a:srgbClr val="FFFFFF"/>
-                </a:solidFill>
-                <a:latin typeface="Calibri" pitchFamily="34" charset="0"/>
-                <a:ea typeface="Calibri" pitchFamily="34" charset="-122"/>
-                <a:cs typeface="Calibri" pitchFamily="34" charset="-120"/>
-              </a:rPr>
-              <a:t>TIMI thrombus grade ≥ 3 in the infarct-related artery</a:t>
-            </a:r>
-            <a:endParaRPr lang="en-US" sz="1350" dirty="0"/>
-          </a:p>
-          <a:p>
-            <a:pPr marL="342900" indent="-342900">
-              <a:spcAft>
-                <a:spcPts val="1000"/>
-              </a:spcAft>
-              <a:buSzPct val="100000"/>
-              <a:buChar char="•"/>
-            </a:pPr>
-            <a:r>
-              <a:rPr lang="en-US" sz="1350" dirty="0">
-                <a:solidFill>
-                  <a:srgbClr val="FFFFFF"/>
-                </a:solidFill>
-                <a:latin typeface="Calibri" pitchFamily="34" charset="0"/>
-                <a:ea typeface="Calibri" pitchFamily="34" charset="-122"/>
-                <a:cs typeface="Calibri" pitchFamily="34" charset="-120"/>
-              </a:rPr>
-              <a:t>If grade 5 (TIMI 0 flow), grade ≥ 3 re-confirmed after wiring</a:t>
-            </a:r>
-            <a:endParaRPr lang="en-US" sz="1350" dirty="0"/>
-          </a:p>
-        </p:txBody>
-      </p:sp>
-      <p:sp>
-        <p:nvSpPr>
-          <p:cNvPr id="10" name="Text 7"/>
-          <p:cNvSpPr txBox="1"/>
-          <p:nvPr/>
-        </p:nvSpPr>
-        <p:spPr>
-          <a:xfrm>
-            <a:off x="731520" y="3657600"/>
-            <a:ext cx="3108960" cy="548640"/>
-          </a:xfrm>
-          <a:prstGeom prst="rect">
-            <a:avLst/>
-          </a:prstGeom>
-          <a:noFill/>
-          <a:ln/>
-        </p:spPr>
-        <p:txBody>
-          <a:bodyPr wrap="square" lIns="0" tIns="0" rIns="0" bIns="0" rtlCol="0" anchor="t"/>
-          <a:lstStyle/>
-          <a:p>
-            <a:pPr indent="0" marL="0">
-              <a:buNone/>
-            </a:pPr>
-            <a:r>
-              <a:rPr lang="en-US" sz="1200" i="1" dirty="0">
-                <a:solidFill>
-                  <a:srgbClr val="F4B6BB"/>
-                </a:solidFill>
-                <a:latin typeface="Cambria" pitchFamily="34" charset="0"/>
-                <a:ea typeface="Cambria" pitchFamily="34" charset="-122"/>
-                <a:cs typeface="Cambria" pitchFamily="34" charset="-120"/>
-              </a:rPr>
-              <a:t>Why enrich? Benefit is most plausible where there is the most clot to embolise.</a:t>
-            </a:r>
-            <a:endParaRPr lang="en-US" sz="1200" dirty="0"/>
-          </a:p>
-        </p:txBody>
-      </p:sp>
-      <p:sp>
-        <p:nvSpPr>
-          <p:cNvPr id="11" name="Shape 8"/>
-          <p:cNvSpPr/>
-          <p:nvPr/>
-        </p:nvSpPr>
-        <p:spPr>
-          <a:xfrm>
-            <a:off x="4389120" y="1371600"/>
-            <a:ext cx="4297680" cy="868680"/>
-          </a:xfrm>
-          <a:prstGeom prst="roundRect">
-            <a:avLst>
-              <a:gd name="adj" fmla="val 10526"/>
+              <a:gd name="adj" fmla="val 3478"/>
             </a:avLst>
           </a:prstGeom>
           <a:solidFill>
@@ -7529,14 +8849,349 @@
       </p:sp>
       <p:sp>
         <p:nvSpPr>
-          <p:cNvPr id="12" name="Shape 9"/>
+          <p:cNvPr id="8" name="Shape 5"/>
           <p:cNvSpPr/>
           <p:nvPr/>
         </p:nvSpPr>
         <p:spPr>
           <a:xfrm>
-            <a:off x="4572000" y="1536192"/>
-            <a:ext cx="548640" cy="548640"/>
+            <a:off x="640080" y="1481328"/>
+            <a:ext cx="3657600" cy="502920"/>
+          </a:xfrm>
+          <a:prstGeom prst="roundRect">
+            <a:avLst>
+              <a:gd name="adj" fmla="val 18182"/>
+            </a:avLst>
+          </a:prstGeom>
+          <a:solidFill>
+            <a:srgbClr val="E3F5F3"/>
+          </a:solidFill>
+          <a:ln w="12700">
+            <a:solidFill>
+              <a:srgbClr val="E3F5F3"/>
+            </a:solidFill>
+            <a:prstDash val="solid"/>
+          </a:ln>
+        </p:spPr>
+      </p:sp>
+      <p:sp>
+        <p:nvSpPr>
+          <p:cNvPr id="9" name="Shape 6"/>
+          <p:cNvSpPr/>
+          <p:nvPr/>
+        </p:nvSpPr>
+        <p:spPr>
+          <a:xfrm>
+            <a:off x="749808" y="1536192"/>
+            <a:ext cx="393192" cy="393192"/>
+          </a:xfrm>
+          <a:prstGeom prst="ellipse">
+            <a:avLst/>
+          </a:prstGeom>
+          <a:solidFill>
+            <a:srgbClr val="1FA99C"/>
+          </a:solidFill>
+          <a:ln w="12700">
+            <a:solidFill>
+              <a:srgbClr val="1FA99C"/>
+            </a:solidFill>
+            <a:prstDash val="solid"/>
+          </a:ln>
+        </p:spPr>
+      </p:sp>
+      <p:pic>
+        <p:nvPicPr>
+          <p:cNvPr id="10" name="Image 1" descr="preencoded.png">    </p:cNvPr>
+          <p:cNvPicPr>
+            <a:picLocks noChangeAspect="1"/>
+          </p:cNvPicPr>
+          <p:nvPr/>
+        </p:nvPicPr>
+        <p:blipFill>
+          <a:blip r:embed="rId2"/>
+          <a:stretch>
+            <a:fillRect/>
+          </a:stretch>
+        </p:blipFill>
+        <p:spPr>
+          <a:xfrm>
+            <a:off x="852038" y="1638422"/>
+            <a:ext cx="188732" cy="188732"/>
+          </a:xfrm>
+          <a:prstGeom prst="rect">
+            <a:avLst/>
+          </a:prstGeom>
+        </p:spPr>
+      </p:pic>
+      <p:sp>
+        <p:nvSpPr>
+          <p:cNvPr id="11" name="Text 7"/>
+          <p:cNvSpPr txBox="1"/>
+          <p:nvPr/>
+        </p:nvSpPr>
+        <p:spPr>
+          <a:xfrm>
+            <a:off x="1280160" y="1481328"/>
+            <a:ext cx="2011680" cy="502920"/>
+          </a:xfrm>
+          <a:prstGeom prst="rect">
+            <a:avLst/>
+          </a:prstGeom>
+          <a:noFill/>
+          <a:ln/>
+        </p:spPr>
+        <p:txBody>
+          <a:bodyPr wrap="square" lIns="0" tIns="0" rIns="0" bIns="0" rtlCol="0" anchor="ctr"/>
+          <a:lstStyle/>
+          <a:p>
+            <a:pPr indent="0" marL="0">
+              <a:buNone/>
+            </a:pPr>
+            <a:r>
+              <a:rPr lang="en-US" sz="1700" b="1" dirty="0">
+                <a:solidFill>
+                  <a:srgbClr val="1B2230"/>
+                </a:solidFill>
+                <a:latin typeface="Cambria" pitchFamily="34" charset="0"/>
+                <a:ea typeface="Cambria" pitchFamily="34" charset="-122"/>
+                <a:cs typeface="Cambria" pitchFamily="34" charset="-120"/>
+              </a:rPr>
+              <a:t>Inclusion</a:t>
+            </a:r>
+            <a:endParaRPr lang="en-US" sz="1700" dirty="0"/>
+          </a:p>
+        </p:txBody>
+      </p:sp>
+      <p:sp>
+        <p:nvSpPr>
+          <p:cNvPr id="12" name="Text 8"/>
+          <p:cNvSpPr txBox="1"/>
+          <p:nvPr/>
+        </p:nvSpPr>
+        <p:spPr>
+          <a:xfrm>
+            <a:off x="3108960" y="1481328"/>
+            <a:ext cx="1051560" cy="502920"/>
+          </a:xfrm>
+          <a:prstGeom prst="rect">
+            <a:avLst/>
+          </a:prstGeom>
+          <a:noFill/>
+          <a:ln/>
+        </p:spPr>
+        <p:txBody>
+          <a:bodyPr wrap="square" lIns="0" tIns="0" rIns="0" bIns="0" rtlCol="0" anchor="ctr"/>
+          <a:lstStyle/>
+          <a:p>
+            <a:pPr algn="r" indent="0" marL="0">
+              <a:buNone/>
+            </a:pPr>
+            <a:r>
+              <a:rPr lang="en-US" sz="1000" b="1" spc="200" kern="0" dirty="0">
+                <a:solidFill>
+                  <a:srgbClr val="1FA99C"/>
+                </a:solidFill>
+                <a:latin typeface="Calibri" pitchFamily="34" charset="0"/>
+                <a:ea typeface="Calibri" pitchFamily="34" charset="-122"/>
+                <a:cs typeface="Calibri" pitchFamily="34" charset="-120"/>
+              </a:rPr>
+              <a:t>5 criteria</a:t>
+            </a:r>
+            <a:endParaRPr lang="en-US" sz="1000" dirty="0"/>
+          </a:p>
+        </p:txBody>
+      </p:sp>
+      <p:sp>
+        <p:nvSpPr>
+          <p:cNvPr id="13" name="Text 9"/>
+          <p:cNvSpPr txBox="1"/>
+          <p:nvPr/>
+        </p:nvSpPr>
+        <p:spPr>
+          <a:xfrm>
+            <a:off x="731520" y="2121408"/>
+            <a:ext cx="3520440" cy="2240280"/>
+          </a:xfrm>
+          <a:prstGeom prst="rect">
+            <a:avLst/>
+          </a:prstGeom>
+          <a:noFill/>
+          <a:ln/>
+        </p:spPr>
+        <p:txBody>
+          <a:bodyPr wrap="square" lIns="0" tIns="0" rIns="0" bIns="0" rtlCol="0" anchor="t"/>
+          <a:lstStyle/>
+          <a:p>
+            <a:pPr marL="177800" indent="-177800">
+              <a:spcAft>
+                <a:spcPts val="500"/>
+              </a:spcAft>
+              <a:buSzPct val="100000"/>
+              <a:buChar char="•"/>
+            </a:pPr>
+            <a:r>
+              <a:rPr lang="en-US" sz="1150" dirty="0">
+                <a:solidFill>
+                  <a:srgbClr val="1B2230"/>
+                </a:solidFill>
+                <a:latin typeface="Calibri" pitchFamily="34" charset="0"/>
+                <a:ea typeface="Calibri" pitchFamily="34" charset="-122"/>
+                <a:cs typeface="Calibri" pitchFamily="34" charset="-120"/>
+              </a:rPr>
+              <a:t>Age ≥ 18 years</a:t>
+            </a:r>
+            <a:endParaRPr lang="en-US" sz="1150" dirty="0"/>
+          </a:p>
+          <a:p>
+            <a:pPr marL="177800" indent="-177800">
+              <a:spcAft>
+                <a:spcPts val="500"/>
+              </a:spcAft>
+              <a:buSzPct val="100000"/>
+              <a:buChar char="•"/>
+            </a:pPr>
+            <a:r>
+              <a:rPr lang="en-US" sz="1150" dirty="0">
+                <a:solidFill>
+                  <a:srgbClr val="1B2230"/>
+                </a:solidFill>
+                <a:latin typeface="Calibri" pitchFamily="34" charset="0"/>
+                <a:ea typeface="Calibri" pitchFamily="34" charset="-122"/>
+                <a:cs typeface="Calibri" pitchFamily="34" charset="-120"/>
+              </a:rPr>
+              <a:t>Chest pain &gt; 20 min with ST elevation ≥ 1 mm in ≥ 2 contiguous leads, or infero-lateral MI with ST depression ≥ 1 mm in ≥ 2 of V1–V3 and a positive terminal T wave</a:t>
+            </a:r>
+            <a:endParaRPr lang="en-US" sz="1150" dirty="0"/>
+          </a:p>
+          <a:p>
+            <a:pPr marL="177800" indent="-177800">
+              <a:spcAft>
+                <a:spcPts val="500"/>
+              </a:spcAft>
+              <a:buSzPct val="100000"/>
+              <a:buChar char="•"/>
+            </a:pPr>
+            <a:r>
+              <a:rPr lang="en-US" sz="1150" dirty="0">
+                <a:solidFill>
+                  <a:srgbClr val="1B2230"/>
+                </a:solidFill>
+                <a:latin typeface="Calibri" pitchFamily="34" charset="0"/>
+                <a:ea typeface="Calibri" pitchFamily="34" charset="-122"/>
+                <a:cs typeface="Calibri" pitchFamily="34" charset="-120"/>
+              </a:rPr>
+              <a:t>TIMI thrombus grade ≥ 3 in the infarct-related artery (re-confirmed after wiring if TIMI 0 flow)</a:t>
+            </a:r>
+            <a:endParaRPr lang="en-US" sz="1150" dirty="0"/>
+          </a:p>
+          <a:p>
+            <a:pPr marL="177800" indent="-177800">
+              <a:spcAft>
+                <a:spcPts val="500"/>
+              </a:spcAft>
+              <a:buSzPct val="100000"/>
+              <a:buChar char="•"/>
+            </a:pPr>
+            <a:r>
+              <a:rPr lang="en-US" sz="1150" dirty="0">
+                <a:solidFill>
+                  <a:srgbClr val="1B2230"/>
+                </a:solidFill>
+                <a:latin typeface="Calibri" pitchFamily="34" charset="0"/>
+                <a:ea typeface="Calibri" pitchFamily="34" charset="-122"/>
+                <a:cs typeface="Calibri" pitchFamily="34" charset="-120"/>
+              </a:rPr>
+              <a:t>Intervention started within 8 h of symptom onset</a:t>
+            </a:r>
+            <a:endParaRPr lang="en-US" sz="1150" dirty="0"/>
+          </a:p>
+          <a:p>
+            <a:pPr marL="177800" indent="-177800">
+              <a:spcAft>
+                <a:spcPts val="500"/>
+              </a:spcAft>
+              <a:buSzPct val="100000"/>
+              <a:buChar char="•"/>
+            </a:pPr>
+            <a:r>
+              <a:rPr lang="en-US" sz="1150" dirty="0">
+                <a:solidFill>
+                  <a:srgbClr val="1B2230"/>
+                </a:solidFill>
+                <a:latin typeface="Calibri" pitchFamily="34" charset="0"/>
+                <a:ea typeface="Calibri" pitchFamily="34" charset="-122"/>
+                <a:cs typeface="Calibri" pitchFamily="34" charset="-120"/>
+              </a:rPr>
+              <a:t>Informed consent before the procedure</a:t>
+            </a:r>
+            <a:endParaRPr lang="en-US" sz="1150" dirty="0"/>
+          </a:p>
+        </p:txBody>
+      </p:sp>
+      <p:sp>
+        <p:nvSpPr>
+          <p:cNvPr id="14" name="Shape 10"/>
+          <p:cNvSpPr/>
+          <p:nvPr/>
+        </p:nvSpPr>
+        <p:spPr>
+          <a:xfrm>
+            <a:off x="4663440" y="1325880"/>
+            <a:ext cx="4023360" cy="3154680"/>
+          </a:xfrm>
+          <a:prstGeom prst="roundRect">
+            <a:avLst>
+              <a:gd name="adj" fmla="val 3478"/>
+            </a:avLst>
+          </a:prstGeom>
+          <a:solidFill>
+            <a:srgbClr val="F6F7F9"/>
+          </a:solidFill>
+          <a:ln w="12700">
+            <a:solidFill>
+              <a:srgbClr val="F6F7F9"/>
+            </a:solidFill>
+            <a:prstDash val="solid"/>
+          </a:ln>
+        </p:spPr>
+      </p:sp>
+      <p:sp>
+        <p:nvSpPr>
+          <p:cNvPr id="15" name="Shape 11"/>
+          <p:cNvSpPr/>
+          <p:nvPr/>
+        </p:nvSpPr>
+        <p:spPr>
+          <a:xfrm>
+            <a:off x="4846320" y="1481328"/>
+            <a:ext cx="3657600" cy="502920"/>
+          </a:xfrm>
+          <a:prstGeom prst="roundRect">
+            <a:avLst>
+              <a:gd name="adj" fmla="val 18182"/>
+            </a:avLst>
+          </a:prstGeom>
+          <a:solidFill>
+            <a:srgbClr val="FDECEC"/>
+          </a:solidFill>
+          <a:ln w="12700">
+            <a:solidFill>
+              <a:srgbClr val="FDECEC"/>
+            </a:solidFill>
+            <a:prstDash val="solid"/>
+          </a:ln>
+        </p:spPr>
+      </p:sp>
+      <p:sp>
+        <p:nvSpPr>
+          <p:cNvPr id="16" name="Shape 12"/>
+          <p:cNvSpPr/>
+          <p:nvPr/>
+        </p:nvSpPr>
+        <p:spPr>
+          <a:xfrm>
+            <a:off x="4956048" y="1536192"/>
+            <a:ext cx="393192" cy="393192"/>
           </a:xfrm>
           <a:prstGeom prst="ellipse">
             <a:avLst/>
@@ -7554,161 +9209,7 @@
       </p:sp>
       <p:pic>
         <p:nvPicPr>
-          <p:cNvPr id="13" name="Image 1" descr="preencoded.png">    </p:cNvPr>
-          <p:cNvPicPr>
-            <a:picLocks noChangeAspect="1"/>
-          </p:cNvPicPr>
-          <p:nvPr/>
-        </p:nvPicPr>
-        <p:blipFill>
-          <a:blip r:embed="rId2"/>
-          <a:stretch>
-            <a:fillRect/>
-          </a:stretch>
-        </p:blipFill>
-        <p:spPr>
-          <a:xfrm>
-            <a:off x="4714646" y="1678838"/>
-            <a:ext cx="263347" cy="263347"/>
-          </a:xfrm>
-          <a:prstGeom prst="rect">
-            <a:avLst/>
-          </a:prstGeom>
-        </p:spPr>
-      </p:pic>
-      <p:sp>
-        <p:nvSpPr>
-          <p:cNvPr id="14" name="Text 10"/>
-          <p:cNvSpPr txBox="1"/>
-          <p:nvPr/>
-        </p:nvSpPr>
-        <p:spPr>
-          <a:xfrm>
-            <a:off x="5303520" y="1499616"/>
-            <a:ext cx="3200400" cy="256032"/>
-          </a:xfrm>
-          <a:prstGeom prst="rect">
-            <a:avLst/>
-          </a:prstGeom>
-          <a:noFill/>
-          <a:ln/>
-        </p:spPr>
-        <p:txBody>
-          <a:bodyPr wrap="square" lIns="0" tIns="0" rIns="0" bIns="0" rtlCol="0" anchor="ctr"/>
-          <a:lstStyle/>
-          <a:p>
-            <a:pPr indent="0" marL="0">
-              <a:buNone/>
-            </a:pPr>
-            <a:r>
-              <a:rPr lang="en-US" sz="1000" b="1" spc="300" kern="0" dirty="0">
-                <a:solidFill>
-                  <a:srgbClr val="E5383B"/>
-                </a:solidFill>
-                <a:latin typeface="Calibri" pitchFamily="34" charset="0"/>
-                <a:ea typeface="Calibri" pitchFamily="34" charset="-122"/>
-                <a:cs typeface="Calibri" pitchFamily="34" charset="-120"/>
-              </a:rPr>
-              <a:t>PRIMARY EFFICACY</a:t>
-            </a:r>
-            <a:endParaRPr lang="en-US" sz="1000" dirty="0"/>
-          </a:p>
-        </p:txBody>
-      </p:sp>
-      <p:sp>
-        <p:nvSpPr>
-          <p:cNvPr id="15" name="Text 11"/>
-          <p:cNvSpPr txBox="1"/>
-          <p:nvPr/>
-        </p:nvSpPr>
-        <p:spPr>
-          <a:xfrm>
-            <a:off x="5303520" y="1755648"/>
-            <a:ext cx="3200400" cy="411480"/>
-          </a:xfrm>
-          <a:prstGeom prst="rect">
-            <a:avLst/>
-          </a:prstGeom>
-          <a:noFill/>
-          <a:ln/>
-        </p:spPr>
-        <p:txBody>
-          <a:bodyPr wrap="square" lIns="0" tIns="0" rIns="0" bIns="0" rtlCol="0" anchor="t"/>
-          <a:lstStyle/>
-          <a:p>
-            <a:pPr indent="0" marL="0">
-              <a:buNone/>
-            </a:pPr>
-            <a:r>
-              <a:rPr lang="en-US" sz="1300" dirty="0">
-                <a:solidFill>
-                  <a:srgbClr val="1B2230"/>
-                </a:solidFill>
-                <a:latin typeface="Calibri" pitchFamily="34" charset="0"/>
-                <a:ea typeface="Calibri" pitchFamily="34" charset="-122"/>
-                <a:cs typeface="Calibri" pitchFamily="34" charset="-120"/>
-              </a:rPr>
-              <a:t>Infarct size by CK-MB area under the curve</a:t>
-            </a:r>
-            <a:endParaRPr lang="en-US" sz="1300" dirty="0"/>
-          </a:p>
-        </p:txBody>
-      </p:sp>
-      <p:sp>
-        <p:nvSpPr>
-          <p:cNvPr id="16" name="Shape 12"/>
-          <p:cNvSpPr/>
-          <p:nvPr/>
-        </p:nvSpPr>
-        <p:spPr>
-          <a:xfrm>
-            <a:off x="4389120" y="2395728"/>
-            <a:ext cx="4297680" cy="868680"/>
-          </a:xfrm>
-          <a:prstGeom prst="roundRect">
-            <a:avLst>
-              <a:gd name="adj" fmla="val 10526"/>
-            </a:avLst>
-          </a:prstGeom>
-          <a:solidFill>
-            <a:srgbClr val="F6F7F9"/>
-          </a:solidFill>
-          <a:ln w="12700">
-            <a:solidFill>
-              <a:srgbClr val="F6F7F9"/>
-            </a:solidFill>
-            <a:prstDash val="solid"/>
-          </a:ln>
-        </p:spPr>
-      </p:sp>
-      <p:sp>
-        <p:nvSpPr>
-          <p:cNvPr id="17" name="Shape 13"/>
-          <p:cNvSpPr/>
-          <p:nvPr/>
-        </p:nvSpPr>
-        <p:spPr>
-          <a:xfrm>
-            <a:off x="4572000" y="2560320"/>
-            <a:ext cx="548640" cy="548640"/>
-          </a:xfrm>
-          <a:prstGeom prst="ellipse">
-            <a:avLst/>
-          </a:prstGeom>
-          <a:solidFill>
-            <a:srgbClr val="1FA99C"/>
-          </a:solidFill>
-          <a:ln w="12700">
-            <a:solidFill>
-              <a:srgbClr val="1FA99C"/>
-            </a:solidFill>
-            <a:prstDash val="solid"/>
-          </a:ln>
-        </p:spPr>
-      </p:sp>
-      <p:pic>
-        <p:nvPicPr>
-          <p:cNvPr id="18" name="Image 2" descr="preencoded.png">    </p:cNvPr>
+          <p:cNvPr id="17" name="Image 2" descr="preencoded.png">    </p:cNvPr>
           <p:cNvPicPr>
             <a:picLocks noChangeAspect="1"/>
           </p:cNvPicPr>
@@ -7722,8 +9223,8 @@
         </p:blipFill>
         <p:spPr>
           <a:xfrm>
-            <a:off x="4714646" y="2702966"/>
-            <a:ext cx="263347" cy="263347"/>
+            <a:off x="5058278" y="1638422"/>
+            <a:ext cx="188732" cy="188732"/>
           </a:xfrm>
           <a:prstGeom prst="rect">
             <a:avLst/>
@@ -7732,14 +9233,53 @@
       </p:pic>
       <p:sp>
         <p:nvSpPr>
+          <p:cNvPr id="18" name="Text 13"/>
+          <p:cNvSpPr txBox="1"/>
+          <p:nvPr/>
+        </p:nvSpPr>
+        <p:spPr>
+          <a:xfrm>
+            <a:off x="5486400" y="1481328"/>
+            <a:ext cx="2011680" cy="502920"/>
+          </a:xfrm>
+          <a:prstGeom prst="rect">
+            <a:avLst/>
+          </a:prstGeom>
+          <a:noFill/>
+          <a:ln/>
+        </p:spPr>
+        <p:txBody>
+          <a:bodyPr wrap="square" lIns="0" tIns="0" rIns="0" bIns="0" rtlCol="0" anchor="ctr"/>
+          <a:lstStyle/>
+          <a:p>
+            <a:pPr indent="0" marL="0">
+              <a:buNone/>
+            </a:pPr>
+            <a:r>
+              <a:rPr lang="en-US" sz="1700" b="1" dirty="0">
+                <a:solidFill>
+                  <a:srgbClr val="1B2230"/>
+                </a:solidFill>
+                <a:latin typeface="Cambria" pitchFamily="34" charset="0"/>
+                <a:ea typeface="Cambria" pitchFamily="34" charset="-122"/>
+                <a:cs typeface="Cambria" pitchFamily="34" charset="-120"/>
+              </a:rPr>
+              <a:t>Exclusion</a:t>
+            </a:r>
+            <a:endParaRPr lang="en-US" sz="1700" dirty="0"/>
+          </a:p>
+        </p:txBody>
+      </p:sp>
+      <p:sp>
+        <p:nvSpPr>
           <p:cNvPr id="19" name="Text 14"/>
           <p:cNvSpPr txBox="1"/>
           <p:nvPr/>
         </p:nvSpPr>
         <p:spPr>
           <a:xfrm>
-            <a:off x="5303520" y="2523744"/>
-            <a:ext cx="3200400" cy="256032"/>
+            <a:off x="7315200" y="1481328"/>
+            <a:ext cx="1051560" cy="502920"/>
           </a:xfrm>
           <a:prstGeom prst="rect">
             <a:avLst/>
@@ -7751,19 +9291,19 @@
           <a:bodyPr wrap="square" lIns="0" tIns="0" rIns="0" bIns="0" rtlCol="0" anchor="ctr"/>
           <a:lstStyle/>
           <a:p>
-            <a:pPr indent="0" marL="0">
-              <a:buNone/>
-            </a:pPr>
-            <a:r>
-              <a:rPr lang="en-US" sz="1000" b="1" spc="300" kern="0" dirty="0">
-                <a:solidFill>
-                  <a:srgbClr val="1FA99C"/>
-                </a:solidFill>
-                <a:latin typeface="Calibri" pitchFamily="34" charset="0"/>
-                <a:ea typeface="Calibri" pitchFamily="34" charset="-122"/>
-                <a:cs typeface="Calibri" pitchFamily="34" charset="-120"/>
-              </a:rPr>
-              <a:t>KEY SECONDARY</a:t>
+            <a:pPr algn="r" indent="0" marL="0">
+              <a:buNone/>
+            </a:pPr>
+            <a:r>
+              <a:rPr lang="en-US" sz="1000" b="1" spc="200" kern="0" dirty="0">
+                <a:solidFill>
+                  <a:srgbClr val="E5383B"/>
+                </a:solidFill>
+                <a:latin typeface="Calibri" pitchFamily="34" charset="0"/>
+                <a:ea typeface="Calibri" pitchFamily="34" charset="-122"/>
+                <a:cs typeface="Calibri" pitchFamily="34" charset="-120"/>
+              </a:rPr>
+              <a:t>7 criteria</a:t>
             </a:r>
             <a:endParaRPr lang="en-US" sz="1000" dirty="0"/>
           </a:p>
@@ -7777,8 +9317,8 @@
         </p:nvSpPr>
         <p:spPr>
           <a:xfrm>
-            <a:off x="5303520" y="2779776"/>
-            <a:ext cx="3200400" cy="411480"/>
+            <a:off x="4937760" y="2121408"/>
+            <a:ext cx="3520440" cy="2240280"/>
           </a:xfrm>
           <a:prstGeom prst="rect">
             <a:avLst/>
@@ -7790,11 +9330,15 @@
           <a:bodyPr wrap="square" lIns="0" tIns="0" rIns="0" bIns="0" rtlCol="0" anchor="t"/>
           <a:lstStyle/>
           <a:p>
-            <a:pPr indent="0" marL="0">
-              <a:buNone/>
-            </a:pPr>
-            <a:r>
-              <a:rPr lang="en-US" sz="1300" dirty="0">
+            <a:pPr marL="177800" indent="-177800">
+              <a:spcAft>
+                <a:spcPts val="500"/>
+              </a:spcAft>
+              <a:buSzPct val="100000"/>
+              <a:buChar char="•"/>
+            </a:pPr>
+            <a:r>
+              <a:rPr lang="en-US" sz="1150" dirty="0">
                 <a:solidFill>
                   <a:srgbClr val="1B2230"/>
                 </a:solidFill>
@@ -7802,153 +9346,20 @@
                 <a:ea typeface="Calibri" pitchFamily="34" charset="-122"/>
                 <a:cs typeface="Calibri" pitchFamily="34" charset="-120"/>
               </a:rPr>
-              <a:t>Infarct size on cardiac MRI (% LV mass) at day 3</a:t>
-            </a:r>
-            <a:endParaRPr lang="en-US" sz="1300" dirty="0"/>
-          </a:p>
-        </p:txBody>
-      </p:sp>
-      <p:sp>
-        <p:nvSpPr>
-          <p:cNvPr id="21" name="Shape 16"/>
-          <p:cNvSpPr/>
-          <p:nvPr/>
-        </p:nvSpPr>
-        <p:spPr>
-          <a:xfrm>
-            <a:off x="4389120" y="3419856"/>
-            <a:ext cx="4297680" cy="868680"/>
-          </a:xfrm>
-          <a:prstGeom prst="roundRect">
-            <a:avLst>
-              <a:gd name="adj" fmla="val 10526"/>
-            </a:avLst>
-          </a:prstGeom>
-          <a:solidFill>
-            <a:srgbClr val="F6F7F9"/>
-          </a:solidFill>
-          <a:ln w="12700">
-            <a:solidFill>
-              <a:srgbClr val="F6F7F9"/>
-            </a:solidFill>
-            <a:prstDash val="solid"/>
-          </a:ln>
-        </p:spPr>
-      </p:sp>
-      <p:sp>
-        <p:nvSpPr>
-          <p:cNvPr id="22" name="Shape 17"/>
-          <p:cNvSpPr/>
-          <p:nvPr/>
-        </p:nvSpPr>
-        <p:spPr>
-          <a:xfrm>
-            <a:off x="4572000" y="3584448"/>
-            <a:ext cx="548640" cy="548640"/>
-          </a:xfrm>
-          <a:prstGeom prst="ellipse">
-            <a:avLst/>
-          </a:prstGeom>
-          <a:solidFill>
-            <a:srgbClr val="0E1117"/>
-          </a:solidFill>
-          <a:ln w="12700">
-            <a:solidFill>
-              <a:srgbClr val="0E1117"/>
-            </a:solidFill>
-            <a:prstDash val="solid"/>
-          </a:ln>
-        </p:spPr>
-      </p:sp>
-      <p:pic>
-        <p:nvPicPr>
-          <p:cNvPr id="23" name="Image 3" descr="preencoded.png">    </p:cNvPr>
-          <p:cNvPicPr>
-            <a:picLocks noChangeAspect="1"/>
-          </p:cNvPicPr>
-          <p:nvPr/>
-        </p:nvPicPr>
-        <p:blipFill>
-          <a:blip r:embed="rId4"/>
-          <a:stretch>
-            <a:fillRect/>
-          </a:stretch>
-        </p:blipFill>
-        <p:spPr>
-          <a:xfrm>
-            <a:off x="4714646" y="3727094"/>
-            <a:ext cx="263347" cy="263347"/>
-          </a:xfrm>
-          <a:prstGeom prst="rect">
-            <a:avLst/>
-          </a:prstGeom>
-        </p:spPr>
-      </p:pic>
-      <p:sp>
-        <p:nvSpPr>
-          <p:cNvPr id="24" name="Text 18"/>
-          <p:cNvSpPr txBox="1"/>
-          <p:nvPr/>
-        </p:nvSpPr>
-        <p:spPr>
-          <a:xfrm>
-            <a:off x="5303520" y="3547872"/>
-            <a:ext cx="3200400" cy="256032"/>
-          </a:xfrm>
-          <a:prstGeom prst="rect">
-            <a:avLst/>
-          </a:prstGeom>
-          <a:noFill/>
-          <a:ln/>
-        </p:spPr>
-        <p:txBody>
-          <a:bodyPr wrap="square" lIns="0" tIns="0" rIns="0" bIns="0" rtlCol="0" anchor="ctr"/>
-          <a:lstStyle/>
-          <a:p>
-            <a:pPr indent="0" marL="0">
-              <a:buNone/>
-            </a:pPr>
-            <a:r>
-              <a:rPr lang="en-US" sz="1000" b="1" spc="300" kern="0" dirty="0">
-                <a:solidFill>
-                  <a:srgbClr val="5E6778"/>
-                </a:solidFill>
-                <a:latin typeface="Calibri" pitchFamily="34" charset="0"/>
-                <a:ea typeface="Calibri" pitchFamily="34" charset="-122"/>
-                <a:cs typeface="Calibri" pitchFamily="34" charset="-120"/>
-              </a:rPr>
-              <a:t>SAFETY</a:t>
-            </a:r>
-            <a:endParaRPr lang="en-US" sz="1000" dirty="0"/>
-          </a:p>
-        </p:txBody>
-      </p:sp>
-      <p:sp>
-        <p:nvSpPr>
-          <p:cNvPr id="25" name="Text 19"/>
-          <p:cNvSpPr txBox="1"/>
-          <p:nvPr/>
-        </p:nvSpPr>
-        <p:spPr>
-          <a:xfrm>
-            <a:off x="5303520" y="3803904"/>
-            <a:ext cx="3200400" cy="411480"/>
-          </a:xfrm>
-          <a:prstGeom prst="rect">
-            <a:avLst/>
-          </a:prstGeom>
-          <a:noFill/>
-          <a:ln/>
-        </p:spPr>
-        <p:txBody>
-          <a:bodyPr wrap="square" lIns="0" tIns="0" rIns="0" bIns="0" rtlCol="0" anchor="t"/>
-          <a:lstStyle/>
-          <a:p>
-            <a:pPr indent="0" marL="0">
-              <a:buNone/>
-            </a:pPr>
-            <a:r>
-              <a:rPr lang="en-US" sz="1300" dirty="0">
+              <a:t>Unconscious patient</a:t>
+            </a:r>
+            <a:endParaRPr lang="en-US" sz="1150" dirty="0"/>
+          </a:p>
+          <a:p>
+            <a:pPr marL="177800" indent="-177800">
+              <a:spcAft>
+                <a:spcPts val="500"/>
+              </a:spcAft>
+              <a:buSzPct val="100000"/>
+              <a:buChar char="•"/>
+            </a:pPr>
+            <a:r>
+              <a:rPr lang="en-US" sz="1150" dirty="0">
                 <a:solidFill>
                   <a:srgbClr val="1B2230"/>
                 </a:solidFill>
@@ -7956,9 +9367,114 @@
                 <a:ea typeface="Calibri" pitchFamily="34" charset="-122"/>
                 <a:cs typeface="Calibri" pitchFamily="34" charset="-120"/>
               </a:rPr>
-              <a:t>Death, stroke and MACE at 30 days</a:t>
-            </a:r>
-            <a:endParaRPr lang="en-US" sz="1300" dirty="0"/>
+              <a:t>Infarct-related artery &lt; 2.5 mm (visual estimate)</a:t>
+            </a:r>
+            <a:endParaRPr lang="en-US" sz="1150" dirty="0"/>
+          </a:p>
+          <a:p>
+            <a:pPr marL="177800" indent="-177800">
+              <a:spcAft>
+                <a:spcPts val="500"/>
+              </a:spcAft>
+              <a:buSzPct val="100000"/>
+              <a:buChar char="•"/>
+            </a:pPr>
+            <a:r>
+              <a:rPr lang="en-US" sz="1150" dirty="0">
+                <a:solidFill>
+                  <a:srgbClr val="1B2230"/>
+                </a:solidFill>
+                <a:latin typeface="Calibri" pitchFamily="34" charset="0"/>
+                <a:ea typeface="Calibri" pitchFamily="34" charset="-122"/>
+                <a:cs typeface="Calibri" pitchFamily="34" charset="-120"/>
+              </a:rPr>
+              <a:t>Severe calcification or extreme tortuosity at or proximal to the culprit lesion</a:t>
+            </a:r>
+            <a:endParaRPr lang="en-US" sz="1150" dirty="0"/>
+          </a:p>
+          <a:p>
+            <a:pPr marL="177800" indent="-177800">
+              <a:spcAft>
+                <a:spcPts val="500"/>
+              </a:spcAft>
+              <a:buSzPct val="100000"/>
+              <a:buChar char="•"/>
+            </a:pPr>
+            <a:r>
+              <a:rPr lang="en-US" sz="1150" dirty="0">
+                <a:solidFill>
+                  <a:srgbClr val="1B2230"/>
+                </a:solidFill>
+                <a:latin typeface="Calibri" pitchFamily="34" charset="0"/>
+                <a:ea typeface="Calibri" pitchFamily="34" charset="-122"/>
+                <a:cs typeface="Calibri" pitchFamily="34" charset="-120"/>
+              </a:rPr>
+              <a:t>Stent thrombosis as the culprit lesion</a:t>
+            </a:r>
+            <a:endParaRPr lang="en-US" sz="1150" dirty="0"/>
+          </a:p>
+          <a:p>
+            <a:pPr marL="177800" indent="-177800">
+              <a:spcAft>
+                <a:spcPts val="500"/>
+              </a:spcAft>
+              <a:buSzPct val="100000"/>
+              <a:buChar char="•"/>
+            </a:pPr>
+            <a:r>
+              <a:rPr lang="en-US" sz="1150" dirty="0">
+                <a:solidFill>
+                  <a:srgbClr val="1B2230"/>
+                </a:solidFill>
+                <a:latin typeface="Calibri" pitchFamily="34" charset="0"/>
+                <a:ea typeface="Calibri" pitchFamily="34" charset="-122"/>
+                <a:cs typeface="Calibri" pitchFamily="34" charset="-120"/>
+              </a:rPr>
+              <a:t>Previous MI in the same territory</a:t>
+            </a:r>
+            <a:endParaRPr lang="en-US" sz="1150" dirty="0"/>
+          </a:p>
+          <a:p>
+            <a:pPr marL="177800" indent="-177800">
+              <a:spcAft>
+                <a:spcPts val="500"/>
+              </a:spcAft>
+              <a:buSzPct val="100000"/>
+              <a:buChar char="•"/>
+            </a:pPr>
+            <a:r>
+              <a:rPr lang="en-US" sz="1150" dirty="0">
+                <a:solidFill>
+                  <a:srgbClr val="1B2230"/>
+                </a:solidFill>
+                <a:latin typeface="Calibri" pitchFamily="34" charset="0"/>
+                <a:ea typeface="Calibri" pitchFamily="34" charset="-122"/>
+                <a:cs typeface="Calibri" pitchFamily="34" charset="-120"/>
+              </a:rPr>
+              <a:t>Women of child-bearing potential</a:t>
+            </a:r>
+            <a:endParaRPr lang="en-US" sz="1150" dirty="0"/>
+          </a:p>
+          <a:p>
+            <a:pPr marL="177800" indent="-177800">
+              <a:spcAft>
+                <a:spcPts val="500"/>
+              </a:spcAft>
+              <a:buSzPct val="100000"/>
+              <a:buChar char="•"/>
+            </a:pPr>
+            <a:r>
+              <a:rPr lang="en-US" sz="1150" dirty="0">
+                <a:solidFill>
+                  <a:srgbClr val="1B2230"/>
+                </a:solidFill>
+                <a:latin typeface="Calibri" pitchFamily="34" charset="0"/>
+                <a:ea typeface="Calibri" pitchFamily="34" charset="-122"/>
+                <a:cs typeface="Calibri" pitchFamily="34" charset="-120"/>
+              </a:rPr>
+              <a:t>Participation in another interventional trial</a:t>
+            </a:r>
+            <a:endParaRPr lang="en-US" sz="1150" dirty="0"/>
           </a:p>
         </p:txBody>
       </p:sp>
@@ -7973,6 +9489,863 @@
 <file path=ppt/slides/slide6.xml><?xml version="1.0" encoding="utf-8"?>
 <p:sld xmlns:a="http://schemas.openxmlformats.org/drawingml/2006/main" xmlns:r="http://schemas.openxmlformats.org/officeDocument/2006/relationships" xmlns:p="http://schemas.openxmlformats.org/presentationml/2006/main">
   <p:cSld name="Slide 6">
+    <p:bg>
+      <p:bgPr>
+        <a:solidFill>
+          <a:srgbClr val="FFFFFF"/>
+        </a:solidFill>
+      </p:bgPr>
+    </p:bg>
+    <p:spTree>
+      <p:nvGrpSpPr>
+        <p:cNvPr id="1" name=""/>
+        <p:cNvGrpSpPr/>
+        <p:nvPr/>
+      </p:nvGrpSpPr>
+      <p:grpSpPr>
+        <a:xfrm>
+          <a:off x="0" y="0"/>
+          <a:ext cx="0" cy="0"/>
+          <a:chOff x="0" y="0"/>
+          <a:chExt cx="0" cy="0"/>
+        </a:xfrm>
+      </p:grpSpPr>
+      <p:pic>
+        <p:nvPicPr>
+          <p:cNvPr id="2" name="Image 0" descr="preencoded.png">    </p:cNvPr>
+          <p:cNvPicPr>
+            <a:picLocks noChangeAspect="1"/>
+          </p:cNvPicPr>
+          <p:nvPr/>
+        </p:nvPicPr>
+        <p:blipFill>
+          <a:blip r:embed="rId1"/>
+          <a:stretch>
+            <a:fillRect/>
+          </a:stretch>
+        </p:blipFill>
+        <p:spPr>
+          <a:xfrm>
+            <a:off x="7818120" y="4727448"/>
+            <a:ext cx="685800" cy="137160"/>
+          </a:xfrm>
+          <a:prstGeom prst="rect">
+            <a:avLst/>
+          </a:prstGeom>
+        </p:spPr>
+      </p:pic>
+      <p:sp>
+        <p:nvSpPr>
+          <p:cNvPr id="3" name="Text 0"/>
+          <p:cNvSpPr txBox="1"/>
+          <p:nvPr/>
+        </p:nvSpPr>
+        <p:spPr>
+          <a:xfrm>
+            <a:off x="8503920" y="4663440"/>
+            <a:ext cx="548640" cy="274320"/>
+          </a:xfrm>
+          <a:prstGeom prst="rect">
+            <a:avLst/>
+          </a:prstGeom>
+          <a:noFill/>
+          <a:ln/>
+        </p:spPr>
+        <p:txBody>
+          <a:bodyPr wrap="square" lIns="0" tIns="0" rIns="0" bIns="0" rtlCol="0" anchor="ctr"/>
+          <a:lstStyle/>
+          <a:p>
+            <a:pPr algn="r" indent="0" marL="0">
+              <a:buNone/>
+            </a:pPr>
+            <a:r>
+              <a:rPr lang="en-US" sz="900" dirty="0">
+                <a:solidFill>
+                  <a:srgbClr val="5E6778"/>
+                </a:solidFill>
+                <a:latin typeface="Calibri" pitchFamily="34" charset="0"/>
+                <a:ea typeface="Calibri" pitchFamily="34" charset="-122"/>
+                <a:cs typeface="Calibri" pitchFamily="34" charset="-120"/>
+              </a:rPr>
+              <a:t>06 / 13</a:t>
+            </a:r>
+            <a:endParaRPr lang="en-US" sz="900" dirty="0"/>
+          </a:p>
+        </p:txBody>
+      </p:sp>
+      <p:sp>
+        <p:nvSpPr>
+          <p:cNvPr id="4" name="Text 1"/>
+          <p:cNvSpPr txBox="1"/>
+          <p:nvPr/>
+        </p:nvSpPr>
+        <p:spPr>
+          <a:xfrm>
+            <a:off x="457200" y="4663440"/>
+            <a:ext cx="2743200" cy="274320"/>
+          </a:xfrm>
+          <a:prstGeom prst="rect">
+            <a:avLst/>
+          </a:prstGeom>
+          <a:noFill/>
+          <a:ln/>
+        </p:spPr>
+        <p:txBody>
+          <a:bodyPr wrap="square" lIns="0" tIns="0" rIns="0" bIns="0" rtlCol="0" anchor="ctr"/>
+          <a:lstStyle/>
+          <a:p>
+            <a:pPr indent="0" marL="0">
+              <a:buNone/>
+            </a:pPr>
+            <a:r>
+              <a:rPr lang="en-US" sz="900" spc="200" kern="0" dirty="0">
+                <a:solidFill>
+                  <a:srgbClr val="5E6778"/>
+                </a:solidFill>
+                <a:latin typeface="Calibri" pitchFamily="34" charset="0"/>
+                <a:ea typeface="Calibri" pitchFamily="34" charset="-122"/>
+                <a:cs typeface="Calibri" pitchFamily="34" charset="-120"/>
+              </a:rPr>
+              <a:t>NATURE · ESC 2026</a:t>
+            </a:r>
+            <a:endParaRPr lang="en-US" sz="900" dirty="0"/>
+          </a:p>
+        </p:txBody>
+      </p:sp>
+      <p:sp>
+        <p:nvSpPr>
+          <p:cNvPr id="5" name="Text 2"/>
+          <p:cNvSpPr txBox="1"/>
+          <p:nvPr/>
+        </p:nvSpPr>
+        <p:spPr>
+          <a:xfrm>
+            <a:off x="457200" y="320040"/>
+            <a:ext cx="8229600" cy="274320"/>
+          </a:xfrm>
+          <a:prstGeom prst="rect">
+            <a:avLst/>
+          </a:prstGeom>
+          <a:noFill/>
+          <a:ln/>
+        </p:spPr>
+        <p:txBody>
+          <a:bodyPr wrap="square" lIns="0" tIns="0" rIns="0" bIns="0" rtlCol="0" anchor="ctr"/>
+          <a:lstStyle/>
+          <a:p>
+            <a:pPr indent="0" marL="0">
+              <a:buNone/>
+            </a:pPr>
+            <a:r>
+              <a:rPr lang="en-US" sz="1100" b="1" spc="400" kern="0" dirty="0">
+                <a:solidFill>
+                  <a:srgbClr val="E5383B"/>
+                </a:solidFill>
+                <a:latin typeface="Calibri" pitchFamily="34" charset="0"/>
+                <a:ea typeface="Calibri" pitchFamily="34" charset="-122"/>
+                <a:cs typeface="Calibri" pitchFamily="34" charset="-120"/>
+              </a:rPr>
+              <a:t>ENDPOINTS</a:t>
+            </a:r>
+            <a:endParaRPr lang="en-US" sz="1100" dirty="0"/>
+          </a:p>
+        </p:txBody>
+      </p:sp>
+      <p:sp>
+        <p:nvSpPr>
+          <p:cNvPr id="6" name="Text 3"/>
+          <p:cNvSpPr txBox="1"/>
+          <p:nvPr/>
+        </p:nvSpPr>
+        <p:spPr>
+          <a:xfrm>
+            <a:off x="457200" y="594360"/>
+            <a:ext cx="8229600" cy="640080"/>
+          </a:xfrm>
+          <a:prstGeom prst="rect">
+            <a:avLst/>
+          </a:prstGeom>
+          <a:noFill/>
+          <a:ln/>
+        </p:spPr>
+        <p:txBody>
+          <a:bodyPr wrap="square" lIns="0" tIns="0" rIns="0" bIns="0" rtlCol="0" anchor="t"/>
+          <a:lstStyle/>
+          <a:p>
+            <a:pPr indent="0" marL="0">
+              <a:buNone/>
+            </a:pPr>
+            <a:r>
+              <a:rPr lang="en-US" sz="3000" b="1" dirty="0">
+                <a:solidFill>
+                  <a:srgbClr val="1B2230"/>
+                </a:solidFill>
+                <a:latin typeface="Cambria" pitchFamily="34" charset="0"/>
+                <a:ea typeface="Cambria" pitchFamily="34" charset="-122"/>
+                <a:cs typeface="Cambria" pitchFamily="34" charset="-120"/>
+              </a:rPr>
+              <a:t>Enriched for clot; judged on infarct size</a:t>
+            </a:r>
+            <a:endParaRPr lang="en-US" sz="3000" dirty="0"/>
+          </a:p>
+        </p:txBody>
+      </p:sp>
+      <p:sp>
+        <p:nvSpPr>
+          <p:cNvPr id="7" name="Shape 4"/>
+          <p:cNvSpPr/>
+          <p:nvPr/>
+        </p:nvSpPr>
+        <p:spPr>
+          <a:xfrm>
+            <a:off x="457200" y="1371600"/>
+            <a:ext cx="3566160" cy="3017520"/>
+          </a:xfrm>
+          <a:prstGeom prst="roundRect">
+            <a:avLst>
+              <a:gd name="adj" fmla="val 3636"/>
+            </a:avLst>
+          </a:prstGeom>
+          <a:solidFill>
+            <a:srgbClr val="0E1117"/>
+          </a:solidFill>
+          <a:ln w="12700">
+            <a:solidFill>
+              <a:srgbClr val="0E1117"/>
+            </a:solidFill>
+            <a:prstDash val="solid"/>
+          </a:ln>
+        </p:spPr>
+      </p:sp>
+      <p:sp>
+        <p:nvSpPr>
+          <p:cNvPr id="8" name="Text 5"/>
+          <p:cNvSpPr txBox="1"/>
+          <p:nvPr/>
+        </p:nvSpPr>
+        <p:spPr>
+          <a:xfrm>
+            <a:off x="731520" y="1554480"/>
+            <a:ext cx="3017520" cy="274320"/>
+          </a:xfrm>
+          <a:prstGeom prst="rect">
+            <a:avLst/>
+          </a:prstGeom>
+          <a:noFill/>
+          <a:ln/>
+        </p:spPr>
+        <p:txBody>
+          <a:bodyPr wrap="square" lIns="0" tIns="0" rIns="0" bIns="0" rtlCol="0" anchor="ctr"/>
+          <a:lstStyle/>
+          <a:p>
+            <a:pPr indent="0" marL="0">
+              <a:buNone/>
+            </a:pPr>
+            <a:r>
+              <a:rPr lang="en-US" sz="1100" b="1" spc="400" kern="0" dirty="0">
+                <a:solidFill>
+                  <a:srgbClr val="F4B6BB"/>
+                </a:solidFill>
+                <a:latin typeface="Calibri" pitchFamily="34" charset="0"/>
+                <a:ea typeface="Calibri" pitchFamily="34" charset="-122"/>
+                <a:cs typeface="Calibri" pitchFamily="34" charset="-120"/>
+              </a:rPr>
+              <a:t>ENRICHED FOR CLOT</a:t>
+            </a:r>
+            <a:endParaRPr lang="en-US" sz="1100" dirty="0"/>
+          </a:p>
+        </p:txBody>
+      </p:sp>
+      <p:sp>
+        <p:nvSpPr>
+          <p:cNvPr id="9" name="Text 6"/>
+          <p:cNvSpPr txBox="1"/>
+          <p:nvPr/>
+        </p:nvSpPr>
+        <p:spPr>
+          <a:xfrm>
+            <a:off x="731520" y="1874520"/>
+            <a:ext cx="3017520" cy="731520"/>
+          </a:xfrm>
+          <a:prstGeom prst="rect">
+            <a:avLst/>
+          </a:prstGeom>
+          <a:noFill/>
+          <a:ln/>
+        </p:spPr>
+        <p:txBody>
+          <a:bodyPr wrap="square" lIns="0" tIns="0" rIns="0" bIns="0" rtlCol="0" anchor="ctr"/>
+          <a:lstStyle/>
+          <a:p>
+            <a:pPr indent="0" marL="0">
+              <a:buNone/>
+            </a:pPr>
+            <a:r>
+              <a:rPr lang="en-US" sz="4400" b="1" dirty="0">
+                <a:solidFill>
+                  <a:srgbClr val="FFFFFF"/>
+                </a:solidFill>
+                <a:latin typeface="Cambria" pitchFamily="34" charset="0"/>
+                <a:ea typeface="Cambria" pitchFamily="34" charset="-122"/>
+                <a:cs typeface="Cambria" pitchFamily="34" charset="-120"/>
+              </a:rPr>
+              <a:t>TTG ≥ 3</a:t>
+            </a:r>
+            <a:endParaRPr lang="en-US" sz="4400" dirty="0"/>
+          </a:p>
+        </p:txBody>
+      </p:sp>
+      <p:sp>
+        <p:nvSpPr>
+          <p:cNvPr id="10" name="Text 7"/>
+          <p:cNvSpPr txBox="1"/>
+          <p:nvPr/>
+        </p:nvSpPr>
+        <p:spPr>
+          <a:xfrm>
+            <a:off x="731520" y="2697480"/>
+            <a:ext cx="3017520" cy="822960"/>
+          </a:xfrm>
+          <a:prstGeom prst="rect">
+            <a:avLst/>
+          </a:prstGeom>
+          <a:noFill/>
+          <a:ln/>
+        </p:spPr>
+        <p:txBody>
+          <a:bodyPr wrap="square" lIns="0" tIns="0" rIns="0" bIns="0" rtlCol="0" anchor="t"/>
+          <a:lstStyle/>
+          <a:p>
+            <a:pPr indent="0" marL="0">
+              <a:buNone/>
+            </a:pPr>
+            <a:r>
+              <a:rPr lang="en-US" sz="1250" dirty="0">
+                <a:solidFill>
+                  <a:srgbClr val="C9CFDA"/>
+                </a:solidFill>
+                <a:latin typeface="Calibri" pitchFamily="34" charset="0"/>
+                <a:ea typeface="Calibri" pitchFamily="34" charset="-122"/>
+                <a:cs typeface="Calibri" pitchFamily="34" charset="-120"/>
+              </a:rPr>
+              <a:t>TIMI thrombus grade 3 or more: a clot longer than half the vessel diameter, in the patients most at risk of distal embolisation.</a:t>
+            </a:r>
+            <a:endParaRPr lang="en-US" sz="1250" dirty="0"/>
+          </a:p>
+        </p:txBody>
+      </p:sp>
+      <p:sp>
+        <p:nvSpPr>
+          <p:cNvPr id="11" name="Text 8"/>
+          <p:cNvSpPr txBox="1"/>
+          <p:nvPr/>
+        </p:nvSpPr>
+        <p:spPr>
+          <a:xfrm>
+            <a:off x="731520" y="3657600"/>
+            <a:ext cx="3017520" cy="548640"/>
+          </a:xfrm>
+          <a:prstGeom prst="rect">
+            <a:avLst/>
+          </a:prstGeom>
+          <a:noFill/>
+          <a:ln/>
+        </p:spPr>
+        <p:txBody>
+          <a:bodyPr wrap="square" lIns="0" tIns="0" rIns="0" bIns="0" rtlCol="0" anchor="t"/>
+          <a:lstStyle/>
+          <a:p>
+            <a:pPr indent="0" marL="0">
+              <a:buNone/>
+            </a:pPr>
+            <a:r>
+              <a:rPr lang="en-US" sz="1200" i="1" dirty="0">
+                <a:solidFill>
+                  <a:srgbClr val="F4B6BB"/>
+                </a:solidFill>
+                <a:latin typeface="Cambria" pitchFamily="34" charset="0"/>
+                <a:ea typeface="Cambria" pitchFamily="34" charset="-122"/>
+                <a:cs typeface="Cambria" pitchFamily="34" charset="-120"/>
+              </a:rPr>
+              <a:t>Why enrich? Benefit is most plausible where there is the most clot to embolise.</a:t>
+            </a:r>
+            <a:endParaRPr lang="en-US" sz="1200" dirty="0"/>
+          </a:p>
+        </p:txBody>
+      </p:sp>
+      <p:sp>
+        <p:nvSpPr>
+          <p:cNvPr id="12" name="Shape 9"/>
+          <p:cNvSpPr/>
+          <p:nvPr/>
+        </p:nvSpPr>
+        <p:spPr>
+          <a:xfrm>
+            <a:off x="4389120" y="1371600"/>
+            <a:ext cx="4297680" cy="868680"/>
+          </a:xfrm>
+          <a:prstGeom prst="roundRect">
+            <a:avLst>
+              <a:gd name="adj" fmla="val 10526"/>
+            </a:avLst>
+          </a:prstGeom>
+          <a:solidFill>
+            <a:srgbClr val="F6F7F9"/>
+          </a:solidFill>
+          <a:ln w="12700">
+            <a:solidFill>
+              <a:srgbClr val="F6F7F9"/>
+            </a:solidFill>
+            <a:prstDash val="solid"/>
+          </a:ln>
+        </p:spPr>
+      </p:sp>
+      <p:sp>
+        <p:nvSpPr>
+          <p:cNvPr id="13" name="Shape 10"/>
+          <p:cNvSpPr/>
+          <p:nvPr/>
+        </p:nvSpPr>
+        <p:spPr>
+          <a:xfrm>
+            <a:off x="4572000" y="1536192"/>
+            <a:ext cx="548640" cy="548640"/>
+          </a:xfrm>
+          <a:prstGeom prst="ellipse">
+            <a:avLst/>
+          </a:prstGeom>
+          <a:solidFill>
+            <a:srgbClr val="E5383B"/>
+          </a:solidFill>
+          <a:ln w="12700">
+            <a:solidFill>
+              <a:srgbClr val="E5383B"/>
+            </a:solidFill>
+            <a:prstDash val="solid"/>
+          </a:ln>
+        </p:spPr>
+      </p:sp>
+      <p:pic>
+        <p:nvPicPr>
+          <p:cNvPr id="14" name="Image 1" descr="preencoded.png">    </p:cNvPr>
+          <p:cNvPicPr>
+            <a:picLocks noChangeAspect="1"/>
+          </p:cNvPicPr>
+          <p:nvPr/>
+        </p:nvPicPr>
+        <p:blipFill>
+          <a:blip r:embed="rId2"/>
+          <a:stretch>
+            <a:fillRect/>
+          </a:stretch>
+        </p:blipFill>
+        <p:spPr>
+          <a:xfrm>
+            <a:off x="4714646" y="1678838"/>
+            <a:ext cx="263347" cy="263347"/>
+          </a:xfrm>
+          <a:prstGeom prst="rect">
+            <a:avLst/>
+          </a:prstGeom>
+        </p:spPr>
+      </p:pic>
+      <p:sp>
+        <p:nvSpPr>
+          <p:cNvPr id="15" name="Text 11"/>
+          <p:cNvSpPr txBox="1"/>
+          <p:nvPr/>
+        </p:nvSpPr>
+        <p:spPr>
+          <a:xfrm>
+            <a:off x="5303520" y="1499616"/>
+            <a:ext cx="3200400" cy="256032"/>
+          </a:xfrm>
+          <a:prstGeom prst="rect">
+            <a:avLst/>
+          </a:prstGeom>
+          <a:noFill/>
+          <a:ln/>
+        </p:spPr>
+        <p:txBody>
+          <a:bodyPr wrap="square" lIns="0" tIns="0" rIns="0" bIns="0" rtlCol="0" anchor="ctr"/>
+          <a:lstStyle/>
+          <a:p>
+            <a:pPr indent="0" marL="0">
+              <a:buNone/>
+            </a:pPr>
+            <a:r>
+              <a:rPr lang="en-US" sz="1000" b="1" spc="300" kern="0" dirty="0">
+                <a:solidFill>
+                  <a:srgbClr val="E5383B"/>
+                </a:solidFill>
+                <a:latin typeface="Calibri" pitchFamily="34" charset="0"/>
+                <a:ea typeface="Calibri" pitchFamily="34" charset="-122"/>
+                <a:cs typeface="Calibri" pitchFamily="34" charset="-120"/>
+              </a:rPr>
+              <a:t>PRIMARY EFFICACY</a:t>
+            </a:r>
+            <a:endParaRPr lang="en-US" sz="1000" dirty="0"/>
+          </a:p>
+        </p:txBody>
+      </p:sp>
+      <p:sp>
+        <p:nvSpPr>
+          <p:cNvPr id="16" name="Text 12"/>
+          <p:cNvSpPr txBox="1"/>
+          <p:nvPr/>
+        </p:nvSpPr>
+        <p:spPr>
+          <a:xfrm>
+            <a:off x="5303520" y="1755648"/>
+            <a:ext cx="3200400" cy="411480"/>
+          </a:xfrm>
+          <a:prstGeom prst="rect">
+            <a:avLst/>
+          </a:prstGeom>
+          <a:noFill/>
+          <a:ln/>
+        </p:spPr>
+        <p:txBody>
+          <a:bodyPr wrap="square" lIns="0" tIns="0" rIns="0" bIns="0" rtlCol="0" anchor="t"/>
+          <a:lstStyle/>
+          <a:p>
+            <a:pPr indent="0" marL="0">
+              <a:buNone/>
+            </a:pPr>
+            <a:r>
+              <a:rPr lang="en-US" sz="1300" dirty="0">
+                <a:solidFill>
+                  <a:srgbClr val="1B2230"/>
+                </a:solidFill>
+                <a:latin typeface="Calibri" pitchFamily="34" charset="0"/>
+                <a:ea typeface="Calibri" pitchFamily="34" charset="-122"/>
+                <a:cs typeface="Calibri" pitchFamily="34" charset="-120"/>
+              </a:rPr>
+              <a:t>Infarct size by CK-MB area under the curve</a:t>
+            </a:r>
+            <a:endParaRPr lang="en-US" sz="1300" dirty="0"/>
+          </a:p>
+        </p:txBody>
+      </p:sp>
+      <p:sp>
+        <p:nvSpPr>
+          <p:cNvPr id="17" name="Shape 13"/>
+          <p:cNvSpPr/>
+          <p:nvPr/>
+        </p:nvSpPr>
+        <p:spPr>
+          <a:xfrm>
+            <a:off x="4389120" y="2395728"/>
+            <a:ext cx="4297680" cy="868680"/>
+          </a:xfrm>
+          <a:prstGeom prst="roundRect">
+            <a:avLst>
+              <a:gd name="adj" fmla="val 10526"/>
+            </a:avLst>
+          </a:prstGeom>
+          <a:solidFill>
+            <a:srgbClr val="F6F7F9"/>
+          </a:solidFill>
+          <a:ln w="12700">
+            <a:solidFill>
+              <a:srgbClr val="F6F7F9"/>
+            </a:solidFill>
+            <a:prstDash val="solid"/>
+          </a:ln>
+        </p:spPr>
+      </p:sp>
+      <p:sp>
+        <p:nvSpPr>
+          <p:cNvPr id="18" name="Shape 14"/>
+          <p:cNvSpPr/>
+          <p:nvPr/>
+        </p:nvSpPr>
+        <p:spPr>
+          <a:xfrm>
+            <a:off x="4572000" y="2560320"/>
+            <a:ext cx="548640" cy="548640"/>
+          </a:xfrm>
+          <a:prstGeom prst="ellipse">
+            <a:avLst/>
+          </a:prstGeom>
+          <a:solidFill>
+            <a:srgbClr val="1FA99C"/>
+          </a:solidFill>
+          <a:ln w="12700">
+            <a:solidFill>
+              <a:srgbClr val="1FA99C"/>
+            </a:solidFill>
+            <a:prstDash val="solid"/>
+          </a:ln>
+        </p:spPr>
+      </p:sp>
+      <p:pic>
+        <p:nvPicPr>
+          <p:cNvPr id="19" name="Image 2" descr="preencoded.png">    </p:cNvPr>
+          <p:cNvPicPr>
+            <a:picLocks noChangeAspect="1"/>
+          </p:cNvPicPr>
+          <p:nvPr/>
+        </p:nvPicPr>
+        <p:blipFill>
+          <a:blip r:embed="rId3"/>
+          <a:stretch>
+            <a:fillRect/>
+          </a:stretch>
+        </p:blipFill>
+        <p:spPr>
+          <a:xfrm>
+            <a:off x="4714646" y="2702966"/>
+            <a:ext cx="263347" cy="263347"/>
+          </a:xfrm>
+          <a:prstGeom prst="rect">
+            <a:avLst/>
+          </a:prstGeom>
+        </p:spPr>
+      </p:pic>
+      <p:sp>
+        <p:nvSpPr>
+          <p:cNvPr id="20" name="Text 15"/>
+          <p:cNvSpPr txBox="1"/>
+          <p:nvPr/>
+        </p:nvSpPr>
+        <p:spPr>
+          <a:xfrm>
+            <a:off x="5303520" y="2523744"/>
+            <a:ext cx="3200400" cy="256032"/>
+          </a:xfrm>
+          <a:prstGeom prst="rect">
+            <a:avLst/>
+          </a:prstGeom>
+          <a:noFill/>
+          <a:ln/>
+        </p:spPr>
+        <p:txBody>
+          <a:bodyPr wrap="square" lIns="0" tIns="0" rIns="0" bIns="0" rtlCol="0" anchor="ctr"/>
+          <a:lstStyle/>
+          <a:p>
+            <a:pPr indent="0" marL="0">
+              <a:buNone/>
+            </a:pPr>
+            <a:r>
+              <a:rPr lang="en-US" sz="1000" b="1" spc="300" kern="0" dirty="0">
+                <a:solidFill>
+                  <a:srgbClr val="1FA99C"/>
+                </a:solidFill>
+                <a:latin typeface="Calibri" pitchFamily="34" charset="0"/>
+                <a:ea typeface="Calibri" pitchFamily="34" charset="-122"/>
+                <a:cs typeface="Calibri" pitchFamily="34" charset="-120"/>
+              </a:rPr>
+              <a:t>KEY SECONDARY</a:t>
+            </a:r>
+            <a:endParaRPr lang="en-US" sz="1000" dirty="0"/>
+          </a:p>
+        </p:txBody>
+      </p:sp>
+      <p:sp>
+        <p:nvSpPr>
+          <p:cNvPr id="21" name="Text 16"/>
+          <p:cNvSpPr txBox="1"/>
+          <p:nvPr/>
+        </p:nvSpPr>
+        <p:spPr>
+          <a:xfrm>
+            <a:off x="5303520" y="2779776"/>
+            <a:ext cx="3200400" cy="411480"/>
+          </a:xfrm>
+          <a:prstGeom prst="rect">
+            <a:avLst/>
+          </a:prstGeom>
+          <a:noFill/>
+          <a:ln/>
+        </p:spPr>
+        <p:txBody>
+          <a:bodyPr wrap="square" lIns="0" tIns="0" rIns="0" bIns="0" rtlCol="0" anchor="t"/>
+          <a:lstStyle/>
+          <a:p>
+            <a:pPr indent="0" marL="0">
+              <a:buNone/>
+            </a:pPr>
+            <a:r>
+              <a:rPr lang="en-US" sz="1300" dirty="0">
+                <a:solidFill>
+                  <a:srgbClr val="1B2230"/>
+                </a:solidFill>
+                <a:latin typeface="Calibri" pitchFamily="34" charset="0"/>
+                <a:ea typeface="Calibri" pitchFamily="34" charset="-122"/>
+                <a:cs typeface="Calibri" pitchFamily="34" charset="-120"/>
+              </a:rPr>
+              <a:t>Infarct size on cardiac MRI (% LV mass) at day 3</a:t>
+            </a:r>
+            <a:endParaRPr lang="en-US" sz="1300" dirty="0"/>
+          </a:p>
+        </p:txBody>
+      </p:sp>
+      <p:sp>
+        <p:nvSpPr>
+          <p:cNvPr id="22" name="Shape 17"/>
+          <p:cNvSpPr/>
+          <p:nvPr/>
+        </p:nvSpPr>
+        <p:spPr>
+          <a:xfrm>
+            <a:off x="4389120" y="3419856"/>
+            <a:ext cx="4297680" cy="868680"/>
+          </a:xfrm>
+          <a:prstGeom prst="roundRect">
+            <a:avLst>
+              <a:gd name="adj" fmla="val 10526"/>
+            </a:avLst>
+          </a:prstGeom>
+          <a:solidFill>
+            <a:srgbClr val="F6F7F9"/>
+          </a:solidFill>
+          <a:ln w="12700">
+            <a:solidFill>
+              <a:srgbClr val="F6F7F9"/>
+            </a:solidFill>
+            <a:prstDash val="solid"/>
+          </a:ln>
+        </p:spPr>
+      </p:sp>
+      <p:sp>
+        <p:nvSpPr>
+          <p:cNvPr id="23" name="Shape 18"/>
+          <p:cNvSpPr/>
+          <p:nvPr/>
+        </p:nvSpPr>
+        <p:spPr>
+          <a:xfrm>
+            <a:off x="4572000" y="3584448"/>
+            <a:ext cx="548640" cy="548640"/>
+          </a:xfrm>
+          <a:prstGeom prst="ellipse">
+            <a:avLst/>
+          </a:prstGeom>
+          <a:solidFill>
+            <a:srgbClr val="0E1117"/>
+          </a:solidFill>
+          <a:ln w="12700">
+            <a:solidFill>
+              <a:srgbClr val="0E1117"/>
+            </a:solidFill>
+            <a:prstDash val="solid"/>
+          </a:ln>
+        </p:spPr>
+      </p:sp>
+      <p:pic>
+        <p:nvPicPr>
+          <p:cNvPr id="24" name="Image 3" descr="preencoded.png">    </p:cNvPr>
+          <p:cNvPicPr>
+            <a:picLocks noChangeAspect="1"/>
+          </p:cNvPicPr>
+          <p:nvPr/>
+        </p:nvPicPr>
+        <p:blipFill>
+          <a:blip r:embed="rId4"/>
+          <a:stretch>
+            <a:fillRect/>
+          </a:stretch>
+        </p:blipFill>
+        <p:spPr>
+          <a:xfrm>
+            <a:off x="4714646" y="3727094"/>
+            <a:ext cx="263347" cy="263347"/>
+          </a:xfrm>
+          <a:prstGeom prst="rect">
+            <a:avLst/>
+          </a:prstGeom>
+        </p:spPr>
+      </p:pic>
+      <p:sp>
+        <p:nvSpPr>
+          <p:cNvPr id="25" name="Text 19"/>
+          <p:cNvSpPr txBox="1"/>
+          <p:nvPr/>
+        </p:nvSpPr>
+        <p:spPr>
+          <a:xfrm>
+            <a:off x="5303520" y="3547872"/>
+            <a:ext cx="3200400" cy="256032"/>
+          </a:xfrm>
+          <a:prstGeom prst="rect">
+            <a:avLst/>
+          </a:prstGeom>
+          <a:noFill/>
+          <a:ln/>
+        </p:spPr>
+        <p:txBody>
+          <a:bodyPr wrap="square" lIns="0" tIns="0" rIns="0" bIns="0" rtlCol="0" anchor="ctr"/>
+          <a:lstStyle/>
+          <a:p>
+            <a:pPr indent="0" marL="0">
+              <a:buNone/>
+            </a:pPr>
+            <a:r>
+              <a:rPr lang="en-US" sz="1000" b="1" spc="300" kern="0" dirty="0">
+                <a:solidFill>
+                  <a:srgbClr val="5E6778"/>
+                </a:solidFill>
+                <a:latin typeface="Calibri" pitchFamily="34" charset="0"/>
+                <a:ea typeface="Calibri" pitchFamily="34" charset="-122"/>
+                <a:cs typeface="Calibri" pitchFamily="34" charset="-120"/>
+              </a:rPr>
+              <a:t>SAFETY</a:t>
+            </a:r>
+            <a:endParaRPr lang="en-US" sz="1000" dirty="0"/>
+          </a:p>
+        </p:txBody>
+      </p:sp>
+      <p:sp>
+        <p:nvSpPr>
+          <p:cNvPr id="26" name="Text 20"/>
+          <p:cNvSpPr txBox="1"/>
+          <p:nvPr/>
+        </p:nvSpPr>
+        <p:spPr>
+          <a:xfrm>
+            <a:off x="5303520" y="3803904"/>
+            <a:ext cx="3200400" cy="411480"/>
+          </a:xfrm>
+          <a:prstGeom prst="rect">
+            <a:avLst/>
+          </a:prstGeom>
+          <a:noFill/>
+          <a:ln/>
+        </p:spPr>
+        <p:txBody>
+          <a:bodyPr wrap="square" lIns="0" tIns="0" rIns="0" bIns="0" rtlCol="0" anchor="t"/>
+          <a:lstStyle/>
+          <a:p>
+            <a:pPr indent="0" marL="0">
+              <a:buNone/>
+            </a:pPr>
+            <a:r>
+              <a:rPr lang="en-US" sz="1300" dirty="0">
+                <a:solidFill>
+                  <a:srgbClr val="1B2230"/>
+                </a:solidFill>
+                <a:latin typeface="Calibri" pitchFamily="34" charset="0"/>
+                <a:ea typeface="Calibri" pitchFamily="34" charset="-122"/>
+                <a:cs typeface="Calibri" pitchFamily="34" charset="-120"/>
+              </a:rPr>
+              <a:t>Death, stroke and MACE at 30 days</a:t>
+            </a:r>
+            <a:endParaRPr lang="en-US" sz="1300" dirty="0"/>
+          </a:p>
+        </p:txBody>
+      </p:sp>
+    </p:spTree>
+  </p:cSld>
+  <p:clrMapOvr>
+    <a:masterClrMapping/>
+  </p:clrMapOvr>
+</p:sld>
+</file>
+
+<file path=ppt/slides/slide7.xml><?xml version="1.0" encoding="utf-8"?>
+<p:sld xmlns:a="http://schemas.openxmlformats.org/drawingml/2006/main" xmlns:r="http://schemas.openxmlformats.org/officeDocument/2006/relationships" xmlns:p="http://schemas.openxmlformats.org/presentationml/2006/main">
+  <p:cSld name="Slide 7">
     <p:bg>
       <p:bgPr>
         <a:solidFill>
@@ -8051,7 +10424,7 @@
                 <a:ea typeface="Calibri" pitchFamily="34" charset="-122"/>
                 <a:cs typeface="Calibri" pitchFamily="34" charset="-120"/>
               </a:rPr>
-              <a:t>06 / 11</a:t>
+              <a:t>07 / 13</a:t>
             </a:r>
             <a:endParaRPr lang="en-US" sz="900" dirty="0"/>
           </a:p>
@@ -8334,977 +10707,6 @@
           </a:graphicData>
         </a:graphic>
       </p:graphicFrame>
-    </p:spTree>
-  </p:cSld>
-  <p:clrMapOvr>
-    <a:masterClrMapping/>
-  </p:clrMapOvr>
-</p:sld>
-</file>
-
-<file path=ppt/slides/slide7.xml><?xml version="1.0" encoding="utf-8"?>
-<p:sld xmlns:a="http://schemas.openxmlformats.org/drawingml/2006/main" xmlns:r="http://schemas.openxmlformats.org/officeDocument/2006/relationships" xmlns:p="http://schemas.openxmlformats.org/presentationml/2006/main">
-  <p:cSld name="Slide 7">
-    <p:bg>
-      <p:bgPr>
-        <a:solidFill>
-          <a:srgbClr val="FFFFFF"/>
-        </a:solidFill>
-      </p:bgPr>
-    </p:bg>
-    <p:spTree>
-      <p:nvGrpSpPr>
-        <p:cNvPr id="1" name=""/>
-        <p:cNvGrpSpPr/>
-        <p:nvPr/>
-      </p:nvGrpSpPr>
-      <p:grpSpPr>
-        <a:xfrm>
-          <a:off x="0" y="0"/>
-          <a:ext cx="0" cy="0"/>
-          <a:chOff x="0" y="0"/>
-          <a:chExt cx="0" cy="0"/>
-        </a:xfrm>
-      </p:grpSpPr>
-      <p:pic>
-        <p:nvPicPr>
-          <p:cNvPr id="2" name="Image 0" descr="preencoded.png">    </p:cNvPr>
-          <p:cNvPicPr>
-            <a:picLocks noChangeAspect="1"/>
-          </p:cNvPicPr>
-          <p:nvPr/>
-        </p:nvPicPr>
-        <p:blipFill>
-          <a:blip r:embed="rId1"/>
-          <a:stretch>
-            <a:fillRect/>
-          </a:stretch>
-        </p:blipFill>
-        <p:spPr>
-          <a:xfrm>
-            <a:off x="7818120" y="4727448"/>
-            <a:ext cx="685800" cy="137160"/>
-          </a:xfrm>
-          <a:prstGeom prst="rect">
-            <a:avLst/>
-          </a:prstGeom>
-        </p:spPr>
-      </p:pic>
-      <p:sp>
-        <p:nvSpPr>
-          <p:cNvPr id="3" name="Text 0"/>
-          <p:cNvSpPr txBox="1"/>
-          <p:nvPr/>
-        </p:nvSpPr>
-        <p:spPr>
-          <a:xfrm>
-            <a:off x="8503920" y="4663440"/>
-            <a:ext cx="548640" cy="274320"/>
-          </a:xfrm>
-          <a:prstGeom prst="rect">
-            <a:avLst/>
-          </a:prstGeom>
-          <a:noFill/>
-          <a:ln/>
-        </p:spPr>
-        <p:txBody>
-          <a:bodyPr wrap="square" lIns="0" tIns="0" rIns="0" bIns="0" rtlCol="0" anchor="ctr"/>
-          <a:lstStyle/>
-          <a:p>
-            <a:pPr algn="r" indent="0" marL="0">
-              <a:buNone/>
-            </a:pPr>
-            <a:r>
-              <a:rPr lang="en-US" sz="900" dirty="0">
-                <a:solidFill>
-                  <a:srgbClr val="5E6778"/>
-                </a:solidFill>
-                <a:latin typeface="Calibri" pitchFamily="34" charset="0"/>
-                <a:ea typeface="Calibri" pitchFamily="34" charset="-122"/>
-                <a:cs typeface="Calibri" pitchFamily="34" charset="-120"/>
-              </a:rPr>
-              <a:t>07 / 11</a:t>
-            </a:r>
-            <a:endParaRPr lang="en-US" sz="900" dirty="0"/>
-          </a:p>
-        </p:txBody>
-      </p:sp>
-      <p:sp>
-        <p:nvSpPr>
-          <p:cNvPr id="4" name="Text 1"/>
-          <p:cNvSpPr txBox="1"/>
-          <p:nvPr/>
-        </p:nvSpPr>
-        <p:spPr>
-          <a:xfrm>
-            <a:off x="457200" y="4663440"/>
-            <a:ext cx="2743200" cy="274320"/>
-          </a:xfrm>
-          <a:prstGeom prst="rect">
-            <a:avLst/>
-          </a:prstGeom>
-          <a:noFill/>
-          <a:ln/>
-        </p:spPr>
-        <p:txBody>
-          <a:bodyPr wrap="square" lIns="0" tIns="0" rIns="0" bIns="0" rtlCol="0" anchor="ctr"/>
-          <a:lstStyle/>
-          <a:p>
-            <a:pPr indent="0" marL="0">
-              <a:buNone/>
-            </a:pPr>
-            <a:r>
-              <a:rPr lang="en-US" sz="900" spc="200" kern="0" dirty="0">
-                <a:solidFill>
-                  <a:srgbClr val="5E6778"/>
-                </a:solidFill>
-                <a:latin typeface="Calibri" pitchFamily="34" charset="0"/>
-                <a:ea typeface="Calibri" pitchFamily="34" charset="-122"/>
-                <a:cs typeface="Calibri" pitchFamily="34" charset="-120"/>
-              </a:rPr>
-              <a:t>NATURE · ESC 2026</a:t>
-            </a:r>
-            <a:endParaRPr lang="en-US" sz="900" dirty="0"/>
-          </a:p>
-        </p:txBody>
-      </p:sp>
-      <p:sp>
-        <p:nvSpPr>
-          <p:cNvPr id="5" name="Text 2"/>
-          <p:cNvSpPr txBox="1"/>
-          <p:nvPr/>
-        </p:nvSpPr>
-        <p:spPr>
-          <a:xfrm>
-            <a:off x="457200" y="320040"/>
-            <a:ext cx="8229600" cy="274320"/>
-          </a:xfrm>
-          <a:prstGeom prst="rect">
-            <a:avLst/>
-          </a:prstGeom>
-          <a:noFill/>
-          <a:ln/>
-        </p:spPr>
-        <p:txBody>
-          <a:bodyPr wrap="square" lIns="0" tIns="0" rIns="0" bIns="0" rtlCol="0" anchor="ctr"/>
-          <a:lstStyle/>
-          <a:p>
-            <a:pPr indent="0" marL="0">
-              <a:buNone/>
-            </a:pPr>
-            <a:r>
-              <a:rPr lang="en-US" sz="1100" b="1" spc="400" kern="0" dirty="0">
-                <a:solidFill>
-                  <a:srgbClr val="E5383B"/>
-                </a:solidFill>
-                <a:latin typeface="Calibri" pitchFamily="34" charset="0"/>
-                <a:ea typeface="Calibri" pitchFamily="34" charset="-122"/>
-                <a:cs typeface="Calibri" pitchFamily="34" charset="-120"/>
-              </a:rPr>
-              <a:t>SECONDARY ENDPOINT</a:t>
-            </a:r>
-            <a:endParaRPr lang="en-US" sz="1100" dirty="0"/>
-          </a:p>
-        </p:txBody>
-      </p:sp>
-      <p:sp>
-        <p:nvSpPr>
-          <p:cNvPr id="6" name="Text 3"/>
-          <p:cNvSpPr txBox="1"/>
-          <p:nvPr/>
-        </p:nvSpPr>
-        <p:spPr>
-          <a:xfrm>
-            <a:off x="457200" y="594360"/>
-            <a:ext cx="8229600" cy="640080"/>
-          </a:xfrm>
-          <a:prstGeom prst="rect">
-            <a:avLst/>
-          </a:prstGeom>
-          <a:noFill/>
-          <a:ln/>
-        </p:spPr>
-        <p:txBody>
-          <a:bodyPr wrap="square" lIns="0" tIns="0" rIns="0" bIns="0" rtlCol="0" anchor="t"/>
-          <a:lstStyle/>
-          <a:p>
-            <a:pPr indent="0" marL="0">
-              <a:buNone/>
-            </a:pPr>
-            <a:r>
-              <a:rPr lang="en-US" sz="3000" b="1" dirty="0">
-                <a:solidFill>
-                  <a:srgbClr val="1B2230"/>
-                </a:solidFill>
-                <a:latin typeface="Cambria" pitchFamily="34" charset="0"/>
-                <a:ea typeface="Cambria" pitchFamily="34" charset="-122"/>
-                <a:cs typeface="Cambria" pitchFamily="34" charset="-120"/>
-              </a:rPr>
-              <a:t>Biomarker and MRI tell the same story</a:t>
-            </a:r>
-            <a:endParaRPr lang="en-US" sz="3000" dirty="0"/>
-          </a:p>
-        </p:txBody>
-      </p:sp>
-      <p:sp>
-        <p:nvSpPr>
-          <p:cNvPr id="7" name="Shape 4"/>
-          <p:cNvSpPr/>
-          <p:nvPr/>
-        </p:nvSpPr>
-        <p:spPr>
-          <a:xfrm>
-            <a:off x="457200" y="1417320"/>
-            <a:ext cx="3886200" cy="2926080"/>
-          </a:xfrm>
-          <a:prstGeom prst="roundRect">
-            <a:avLst>
-              <a:gd name="adj" fmla="val 3750"/>
-            </a:avLst>
-          </a:prstGeom>
-          <a:solidFill>
-            <a:srgbClr val="F6F7F9"/>
-          </a:solidFill>
-          <a:ln w="12700">
-            <a:solidFill>
-              <a:srgbClr val="F6F7F9"/>
-            </a:solidFill>
-            <a:prstDash val="solid"/>
-          </a:ln>
-        </p:spPr>
-      </p:sp>
-      <p:sp>
-        <p:nvSpPr>
-          <p:cNvPr id="8" name="Shape 5"/>
-          <p:cNvSpPr/>
-          <p:nvPr/>
-        </p:nvSpPr>
-        <p:spPr>
-          <a:xfrm>
-            <a:off x="731520" y="1645920"/>
-            <a:ext cx="566928" cy="566928"/>
-          </a:xfrm>
-          <a:prstGeom prst="ellipse">
-            <a:avLst/>
-          </a:prstGeom>
-          <a:solidFill>
-            <a:srgbClr val="E5383B"/>
-          </a:solidFill>
-          <a:ln w="12700">
-            <a:solidFill>
-              <a:srgbClr val="E5383B"/>
-            </a:solidFill>
-            <a:prstDash val="solid"/>
-          </a:ln>
-        </p:spPr>
-      </p:sp>
-      <p:pic>
-        <p:nvPicPr>
-          <p:cNvPr id="9" name="Image 1" descr="preencoded.png">    </p:cNvPr>
-          <p:cNvPicPr>
-            <a:picLocks noChangeAspect="1"/>
-          </p:cNvPicPr>
-          <p:nvPr/>
-        </p:nvPicPr>
-        <p:blipFill>
-          <a:blip r:embed="rId2"/>
-          <a:stretch>
-            <a:fillRect/>
-          </a:stretch>
-        </p:blipFill>
-        <p:spPr>
-          <a:xfrm>
-            <a:off x="878921" y="1793321"/>
-            <a:ext cx="272125" cy="272125"/>
-          </a:xfrm>
-          <a:prstGeom prst="rect">
-            <a:avLst/>
-          </a:prstGeom>
-        </p:spPr>
-      </p:pic>
-      <p:sp>
-        <p:nvSpPr>
-          <p:cNvPr id="10" name="Text 6"/>
-          <p:cNvSpPr txBox="1"/>
-          <p:nvPr/>
-        </p:nvSpPr>
-        <p:spPr>
-          <a:xfrm>
-            <a:off x="1463040" y="1645920"/>
-            <a:ext cx="2743200" cy="292608"/>
-          </a:xfrm>
-          <a:prstGeom prst="rect">
-            <a:avLst/>
-          </a:prstGeom>
-          <a:noFill/>
-          <a:ln/>
-        </p:spPr>
-        <p:txBody>
-          <a:bodyPr wrap="square" lIns="0" tIns="0" rIns="0" bIns="0" rtlCol="0" anchor="ctr"/>
-          <a:lstStyle/>
-          <a:p>
-            <a:pPr indent="0" marL="0">
-              <a:buNone/>
-            </a:pPr>
-            <a:r>
-              <a:rPr lang="en-US" sz="1600" b="1" dirty="0">
-                <a:solidFill>
-                  <a:srgbClr val="1B2230"/>
-                </a:solidFill>
-                <a:latin typeface="Cambria" pitchFamily="34" charset="0"/>
-                <a:ea typeface="Cambria" pitchFamily="34" charset="-122"/>
-                <a:cs typeface="Cambria" pitchFamily="34" charset="-120"/>
-              </a:rPr>
-              <a:t>CK-MB AUC</a:t>
-            </a:r>
-            <a:endParaRPr lang="en-US" sz="1600" dirty="0"/>
-          </a:p>
-        </p:txBody>
-      </p:sp>
-      <p:sp>
-        <p:nvSpPr>
-          <p:cNvPr id="11" name="Text 7"/>
-          <p:cNvSpPr txBox="1"/>
-          <p:nvPr/>
-        </p:nvSpPr>
-        <p:spPr>
-          <a:xfrm>
-            <a:off x="1463040" y="1938528"/>
-            <a:ext cx="2743200" cy="274320"/>
-          </a:xfrm>
-          <a:prstGeom prst="rect">
-            <a:avLst/>
-          </a:prstGeom>
-          <a:noFill/>
-          <a:ln/>
-        </p:spPr>
-        <p:txBody>
-          <a:bodyPr wrap="square" lIns="0" tIns="0" rIns="0" bIns="0" rtlCol="0" anchor="ctr"/>
-          <a:lstStyle/>
-          <a:p>
-            <a:pPr indent="0" marL="0">
-              <a:buNone/>
-            </a:pPr>
-            <a:r>
-              <a:rPr lang="en-US" sz="1150" dirty="0">
-                <a:solidFill>
-                  <a:srgbClr val="5E6778"/>
-                </a:solidFill>
-                <a:latin typeface="Calibri" pitchFamily="34" charset="0"/>
-                <a:ea typeface="Calibri" pitchFamily="34" charset="-122"/>
-                <a:cs typeface="Calibri" pitchFamily="34" charset="-120"/>
-              </a:rPr>
-              <a:t>Primary endpoint</a:t>
-            </a:r>
-            <a:endParaRPr lang="en-US" sz="1150" dirty="0"/>
-          </a:p>
-        </p:txBody>
-      </p:sp>
-      <p:sp>
-        <p:nvSpPr>
-          <p:cNvPr id="12" name="Text 8"/>
-          <p:cNvSpPr txBox="1"/>
-          <p:nvPr/>
-        </p:nvSpPr>
-        <p:spPr>
-          <a:xfrm>
-            <a:off x="731520" y="2377440"/>
-            <a:ext cx="3291840" cy="777240"/>
-          </a:xfrm>
-          <a:prstGeom prst="rect">
-            <a:avLst/>
-          </a:prstGeom>
-          <a:noFill/>
-          <a:ln/>
-        </p:spPr>
-        <p:txBody>
-          <a:bodyPr wrap="square" lIns="0" tIns="0" rIns="0" bIns="0" rtlCol="0" anchor="ctr"/>
-          <a:lstStyle/>
-          <a:p>
-            <a:pPr indent="0" marL="0">
-              <a:buNone/>
-            </a:pPr>
-            <a:r>
-              <a:rPr lang="en-US" sz="4800" b="1" dirty="0">
-                <a:solidFill>
-                  <a:srgbClr val="E5383B"/>
-                </a:solidFill>
-                <a:latin typeface="Cambria" pitchFamily="34" charset="0"/>
-                <a:ea typeface="Cambria" pitchFamily="34" charset="-122"/>
-                <a:cs typeface="Cambria" pitchFamily="34" charset="-120"/>
-              </a:rPr>
-              <a:t>−26%</a:t>
-            </a:r>
-            <a:endParaRPr lang="en-US" sz="4800" dirty="0"/>
-          </a:p>
-        </p:txBody>
-      </p:sp>
-      <p:sp>
-        <p:nvSpPr>
-          <p:cNvPr id="13" name="Text 9"/>
-          <p:cNvSpPr txBox="1"/>
-          <p:nvPr/>
-        </p:nvSpPr>
-        <p:spPr>
-          <a:xfrm>
-            <a:off x="731520" y="3200400"/>
-            <a:ext cx="1371600" cy="201168"/>
-          </a:xfrm>
-          <a:prstGeom prst="rect">
-            <a:avLst/>
-          </a:prstGeom>
-          <a:noFill/>
-          <a:ln/>
-        </p:spPr>
-        <p:txBody>
-          <a:bodyPr wrap="square" lIns="0" tIns="0" rIns="0" bIns="0" rtlCol="0" anchor="ctr"/>
-          <a:lstStyle/>
-          <a:p>
-            <a:pPr indent="0" marL="0">
-              <a:buNone/>
-            </a:pPr>
-            <a:r>
-              <a:rPr lang="en-US" sz="950" dirty="0">
-                <a:solidFill>
-                  <a:srgbClr val="5E6778"/>
-                </a:solidFill>
-                <a:latin typeface="Calibri" pitchFamily="34" charset="0"/>
-                <a:ea typeface="Calibri" pitchFamily="34" charset="-122"/>
-                <a:cs typeface="Calibri" pitchFamily="34" charset="-120"/>
-              </a:rPr>
-              <a:t>Standard PCI</a:t>
-            </a:r>
-            <a:endParaRPr lang="en-US" sz="950" dirty="0"/>
-          </a:p>
-        </p:txBody>
-      </p:sp>
-      <p:sp>
-        <p:nvSpPr>
-          <p:cNvPr id="14" name="Shape 10"/>
-          <p:cNvSpPr/>
-          <p:nvPr/>
-        </p:nvSpPr>
-        <p:spPr>
-          <a:xfrm>
-            <a:off x="731520" y="3410712"/>
-            <a:ext cx="3337560" cy="164592"/>
-          </a:xfrm>
-          <a:prstGeom prst="rect">
-            <a:avLst/>
-          </a:prstGeom>
-          <a:solidFill>
-            <a:srgbClr val="C7CCD6"/>
-          </a:solidFill>
-          <a:ln w="12700">
-            <a:solidFill>
-              <a:srgbClr val="C7CCD6"/>
-            </a:solidFill>
-            <a:prstDash val="solid"/>
-          </a:ln>
-        </p:spPr>
-      </p:sp>
-      <p:sp>
-        <p:nvSpPr>
-          <p:cNvPr id="15" name="Text 11"/>
-          <p:cNvSpPr txBox="1"/>
-          <p:nvPr/>
-        </p:nvSpPr>
-        <p:spPr>
-          <a:xfrm>
-            <a:off x="731520" y="3630168"/>
-            <a:ext cx="1371600" cy="201168"/>
-          </a:xfrm>
-          <a:prstGeom prst="rect">
-            <a:avLst/>
-          </a:prstGeom>
-          <a:noFill/>
-          <a:ln/>
-        </p:spPr>
-        <p:txBody>
-          <a:bodyPr wrap="square" lIns="0" tIns="0" rIns="0" bIns="0" rtlCol="0" anchor="ctr"/>
-          <a:lstStyle/>
-          <a:p>
-            <a:pPr indent="0" marL="0">
-              <a:buNone/>
-            </a:pPr>
-            <a:r>
-              <a:rPr lang="en-US" sz="950" dirty="0">
-                <a:solidFill>
-                  <a:srgbClr val="5E6778"/>
-                </a:solidFill>
-                <a:latin typeface="Calibri" pitchFamily="34" charset="0"/>
-                <a:ea typeface="Calibri" pitchFamily="34" charset="-122"/>
-                <a:cs typeface="Calibri" pitchFamily="34" charset="-120"/>
-              </a:rPr>
-              <a:t>enVast + PCI</a:t>
-            </a:r>
-            <a:endParaRPr lang="en-US" sz="950" dirty="0"/>
-          </a:p>
-        </p:txBody>
-      </p:sp>
-      <p:sp>
-        <p:nvSpPr>
-          <p:cNvPr id="16" name="Shape 12"/>
-          <p:cNvSpPr/>
-          <p:nvPr/>
-        </p:nvSpPr>
-        <p:spPr>
-          <a:xfrm>
-            <a:off x="731520" y="3840480"/>
-            <a:ext cx="2469794" cy="164592"/>
-          </a:xfrm>
-          <a:prstGeom prst="rect">
-            <a:avLst/>
-          </a:prstGeom>
-          <a:solidFill>
-            <a:srgbClr val="E5383B"/>
-          </a:solidFill>
-          <a:ln w="12700">
-            <a:solidFill>
-              <a:srgbClr val="E5383B"/>
-            </a:solidFill>
-            <a:prstDash val="solid"/>
-          </a:ln>
-        </p:spPr>
-      </p:sp>
-      <p:sp>
-        <p:nvSpPr>
-          <p:cNvPr id="17" name="Text 13"/>
-          <p:cNvSpPr txBox="1"/>
-          <p:nvPr/>
-        </p:nvSpPr>
-        <p:spPr>
-          <a:xfrm>
-            <a:off x="731520" y="4041648"/>
-            <a:ext cx="3337560" cy="228600"/>
-          </a:xfrm>
-          <a:prstGeom prst="rect">
-            <a:avLst/>
-          </a:prstGeom>
-          <a:noFill/>
-          <a:ln/>
-        </p:spPr>
-        <p:txBody>
-          <a:bodyPr wrap="square" lIns="0" tIns="0" rIns="0" bIns="0" rtlCol="0" anchor="ctr"/>
-          <a:lstStyle/>
-          <a:p>
-            <a:pPr indent="0" marL="0">
-              <a:buNone/>
-            </a:pPr>
-            <a:r>
-              <a:rPr lang="en-US" sz="1050" i="1" dirty="0">
-                <a:solidFill>
-                  <a:srgbClr val="1B2230"/>
-                </a:solidFill>
-                <a:latin typeface="Calibri" pitchFamily="34" charset="0"/>
-                <a:ea typeface="Calibri" pitchFamily="34" charset="-122"/>
-                <a:cs typeface="Calibri" pitchFamily="34" charset="-120"/>
-              </a:rPr>
-              <a:t>P = 0.001 · significant</a:t>
-            </a:r>
-            <a:endParaRPr lang="en-US" sz="1050" dirty="0"/>
-          </a:p>
-        </p:txBody>
-      </p:sp>
-      <p:sp>
-        <p:nvSpPr>
-          <p:cNvPr id="18" name="Shape 14"/>
-          <p:cNvSpPr/>
-          <p:nvPr/>
-        </p:nvSpPr>
-        <p:spPr>
-          <a:xfrm>
-            <a:off x="4800600" y="1417320"/>
-            <a:ext cx="3886200" cy="2926080"/>
-          </a:xfrm>
-          <a:prstGeom prst="roundRect">
-            <a:avLst>
-              <a:gd name="adj" fmla="val 3750"/>
-            </a:avLst>
-          </a:prstGeom>
-          <a:solidFill>
-            <a:srgbClr val="F6F7F9"/>
-          </a:solidFill>
-          <a:ln w="12700">
-            <a:solidFill>
-              <a:srgbClr val="F6F7F9"/>
-            </a:solidFill>
-            <a:prstDash val="solid"/>
-          </a:ln>
-        </p:spPr>
-      </p:sp>
-      <p:sp>
-        <p:nvSpPr>
-          <p:cNvPr id="19" name="Shape 15"/>
-          <p:cNvSpPr/>
-          <p:nvPr/>
-        </p:nvSpPr>
-        <p:spPr>
-          <a:xfrm>
-            <a:off x="5074920" y="1645920"/>
-            <a:ext cx="566928" cy="566928"/>
-          </a:xfrm>
-          <a:prstGeom prst="ellipse">
-            <a:avLst/>
-          </a:prstGeom>
-          <a:solidFill>
-            <a:srgbClr val="1FA99C"/>
-          </a:solidFill>
-          <a:ln w="12700">
-            <a:solidFill>
-              <a:srgbClr val="1FA99C"/>
-            </a:solidFill>
-            <a:prstDash val="solid"/>
-          </a:ln>
-        </p:spPr>
-      </p:sp>
-      <p:pic>
-        <p:nvPicPr>
-          <p:cNvPr id="20" name="Image 2" descr="preencoded.png">    </p:cNvPr>
-          <p:cNvPicPr>
-            <a:picLocks noChangeAspect="1"/>
-          </p:cNvPicPr>
-          <p:nvPr/>
-        </p:nvPicPr>
-        <p:blipFill>
-          <a:blip r:embed="rId3"/>
-          <a:stretch>
-            <a:fillRect/>
-          </a:stretch>
-        </p:blipFill>
-        <p:spPr>
-          <a:xfrm>
-            <a:off x="5222321" y="1793321"/>
-            <a:ext cx="272125" cy="272125"/>
-          </a:xfrm>
-          <a:prstGeom prst="rect">
-            <a:avLst/>
-          </a:prstGeom>
-        </p:spPr>
-      </p:pic>
-      <p:sp>
-        <p:nvSpPr>
-          <p:cNvPr id="21" name="Text 16"/>
-          <p:cNvSpPr txBox="1"/>
-          <p:nvPr/>
-        </p:nvSpPr>
-        <p:spPr>
-          <a:xfrm>
-            <a:off x="5806440" y="1645920"/>
-            <a:ext cx="2743200" cy="292608"/>
-          </a:xfrm>
-          <a:prstGeom prst="rect">
-            <a:avLst/>
-          </a:prstGeom>
-          <a:noFill/>
-          <a:ln/>
-        </p:spPr>
-        <p:txBody>
-          <a:bodyPr wrap="square" lIns="0" tIns="0" rIns="0" bIns="0" rtlCol="0" anchor="ctr"/>
-          <a:lstStyle/>
-          <a:p>
-            <a:pPr indent="0" marL="0">
-              <a:buNone/>
-            </a:pPr>
-            <a:r>
-              <a:rPr lang="en-US" sz="1600" b="1" dirty="0">
-                <a:solidFill>
-                  <a:srgbClr val="1B2230"/>
-                </a:solidFill>
-                <a:latin typeface="Cambria" pitchFamily="34" charset="0"/>
-                <a:ea typeface="Cambria" pitchFamily="34" charset="-122"/>
-                <a:cs typeface="Cambria" pitchFamily="34" charset="-120"/>
-              </a:rPr>
-              <a:t>Cardiac MRI, day 3</a:t>
-            </a:r>
-            <a:endParaRPr lang="en-US" sz="1600" dirty="0"/>
-          </a:p>
-        </p:txBody>
-      </p:sp>
-      <p:sp>
-        <p:nvSpPr>
-          <p:cNvPr id="22" name="Text 17"/>
-          <p:cNvSpPr txBox="1"/>
-          <p:nvPr/>
-        </p:nvSpPr>
-        <p:spPr>
-          <a:xfrm>
-            <a:off x="5806440" y="1938528"/>
-            <a:ext cx="2743200" cy="274320"/>
-          </a:xfrm>
-          <a:prstGeom prst="rect">
-            <a:avLst/>
-          </a:prstGeom>
-          <a:noFill/>
-          <a:ln/>
-        </p:spPr>
-        <p:txBody>
-          <a:bodyPr wrap="square" lIns="0" tIns="0" rIns="0" bIns="0" rtlCol="0" anchor="ctr"/>
-          <a:lstStyle/>
-          <a:p>
-            <a:pPr indent="0" marL="0">
-              <a:buNone/>
-            </a:pPr>
-            <a:r>
-              <a:rPr lang="en-US" sz="1150" dirty="0">
-                <a:solidFill>
-                  <a:srgbClr val="5E6778"/>
-                </a:solidFill>
-                <a:latin typeface="Calibri" pitchFamily="34" charset="0"/>
-                <a:ea typeface="Calibri" pitchFamily="34" charset="-122"/>
-                <a:cs typeface="Calibri" pitchFamily="34" charset="-120"/>
-              </a:rPr>
-              <a:t>Infarct size, % LV mass</a:t>
-            </a:r>
-            <a:endParaRPr lang="en-US" sz="1150" dirty="0"/>
-          </a:p>
-        </p:txBody>
-      </p:sp>
-      <p:sp>
-        <p:nvSpPr>
-          <p:cNvPr id="23" name="Text 18"/>
-          <p:cNvSpPr txBox="1"/>
-          <p:nvPr/>
-        </p:nvSpPr>
-        <p:spPr>
-          <a:xfrm>
-            <a:off x="5074920" y="2377440"/>
-            <a:ext cx="3291840" cy="777240"/>
-          </a:xfrm>
-          <a:prstGeom prst="rect">
-            <a:avLst/>
-          </a:prstGeom>
-          <a:noFill/>
-          <a:ln/>
-        </p:spPr>
-        <p:txBody>
-          <a:bodyPr wrap="square" lIns="0" tIns="0" rIns="0" bIns="0" rtlCol="0" anchor="ctr"/>
-          <a:lstStyle/>
-          <a:p>
-            <a:pPr indent="0" marL="0">
-              <a:buNone/>
-            </a:pPr>
-            <a:r>
-              <a:rPr lang="en-US" sz="4800" b="1" dirty="0">
-                <a:solidFill>
-                  <a:srgbClr val="1FA99C"/>
-                </a:solidFill>
-                <a:latin typeface="Cambria" pitchFamily="34" charset="0"/>
-                <a:ea typeface="Cambria" pitchFamily="34" charset="-122"/>
-                <a:cs typeface="Cambria" pitchFamily="34" charset="-120"/>
-              </a:rPr>
-              <a:t>−25%</a:t>
-            </a:r>
-            <a:endParaRPr lang="en-US" sz="4800" dirty="0"/>
-          </a:p>
-        </p:txBody>
-      </p:sp>
-      <p:sp>
-        <p:nvSpPr>
-          <p:cNvPr id="24" name="Text 19"/>
-          <p:cNvSpPr txBox="1"/>
-          <p:nvPr/>
-        </p:nvSpPr>
-        <p:spPr>
-          <a:xfrm>
-            <a:off x="5074920" y="3200400"/>
-            <a:ext cx="1371600" cy="201168"/>
-          </a:xfrm>
-          <a:prstGeom prst="rect">
-            <a:avLst/>
-          </a:prstGeom>
-          <a:noFill/>
-          <a:ln/>
-        </p:spPr>
-        <p:txBody>
-          <a:bodyPr wrap="square" lIns="0" tIns="0" rIns="0" bIns="0" rtlCol="0" anchor="ctr"/>
-          <a:lstStyle/>
-          <a:p>
-            <a:pPr indent="0" marL="0">
-              <a:buNone/>
-            </a:pPr>
-            <a:r>
-              <a:rPr lang="en-US" sz="950" dirty="0">
-                <a:solidFill>
-                  <a:srgbClr val="5E6778"/>
-                </a:solidFill>
-                <a:latin typeface="Calibri" pitchFamily="34" charset="0"/>
-                <a:ea typeface="Calibri" pitchFamily="34" charset="-122"/>
-                <a:cs typeface="Calibri" pitchFamily="34" charset="-120"/>
-              </a:rPr>
-              <a:t>Standard PCI</a:t>
-            </a:r>
-            <a:endParaRPr lang="en-US" sz="950" dirty="0"/>
-          </a:p>
-        </p:txBody>
-      </p:sp>
-      <p:sp>
-        <p:nvSpPr>
-          <p:cNvPr id="25" name="Shape 20"/>
-          <p:cNvSpPr/>
-          <p:nvPr/>
-        </p:nvSpPr>
-        <p:spPr>
-          <a:xfrm>
-            <a:off x="5074920" y="3410712"/>
-            <a:ext cx="3337560" cy="164592"/>
-          </a:xfrm>
-          <a:prstGeom prst="rect">
-            <a:avLst/>
-          </a:prstGeom>
-          <a:solidFill>
-            <a:srgbClr val="C7CCD6"/>
-          </a:solidFill>
-          <a:ln w="12700">
-            <a:solidFill>
-              <a:srgbClr val="C7CCD6"/>
-            </a:solidFill>
-            <a:prstDash val="solid"/>
-          </a:ln>
-        </p:spPr>
-      </p:sp>
-      <p:sp>
-        <p:nvSpPr>
-          <p:cNvPr id="26" name="Text 21"/>
-          <p:cNvSpPr txBox="1"/>
-          <p:nvPr/>
-        </p:nvSpPr>
-        <p:spPr>
-          <a:xfrm>
-            <a:off x="5074920" y="3630168"/>
-            <a:ext cx="1371600" cy="201168"/>
-          </a:xfrm>
-          <a:prstGeom prst="rect">
-            <a:avLst/>
-          </a:prstGeom>
-          <a:noFill/>
-          <a:ln/>
-        </p:spPr>
-        <p:txBody>
-          <a:bodyPr wrap="square" lIns="0" tIns="0" rIns="0" bIns="0" rtlCol="0" anchor="ctr"/>
-          <a:lstStyle/>
-          <a:p>
-            <a:pPr indent="0" marL="0">
-              <a:buNone/>
-            </a:pPr>
-            <a:r>
-              <a:rPr lang="en-US" sz="950" dirty="0">
-                <a:solidFill>
-                  <a:srgbClr val="5E6778"/>
-                </a:solidFill>
-                <a:latin typeface="Calibri" pitchFamily="34" charset="0"/>
-                <a:ea typeface="Calibri" pitchFamily="34" charset="-122"/>
-                <a:cs typeface="Calibri" pitchFamily="34" charset="-120"/>
-              </a:rPr>
-              <a:t>enVast + PCI</a:t>
-            </a:r>
-            <a:endParaRPr lang="en-US" sz="950" dirty="0"/>
-          </a:p>
-        </p:txBody>
-      </p:sp>
-      <p:sp>
-        <p:nvSpPr>
-          <p:cNvPr id="27" name="Shape 22"/>
-          <p:cNvSpPr/>
-          <p:nvPr/>
-        </p:nvSpPr>
-        <p:spPr>
-          <a:xfrm>
-            <a:off x="5074920" y="3840480"/>
-            <a:ext cx="2503170" cy="164592"/>
-          </a:xfrm>
-          <a:prstGeom prst="rect">
-            <a:avLst/>
-          </a:prstGeom>
-          <a:solidFill>
-            <a:srgbClr val="1FA99C"/>
-          </a:solidFill>
-          <a:ln w="12700">
-            <a:solidFill>
-              <a:srgbClr val="1FA99C"/>
-            </a:solidFill>
-            <a:prstDash val="solid"/>
-          </a:ln>
-        </p:spPr>
-      </p:sp>
-      <p:sp>
-        <p:nvSpPr>
-          <p:cNvPr id="28" name="Text 23"/>
-          <p:cNvSpPr txBox="1"/>
-          <p:nvPr/>
-        </p:nvSpPr>
-        <p:spPr>
-          <a:xfrm>
-            <a:off x="5074920" y="4041648"/>
-            <a:ext cx="3337560" cy="228600"/>
-          </a:xfrm>
-          <a:prstGeom prst="rect">
-            <a:avLst/>
-          </a:prstGeom>
-          <a:noFill/>
-          <a:ln/>
-        </p:spPr>
-        <p:txBody>
-          <a:bodyPr wrap="square" lIns="0" tIns="0" rIns="0" bIns="0" rtlCol="0" anchor="ctr"/>
-          <a:lstStyle/>
-          <a:p>
-            <a:pPr indent="0" marL="0">
-              <a:buNone/>
-            </a:pPr>
-            <a:r>
-              <a:rPr lang="en-US" sz="1050" i="1" dirty="0">
-                <a:solidFill>
-                  <a:srgbClr val="1B2230"/>
-                </a:solidFill>
-                <a:latin typeface="Calibri" pitchFamily="34" charset="0"/>
-                <a:ea typeface="Calibri" pitchFamily="34" charset="-122"/>
-                <a:cs typeface="Calibri" pitchFamily="34" charset="-120"/>
-              </a:rPr>
-              <a:t>Directionally consistent trend</a:t>
-            </a:r>
-            <a:endParaRPr lang="en-US" sz="1050" dirty="0"/>
-          </a:p>
-        </p:txBody>
-      </p:sp>
-      <p:sp>
-        <p:nvSpPr>
-          <p:cNvPr id="29" name="Text 24"/>
-          <p:cNvSpPr txBox="1"/>
-          <p:nvPr/>
-        </p:nvSpPr>
-        <p:spPr>
-          <a:xfrm>
-            <a:off x="4343400" y="2377440"/>
-            <a:ext cx="457200" cy="731520"/>
-          </a:xfrm>
-          <a:prstGeom prst="rect">
-            <a:avLst/>
-          </a:prstGeom>
-          <a:noFill/>
-          <a:ln/>
-        </p:spPr>
-        <p:txBody>
-          <a:bodyPr wrap="square" lIns="0" tIns="0" rIns="0" bIns="0" rtlCol="0" anchor="ctr"/>
-          <a:lstStyle/>
-          <a:p>
-            <a:pPr algn="ctr" indent="0" marL="0">
-              <a:buNone/>
-            </a:pPr>
-            <a:r>
-              <a:rPr lang="en-US" sz="3600" b="1" dirty="0">
-                <a:solidFill>
-                  <a:srgbClr val="5E6778"/>
-                </a:solidFill>
-                <a:latin typeface="Cambria" pitchFamily="34" charset="0"/>
-                <a:ea typeface="Cambria" pitchFamily="34" charset="-122"/>
-                <a:cs typeface="Cambria" pitchFamily="34" charset="-120"/>
-              </a:rPr>
-              <a:t>≈</a:t>
-            </a:r>
-            <a:endParaRPr lang="en-US" sz="3600" dirty="0"/>
-          </a:p>
-        </p:txBody>
-      </p:sp>
     </p:spTree>
   </p:cSld>
   <p:clrMapOvr>
@@ -9394,7 +10796,7 @@
                 <a:ea typeface="Calibri" pitchFamily="34" charset="-122"/>
                 <a:cs typeface="Calibri" pitchFamily="34" charset="-120"/>
               </a:rPr>
-              <a:t>08 / 11</a:t>
+              <a:t>08 / 13</a:t>
             </a:r>
             <a:endParaRPr lang="en-US" sz="900" dirty="0"/>
           </a:p>
@@ -9472,7 +10874,7 @@
                 <a:ea typeface="Calibri" pitchFamily="34" charset="-122"/>
                 <a:cs typeface="Calibri" pitchFamily="34" charset="-120"/>
               </a:rPr>
-              <a:t>30-DAY SAFETY</a:t>
+              <a:t>SECONDARY ENDPOINT</a:t>
             </a:r>
             <a:endParaRPr lang="en-US" sz="1100" dirty="0"/>
           </a:p>
@@ -9511,50 +10913,34 @@
                 <a:ea typeface="Cambria" pitchFamily="34" charset="-122"/>
                 <a:cs typeface="Cambria" pitchFamily="34" charset="-120"/>
               </a:rPr>
-              <a:t>No strokes, no deaths in the enVast arm</a:t>
+              <a:t>Biomarker and MRI tell the same story</a:t>
             </a:r>
             <a:endParaRPr lang="en-US" sz="3000" dirty="0"/>
           </a:p>
         </p:txBody>
       </p:sp>
-      <p:graphicFrame>
-        <p:nvGraphicFramePr>
-          <p:cNvPr id="7" name="Chart 0" descr=""/>
-          <p:cNvGraphicFramePr/>
-          <p:nvPr/>
-        </p:nvGraphicFramePr>
-        <p:xfrm>
-          <a:off x="365760" y="1325880"/>
-          <a:ext cx="5120640" cy="3154680"/>
-        </p:xfrm>
-        <a:graphic xmlns:a="http://schemas.openxmlformats.org/drawingml/2006/main">
-          <a:graphicData uri="http://schemas.openxmlformats.org/drawingml/2006/chart">
-            <c:chart xmlns:c="http://schemas.openxmlformats.org/drawingml/2006/chart" r:id="rId2"/>
-          </a:graphicData>
-        </a:graphic>
-      </p:graphicFrame>
-      <p:sp>
-        <p:nvSpPr>
-          <p:cNvPr id="8" name="Shape 4"/>
+      <p:sp>
+        <p:nvSpPr>
+          <p:cNvPr id="7" name="Shape 4"/>
           <p:cNvSpPr/>
           <p:nvPr/>
         </p:nvSpPr>
         <p:spPr>
           <a:xfrm>
-            <a:off x="5852160" y="1417320"/>
-            <a:ext cx="2834640" cy="1417320"/>
+            <a:off x="457200" y="1417320"/>
+            <a:ext cx="3886200" cy="2926080"/>
           </a:xfrm>
           <a:prstGeom prst="roundRect">
             <a:avLst>
-              <a:gd name="adj" fmla="val 7742"/>
+              <a:gd name="adj" fmla="val 3750"/>
             </a:avLst>
           </a:prstGeom>
           <a:solidFill>
-            <a:srgbClr val="E3F5F3"/>
+            <a:srgbClr val="F6F7F9"/>
           </a:solidFill>
           <a:ln w="12700">
             <a:solidFill>
-              <a:srgbClr val="E3F5F3"/>
+              <a:srgbClr val="F6F7F9"/>
             </a:solidFill>
             <a:prstDash val="solid"/>
           </a:ln>
@@ -9562,14 +10948,374 @@
       </p:sp>
       <p:sp>
         <p:nvSpPr>
-          <p:cNvPr id="9" name="Shape 5"/>
+          <p:cNvPr id="8" name="Shape 5"/>
           <p:cNvSpPr/>
           <p:nvPr/>
         </p:nvSpPr>
         <p:spPr>
           <a:xfrm>
-            <a:off x="6035040" y="1600200"/>
-            <a:ext cx="457200" cy="457200"/>
+            <a:off x="731520" y="1645920"/>
+            <a:ext cx="566928" cy="566928"/>
+          </a:xfrm>
+          <a:prstGeom prst="ellipse">
+            <a:avLst/>
+          </a:prstGeom>
+          <a:solidFill>
+            <a:srgbClr val="E5383B"/>
+          </a:solidFill>
+          <a:ln w="12700">
+            <a:solidFill>
+              <a:srgbClr val="E5383B"/>
+            </a:solidFill>
+            <a:prstDash val="solid"/>
+          </a:ln>
+        </p:spPr>
+      </p:sp>
+      <p:pic>
+        <p:nvPicPr>
+          <p:cNvPr id="9" name="Image 1" descr="preencoded.png">    </p:cNvPr>
+          <p:cNvPicPr>
+            <a:picLocks noChangeAspect="1"/>
+          </p:cNvPicPr>
+          <p:nvPr/>
+        </p:nvPicPr>
+        <p:blipFill>
+          <a:blip r:embed="rId2"/>
+          <a:stretch>
+            <a:fillRect/>
+          </a:stretch>
+        </p:blipFill>
+        <p:spPr>
+          <a:xfrm>
+            <a:off x="878921" y="1793321"/>
+            <a:ext cx="272125" cy="272125"/>
+          </a:xfrm>
+          <a:prstGeom prst="rect">
+            <a:avLst/>
+          </a:prstGeom>
+        </p:spPr>
+      </p:pic>
+      <p:sp>
+        <p:nvSpPr>
+          <p:cNvPr id="10" name="Text 6"/>
+          <p:cNvSpPr txBox="1"/>
+          <p:nvPr/>
+        </p:nvSpPr>
+        <p:spPr>
+          <a:xfrm>
+            <a:off x="1463040" y="1645920"/>
+            <a:ext cx="2743200" cy="292608"/>
+          </a:xfrm>
+          <a:prstGeom prst="rect">
+            <a:avLst/>
+          </a:prstGeom>
+          <a:noFill/>
+          <a:ln/>
+        </p:spPr>
+        <p:txBody>
+          <a:bodyPr wrap="square" lIns="0" tIns="0" rIns="0" bIns="0" rtlCol="0" anchor="ctr"/>
+          <a:lstStyle/>
+          <a:p>
+            <a:pPr indent="0" marL="0">
+              <a:buNone/>
+            </a:pPr>
+            <a:r>
+              <a:rPr lang="en-US" sz="1600" b="1" dirty="0">
+                <a:solidFill>
+                  <a:srgbClr val="1B2230"/>
+                </a:solidFill>
+                <a:latin typeface="Cambria" pitchFamily="34" charset="0"/>
+                <a:ea typeface="Cambria" pitchFamily="34" charset="-122"/>
+                <a:cs typeface="Cambria" pitchFamily="34" charset="-120"/>
+              </a:rPr>
+              <a:t>CK-MB AUC</a:t>
+            </a:r>
+            <a:endParaRPr lang="en-US" sz="1600" dirty="0"/>
+          </a:p>
+        </p:txBody>
+      </p:sp>
+      <p:sp>
+        <p:nvSpPr>
+          <p:cNvPr id="11" name="Text 7"/>
+          <p:cNvSpPr txBox="1"/>
+          <p:nvPr/>
+        </p:nvSpPr>
+        <p:spPr>
+          <a:xfrm>
+            <a:off x="1463040" y="1938528"/>
+            <a:ext cx="2743200" cy="274320"/>
+          </a:xfrm>
+          <a:prstGeom prst="rect">
+            <a:avLst/>
+          </a:prstGeom>
+          <a:noFill/>
+          <a:ln/>
+        </p:spPr>
+        <p:txBody>
+          <a:bodyPr wrap="square" lIns="0" tIns="0" rIns="0" bIns="0" rtlCol="0" anchor="ctr"/>
+          <a:lstStyle/>
+          <a:p>
+            <a:pPr indent="0" marL="0">
+              <a:buNone/>
+            </a:pPr>
+            <a:r>
+              <a:rPr lang="en-US" sz="1150" dirty="0">
+                <a:solidFill>
+                  <a:srgbClr val="5E6778"/>
+                </a:solidFill>
+                <a:latin typeface="Calibri" pitchFamily="34" charset="0"/>
+                <a:ea typeface="Calibri" pitchFamily="34" charset="-122"/>
+                <a:cs typeface="Calibri" pitchFamily="34" charset="-120"/>
+              </a:rPr>
+              <a:t>Primary endpoint</a:t>
+            </a:r>
+            <a:endParaRPr lang="en-US" sz="1150" dirty="0"/>
+          </a:p>
+        </p:txBody>
+      </p:sp>
+      <p:sp>
+        <p:nvSpPr>
+          <p:cNvPr id="12" name="Text 8"/>
+          <p:cNvSpPr txBox="1"/>
+          <p:nvPr/>
+        </p:nvSpPr>
+        <p:spPr>
+          <a:xfrm>
+            <a:off x="731520" y="2377440"/>
+            <a:ext cx="3291840" cy="777240"/>
+          </a:xfrm>
+          <a:prstGeom prst="rect">
+            <a:avLst/>
+          </a:prstGeom>
+          <a:noFill/>
+          <a:ln/>
+        </p:spPr>
+        <p:txBody>
+          <a:bodyPr wrap="square" lIns="0" tIns="0" rIns="0" bIns="0" rtlCol="0" anchor="ctr"/>
+          <a:lstStyle/>
+          <a:p>
+            <a:pPr indent="0" marL="0">
+              <a:buNone/>
+            </a:pPr>
+            <a:r>
+              <a:rPr lang="en-US" sz="4800" b="1" dirty="0">
+                <a:solidFill>
+                  <a:srgbClr val="E5383B"/>
+                </a:solidFill>
+                <a:latin typeface="Cambria" pitchFamily="34" charset="0"/>
+                <a:ea typeface="Cambria" pitchFamily="34" charset="-122"/>
+                <a:cs typeface="Cambria" pitchFamily="34" charset="-120"/>
+              </a:rPr>
+              <a:t>−26%</a:t>
+            </a:r>
+            <a:endParaRPr lang="en-US" sz="4800" dirty="0"/>
+          </a:p>
+        </p:txBody>
+      </p:sp>
+      <p:sp>
+        <p:nvSpPr>
+          <p:cNvPr id="13" name="Text 9"/>
+          <p:cNvSpPr txBox="1"/>
+          <p:nvPr/>
+        </p:nvSpPr>
+        <p:spPr>
+          <a:xfrm>
+            <a:off x="731520" y="3200400"/>
+            <a:ext cx="1371600" cy="201168"/>
+          </a:xfrm>
+          <a:prstGeom prst="rect">
+            <a:avLst/>
+          </a:prstGeom>
+          <a:noFill/>
+          <a:ln/>
+        </p:spPr>
+        <p:txBody>
+          <a:bodyPr wrap="square" lIns="0" tIns="0" rIns="0" bIns="0" rtlCol="0" anchor="ctr"/>
+          <a:lstStyle/>
+          <a:p>
+            <a:pPr indent="0" marL="0">
+              <a:buNone/>
+            </a:pPr>
+            <a:r>
+              <a:rPr lang="en-US" sz="950" dirty="0">
+                <a:solidFill>
+                  <a:srgbClr val="5E6778"/>
+                </a:solidFill>
+                <a:latin typeface="Calibri" pitchFamily="34" charset="0"/>
+                <a:ea typeface="Calibri" pitchFamily="34" charset="-122"/>
+                <a:cs typeface="Calibri" pitchFamily="34" charset="-120"/>
+              </a:rPr>
+              <a:t>Standard PCI</a:t>
+            </a:r>
+            <a:endParaRPr lang="en-US" sz="950" dirty="0"/>
+          </a:p>
+        </p:txBody>
+      </p:sp>
+      <p:sp>
+        <p:nvSpPr>
+          <p:cNvPr id="14" name="Shape 10"/>
+          <p:cNvSpPr/>
+          <p:nvPr/>
+        </p:nvSpPr>
+        <p:spPr>
+          <a:xfrm>
+            <a:off x="731520" y="3410712"/>
+            <a:ext cx="3337560" cy="164592"/>
+          </a:xfrm>
+          <a:prstGeom prst="rect">
+            <a:avLst/>
+          </a:prstGeom>
+          <a:solidFill>
+            <a:srgbClr val="C7CCD6"/>
+          </a:solidFill>
+          <a:ln w="12700">
+            <a:solidFill>
+              <a:srgbClr val="C7CCD6"/>
+            </a:solidFill>
+            <a:prstDash val="solid"/>
+          </a:ln>
+        </p:spPr>
+      </p:sp>
+      <p:sp>
+        <p:nvSpPr>
+          <p:cNvPr id="15" name="Text 11"/>
+          <p:cNvSpPr txBox="1"/>
+          <p:nvPr/>
+        </p:nvSpPr>
+        <p:spPr>
+          <a:xfrm>
+            <a:off x="731520" y="3630168"/>
+            <a:ext cx="1371600" cy="201168"/>
+          </a:xfrm>
+          <a:prstGeom prst="rect">
+            <a:avLst/>
+          </a:prstGeom>
+          <a:noFill/>
+          <a:ln/>
+        </p:spPr>
+        <p:txBody>
+          <a:bodyPr wrap="square" lIns="0" tIns="0" rIns="0" bIns="0" rtlCol="0" anchor="ctr"/>
+          <a:lstStyle/>
+          <a:p>
+            <a:pPr indent="0" marL="0">
+              <a:buNone/>
+            </a:pPr>
+            <a:r>
+              <a:rPr lang="en-US" sz="950" dirty="0">
+                <a:solidFill>
+                  <a:srgbClr val="5E6778"/>
+                </a:solidFill>
+                <a:latin typeface="Calibri" pitchFamily="34" charset="0"/>
+                <a:ea typeface="Calibri" pitchFamily="34" charset="-122"/>
+                <a:cs typeface="Calibri" pitchFamily="34" charset="-120"/>
+              </a:rPr>
+              <a:t>enVast + PCI</a:t>
+            </a:r>
+            <a:endParaRPr lang="en-US" sz="950" dirty="0"/>
+          </a:p>
+        </p:txBody>
+      </p:sp>
+      <p:sp>
+        <p:nvSpPr>
+          <p:cNvPr id="16" name="Shape 12"/>
+          <p:cNvSpPr/>
+          <p:nvPr/>
+        </p:nvSpPr>
+        <p:spPr>
+          <a:xfrm>
+            <a:off x="731520" y="3840480"/>
+            <a:ext cx="2469794" cy="164592"/>
+          </a:xfrm>
+          <a:prstGeom prst="rect">
+            <a:avLst/>
+          </a:prstGeom>
+          <a:solidFill>
+            <a:srgbClr val="E5383B"/>
+          </a:solidFill>
+          <a:ln w="12700">
+            <a:solidFill>
+              <a:srgbClr val="E5383B"/>
+            </a:solidFill>
+            <a:prstDash val="solid"/>
+          </a:ln>
+        </p:spPr>
+      </p:sp>
+      <p:sp>
+        <p:nvSpPr>
+          <p:cNvPr id="17" name="Text 13"/>
+          <p:cNvSpPr txBox="1"/>
+          <p:nvPr/>
+        </p:nvSpPr>
+        <p:spPr>
+          <a:xfrm>
+            <a:off x="731520" y="4041648"/>
+            <a:ext cx="3337560" cy="228600"/>
+          </a:xfrm>
+          <a:prstGeom prst="rect">
+            <a:avLst/>
+          </a:prstGeom>
+          <a:noFill/>
+          <a:ln/>
+        </p:spPr>
+        <p:txBody>
+          <a:bodyPr wrap="square" lIns="0" tIns="0" rIns="0" bIns="0" rtlCol="0" anchor="ctr"/>
+          <a:lstStyle/>
+          <a:p>
+            <a:pPr indent="0" marL="0">
+              <a:buNone/>
+            </a:pPr>
+            <a:r>
+              <a:rPr lang="en-US" sz="1050" i="1" dirty="0">
+                <a:solidFill>
+                  <a:srgbClr val="1B2230"/>
+                </a:solidFill>
+                <a:latin typeface="Calibri" pitchFamily="34" charset="0"/>
+                <a:ea typeface="Calibri" pitchFamily="34" charset="-122"/>
+                <a:cs typeface="Calibri" pitchFamily="34" charset="-120"/>
+              </a:rPr>
+              <a:t>P = 0.001 · significant</a:t>
+            </a:r>
+            <a:endParaRPr lang="en-US" sz="1050" dirty="0"/>
+          </a:p>
+        </p:txBody>
+      </p:sp>
+      <p:sp>
+        <p:nvSpPr>
+          <p:cNvPr id="18" name="Shape 14"/>
+          <p:cNvSpPr/>
+          <p:nvPr/>
+        </p:nvSpPr>
+        <p:spPr>
+          <a:xfrm>
+            <a:off x="4800600" y="1417320"/>
+            <a:ext cx="3886200" cy="2926080"/>
+          </a:xfrm>
+          <a:prstGeom prst="roundRect">
+            <a:avLst>
+              <a:gd name="adj" fmla="val 3750"/>
+            </a:avLst>
+          </a:prstGeom>
+          <a:solidFill>
+            <a:srgbClr val="F6F7F9"/>
+          </a:solidFill>
+          <a:ln w="12700">
+            <a:solidFill>
+              <a:srgbClr val="F6F7F9"/>
+            </a:solidFill>
+            <a:prstDash val="solid"/>
+          </a:ln>
+        </p:spPr>
+      </p:sp>
+      <p:sp>
+        <p:nvSpPr>
+          <p:cNvPr id="19" name="Shape 15"/>
+          <p:cNvSpPr/>
+          <p:nvPr/>
+        </p:nvSpPr>
+        <p:spPr>
+          <a:xfrm>
+            <a:off x="5074920" y="1645920"/>
+            <a:ext cx="566928" cy="566928"/>
           </a:xfrm>
           <a:prstGeom prst="ellipse">
             <a:avLst/>
@@ -9587,7 +11333,7 @@
       </p:sp>
       <p:pic>
         <p:nvPicPr>
-          <p:cNvPr id="10" name="Image 1" descr="preencoded.png">    </p:cNvPr>
+          <p:cNvPr id="20" name="Image 2" descr="preencoded.png">    </p:cNvPr>
           <p:cNvPicPr>
             <a:picLocks noChangeAspect="1"/>
           </p:cNvPicPr>
@@ -9601,8 +11347,8 @@
         </p:blipFill>
         <p:spPr>
           <a:xfrm>
-            <a:off x="6153912" y="1719072"/>
-            <a:ext cx="219456" cy="219456"/>
+            <a:off x="5222321" y="1793321"/>
+            <a:ext cx="272125" cy="272125"/>
           </a:xfrm>
           <a:prstGeom prst="rect">
             <a:avLst/>
@@ -9611,14 +11357,14 @@
       </p:pic>
       <p:sp>
         <p:nvSpPr>
-          <p:cNvPr id="11" name="Text 6"/>
-          <p:cNvSpPr txBox="1"/>
-          <p:nvPr/>
-        </p:nvSpPr>
-        <p:spPr>
-          <a:xfrm>
-            <a:off x="6629400" y="1645920"/>
-            <a:ext cx="2011680" cy="365760"/>
+          <p:cNvPr id="21" name="Text 16"/>
+          <p:cNvSpPr txBox="1"/>
+          <p:nvPr/>
+        </p:nvSpPr>
+        <p:spPr>
+          <a:xfrm>
+            <a:off x="5806440" y="1645920"/>
+            <a:ext cx="2743200" cy="292608"/>
           </a:xfrm>
           <a:prstGeom prst="rect">
             <a:avLst/>
@@ -9634,7 +11380,7 @@
               <a:buNone/>
             </a:pPr>
             <a:r>
-              <a:rPr lang="en-US" sz="1400" b="1" dirty="0">
+              <a:rPr lang="en-US" sz="1600" b="1" dirty="0">
                 <a:solidFill>
                   <a:srgbClr val="1B2230"/>
                 </a:solidFill>
@@ -9642,31 +11388,31 @@
                 <a:ea typeface="Cambria" pitchFamily="34" charset="-122"/>
                 <a:cs typeface="Cambria" pitchFamily="34" charset="-120"/>
               </a:rPr>
-              <a:t>Why it matters</a:t>
-            </a:r>
-            <a:endParaRPr lang="en-US" sz="1400" dirty="0"/>
-          </a:p>
-        </p:txBody>
-      </p:sp>
-      <p:sp>
-        <p:nvSpPr>
-          <p:cNvPr id="12" name="Text 7"/>
-          <p:cNvSpPr txBox="1"/>
-          <p:nvPr/>
-        </p:nvSpPr>
-        <p:spPr>
-          <a:xfrm>
-            <a:off x="6035040" y="2148840"/>
-            <a:ext cx="2514600" cy="640080"/>
-          </a:xfrm>
-          <a:prstGeom prst="rect">
-            <a:avLst/>
-          </a:prstGeom>
-          <a:noFill/>
-          <a:ln/>
-        </p:spPr>
-        <p:txBody>
-          <a:bodyPr wrap="square" lIns="0" tIns="0" rIns="0" bIns="0" rtlCol="0" anchor="t"/>
+              <a:t>Cardiac MRI, day 3</a:t>
+            </a:r>
+            <a:endParaRPr lang="en-US" sz="1600" dirty="0"/>
+          </a:p>
+        </p:txBody>
+      </p:sp>
+      <p:sp>
+        <p:nvSpPr>
+          <p:cNvPr id="22" name="Text 17"/>
+          <p:cNvSpPr txBox="1"/>
+          <p:nvPr/>
+        </p:nvSpPr>
+        <p:spPr>
+          <a:xfrm>
+            <a:off x="5806440" y="1938528"/>
+            <a:ext cx="2743200" cy="274320"/>
+          </a:xfrm>
+          <a:prstGeom prst="rect">
+            <a:avLst/>
+          </a:prstGeom>
+          <a:noFill/>
+          <a:ln/>
+        </p:spPr>
+        <p:txBody>
+          <a:bodyPr wrap="square" lIns="0" tIns="0" rIns="0" bIns="0" rtlCol="0" anchor="ctr"/>
           <a:lstStyle/>
           <a:p>
             <a:pPr indent="0" marL="0">
@@ -9675,13 +11421,13 @@
             <a:r>
               <a:rPr lang="en-US" sz="1150" dirty="0">
                 <a:solidFill>
-                  <a:srgbClr val="1B2230"/>
-                </a:solidFill>
-                <a:latin typeface="Calibri" pitchFamily="34" charset="0"/>
-                <a:ea typeface="Calibri" pitchFamily="34" charset="-122"/>
-                <a:cs typeface="Calibri" pitchFamily="34" charset="-120"/>
-              </a:rPr>
-              <a:t>Aspiration in TOTAL carried a stroke signal. NATURE saw none with enVast.</a:t>
+                  <a:srgbClr val="5E6778"/>
+                </a:solidFill>
+                <a:latin typeface="Calibri" pitchFamily="34" charset="0"/>
+                <a:ea typeface="Calibri" pitchFamily="34" charset="-122"/>
+                <a:cs typeface="Calibri" pitchFamily="34" charset="-120"/>
+              </a:rPr>
+              <a:t>Infarct size, % LV mass</a:t>
             </a:r>
             <a:endParaRPr lang="en-US" sz="1150" dirty="0"/>
           </a:p>
@@ -9689,26 +11435,102 @@
       </p:sp>
       <p:sp>
         <p:nvSpPr>
-          <p:cNvPr id="13" name="Shape 8"/>
+          <p:cNvPr id="23" name="Text 18"/>
+          <p:cNvSpPr txBox="1"/>
+          <p:nvPr/>
+        </p:nvSpPr>
+        <p:spPr>
+          <a:xfrm>
+            <a:off x="5074920" y="2377440"/>
+            <a:ext cx="3291840" cy="777240"/>
+          </a:xfrm>
+          <a:prstGeom prst="rect">
+            <a:avLst/>
+          </a:prstGeom>
+          <a:noFill/>
+          <a:ln/>
+        </p:spPr>
+        <p:txBody>
+          <a:bodyPr wrap="square" lIns="0" tIns="0" rIns="0" bIns="0" rtlCol="0" anchor="ctr"/>
+          <a:lstStyle/>
+          <a:p>
+            <a:pPr indent="0" marL="0">
+              <a:buNone/>
+            </a:pPr>
+            <a:r>
+              <a:rPr lang="en-US" sz="4800" b="1" dirty="0">
+                <a:solidFill>
+                  <a:srgbClr val="1FA99C"/>
+                </a:solidFill>
+                <a:latin typeface="Cambria" pitchFamily="34" charset="0"/>
+                <a:ea typeface="Cambria" pitchFamily="34" charset="-122"/>
+                <a:cs typeface="Cambria" pitchFamily="34" charset="-120"/>
+              </a:rPr>
+              <a:t>−25%</a:t>
+            </a:r>
+            <a:endParaRPr lang="en-US" sz="4800" dirty="0"/>
+          </a:p>
+        </p:txBody>
+      </p:sp>
+      <p:sp>
+        <p:nvSpPr>
+          <p:cNvPr id="24" name="Text 19"/>
+          <p:cNvSpPr txBox="1"/>
+          <p:nvPr/>
+        </p:nvSpPr>
+        <p:spPr>
+          <a:xfrm>
+            <a:off x="5074920" y="3200400"/>
+            <a:ext cx="1371600" cy="201168"/>
+          </a:xfrm>
+          <a:prstGeom prst="rect">
+            <a:avLst/>
+          </a:prstGeom>
+          <a:noFill/>
+          <a:ln/>
+        </p:spPr>
+        <p:txBody>
+          <a:bodyPr wrap="square" lIns="0" tIns="0" rIns="0" bIns="0" rtlCol="0" anchor="ctr"/>
+          <a:lstStyle/>
+          <a:p>
+            <a:pPr indent="0" marL="0">
+              <a:buNone/>
+            </a:pPr>
+            <a:r>
+              <a:rPr lang="en-US" sz="950" dirty="0">
+                <a:solidFill>
+                  <a:srgbClr val="5E6778"/>
+                </a:solidFill>
+                <a:latin typeface="Calibri" pitchFamily="34" charset="0"/>
+                <a:ea typeface="Calibri" pitchFamily="34" charset="-122"/>
+                <a:cs typeface="Calibri" pitchFamily="34" charset="-120"/>
+              </a:rPr>
+              <a:t>Standard PCI</a:t>
+            </a:r>
+            <a:endParaRPr lang="en-US" sz="950" dirty="0"/>
+          </a:p>
+        </p:txBody>
+      </p:sp>
+      <p:sp>
+        <p:nvSpPr>
+          <p:cNvPr id="25" name="Shape 20"/>
           <p:cNvSpPr/>
           <p:nvPr/>
         </p:nvSpPr>
         <p:spPr>
           <a:xfrm>
-            <a:off x="5852160" y="3017520"/>
-            <a:ext cx="2834640" cy="1417320"/>
-          </a:xfrm>
-          <a:prstGeom prst="roundRect">
-            <a:avLst>
-              <a:gd name="adj" fmla="val 7742"/>
-            </a:avLst>
+            <a:off x="5074920" y="3410712"/>
+            <a:ext cx="3337560" cy="164592"/>
+          </a:xfrm>
+          <a:prstGeom prst="rect">
+            <a:avLst/>
           </a:prstGeom>
           <a:solidFill>
-            <a:srgbClr val="FDECEC"/>
+            <a:srgbClr val="C7CCD6"/>
           </a:solidFill>
           <a:ln w="12700">
             <a:solidFill>
-              <a:srgbClr val="FDECEC"/>
+              <a:srgbClr val="C7CCD6"/>
             </a:solidFill>
             <a:prstDash val="solid"/>
           </a:ln>
@@ -9716,63 +11538,78 @@
       </p:sp>
       <p:sp>
         <p:nvSpPr>
-          <p:cNvPr id="14" name="Shape 9"/>
+          <p:cNvPr id="26" name="Text 21"/>
+          <p:cNvSpPr txBox="1"/>
+          <p:nvPr/>
+        </p:nvSpPr>
+        <p:spPr>
+          <a:xfrm>
+            <a:off x="5074920" y="3630168"/>
+            <a:ext cx="1371600" cy="201168"/>
+          </a:xfrm>
+          <a:prstGeom prst="rect">
+            <a:avLst/>
+          </a:prstGeom>
+          <a:noFill/>
+          <a:ln/>
+        </p:spPr>
+        <p:txBody>
+          <a:bodyPr wrap="square" lIns="0" tIns="0" rIns="0" bIns="0" rtlCol="0" anchor="ctr"/>
+          <a:lstStyle/>
+          <a:p>
+            <a:pPr indent="0" marL="0">
+              <a:buNone/>
+            </a:pPr>
+            <a:r>
+              <a:rPr lang="en-US" sz="950" dirty="0">
+                <a:solidFill>
+                  <a:srgbClr val="5E6778"/>
+                </a:solidFill>
+                <a:latin typeface="Calibri" pitchFamily="34" charset="0"/>
+                <a:ea typeface="Calibri" pitchFamily="34" charset="-122"/>
+                <a:cs typeface="Calibri" pitchFamily="34" charset="-120"/>
+              </a:rPr>
+              <a:t>enVast + PCI</a:t>
+            </a:r>
+            <a:endParaRPr lang="en-US" sz="950" dirty="0"/>
+          </a:p>
+        </p:txBody>
+      </p:sp>
+      <p:sp>
+        <p:nvSpPr>
+          <p:cNvPr id="27" name="Shape 22"/>
           <p:cNvSpPr/>
           <p:nvPr/>
         </p:nvSpPr>
         <p:spPr>
           <a:xfrm>
-            <a:off x="6035040" y="3200400"/>
-            <a:ext cx="457200" cy="457200"/>
-          </a:xfrm>
-          <a:prstGeom prst="ellipse">
+            <a:off x="5074920" y="3840480"/>
+            <a:ext cx="2503170" cy="164592"/>
+          </a:xfrm>
+          <a:prstGeom prst="rect">
             <a:avLst/>
           </a:prstGeom>
           <a:solidFill>
-            <a:srgbClr val="E5383B"/>
+            <a:srgbClr val="1FA99C"/>
           </a:solidFill>
           <a:ln w="12700">
             <a:solidFill>
-              <a:srgbClr val="E5383B"/>
+              <a:srgbClr val="1FA99C"/>
             </a:solidFill>
             <a:prstDash val="solid"/>
           </a:ln>
         </p:spPr>
       </p:sp>
-      <p:pic>
-        <p:nvPicPr>
-          <p:cNvPr id="15" name="Image 2" descr="preencoded.png">    </p:cNvPr>
-          <p:cNvPicPr>
-            <a:picLocks noChangeAspect="1"/>
-          </p:cNvPicPr>
-          <p:nvPr/>
-        </p:nvPicPr>
-        <p:blipFill>
-          <a:blip r:embed="rId4"/>
-          <a:stretch>
-            <a:fillRect/>
-          </a:stretch>
-        </p:blipFill>
-        <p:spPr>
-          <a:xfrm>
-            <a:off x="6153912" y="3319272"/>
-            <a:ext cx="219456" cy="219456"/>
-          </a:xfrm>
-          <a:prstGeom prst="rect">
-            <a:avLst/>
-          </a:prstGeom>
-        </p:spPr>
-      </p:pic>
-      <p:sp>
-        <p:nvSpPr>
-          <p:cNvPr id="16" name="Text 10"/>
-          <p:cNvSpPr txBox="1"/>
-          <p:nvPr/>
-        </p:nvSpPr>
-        <p:spPr>
-          <a:xfrm>
-            <a:off x="6629400" y="3246120"/>
-            <a:ext cx="2011680" cy="365760"/>
+      <p:sp>
+        <p:nvSpPr>
+          <p:cNvPr id="28" name="Text 23"/>
+          <p:cNvSpPr txBox="1"/>
+          <p:nvPr/>
+        </p:nvSpPr>
+        <p:spPr>
+          <a:xfrm>
+            <a:off x="5074920" y="4041648"/>
+            <a:ext cx="3337560" cy="228600"/>
           </a:xfrm>
           <a:prstGeom prst="rect">
             <a:avLst/>
@@ -9788,56 +11625,56 @@
               <a:buNone/>
             </a:pPr>
             <a:r>
-              <a:rPr lang="en-US" sz="1400" b="1" dirty="0">
+              <a:rPr lang="en-US" sz="1050" i="1" dirty="0">
                 <a:solidFill>
                   <a:srgbClr val="1B2230"/>
+                </a:solidFill>
+                <a:latin typeface="Calibri" pitchFamily="34" charset="0"/>
+                <a:ea typeface="Calibri" pitchFamily="34" charset="-122"/>
+                <a:cs typeface="Calibri" pitchFamily="34" charset="-120"/>
+              </a:rPr>
+              <a:t>Directionally consistent trend</a:t>
+            </a:r>
+            <a:endParaRPr lang="en-US" sz="1050" dirty="0"/>
+          </a:p>
+        </p:txBody>
+      </p:sp>
+      <p:sp>
+        <p:nvSpPr>
+          <p:cNvPr id="29" name="Text 24"/>
+          <p:cNvSpPr txBox="1"/>
+          <p:nvPr/>
+        </p:nvSpPr>
+        <p:spPr>
+          <a:xfrm>
+            <a:off x="4343400" y="2377440"/>
+            <a:ext cx="457200" cy="731520"/>
+          </a:xfrm>
+          <a:prstGeom prst="rect">
+            <a:avLst/>
+          </a:prstGeom>
+          <a:noFill/>
+          <a:ln/>
+        </p:spPr>
+        <p:txBody>
+          <a:bodyPr wrap="square" lIns="0" tIns="0" rIns="0" bIns="0" rtlCol="0" anchor="ctr"/>
+          <a:lstStyle/>
+          <a:p>
+            <a:pPr algn="ctr" indent="0" marL="0">
+              <a:buNone/>
+            </a:pPr>
+            <a:r>
+              <a:rPr lang="en-US" sz="3600" b="1" dirty="0">
+                <a:solidFill>
+                  <a:srgbClr val="5E6778"/>
                 </a:solidFill>
                 <a:latin typeface="Cambria" pitchFamily="34" charset="0"/>
                 <a:ea typeface="Cambria" pitchFamily="34" charset="-122"/>
                 <a:cs typeface="Cambria" pitchFamily="34" charset="-120"/>
               </a:rPr>
-              <a:t>Read with care</a:t>
-            </a:r>
-            <a:endParaRPr lang="en-US" sz="1400" dirty="0"/>
-          </a:p>
-        </p:txBody>
-      </p:sp>
-      <p:sp>
-        <p:nvSpPr>
-          <p:cNvPr id="17" name="Text 11"/>
-          <p:cNvSpPr txBox="1"/>
-          <p:nvPr/>
-        </p:nvSpPr>
-        <p:spPr>
-          <a:xfrm>
-            <a:off x="6035040" y="3749040"/>
-            <a:ext cx="2514600" cy="640080"/>
-          </a:xfrm>
-          <a:prstGeom prst="rect">
-            <a:avLst/>
-          </a:prstGeom>
-          <a:noFill/>
-          <a:ln/>
-        </p:spPr>
-        <p:txBody>
-          <a:bodyPr wrap="square" lIns="0" tIns="0" rIns="0" bIns="0" rtlCol="0" anchor="t"/>
-          <a:lstStyle/>
-          <a:p>
-            <a:pPr indent="0" marL="0">
-              <a:buNone/>
-            </a:pPr>
-            <a:r>
-              <a:rPr lang="en-US" sz="1150" dirty="0">
-                <a:solidFill>
-                  <a:srgbClr val="1B2230"/>
-                </a:solidFill>
-                <a:latin typeface="Calibri" pitchFamily="34" charset="0"/>
-                <a:ea typeface="Calibri" pitchFamily="34" charset="-122"/>
-                <a:cs typeface="Calibri" pitchFamily="34" charset="-120"/>
-              </a:rPr>
-              <a:t>Only a handful of events; the trial was not powered for clinical outcomes.</a:t>
-            </a:r>
-            <a:endParaRPr lang="en-US" sz="1150" dirty="0"/>
+              <a:t>≈</a:t>
+            </a:r>
+            <a:endParaRPr lang="en-US" sz="3600" dirty="0"/>
           </a:p>
         </p:txBody>
       </p:sp>
@@ -9930,7 +11767,7 @@
                 <a:ea typeface="Calibri" pitchFamily="34" charset="-122"/>
                 <a:cs typeface="Calibri" pitchFamily="34" charset="-120"/>
               </a:rPr>
-              <a:t>09 / 11</a:t>
+              <a:t>09 / 13</a:t>
             </a:r>
             <a:endParaRPr lang="en-US" sz="900" dirty="0"/>
           </a:p>
@@ -10008,7 +11845,7 @@
                 <a:ea typeface="Calibri" pitchFamily="34" charset="-122"/>
                 <a:cs typeface="Calibri" pitchFamily="34" charset="-120"/>
               </a:rPr>
-              <a:t>CRITICAL APPRAISAL</a:t>
+              <a:t>30-DAY SAFETY</a:t>
             </a:r>
             <a:endParaRPr lang="en-US" sz="1100" dirty="0"/>
           </a:p>
@@ -10047,34 +11884,50 @@
                 <a:ea typeface="Cambria" pitchFamily="34" charset="-122"/>
                 <a:cs typeface="Cambria" pitchFamily="34" charset="-120"/>
               </a:rPr>
-              <a:t>Strong signal, early evidence</a:t>
+              <a:t>No strokes, no deaths in the enVast arm</a:t>
             </a:r>
             <a:endParaRPr lang="en-US" sz="3000" dirty="0"/>
           </a:p>
         </p:txBody>
       </p:sp>
-      <p:sp>
-        <p:nvSpPr>
-          <p:cNvPr id="7" name="Shape 4"/>
+      <p:graphicFrame>
+        <p:nvGraphicFramePr>
+          <p:cNvPr id="7" name="Chart 0" descr=""/>
+          <p:cNvGraphicFramePr/>
+          <p:nvPr/>
+        </p:nvGraphicFramePr>
+        <p:xfrm>
+          <a:off x="365760" y="1325880"/>
+          <a:ext cx="5120640" cy="3154680"/>
+        </p:xfrm>
+        <a:graphic xmlns:a="http://schemas.openxmlformats.org/drawingml/2006/main">
+          <a:graphicData uri="http://schemas.openxmlformats.org/drawingml/2006/chart">
+            <c:chart xmlns:c="http://schemas.openxmlformats.org/drawingml/2006/chart" r:id="rId2"/>
+          </a:graphicData>
+        </a:graphic>
+      </p:graphicFrame>
+      <p:sp>
+        <p:nvSpPr>
+          <p:cNvPr id="8" name="Shape 4"/>
           <p:cNvSpPr/>
           <p:nvPr/>
         </p:nvSpPr>
         <p:spPr>
           <a:xfrm>
-            <a:off x="457200" y="1371600"/>
-            <a:ext cx="4023360" cy="2514600"/>
+            <a:off x="5852160" y="1417320"/>
+            <a:ext cx="2834640" cy="1417320"/>
           </a:xfrm>
           <a:prstGeom prst="roundRect">
             <a:avLst>
-              <a:gd name="adj" fmla="val 4364"/>
+              <a:gd name="adj" fmla="val 7742"/>
             </a:avLst>
           </a:prstGeom>
           <a:solidFill>
-            <a:srgbClr val="F6F7F9"/>
+            <a:srgbClr val="E3F5F3"/>
           </a:solidFill>
           <a:ln w="12700">
             <a:solidFill>
-              <a:srgbClr val="F6F7F9"/>
+              <a:srgbClr val="E3F5F3"/>
             </a:solidFill>
             <a:prstDash val="solid"/>
           </a:ln>
@@ -10082,14 +11935,14 @@
       </p:sp>
       <p:sp>
         <p:nvSpPr>
-          <p:cNvPr id="8" name="Shape 5"/>
+          <p:cNvPr id="9" name="Shape 5"/>
           <p:cNvSpPr/>
           <p:nvPr/>
         </p:nvSpPr>
         <p:spPr>
           <a:xfrm>
-            <a:off x="731520" y="1572768"/>
-            <a:ext cx="502920" cy="502920"/>
+            <a:off x="6035040" y="1600200"/>
+            <a:ext cx="457200" cy="457200"/>
           </a:xfrm>
           <a:prstGeom prst="ellipse">
             <a:avLst/>
@@ -10107,22 +11960,22 @@
       </p:sp>
       <p:pic>
         <p:nvPicPr>
-          <p:cNvPr id="9" name="Image 1" descr="preencoded.png">    </p:cNvPr>
+          <p:cNvPr id="10" name="Image 1" descr="preencoded.png">    </p:cNvPr>
           <p:cNvPicPr>
             <a:picLocks noChangeAspect="1"/>
           </p:cNvPicPr>
           <p:nvPr/>
         </p:nvPicPr>
         <p:blipFill>
-          <a:blip r:embed="rId2"/>
+          <a:blip r:embed="rId3"/>
           <a:stretch>
             <a:fillRect/>
           </a:stretch>
         </p:blipFill>
         <p:spPr>
           <a:xfrm>
-            <a:off x="862279" y="1703527"/>
-            <a:ext cx="241402" cy="241402"/>
+            <a:off x="6153912" y="1719072"/>
+            <a:ext cx="219456" cy="219456"/>
           </a:xfrm>
           <a:prstGeom prst="rect">
             <a:avLst/>
@@ -10131,14 +11984,14 @@
       </p:pic>
       <p:sp>
         <p:nvSpPr>
-          <p:cNvPr id="10" name="Text 6"/>
-          <p:cNvSpPr txBox="1"/>
-          <p:nvPr/>
-        </p:nvSpPr>
-        <p:spPr>
-          <a:xfrm>
-            <a:off x="1371600" y="1572768"/>
-            <a:ext cx="2926080" cy="502920"/>
+          <p:cNvPr id="11" name="Text 6"/>
+          <p:cNvSpPr txBox="1"/>
+          <p:nvPr/>
+        </p:nvSpPr>
+        <p:spPr>
+          <a:xfrm>
+            <a:off x="6629400" y="1645920"/>
+            <a:ext cx="2011680" cy="365760"/>
           </a:xfrm>
           <a:prstGeom prst="rect">
             <a:avLst/>
@@ -10154,7 +12007,7 @@
               <a:buNone/>
             </a:pPr>
             <a:r>
-              <a:rPr lang="en-US" sz="1900" b="1" dirty="0">
+              <a:rPr lang="en-US" sz="1400" b="1" dirty="0">
                 <a:solidFill>
                   <a:srgbClr val="1B2230"/>
                 </a:solidFill>
@@ -10162,22 +12015,22 @@
                 <a:ea typeface="Cambria" pitchFamily="34" charset="-122"/>
                 <a:cs typeface="Cambria" pitchFamily="34" charset="-120"/>
               </a:rPr>
-              <a:t>Strengths</a:t>
-            </a:r>
-            <a:endParaRPr lang="en-US" sz="1900" dirty="0"/>
-          </a:p>
-        </p:txBody>
-      </p:sp>
-      <p:sp>
-        <p:nvSpPr>
-          <p:cNvPr id="11" name="Text 7"/>
-          <p:cNvSpPr txBox="1"/>
-          <p:nvPr/>
-        </p:nvSpPr>
-        <p:spPr>
-          <a:xfrm>
-            <a:off x="731520" y="2240280"/>
-            <a:ext cx="3566160" cy="1554480"/>
+              <a:t>Why it matters</a:t>
+            </a:r>
+            <a:endParaRPr lang="en-US" sz="1400" dirty="0"/>
+          </a:p>
+        </p:txBody>
+      </p:sp>
+      <p:sp>
+        <p:nvSpPr>
+          <p:cNvPr id="12" name="Text 7"/>
+          <p:cNvSpPr txBox="1"/>
+          <p:nvPr/>
+        </p:nvSpPr>
+        <p:spPr>
+          <a:xfrm>
+            <a:off x="6035040" y="2148840"/>
+            <a:ext cx="2514600" cy="640080"/>
           </a:xfrm>
           <a:prstGeom prst="rect">
             <a:avLst/>
@@ -10189,15 +12042,11 @@
           <a:bodyPr wrap="square" lIns="0" tIns="0" rIns="0" bIns="0" rtlCol="0" anchor="t"/>
           <a:lstStyle/>
           <a:p>
-            <a:pPr marL="342900" indent="-342900">
-              <a:spcAft>
-                <a:spcPts val="800"/>
-              </a:spcAft>
-              <a:buSzPct val="100000"/>
-              <a:buChar char="•"/>
-            </a:pPr>
-            <a:r>
-              <a:rPr lang="en-US" sz="1300" dirty="0">
+            <a:pPr indent="0" marL="0">
+              <a:buNone/>
+            </a:pPr>
+            <a:r>
+              <a:rPr lang="en-US" sz="1150" dirty="0">
                 <a:solidFill>
                   <a:srgbClr val="1B2230"/>
                 </a:solidFill>
@@ -10205,97 +12054,34 @@
                 <a:ea typeface="Calibri" pitchFamily="34" charset="-122"/>
                 <a:cs typeface="Calibri" pitchFamily="34" charset="-120"/>
               </a:rPr>
-              <a:t>Randomised, multicentre design</a:t>
-            </a:r>
-            <a:endParaRPr lang="en-US" sz="1300" dirty="0"/>
-          </a:p>
-          <a:p>
-            <a:pPr marL="342900" indent="-342900">
-              <a:spcAft>
-                <a:spcPts val="800"/>
-              </a:spcAft>
-              <a:buSzPct val="100000"/>
-              <a:buChar char="•"/>
-            </a:pPr>
-            <a:r>
-              <a:rPr lang="en-US" sz="1300" dirty="0">
-                <a:solidFill>
-                  <a:srgbClr val="1B2230"/>
-                </a:solidFill>
-                <a:latin typeface="Calibri" pitchFamily="34" charset="0"/>
-                <a:ea typeface="Calibri" pitchFamily="34" charset="-122"/>
-                <a:cs typeface="Calibri" pitchFamily="34" charset="-120"/>
-              </a:rPr>
-              <a:t>Population enriched for large thrombus — where benefit is most plausible</a:t>
-            </a:r>
-            <a:endParaRPr lang="en-US" sz="1300" dirty="0"/>
-          </a:p>
-          <a:p>
-            <a:pPr marL="342900" indent="-342900">
-              <a:spcAft>
-                <a:spcPts val="800"/>
-              </a:spcAft>
-              <a:buSzPct val="100000"/>
-              <a:buChar char="•"/>
-            </a:pPr>
-            <a:r>
-              <a:rPr lang="en-US" sz="1300" dirty="0">
-                <a:solidFill>
-                  <a:srgbClr val="1B2230"/>
-                </a:solidFill>
-                <a:latin typeface="Calibri" pitchFamily="34" charset="0"/>
-                <a:ea typeface="Calibri" pitchFamily="34" charset="-122"/>
-                <a:cs typeface="Calibri" pitchFamily="34" charset="-120"/>
-              </a:rPr>
-              <a:t>Biomarker and CMR results agree</a:t>
-            </a:r>
-            <a:endParaRPr lang="en-US" sz="1300" dirty="0"/>
-          </a:p>
-          <a:p>
-            <a:pPr marL="342900" indent="-342900">
-              <a:spcAft>
-                <a:spcPts val="800"/>
-              </a:spcAft>
-              <a:buSzPct val="100000"/>
-              <a:buChar char="•"/>
-            </a:pPr>
-            <a:r>
-              <a:rPr lang="en-US" sz="1300" dirty="0">
-                <a:solidFill>
-                  <a:srgbClr val="1B2230"/>
-                </a:solidFill>
-                <a:latin typeface="Calibri" pitchFamily="34" charset="0"/>
-                <a:ea typeface="Calibri" pitchFamily="34" charset="-122"/>
-                <a:cs typeface="Calibri" pitchFamily="34" charset="-120"/>
-              </a:rPr>
-              <a:t>No stroke or death signal at 30 days</a:t>
-            </a:r>
-            <a:endParaRPr lang="en-US" sz="1300" dirty="0"/>
-          </a:p>
-        </p:txBody>
-      </p:sp>
-      <p:sp>
-        <p:nvSpPr>
-          <p:cNvPr id="12" name="Shape 8"/>
+              <a:t>Aspiration in TOTAL carried a stroke signal. NATURE saw none with enVast.</a:t>
+            </a:r>
+            <a:endParaRPr lang="en-US" sz="1150" dirty="0"/>
+          </a:p>
+        </p:txBody>
+      </p:sp>
+      <p:sp>
+        <p:nvSpPr>
+          <p:cNvPr id="13" name="Shape 8"/>
           <p:cNvSpPr/>
           <p:nvPr/>
         </p:nvSpPr>
         <p:spPr>
           <a:xfrm>
-            <a:off x="4663440" y="1371600"/>
-            <a:ext cx="4023360" cy="2514600"/>
+            <a:off x="5852160" y="3017520"/>
+            <a:ext cx="2834640" cy="1417320"/>
           </a:xfrm>
           <a:prstGeom prst="roundRect">
             <a:avLst>
-              <a:gd name="adj" fmla="val 4364"/>
+              <a:gd name="adj" fmla="val 7742"/>
             </a:avLst>
           </a:prstGeom>
           <a:solidFill>
-            <a:srgbClr val="F6F7F9"/>
+            <a:srgbClr val="FDECEC"/>
           </a:solidFill>
           <a:ln w="12700">
             <a:solidFill>
-              <a:srgbClr val="F6F7F9"/>
+              <a:srgbClr val="FDECEC"/>
             </a:solidFill>
             <a:prstDash val="solid"/>
           </a:ln>
@@ -10303,14 +12089,14 @@
       </p:sp>
       <p:sp>
         <p:nvSpPr>
-          <p:cNvPr id="13" name="Shape 9"/>
+          <p:cNvPr id="14" name="Shape 9"/>
           <p:cNvSpPr/>
           <p:nvPr/>
         </p:nvSpPr>
         <p:spPr>
           <a:xfrm>
-            <a:off x="4937760" y="1572768"/>
-            <a:ext cx="502920" cy="502920"/>
+            <a:off x="6035040" y="3200400"/>
+            <a:ext cx="457200" cy="457200"/>
           </a:xfrm>
           <a:prstGeom prst="ellipse">
             <a:avLst/>
@@ -10328,22 +12114,22 @@
       </p:sp>
       <p:pic>
         <p:nvPicPr>
-          <p:cNvPr id="14" name="Image 2" descr="preencoded.png">    </p:cNvPr>
+          <p:cNvPr id="15" name="Image 2" descr="preencoded.png">    </p:cNvPr>
           <p:cNvPicPr>
             <a:picLocks noChangeAspect="1"/>
           </p:cNvPicPr>
           <p:nvPr/>
         </p:nvPicPr>
         <p:blipFill>
-          <a:blip r:embed="rId3"/>
+          <a:blip r:embed="rId4"/>
           <a:stretch>
             <a:fillRect/>
           </a:stretch>
         </p:blipFill>
         <p:spPr>
           <a:xfrm>
-            <a:off x="5068519" y="1703527"/>
-            <a:ext cx="241402" cy="241402"/>
+            <a:off x="6153912" y="3319272"/>
+            <a:ext cx="219456" cy="219456"/>
           </a:xfrm>
           <a:prstGeom prst="rect">
             <a:avLst/>
@@ -10352,14 +12138,14 @@
       </p:pic>
       <p:sp>
         <p:nvSpPr>
-          <p:cNvPr id="15" name="Text 10"/>
-          <p:cNvSpPr txBox="1"/>
-          <p:nvPr/>
-        </p:nvSpPr>
-        <p:spPr>
-          <a:xfrm>
-            <a:off x="5577840" y="1572768"/>
-            <a:ext cx="2926080" cy="502920"/>
+          <p:cNvPr id="16" name="Text 10"/>
+          <p:cNvSpPr txBox="1"/>
+          <p:nvPr/>
+        </p:nvSpPr>
+        <p:spPr>
+          <a:xfrm>
+            <a:off x="6629400" y="3246120"/>
+            <a:ext cx="2011680" cy="365760"/>
           </a:xfrm>
           <a:prstGeom prst="rect">
             <a:avLst/>
@@ -10375,7 +12161,7 @@
               <a:buNone/>
             </a:pPr>
             <a:r>
-              <a:rPr lang="en-US" sz="1900" b="1" dirty="0">
+              <a:rPr lang="en-US" sz="1400" b="1" dirty="0">
                 <a:solidFill>
                   <a:srgbClr val="1B2230"/>
                 </a:solidFill>
@@ -10383,22 +12169,22 @@
                 <a:ea typeface="Cambria" pitchFamily="34" charset="-122"/>
                 <a:cs typeface="Cambria" pitchFamily="34" charset="-120"/>
               </a:rPr>
-              <a:t>Limitations</a:t>
-            </a:r>
-            <a:endParaRPr lang="en-US" sz="1900" dirty="0"/>
-          </a:p>
-        </p:txBody>
-      </p:sp>
-      <p:sp>
-        <p:nvSpPr>
-          <p:cNvPr id="16" name="Text 11"/>
-          <p:cNvSpPr txBox="1"/>
-          <p:nvPr/>
-        </p:nvSpPr>
-        <p:spPr>
-          <a:xfrm>
-            <a:off x="4937760" y="2240280"/>
-            <a:ext cx="3566160" cy="1554480"/>
+              <a:t>Read with care</a:t>
+            </a:r>
+            <a:endParaRPr lang="en-US" sz="1400" dirty="0"/>
+          </a:p>
+        </p:txBody>
+      </p:sp>
+      <p:sp>
+        <p:nvSpPr>
+          <p:cNvPr id="17" name="Text 11"/>
+          <p:cNvSpPr txBox="1"/>
+          <p:nvPr/>
+        </p:nvSpPr>
+        <p:spPr>
+          <a:xfrm>
+            <a:off x="6035040" y="3749040"/>
+            <a:ext cx="2514600" cy="640080"/>
           </a:xfrm>
           <a:prstGeom prst="rect">
             <a:avLst/>
@@ -10410,15 +12196,11 @@
           <a:bodyPr wrap="square" lIns="0" tIns="0" rIns="0" bIns="0" rtlCol="0" anchor="t"/>
           <a:lstStyle/>
           <a:p>
-            <a:pPr marL="342900" indent="-342900">
-              <a:spcAft>
-                <a:spcPts val="800"/>
-              </a:spcAft>
-              <a:buSzPct val="100000"/>
-              <a:buChar char="•"/>
-            </a:pPr>
-            <a:r>
-              <a:rPr lang="en-US" sz="1300" dirty="0">
+            <a:pPr indent="0" marL="0">
+              <a:buNone/>
+            </a:pPr>
+            <a:r>
+              <a:rPr lang="en-US" sz="1150" dirty="0">
                 <a:solidFill>
                   <a:srgbClr val="1B2230"/>
                 </a:solidFill>
@@ -10426,152 +12208,9 @@
                 <a:ea typeface="Calibri" pitchFamily="34" charset="-122"/>
                 <a:cs typeface="Calibri" pitchFamily="34" charset="-120"/>
               </a:rPr>
-              <a:t>Modest sample (n = 154)</a:t>
-            </a:r>
-            <a:endParaRPr lang="en-US" sz="1300" dirty="0"/>
-          </a:p>
-          <a:p>
-            <a:pPr marL="342900" indent="-342900">
-              <a:spcAft>
-                <a:spcPts val="800"/>
-              </a:spcAft>
-              <a:buSzPct val="100000"/>
-              <a:buChar char="•"/>
-            </a:pPr>
-            <a:r>
-              <a:rPr lang="en-US" sz="1300" dirty="0">
-                <a:solidFill>
-                  <a:srgbClr val="1B2230"/>
-                </a:solidFill>
-                <a:latin typeface="Calibri" pitchFamily="34" charset="0"/>
-                <a:ea typeface="Calibri" pitchFamily="34" charset="-122"/>
-                <a:cs typeface="Calibri" pitchFamily="34" charset="-120"/>
-              </a:rPr>
-              <a:t>Surrogate primary endpoint, not hard outcomes</a:t>
-            </a:r>
-            <a:endParaRPr lang="en-US" sz="1300" dirty="0"/>
-          </a:p>
-          <a:p>
-            <a:pPr marL="342900" indent="-342900">
-              <a:spcAft>
-                <a:spcPts val="800"/>
-              </a:spcAft>
-              <a:buSzPct val="100000"/>
-              <a:buChar char="•"/>
-            </a:pPr>
-            <a:r>
-              <a:rPr lang="en-US" sz="1300" dirty="0">
-                <a:solidFill>
-                  <a:srgbClr val="1B2230"/>
-                </a:solidFill>
-                <a:latin typeface="Calibri" pitchFamily="34" charset="0"/>
-                <a:ea typeface="Calibri" pitchFamily="34" charset="-122"/>
-                <a:cs typeface="Calibri" pitchFamily="34" charset="-120"/>
-              </a:rPr>
-              <a:t>Operators cannot be blinded to device use</a:t>
-            </a:r>
-            <a:endParaRPr lang="en-US" sz="1300" dirty="0"/>
-          </a:p>
-          <a:p>
-            <a:pPr marL="342900" indent="-342900">
-              <a:spcAft>
-                <a:spcPts val="800"/>
-              </a:spcAft>
-              <a:buSzPct val="100000"/>
-              <a:buChar char="•"/>
-            </a:pPr>
-            <a:r>
-              <a:rPr lang="en-US" sz="1300" dirty="0">
-                <a:solidFill>
-                  <a:srgbClr val="1B2230"/>
-                </a:solidFill>
-                <a:latin typeface="Calibri" pitchFamily="34" charset="0"/>
-                <a:ea typeface="Calibri" pitchFamily="34" charset="-122"/>
-                <a:cs typeface="Calibri" pitchFamily="34" charset="-120"/>
-              </a:rPr>
-              <a:t>CMR effect a trend; industry-sponsored</a:t>
-            </a:r>
-            <a:endParaRPr lang="en-US" sz="1300" dirty="0"/>
-          </a:p>
-        </p:txBody>
-      </p:sp>
-      <p:sp>
-        <p:nvSpPr>
-          <p:cNvPr id="17" name="Shape 12"/>
-          <p:cNvSpPr/>
-          <p:nvPr/>
-        </p:nvSpPr>
-        <p:spPr>
-          <a:xfrm>
-            <a:off x="457200" y="4023360"/>
-            <a:ext cx="8229600" cy="457200"/>
-          </a:xfrm>
-          <a:prstGeom prst="roundRect">
-            <a:avLst>
-              <a:gd name="adj" fmla="val 50000"/>
-            </a:avLst>
-          </a:prstGeom>
-          <a:solidFill>
-            <a:srgbClr val="0E1117"/>
-          </a:solidFill>
-          <a:ln w="12700">
-            <a:solidFill>
-              <a:srgbClr val="0E1117"/>
-            </a:solidFill>
-            <a:prstDash val="solid"/>
-          </a:ln>
-        </p:spPr>
-      </p:sp>
-      <p:sp>
-        <p:nvSpPr>
-          <p:cNvPr id="18" name="Text 13"/>
-          <p:cNvSpPr txBox="1"/>
-          <p:nvPr/>
-        </p:nvSpPr>
-        <p:spPr>
-          <a:xfrm>
-            <a:off x="731520" y="4023360"/>
-            <a:ext cx="7772400" cy="457200"/>
-          </a:xfrm>
-          <a:prstGeom prst="rect">
-            <a:avLst/>
-          </a:prstGeom>
-          <a:noFill/>
-          <a:ln/>
-        </p:spPr>
-        <p:txBody>
-          <a:bodyPr wrap="square" lIns="0" tIns="0" rIns="0" bIns="0" rtlCol="0" anchor="ctr"/>
-          <a:lstStyle/>
-          <a:p>
-            <a:pPr indent="0" marL="0">
-              <a:buNone/>
-            </a:pPr>
-            <a:r>
-              <a:rPr lang="en-US" sz="1250" b="1" spc="300" kern="0" dirty="0">
-                <a:solidFill>
-                  <a:srgbClr val="F4B6BB"/>
-                </a:solidFill>
-                <a:latin typeface="Calibri" pitchFamily="34" charset="0"/>
-                <a:ea typeface="Calibri" pitchFamily="34" charset="-122"/>
-                <a:cs typeface="Calibri" pitchFamily="34" charset="-120"/>
-              </a:rPr>
-              <a:t>VERDICT   </a:t>
-            </a:r>
-            <a:pPr indent="0" marL="0">
-              <a:buNone/>
-            </a:pPr>
-            <a:r>
-              <a:rPr lang="en-US" sz="1250" dirty="0">
-                <a:solidFill>
-                  <a:srgbClr val="FFFFFF"/>
-                </a:solidFill>
-                <a:latin typeface="Calibri" pitchFamily="34" charset="0"/>
-                <a:ea typeface="Calibri" pitchFamily="34" charset="-122"/>
-                <a:cs typeface="Calibri" pitchFamily="34" charset="-120"/>
-              </a:rPr>
-              <a:t>Confirms the hypothesis on infarct size; generates the hypothesis for clinical outcomes.</a:t>
-            </a:r>
-            <a:endParaRPr lang="en-US" sz="1250" dirty="0"/>
+              <a:t>Only a handful of events; the trial was not powered for clinical outcomes.</a:t>
+            </a:r>
+            <a:endParaRPr lang="en-US" sz="1150" dirty="0"/>
           </a:p>
         </p:txBody>
       </p:sp>

--- a/presentations/NATURE_Trial_2026.pptx
+++ b/presentations/NATURE_Trial_2026.pptx
@@ -3143,55 +3143,6 @@
           </a:p>
         </p:txBody>
       </p:sp>
-      <p:sp>
-        <p:nvSpPr>
-          <p:cNvPr id="7" name="Shape 5"/>
-          <p:cNvSpPr/>
-          <p:nvPr/>
-        </p:nvSpPr>
-        <p:spPr>
-          <a:xfrm>
-            <a:off x="6675120" y="2834640"/>
-            <a:ext cx="1645920" cy="1645920"/>
-          </a:xfrm>
-          <a:prstGeom prst="ellipse">
-            <a:avLst/>
-          </a:prstGeom>
-          <a:solidFill>
-            <a:srgbClr val="6E1631"/>
-          </a:solidFill>
-          <a:ln w="12700">
-            <a:solidFill>
-              <a:srgbClr val="6E1631"/>
-            </a:solidFill>
-            <a:prstDash val="solid"/>
-          </a:ln>
-        </p:spPr>
-      </p:sp>
-      <p:pic>
-        <p:nvPicPr>
-          <p:cNvPr id="8" name="Image 0" descr="preencoded.png">    </p:cNvPr>
-          <p:cNvPicPr>
-            <a:picLocks noChangeAspect="1"/>
-          </p:cNvPicPr>
-          <p:nvPr/>
-        </p:nvPicPr>
-        <p:blipFill>
-          <a:blip r:embed="rId1"/>
-          <a:stretch>
-            <a:fillRect/>
-          </a:stretch>
-        </p:blipFill>
-        <p:spPr>
-          <a:xfrm>
-            <a:off x="7086600" y="3246120"/>
-            <a:ext cx="822960" cy="822960"/>
-          </a:xfrm>
-          <a:prstGeom prst="rect">
-            <a:avLst/>
-          </a:prstGeom>
-        </p:spPr>
-      </p:pic>
     </p:spTree>
   </p:cSld>
   <p:clrMapOvr>
@@ -3271,8 +3222,8 @@
         </p:nvSpPr>
         <p:spPr>
           <a:xfrm>
-            <a:off x="457200" y="4709160"/>
-            <a:ext cx="5486400" cy="228600"/>
+            <a:off x="8229600" y="4709160"/>
+            <a:ext cx="457200" cy="228600"/>
           </a:xfrm>
           <a:prstGeom prst="rect">
             <a:avLst/>
@@ -3284,19 +3235,19 @@
           <a:bodyPr wrap="square" lIns="0" tIns="0" rIns="0" bIns="0" rtlCol="0" anchor="ctr"/>
           <a:lstStyle/>
           <a:p>
-            <a:pPr indent="0" marL="0">
-              <a:buNone/>
-            </a:pPr>
-            <a:r>
-              <a:rPr lang="en-US" sz="900" dirty="0">
-                <a:solidFill>
-                  <a:srgbClr val="6B7280"/>
+            <a:pPr algn="r" indent="0" marL="0">
+              <a:buNone/>
+            </a:pPr>
+            <a:r>
+              <a:rPr lang="en-US" sz="900" b="1" dirty="0">
+                <a:solidFill>
+                  <a:srgbClr val="8C1D40"/>
                 </a:solidFill>
                 <a:latin typeface="Calibri" pitchFamily="34" charset="0"/>
                 <a:ea typeface="Calibri" pitchFamily="34" charset="-122"/>
                 <a:cs typeface="Calibri" pitchFamily="34" charset="-120"/>
               </a:rPr>
-              <a:t>NATURE Trial · Journal Club · Cardiac Centre, BVH Bahawalpur</a:t>
+              <a:t>10</a:t>
             </a:r>
             <a:endParaRPr lang="en-US" sz="900" dirty="0"/>
           </a:p>
@@ -3304,14 +3255,14 @@
       </p:sp>
       <p:sp>
         <p:nvSpPr>
-          <p:cNvPr id="4" name="Text 2"/>
-          <p:cNvSpPr txBox="1"/>
-          <p:nvPr/>
-        </p:nvSpPr>
-        <p:spPr>
-          <a:xfrm>
-            <a:off x="8229600" y="4709160"/>
-            <a:ext cx="457200" cy="228600"/>
+          <p:cNvPr id="5" name="Text 2"/>
+          <p:cNvSpPr txBox="1"/>
+          <p:nvPr/>
+        </p:nvSpPr>
+        <p:spPr>
+          <a:xfrm>
+            <a:off x="457200" y="1234440"/>
+            <a:ext cx="5486400" cy="365760"/>
           </a:xfrm>
           <a:prstGeom prst="rect">
             <a:avLst/>
@@ -3323,135 +3274,96 @@
           <a:bodyPr wrap="square" lIns="0" tIns="0" rIns="0" bIns="0" rtlCol="0" anchor="ctr"/>
           <a:lstStyle/>
           <a:p>
+            <a:pPr indent="0" marL="0">
+              <a:buNone/>
+            </a:pPr>
+            <a:r>
+              <a:rPr lang="en-US" sz="1700" b="1" dirty="0">
+                <a:solidFill>
+                  <a:srgbClr val="1F2937"/>
+                </a:solidFill>
+                <a:latin typeface="Cambria" pitchFamily="34" charset="0"/>
+                <a:ea typeface="Cambria" pitchFamily="34" charset="-122"/>
+                <a:cs typeface="Cambria" pitchFamily="34" charset="-120"/>
+              </a:rPr>
+              <a:t>CK-MB AUC (primary)</a:t>
+            </a:r>
+            <a:endParaRPr lang="en-US" sz="1700" dirty="0"/>
+          </a:p>
+        </p:txBody>
+      </p:sp>
+      <p:sp>
+        <p:nvSpPr>
+          <p:cNvPr id="6" name="Text 3"/>
+          <p:cNvSpPr txBox="1"/>
+          <p:nvPr/>
+        </p:nvSpPr>
+        <p:spPr>
+          <a:xfrm>
+            <a:off x="6217920" y="1234440"/>
+            <a:ext cx="2468880" cy="365760"/>
+          </a:xfrm>
+          <a:prstGeom prst="rect">
+            <a:avLst/>
+          </a:prstGeom>
+          <a:noFill/>
+          <a:ln/>
+        </p:spPr>
+        <p:txBody>
+          <a:bodyPr wrap="square" lIns="0" tIns="0" rIns="0" bIns="0" rtlCol="0" anchor="ctr"/>
+          <a:lstStyle/>
+          <a:p>
             <a:pPr algn="r" indent="0" marL="0">
               <a:buNone/>
             </a:pPr>
             <a:r>
-              <a:rPr lang="en-US" sz="900" b="1" dirty="0">
+              <a:rPr lang="en-US" sz="2000" b="1" dirty="0">
                 <a:solidFill>
                   <a:srgbClr val="8C1D40"/>
+                </a:solidFill>
+                <a:latin typeface="Cambria" pitchFamily="34" charset="0"/>
+                <a:ea typeface="Cambria" pitchFamily="34" charset="-122"/>
+                <a:cs typeface="Cambria" pitchFamily="34" charset="-120"/>
+              </a:rPr>
+              <a:t>26% smaller</a:t>
+            </a:r>
+            <a:endParaRPr lang="en-US" sz="2000" dirty="0"/>
+          </a:p>
+        </p:txBody>
+      </p:sp>
+      <p:sp>
+        <p:nvSpPr>
+          <p:cNvPr id="7" name="Text 4"/>
+          <p:cNvSpPr txBox="1"/>
+          <p:nvPr/>
+        </p:nvSpPr>
+        <p:spPr>
+          <a:xfrm>
+            <a:off x="457200" y="1691640"/>
+            <a:ext cx="1280160" cy="274320"/>
+          </a:xfrm>
+          <a:prstGeom prst="rect">
+            <a:avLst/>
+          </a:prstGeom>
+          <a:noFill/>
+          <a:ln/>
+        </p:spPr>
+        <p:txBody>
+          <a:bodyPr wrap="square" lIns="0" tIns="0" rIns="0" bIns="0" rtlCol="0" anchor="ctr"/>
+          <a:lstStyle/>
+          <a:p>
+            <a:pPr indent="0" marL="0">
+              <a:buNone/>
+            </a:pPr>
+            <a:r>
+              <a:rPr lang="en-US" sz="1100" dirty="0">
+                <a:solidFill>
+                  <a:srgbClr val="6B7280"/>
                 </a:solidFill>
                 <a:latin typeface="Calibri" pitchFamily="34" charset="0"/>
                 <a:ea typeface="Calibri" pitchFamily="34" charset="-122"/>
                 <a:cs typeface="Calibri" pitchFamily="34" charset="-120"/>
               </a:rPr>
-              <a:t>10</a:t>
-            </a:r>
-            <a:endParaRPr lang="en-US" sz="900" dirty="0"/>
-          </a:p>
-        </p:txBody>
-      </p:sp>
-      <p:sp>
-        <p:nvSpPr>
-          <p:cNvPr id="6" name="Text 3"/>
-          <p:cNvSpPr txBox="1"/>
-          <p:nvPr/>
-        </p:nvSpPr>
-        <p:spPr>
-          <a:xfrm>
-            <a:off x="457200" y="1234440"/>
-            <a:ext cx="5486400" cy="365760"/>
-          </a:xfrm>
-          <a:prstGeom prst="rect">
-            <a:avLst/>
-          </a:prstGeom>
-          <a:noFill/>
-          <a:ln/>
-        </p:spPr>
-        <p:txBody>
-          <a:bodyPr wrap="square" lIns="0" tIns="0" rIns="0" bIns="0" rtlCol="0" anchor="ctr"/>
-          <a:lstStyle/>
-          <a:p>
-            <a:pPr indent="0" marL="0">
-              <a:buNone/>
-            </a:pPr>
-            <a:r>
-              <a:rPr lang="en-US" sz="1700" b="1" dirty="0">
-                <a:solidFill>
-                  <a:srgbClr val="1F2937"/>
-                </a:solidFill>
-                <a:latin typeface="Cambria" pitchFamily="34" charset="0"/>
-                <a:ea typeface="Cambria" pitchFamily="34" charset="-122"/>
-                <a:cs typeface="Cambria" pitchFamily="34" charset="-120"/>
-              </a:rPr>
-              <a:t>CK-MB AUC (primary)</a:t>
-            </a:r>
-            <a:endParaRPr lang="en-US" sz="1700" dirty="0"/>
-          </a:p>
-        </p:txBody>
-      </p:sp>
-      <p:sp>
-        <p:nvSpPr>
-          <p:cNvPr id="7" name="Text 4"/>
-          <p:cNvSpPr txBox="1"/>
-          <p:nvPr/>
-        </p:nvSpPr>
-        <p:spPr>
-          <a:xfrm>
-            <a:off x="6217920" y="1234440"/>
-            <a:ext cx="2468880" cy="365760"/>
-          </a:xfrm>
-          <a:prstGeom prst="rect">
-            <a:avLst/>
-          </a:prstGeom>
-          <a:noFill/>
-          <a:ln/>
-        </p:spPr>
-        <p:txBody>
-          <a:bodyPr wrap="square" lIns="0" tIns="0" rIns="0" bIns="0" rtlCol="0" anchor="ctr"/>
-          <a:lstStyle/>
-          <a:p>
-            <a:pPr algn="r" indent="0" marL="0">
-              <a:buNone/>
-            </a:pPr>
-            <a:r>
-              <a:rPr lang="en-US" sz="2000" b="1" dirty="0">
-                <a:solidFill>
-                  <a:srgbClr val="8C1D40"/>
-                </a:solidFill>
-                <a:latin typeface="Cambria" pitchFamily="34" charset="0"/>
-                <a:ea typeface="Cambria" pitchFamily="34" charset="-122"/>
-                <a:cs typeface="Cambria" pitchFamily="34" charset="-120"/>
-              </a:rPr>
-              <a:t>26% smaller</a:t>
-            </a:r>
-            <a:endParaRPr lang="en-US" sz="2000" dirty="0"/>
-          </a:p>
-        </p:txBody>
-      </p:sp>
-      <p:sp>
-        <p:nvSpPr>
-          <p:cNvPr id="8" name="Text 5"/>
-          <p:cNvSpPr txBox="1"/>
-          <p:nvPr/>
-        </p:nvSpPr>
-        <p:spPr>
-          <a:xfrm>
-            <a:off x="457200" y="1691640"/>
-            <a:ext cx="1280160" cy="274320"/>
-          </a:xfrm>
-          <a:prstGeom prst="rect">
-            <a:avLst/>
-          </a:prstGeom>
-          <a:noFill/>
-          <a:ln/>
-        </p:spPr>
-        <p:txBody>
-          <a:bodyPr wrap="square" lIns="0" tIns="0" rIns="0" bIns="0" rtlCol="0" anchor="ctr"/>
-          <a:lstStyle/>
-          <a:p>
-            <a:pPr indent="0" marL="0">
-              <a:buNone/>
-            </a:pPr>
-            <a:r>
-              <a:rPr lang="en-US" sz="1100" dirty="0">
-                <a:solidFill>
-                  <a:srgbClr val="6B7280"/>
-                </a:solidFill>
-                <a:latin typeface="Calibri" pitchFamily="34" charset="0"/>
-                <a:ea typeface="Calibri" pitchFamily="34" charset="-122"/>
-                <a:cs typeface="Calibri" pitchFamily="34" charset="-120"/>
-              </a:rPr>
               <a:t>Standard PCI</a:t>
             </a:r>
             <a:endParaRPr lang="en-US" sz="1100" dirty="0"/>
@@ -3460,7 +3372,7 @@
       </p:sp>
       <p:sp>
         <p:nvSpPr>
-          <p:cNvPr id="9" name="Shape 6"/>
+          <p:cNvPr id="8" name="Shape 5"/>
           <p:cNvSpPr/>
           <p:nvPr/>
         </p:nvSpPr>
@@ -3485,7 +3397,7 @@
       </p:sp>
       <p:sp>
         <p:nvSpPr>
-          <p:cNvPr id="10" name="Text 7"/>
+          <p:cNvPr id="9" name="Text 6"/>
           <p:cNvSpPr txBox="1"/>
           <p:nvPr/>
         </p:nvSpPr>
@@ -3524,7 +3436,7 @@
       </p:sp>
       <p:sp>
         <p:nvSpPr>
-          <p:cNvPr id="11" name="Shape 8"/>
+          <p:cNvPr id="10" name="Shape 7"/>
           <p:cNvSpPr/>
           <p:nvPr/>
         </p:nvSpPr>
@@ -3549,7 +3461,7 @@
       </p:sp>
       <p:sp>
         <p:nvSpPr>
-          <p:cNvPr id="12" name="Text 9"/>
+          <p:cNvPr id="11" name="Text 8"/>
           <p:cNvSpPr txBox="1"/>
           <p:nvPr/>
         </p:nvSpPr>
@@ -3588,7 +3500,7 @@
       </p:sp>
       <p:sp>
         <p:nvSpPr>
-          <p:cNvPr id="13" name="Text 10"/>
+          <p:cNvPr id="12" name="Text 9"/>
           <p:cNvSpPr txBox="1"/>
           <p:nvPr/>
         </p:nvSpPr>
@@ -3627,7 +3539,7 @@
       </p:sp>
       <p:sp>
         <p:nvSpPr>
-          <p:cNvPr id="14" name="Text 11"/>
+          <p:cNvPr id="13" name="Text 10"/>
           <p:cNvSpPr txBox="1"/>
           <p:nvPr/>
         </p:nvSpPr>
@@ -3666,7 +3578,7 @@
       </p:sp>
       <p:sp>
         <p:nvSpPr>
-          <p:cNvPr id="15" name="Text 12"/>
+          <p:cNvPr id="14" name="Text 11"/>
           <p:cNvSpPr txBox="1"/>
           <p:nvPr/>
         </p:nvSpPr>
@@ -3705,7 +3617,7 @@
       </p:sp>
       <p:sp>
         <p:nvSpPr>
-          <p:cNvPr id="16" name="Shape 13"/>
+          <p:cNvPr id="15" name="Shape 12"/>
           <p:cNvSpPr/>
           <p:nvPr/>
         </p:nvSpPr>
@@ -3730,7 +3642,7 @@
       </p:sp>
       <p:sp>
         <p:nvSpPr>
-          <p:cNvPr id="17" name="Text 14"/>
+          <p:cNvPr id="16" name="Text 13"/>
           <p:cNvSpPr txBox="1"/>
           <p:nvPr/>
         </p:nvSpPr>
@@ -3769,7 +3681,7 @@
       </p:sp>
       <p:sp>
         <p:nvSpPr>
-          <p:cNvPr id="18" name="Shape 15"/>
+          <p:cNvPr id="17" name="Shape 14"/>
           <p:cNvSpPr/>
           <p:nvPr/>
         </p:nvSpPr>
@@ -3794,7 +3706,7 @@
       </p:sp>
       <p:sp>
         <p:nvSpPr>
-          <p:cNvPr id="19" name="Text 16"/>
+          <p:cNvPr id="18" name="Text 15"/>
           <p:cNvSpPr txBox="1"/>
           <p:nvPr/>
         </p:nvSpPr>
@@ -3833,7 +3745,7 @@
       </p:sp>
       <p:sp>
         <p:nvSpPr>
-          <p:cNvPr id="20" name="Text 17"/>
+          <p:cNvPr id="19" name="Text 16"/>
           <p:cNvSpPr txBox="1"/>
           <p:nvPr/>
         </p:nvSpPr>
@@ -3949,8 +3861,8 @@
         </p:nvSpPr>
         <p:spPr>
           <a:xfrm>
-            <a:off x="457200" y="4709160"/>
-            <a:ext cx="5486400" cy="228600"/>
+            <a:off x="8229600" y="4709160"/>
+            <a:ext cx="457200" cy="228600"/>
           </a:xfrm>
           <a:prstGeom prst="rect">
             <a:avLst/>
@@ -3962,57 +3874,18 @@
           <a:bodyPr wrap="square" lIns="0" tIns="0" rIns="0" bIns="0" rtlCol="0" anchor="ctr"/>
           <a:lstStyle/>
           <a:p>
-            <a:pPr indent="0" marL="0">
-              <a:buNone/>
-            </a:pPr>
-            <a:r>
-              <a:rPr lang="en-US" sz="900" dirty="0">
-                <a:solidFill>
-                  <a:srgbClr val="6B7280"/>
+            <a:pPr algn="r" indent="0" marL="0">
+              <a:buNone/>
+            </a:pPr>
+            <a:r>
+              <a:rPr lang="en-US" sz="900" b="1" dirty="0">
+                <a:solidFill>
+                  <a:srgbClr val="8C1D40"/>
                 </a:solidFill>
                 <a:latin typeface="Calibri" pitchFamily="34" charset="0"/>
                 <a:ea typeface="Calibri" pitchFamily="34" charset="-122"/>
                 <a:cs typeface="Calibri" pitchFamily="34" charset="-120"/>
               </a:rPr>
-              <a:t>NATURE Trial · Journal Club · Cardiac Centre, BVH Bahawalpur</a:t>
-            </a:r>
-            <a:endParaRPr lang="en-US" sz="900" dirty="0"/>
-          </a:p>
-        </p:txBody>
-      </p:sp>
-      <p:sp>
-        <p:nvSpPr>
-          <p:cNvPr id="4" name="Text 2"/>
-          <p:cNvSpPr txBox="1"/>
-          <p:nvPr/>
-        </p:nvSpPr>
-        <p:spPr>
-          <a:xfrm>
-            <a:off x="8229600" y="4709160"/>
-            <a:ext cx="457200" cy="228600"/>
-          </a:xfrm>
-          <a:prstGeom prst="rect">
-            <a:avLst/>
-          </a:prstGeom>
-          <a:noFill/>
-          <a:ln/>
-        </p:spPr>
-        <p:txBody>
-          <a:bodyPr wrap="square" lIns="0" tIns="0" rIns="0" bIns="0" rtlCol="0" anchor="ctr"/>
-          <a:lstStyle/>
-          <a:p>
-            <a:pPr algn="r" indent="0" marL="0">
-              <a:buNone/>
-            </a:pPr>
-            <a:r>
-              <a:rPr lang="en-US" sz="900" b="1" dirty="0">
-                <a:solidFill>
-                  <a:srgbClr val="8C1D40"/>
-                </a:solidFill>
-                <a:latin typeface="Calibri" pitchFamily="34" charset="0"/>
-                <a:ea typeface="Calibri" pitchFamily="34" charset="-122"/>
-                <a:cs typeface="Calibri" pitchFamily="34" charset="-120"/>
-              </a:rPr>
               <a:t>11</a:t>
             </a:r>
             <a:endParaRPr lang="en-US" sz="900" dirty="0"/>
@@ -4021,7 +3894,7 @@
       </p:sp>
       <p:graphicFrame>
         <p:nvGraphicFramePr>
-          <p:cNvPr id="6" name="Chart 0" descr=""/>
+          <p:cNvPr id="5" name="Chart 0" descr=""/>
           <p:cNvGraphicFramePr/>
           <p:nvPr/>
         </p:nvGraphicFramePr>
@@ -4037,7 +3910,7 @@
       </p:graphicFrame>
       <p:sp>
         <p:nvSpPr>
-          <p:cNvPr id="7" name="Shape 3"/>
+          <p:cNvPr id="6" name="Shape 2"/>
           <p:cNvSpPr/>
           <p:nvPr/>
         </p:nvSpPr>
@@ -4064,7 +3937,7 @@
       </p:sp>
       <p:sp>
         <p:nvSpPr>
-          <p:cNvPr id="8" name="Text 4"/>
+          <p:cNvPr id="7" name="Text 3"/>
           <p:cNvSpPr txBox="1"/>
           <p:nvPr/>
         </p:nvSpPr>
@@ -4103,7 +3976,7 @@
       </p:sp>
       <p:sp>
         <p:nvSpPr>
-          <p:cNvPr id="9" name="Text 5"/>
+          <p:cNvPr id="8" name="Text 4"/>
           <p:cNvSpPr txBox="1"/>
           <p:nvPr/>
         </p:nvSpPr>
@@ -4265,8 +4138,8 @@
         </p:nvSpPr>
         <p:spPr>
           <a:xfrm>
-            <a:off x="457200" y="4709160"/>
-            <a:ext cx="5486400" cy="228600"/>
+            <a:off x="8229600" y="4709160"/>
+            <a:ext cx="457200" cy="228600"/>
           </a:xfrm>
           <a:prstGeom prst="rect">
             <a:avLst/>
@@ -4278,19 +4151,19 @@
           <a:bodyPr wrap="square" lIns="0" tIns="0" rIns="0" bIns="0" rtlCol="0" anchor="ctr"/>
           <a:lstStyle/>
           <a:p>
-            <a:pPr indent="0" marL="0">
-              <a:buNone/>
-            </a:pPr>
-            <a:r>
-              <a:rPr lang="en-US" sz="900" dirty="0">
-                <a:solidFill>
-                  <a:srgbClr val="6B7280"/>
+            <a:pPr algn="r" indent="0" marL="0">
+              <a:buNone/>
+            </a:pPr>
+            <a:r>
+              <a:rPr lang="en-US" sz="900" b="1" dirty="0">
+                <a:solidFill>
+                  <a:srgbClr val="8C1D40"/>
                 </a:solidFill>
                 <a:latin typeface="Calibri" pitchFamily="34" charset="0"/>
                 <a:ea typeface="Calibri" pitchFamily="34" charset="-122"/>
                 <a:cs typeface="Calibri" pitchFamily="34" charset="-120"/>
               </a:rPr>
-              <a:t>NATURE Trial · Journal Club · Cardiac Centre, BVH Bahawalpur</a:t>
+              <a:t>12</a:t>
             </a:r>
             <a:endParaRPr lang="en-US" sz="900" dirty="0"/>
           </a:p>
@@ -4298,46 +4171,7 @@
       </p:sp>
       <p:sp>
         <p:nvSpPr>
-          <p:cNvPr id="4" name="Text 2"/>
-          <p:cNvSpPr txBox="1"/>
-          <p:nvPr/>
-        </p:nvSpPr>
-        <p:spPr>
-          <a:xfrm>
-            <a:off x="8229600" y="4709160"/>
-            <a:ext cx="457200" cy="228600"/>
-          </a:xfrm>
-          <a:prstGeom prst="rect">
-            <a:avLst/>
-          </a:prstGeom>
-          <a:noFill/>
-          <a:ln/>
-        </p:spPr>
-        <p:txBody>
-          <a:bodyPr wrap="square" lIns="0" tIns="0" rIns="0" bIns="0" rtlCol="0" anchor="ctr"/>
-          <a:lstStyle/>
-          <a:p>
-            <a:pPr algn="r" indent="0" marL="0">
-              <a:buNone/>
-            </a:pPr>
-            <a:r>
-              <a:rPr lang="en-US" sz="900" b="1" dirty="0">
-                <a:solidFill>
-                  <a:srgbClr val="8C1D40"/>
-                </a:solidFill>
-                <a:latin typeface="Calibri" pitchFamily="34" charset="0"/>
-                <a:ea typeface="Calibri" pitchFamily="34" charset="-122"/>
-                <a:cs typeface="Calibri" pitchFamily="34" charset="-120"/>
-              </a:rPr>
-              <a:t>12</a:t>
-            </a:r>
-            <a:endParaRPr lang="en-US" sz="900" dirty="0"/>
-          </a:p>
-        </p:txBody>
-      </p:sp>
-      <p:sp>
-        <p:nvSpPr>
-          <p:cNvPr id="6" name="Shape 3"/>
+          <p:cNvPr id="5" name="Shape 2"/>
           <p:cNvSpPr/>
           <p:nvPr/>
         </p:nvSpPr>
@@ -4364,7 +4198,7 @@
       </p:sp>
       <p:sp>
         <p:nvSpPr>
-          <p:cNvPr id="7" name="Shape 4"/>
+          <p:cNvPr id="6" name="Shape 3"/>
           <p:cNvSpPr/>
           <p:nvPr/>
         </p:nvSpPr>
@@ -4389,7 +4223,7 @@
       </p:sp>
       <p:pic>
         <p:nvPicPr>
-          <p:cNvPr id="8" name="Image 0" descr="preencoded.png">    </p:cNvPr>
+          <p:cNvPr id="7" name="Image 0" descr="preencoded.png">    </p:cNvPr>
           <p:cNvPicPr>
             <a:picLocks noChangeAspect="1"/>
           </p:cNvPicPr>
@@ -4413,7 +4247,7 @@
       </p:pic>
       <p:sp>
         <p:nvSpPr>
-          <p:cNvPr id="9" name="Text 5"/>
+          <p:cNvPr id="8" name="Text 4"/>
           <p:cNvSpPr txBox="1"/>
           <p:nvPr/>
         </p:nvSpPr>
@@ -4452,7 +4286,7 @@
       </p:sp>
       <p:sp>
         <p:nvSpPr>
-          <p:cNvPr id="10" name="Text 6"/>
+          <p:cNvPr id="9" name="Text 5"/>
           <p:cNvSpPr txBox="1"/>
           <p:nvPr/>
         </p:nvSpPr>
@@ -4491,7 +4325,7 @@
       </p:sp>
       <p:sp>
         <p:nvSpPr>
-          <p:cNvPr id="11" name="Shape 7"/>
+          <p:cNvPr id="10" name="Shape 6"/>
           <p:cNvSpPr/>
           <p:nvPr/>
         </p:nvSpPr>
@@ -4518,7 +4352,7 @@
       </p:sp>
       <p:sp>
         <p:nvSpPr>
-          <p:cNvPr id="12" name="Shape 8"/>
+          <p:cNvPr id="11" name="Shape 7"/>
           <p:cNvSpPr/>
           <p:nvPr/>
         </p:nvSpPr>
@@ -4543,7 +4377,7 @@
       </p:sp>
       <p:pic>
         <p:nvPicPr>
-          <p:cNvPr id="13" name="Image 1" descr="preencoded.png">    </p:cNvPr>
+          <p:cNvPr id="12" name="Image 1" descr="preencoded.png">    </p:cNvPr>
           <p:cNvPicPr>
             <a:picLocks noChangeAspect="1"/>
           </p:cNvPicPr>
@@ -4567,7 +4401,7 @@
       </p:pic>
       <p:sp>
         <p:nvSpPr>
-          <p:cNvPr id="14" name="Text 9"/>
+          <p:cNvPr id="13" name="Text 8"/>
           <p:cNvSpPr txBox="1"/>
           <p:nvPr/>
         </p:nvSpPr>
@@ -4606,7 +4440,7 @@
       </p:sp>
       <p:sp>
         <p:nvSpPr>
-          <p:cNvPr id="15" name="Text 10"/>
+          <p:cNvPr id="14" name="Text 9"/>
           <p:cNvSpPr txBox="1"/>
           <p:nvPr/>
         </p:nvSpPr>
@@ -4645,7 +4479,7 @@
       </p:sp>
       <p:sp>
         <p:nvSpPr>
-          <p:cNvPr id="16" name="Shape 11"/>
+          <p:cNvPr id="15" name="Shape 10"/>
           <p:cNvSpPr/>
           <p:nvPr/>
         </p:nvSpPr>
@@ -4672,7 +4506,7 @@
       </p:sp>
       <p:sp>
         <p:nvSpPr>
-          <p:cNvPr id="17" name="Shape 12"/>
+          <p:cNvPr id="16" name="Shape 11"/>
           <p:cNvSpPr/>
           <p:nvPr/>
         </p:nvSpPr>
@@ -4697,7 +4531,7 @@
       </p:sp>
       <p:pic>
         <p:nvPicPr>
-          <p:cNvPr id="18" name="Image 2" descr="preencoded.png">    </p:cNvPr>
+          <p:cNvPr id="17" name="Image 2" descr="preencoded.png">    </p:cNvPr>
           <p:cNvPicPr>
             <a:picLocks noChangeAspect="1"/>
           </p:cNvPicPr>
@@ -4721,7 +4555,7 @@
       </p:pic>
       <p:sp>
         <p:nvSpPr>
-          <p:cNvPr id="19" name="Text 13"/>
+          <p:cNvPr id="18" name="Text 12"/>
           <p:cNvSpPr txBox="1"/>
           <p:nvPr/>
         </p:nvSpPr>
@@ -4760,7 +4594,7 @@
       </p:sp>
       <p:sp>
         <p:nvSpPr>
-          <p:cNvPr id="20" name="Text 14"/>
+          <p:cNvPr id="19" name="Text 13"/>
           <p:cNvSpPr txBox="1"/>
           <p:nvPr/>
         </p:nvSpPr>
@@ -4799,7 +4633,7 @@
       </p:sp>
       <p:sp>
         <p:nvSpPr>
-          <p:cNvPr id="21" name="Shape 15"/>
+          <p:cNvPr id="20" name="Shape 14"/>
           <p:cNvSpPr/>
           <p:nvPr/>
         </p:nvSpPr>
@@ -4826,7 +4660,7 @@
       </p:sp>
       <p:sp>
         <p:nvSpPr>
-          <p:cNvPr id="22" name="Shape 16"/>
+          <p:cNvPr id="21" name="Shape 15"/>
           <p:cNvSpPr/>
           <p:nvPr/>
         </p:nvSpPr>
@@ -4851,7 +4685,7 @@
       </p:sp>
       <p:pic>
         <p:nvPicPr>
-          <p:cNvPr id="23" name="Image 3" descr="preencoded.png">    </p:cNvPr>
+          <p:cNvPr id="22" name="Image 3" descr="preencoded.png">    </p:cNvPr>
           <p:cNvPicPr>
             <a:picLocks noChangeAspect="1"/>
           </p:cNvPicPr>
@@ -4875,7 +4709,7 @@
       </p:pic>
       <p:sp>
         <p:nvSpPr>
-          <p:cNvPr id="24" name="Text 17"/>
+          <p:cNvPr id="23" name="Text 16"/>
           <p:cNvSpPr txBox="1"/>
           <p:nvPr/>
         </p:nvSpPr>
@@ -4914,7 +4748,7 @@
       </p:sp>
       <p:sp>
         <p:nvSpPr>
-          <p:cNvPr id="25" name="Text 18"/>
+          <p:cNvPr id="24" name="Text 17"/>
           <p:cNvSpPr txBox="1"/>
           <p:nvPr/>
         </p:nvSpPr>
@@ -5030,8 +4864,8 @@
         </p:nvSpPr>
         <p:spPr>
           <a:xfrm>
-            <a:off x="457200" y="4709160"/>
-            <a:ext cx="5486400" cy="228600"/>
+            <a:off x="8229600" y="4709160"/>
+            <a:ext cx="457200" cy="228600"/>
           </a:xfrm>
           <a:prstGeom prst="rect">
             <a:avLst/>
@@ -5043,19 +4877,19 @@
           <a:bodyPr wrap="square" lIns="0" tIns="0" rIns="0" bIns="0" rtlCol="0" anchor="ctr"/>
           <a:lstStyle/>
           <a:p>
-            <a:pPr indent="0" marL="0">
-              <a:buNone/>
-            </a:pPr>
-            <a:r>
-              <a:rPr lang="en-US" sz="900" dirty="0">
-                <a:solidFill>
-                  <a:srgbClr val="6B7280"/>
+            <a:pPr algn="r" indent="0" marL="0">
+              <a:buNone/>
+            </a:pPr>
+            <a:r>
+              <a:rPr lang="en-US" sz="900" b="1" dirty="0">
+                <a:solidFill>
+                  <a:srgbClr val="8C1D40"/>
                 </a:solidFill>
                 <a:latin typeface="Calibri" pitchFamily="34" charset="0"/>
                 <a:ea typeface="Calibri" pitchFamily="34" charset="-122"/>
                 <a:cs typeface="Calibri" pitchFamily="34" charset="-120"/>
               </a:rPr>
-              <a:t>NATURE Trial · Journal Club · Cardiac Centre, BVH Bahawalpur</a:t>
+              <a:t>13</a:t>
             </a:r>
             <a:endParaRPr lang="en-US" sz="900" dirty="0"/>
           </a:p>
@@ -5063,46 +4897,7 @@
       </p:sp>
       <p:sp>
         <p:nvSpPr>
-          <p:cNvPr id="4" name="Text 2"/>
-          <p:cNvSpPr txBox="1"/>
-          <p:nvPr/>
-        </p:nvSpPr>
-        <p:spPr>
-          <a:xfrm>
-            <a:off x="8229600" y="4709160"/>
-            <a:ext cx="457200" cy="228600"/>
-          </a:xfrm>
-          <a:prstGeom prst="rect">
-            <a:avLst/>
-          </a:prstGeom>
-          <a:noFill/>
-          <a:ln/>
-        </p:spPr>
-        <p:txBody>
-          <a:bodyPr wrap="square" lIns="0" tIns="0" rIns="0" bIns="0" rtlCol="0" anchor="ctr"/>
-          <a:lstStyle/>
-          <a:p>
-            <a:pPr algn="r" indent="0" marL="0">
-              <a:buNone/>
-            </a:pPr>
-            <a:r>
-              <a:rPr lang="en-US" sz="900" b="1" dirty="0">
-                <a:solidFill>
-                  <a:srgbClr val="8C1D40"/>
-                </a:solidFill>
-                <a:latin typeface="Calibri" pitchFamily="34" charset="0"/>
-                <a:ea typeface="Calibri" pitchFamily="34" charset="-122"/>
-                <a:cs typeface="Calibri" pitchFamily="34" charset="-120"/>
-              </a:rPr>
-              <a:t>13</a:t>
-            </a:r>
-            <a:endParaRPr lang="en-US" sz="900" dirty="0"/>
-          </a:p>
-        </p:txBody>
-      </p:sp>
-      <p:sp>
-        <p:nvSpPr>
-          <p:cNvPr id="6" name="Shape 3"/>
+          <p:cNvPr id="5" name="Shape 2"/>
           <p:cNvSpPr/>
           <p:nvPr/>
         </p:nvSpPr>
@@ -5129,7 +4924,7 @@
       </p:sp>
       <p:sp>
         <p:nvSpPr>
-          <p:cNvPr id="7" name="Shape 4"/>
+          <p:cNvPr id="6" name="Shape 3"/>
           <p:cNvSpPr/>
           <p:nvPr/>
         </p:nvSpPr>
@@ -5154,7 +4949,7 @@
       </p:sp>
       <p:sp>
         <p:nvSpPr>
-          <p:cNvPr id="8" name="Text 5"/>
+          <p:cNvPr id="7" name="Text 4"/>
           <p:cNvSpPr txBox="1"/>
           <p:nvPr/>
         </p:nvSpPr>
@@ -5193,7 +4988,7 @@
       </p:sp>
       <p:sp>
         <p:nvSpPr>
-          <p:cNvPr id="9" name="Text 6"/>
+          <p:cNvPr id="8" name="Text 5"/>
           <p:cNvSpPr txBox="1"/>
           <p:nvPr/>
         </p:nvSpPr>
@@ -5232,7 +5027,7 @@
       </p:sp>
       <p:sp>
         <p:nvSpPr>
-          <p:cNvPr id="10" name="Text 7"/>
+          <p:cNvPr id="9" name="Text 6"/>
           <p:cNvSpPr txBox="1"/>
           <p:nvPr/>
         </p:nvSpPr>
@@ -5271,7 +5066,7 @@
       </p:sp>
       <p:sp>
         <p:nvSpPr>
-          <p:cNvPr id="11" name="Shape 8"/>
+          <p:cNvPr id="10" name="Shape 7"/>
           <p:cNvSpPr/>
           <p:nvPr/>
         </p:nvSpPr>
@@ -5298,7 +5093,7 @@
       </p:sp>
       <p:sp>
         <p:nvSpPr>
-          <p:cNvPr id="12" name="Shape 9"/>
+          <p:cNvPr id="11" name="Shape 8"/>
           <p:cNvSpPr/>
           <p:nvPr/>
         </p:nvSpPr>
@@ -5323,7 +5118,7 @@
       </p:sp>
       <p:sp>
         <p:nvSpPr>
-          <p:cNvPr id="13" name="Text 10"/>
+          <p:cNvPr id="12" name="Text 9"/>
           <p:cNvSpPr txBox="1"/>
           <p:nvPr/>
         </p:nvSpPr>
@@ -5362,7 +5157,7 @@
       </p:sp>
       <p:sp>
         <p:nvSpPr>
-          <p:cNvPr id="14" name="Text 11"/>
+          <p:cNvPr id="13" name="Text 10"/>
           <p:cNvSpPr txBox="1"/>
           <p:nvPr/>
         </p:nvSpPr>
@@ -5401,7 +5196,7 @@
       </p:sp>
       <p:sp>
         <p:nvSpPr>
-          <p:cNvPr id="15" name="Text 12"/>
+          <p:cNvPr id="14" name="Text 11"/>
           <p:cNvSpPr txBox="1"/>
           <p:nvPr/>
         </p:nvSpPr>
@@ -5440,7 +5235,7 @@
       </p:sp>
       <p:sp>
         <p:nvSpPr>
-          <p:cNvPr id="16" name="Shape 13"/>
+          <p:cNvPr id="15" name="Shape 12"/>
           <p:cNvSpPr/>
           <p:nvPr/>
         </p:nvSpPr>
@@ -5467,7 +5262,7 @@
       </p:sp>
       <p:sp>
         <p:nvSpPr>
-          <p:cNvPr id="17" name="Shape 14"/>
+          <p:cNvPr id="16" name="Shape 13"/>
           <p:cNvSpPr/>
           <p:nvPr/>
         </p:nvSpPr>
@@ -5492,7 +5287,7 @@
       </p:sp>
       <p:sp>
         <p:nvSpPr>
-          <p:cNvPr id="18" name="Text 15"/>
+          <p:cNvPr id="17" name="Text 14"/>
           <p:cNvSpPr txBox="1"/>
           <p:nvPr/>
         </p:nvSpPr>
@@ -5531,7 +5326,7 @@
       </p:sp>
       <p:sp>
         <p:nvSpPr>
-          <p:cNvPr id="19" name="Text 16"/>
+          <p:cNvPr id="18" name="Text 15"/>
           <p:cNvSpPr txBox="1"/>
           <p:nvPr/>
         </p:nvSpPr>
@@ -5570,7 +5365,7 @@
       </p:sp>
       <p:sp>
         <p:nvSpPr>
-          <p:cNvPr id="20" name="Text 17"/>
+          <p:cNvPr id="19" name="Text 16"/>
           <p:cNvSpPr txBox="1"/>
           <p:nvPr/>
         </p:nvSpPr>
@@ -5609,7 +5404,7 @@
       </p:sp>
       <p:sp>
         <p:nvSpPr>
-          <p:cNvPr id="21" name="Shape 18"/>
+          <p:cNvPr id="20" name="Shape 17"/>
           <p:cNvSpPr/>
           <p:nvPr/>
         </p:nvSpPr>
@@ -5636,7 +5431,7 @@
       </p:sp>
       <p:sp>
         <p:nvSpPr>
-          <p:cNvPr id="22" name="Shape 19"/>
+          <p:cNvPr id="21" name="Shape 18"/>
           <p:cNvSpPr/>
           <p:nvPr/>
         </p:nvSpPr>
@@ -5661,7 +5456,7 @@
       </p:sp>
       <p:sp>
         <p:nvSpPr>
-          <p:cNvPr id="23" name="Text 20"/>
+          <p:cNvPr id="22" name="Text 19"/>
           <p:cNvSpPr txBox="1"/>
           <p:nvPr/>
         </p:nvSpPr>
@@ -5700,7 +5495,7 @@
       </p:sp>
       <p:sp>
         <p:nvSpPr>
-          <p:cNvPr id="24" name="Text 21"/>
+          <p:cNvPr id="23" name="Text 20"/>
           <p:cNvSpPr txBox="1"/>
           <p:nvPr/>
         </p:nvSpPr>
@@ -5739,7 +5534,7 @@
       </p:sp>
       <p:sp>
         <p:nvSpPr>
-          <p:cNvPr id="25" name="Text 22"/>
+          <p:cNvPr id="24" name="Text 21"/>
           <p:cNvSpPr txBox="1"/>
           <p:nvPr/>
         </p:nvSpPr>
@@ -5855,8 +5650,8 @@
         </p:nvSpPr>
         <p:spPr>
           <a:xfrm>
-            <a:off x="457200" y="4709160"/>
-            <a:ext cx="5486400" cy="228600"/>
+            <a:off x="8229600" y="4709160"/>
+            <a:ext cx="457200" cy="228600"/>
           </a:xfrm>
           <a:prstGeom prst="rect">
             <a:avLst/>
@@ -5868,19 +5663,19 @@
           <a:bodyPr wrap="square" lIns="0" tIns="0" rIns="0" bIns="0" rtlCol="0" anchor="ctr"/>
           <a:lstStyle/>
           <a:p>
-            <a:pPr indent="0" marL="0">
-              <a:buNone/>
-            </a:pPr>
-            <a:r>
-              <a:rPr lang="en-US" sz="900" dirty="0">
-                <a:solidFill>
-                  <a:srgbClr val="6B7280"/>
+            <a:pPr algn="r" indent="0" marL="0">
+              <a:buNone/>
+            </a:pPr>
+            <a:r>
+              <a:rPr lang="en-US" sz="900" b="1" dirty="0">
+                <a:solidFill>
+                  <a:srgbClr val="8C1D40"/>
                 </a:solidFill>
                 <a:latin typeface="Calibri" pitchFamily="34" charset="0"/>
                 <a:ea typeface="Calibri" pitchFamily="34" charset="-122"/>
                 <a:cs typeface="Calibri" pitchFamily="34" charset="-120"/>
               </a:rPr>
-              <a:t>NATURE Trial · Journal Club · Cardiac Centre, BVH Bahawalpur</a:t>
+              <a:t>14</a:t>
             </a:r>
             <a:endParaRPr lang="en-US" sz="900" dirty="0"/>
           </a:p>
@@ -5888,46 +5683,7 @@
       </p:sp>
       <p:sp>
         <p:nvSpPr>
-          <p:cNvPr id="4" name="Text 2"/>
-          <p:cNvSpPr txBox="1"/>
-          <p:nvPr/>
-        </p:nvSpPr>
-        <p:spPr>
-          <a:xfrm>
-            <a:off x="8229600" y="4709160"/>
-            <a:ext cx="457200" cy="228600"/>
-          </a:xfrm>
-          <a:prstGeom prst="rect">
-            <a:avLst/>
-          </a:prstGeom>
-          <a:noFill/>
-          <a:ln/>
-        </p:spPr>
-        <p:txBody>
-          <a:bodyPr wrap="square" lIns="0" tIns="0" rIns="0" bIns="0" rtlCol="0" anchor="ctr"/>
-          <a:lstStyle/>
-          <a:p>
-            <a:pPr algn="r" indent="0" marL="0">
-              <a:buNone/>
-            </a:pPr>
-            <a:r>
-              <a:rPr lang="en-US" sz="900" b="1" dirty="0">
-                <a:solidFill>
-                  <a:srgbClr val="8C1D40"/>
-                </a:solidFill>
-                <a:latin typeface="Calibri" pitchFamily="34" charset="0"/>
-                <a:ea typeface="Calibri" pitchFamily="34" charset="-122"/>
-                <a:cs typeface="Calibri" pitchFamily="34" charset="-120"/>
-              </a:rPr>
-              <a:t>14</a:t>
-            </a:r>
-            <a:endParaRPr lang="en-US" sz="900" dirty="0"/>
-          </a:p>
-        </p:txBody>
-      </p:sp>
-      <p:sp>
-        <p:nvSpPr>
-          <p:cNvPr id="6" name="Shape 3"/>
+          <p:cNvPr id="5" name="Shape 2"/>
           <p:cNvSpPr/>
           <p:nvPr/>
         </p:nvSpPr>
@@ -5954,7 +5710,7 @@
       </p:sp>
       <p:sp>
         <p:nvSpPr>
-          <p:cNvPr id="7" name="Text 4"/>
+          <p:cNvPr id="6" name="Text 3"/>
           <p:cNvSpPr txBox="1"/>
           <p:nvPr/>
         </p:nvSpPr>
@@ -5993,7 +5749,7 @@
       </p:sp>
       <p:sp>
         <p:nvSpPr>
-          <p:cNvPr id="8" name="Text 5"/>
+          <p:cNvPr id="7" name="Text 4"/>
           <p:cNvSpPr txBox="1"/>
           <p:nvPr/>
         </p:nvSpPr>
@@ -6032,7 +5788,7 @@
       </p:sp>
       <p:sp>
         <p:nvSpPr>
-          <p:cNvPr id="9" name="Text 6"/>
+          <p:cNvPr id="8" name="Text 5"/>
           <p:cNvSpPr txBox="1"/>
           <p:nvPr/>
         </p:nvSpPr>
@@ -6071,7 +5827,7 @@
       </p:sp>
       <p:sp>
         <p:nvSpPr>
-          <p:cNvPr id="10" name="Text 7"/>
+          <p:cNvPr id="9" name="Text 6"/>
           <p:cNvSpPr txBox="1"/>
           <p:nvPr/>
         </p:nvSpPr>
@@ -6110,7 +5866,7 @@
       </p:sp>
       <p:sp>
         <p:nvSpPr>
-          <p:cNvPr id="11" name="Text 8"/>
+          <p:cNvPr id="10" name="Text 7"/>
           <p:cNvSpPr txBox="1"/>
           <p:nvPr/>
         </p:nvSpPr>
@@ -6226,8 +5982,8 @@
         </p:nvSpPr>
         <p:spPr>
           <a:xfrm>
-            <a:off x="457200" y="4709160"/>
-            <a:ext cx="5486400" cy="228600"/>
+            <a:off x="8229600" y="4709160"/>
+            <a:ext cx="457200" cy="228600"/>
           </a:xfrm>
           <a:prstGeom prst="rect">
             <a:avLst/>
@@ -6239,19 +5995,19 @@
           <a:bodyPr wrap="square" lIns="0" tIns="0" rIns="0" bIns="0" rtlCol="0" anchor="ctr"/>
           <a:lstStyle/>
           <a:p>
-            <a:pPr indent="0" marL="0">
-              <a:buNone/>
-            </a:pPr>
-            <a:r>
-              <a:rPr lang="en-US" sz="900" dirty="0">
-                <a:solidFill>
-                  <a:srgbClr val="6B7280"/>
+            <a:pPr algn="r" indent="0" marL="0">
+              <a:buNone/>
+            </a:pPr>
+            <a:r>
+              <a:rPr lang="en-US" sz="900" b="1" dirty="0">
+                <a:solidFill>
+                  <a:srgbClr val="8C1D40"/>
                 </a:solidFill>
                 <a:latin typeface="Calibri" pitchFamily="34" charset="0"/>
                 <a:ea typeface="Calibri" pitchFamily="34" charset="-122"/>
                 <a:cs typeface="Calibri" pitchFamily="34" charset="-120"/>
               </a:rPr>
-              <a:t>NATURE Trial · Journal Club · Cardiac Centre, BVH Bahawalpur</a:t>
+              <a:t>15</a:t>
             </a:r>
             <a:endParaRPr lang="en-US" sz="900" dirty="0"/>
           </a:p>
@@ -6259,14 +6015,14 @@
       </p:sp>
       <p:sp>
         <p:nvSpPr>
-          <p:cNvPr id="4" name="Text 2"/>
-          <p:cNvSpPr txBox="1"/>
-          <p:nvPr/>
-        </p:nvSpPr>
-        <p:spPr>
-          <a:xfrm>
-            <a:off x="8229600" y="4709160"/>
-            <a:ext cx="457200" cy="228600"/>
+          <p:cNvPr id="5" name="Text 2"/>
+          <p:cNvSpPr txBox="1"/>
+          <p:nvPr/>
+        </p:nvSpPr>
+        <p:spPr>
+          <a:xfrm>
+            <a:off x="457200" y="1234440"/>
+            <a:ext cx="914400" cy="731520"/>
           </a:xfrm>
           <a:prstGeom prst="rect">
             <a:avLst/>
@@ -6278,33 +6034,72 @@
           <a:bodyPr wrap="square" lIns="0" tIns="0" rIns="0" bIns="0" rtlCol="0" anchor="ctr"/>
           <a:lstStyle/>
           <a:p>
-            <a:pPr algn="r" indent="0" marL="0">
-              <a:buNone/>
-            </a:pPr>
-            <a:r>
-              <a:rPr lang="en-US" sz="900" b="1" dirty="0">
+            <a:pPr indent="0" marL="0">
+              <a:buNone/>
+            </a:pPr>
+            <a:r>
+              <a:rPr lang="en-US" sz="3600" b="1" dirty="0">
                 <a:solidFill>
                   <a:srgbClr val="8C1D40"/>
+                </a:solidFill>
+                <a:latin typeface="Cambria" pitchFamily="34" charset="0"/>
+                <a:ea typeface="Cambria" pitchFamily="34" charset="-122"/>
+                <a:cs typeface="Cambria" pitchFamily="34" charset="-120"/>
+              </a:rPr>
+              <a:t>01</a:t>
+            </a:r>
+            <a:endParaRPr lang="en-US" sz="3600" dirty="0"/>
+          </a:p>
+        </p:txBody>
+      </p:sp>
+      <p:sp>
+        <p:nvSpPr>
+          <p:cNvPr id="6" name="Text 3"/>
+          <p:cNvSpPr txBox="1"/>
+          <p:nvPr/>
+        </p:nvSpPr>
+        <p:spPr>
+          <a:xfrm>
+            <a:off x="1463040" y="1234440"/>
+            <a:ext cx="7223760" cy="731520"/>
+          </a:xfrm>
+          <a:prstGeom prst="rect">
+            <a:avLst/>
+          </a:prstGeom>
+          <a:noFill/>
+          <a:ln/>
+        </p:spPr>
+        <p:txBody>
+          <a:bodyPr wrap="square" lIns="0" tIns="0" rIns="0" bIns="0" rtlCol="0" anchor="ctr"/>
+          <a:lstStyle/>
+          <a:p>
+            <a:pPr indent="0" marL="0">
+              <a:buNone/>
+            </a:pPr>
+            <a:r>
+              <a:rPr lang="en-US" sz="1700" dirty="0">
+                <a:solidFill>
+                  <a:srgbClr val="1F2937"/>
                 </a:solidFill>
                 <a:latin typeface="Calibri" pitchFamily="34" charset="0"/>
                 <a:ea typeface="Calibri" pitchFamily="34" charset="-122"/>
                 <a:cs typeface="Calibri" pitchFamily="34" charset="-120"/>
               </a:rPr>
-              <a:t>15</a:t>
-            </a:r>
-            <a:endParaRPr lang="en-US" sz="900" dirty="0"/>
-          </a:p>
-        </p:txBody>
-      </p:sp>
-      <p:sp>
-        <p:nvSpPr>
-          <p:cNvPr id="6" name="Text 3"/>
-          <p:cNvSpPr txBox="1"/>
-          <p:nvPr/>
-        </p:nvSpPr>
-        <p:spPr>
-          <a:xfrm>
-            <a:off x="457200" y="1234440"/>
+              <a:t>Grade the thrombus (TIMI thrombus grade) in every STEMI</a:t>
+            </a:r>
+            <a:endParaRPr lang="en-US" sz="1700" dirty="0"/>
+          </a:p>
+        </p:txBody>
+      </p:sp>
+      <p:sp>
+        <p:nvSpPr>
+          <p:cNvPr id="7" name="Text 4"/>
+          <p:cNvSpPr txBox="1"/>
+          <p:nvPr/>
+        </p:nvSpPr>
+        <p:spPr>
+          <a:xfrm>
+            <a:off x="457200" y="2240280"/>
             <a:ext cx="914400" cy="731520"/>
           </a:xfrm>
           <a:prstGeom prst="rect">
@@ -6329,7 +6124,7 @@
                 <a:ea typeface="Cambria" pitchFamily="34" charset="-122"/>
                 <a:cs typeface="Cambria" pitchFamily="34" charset="-120"/>
               </a:rPr>
-              <a:t>01</a:t>
+              <a:t>02</a:t>
             </a:r>
             <a:endParaRPr lang="en-US" sz="3600" dirty="0"/>
           </a:p>
@@ -6337,13 +6132,13 @@
       </p:sp>
       <p:sp>
         <p:nvSpPr>
-          <p:cNvPr id="7" name="Text 4"/>
-          <p:cNvSpPr txBox="1"/>
-          <p:nvPr/>
-        </p:nvSpPr>
-        <p:spPr>
-          <a:xfrm>
-            <a:off x="1463040" y="1234440"/>
+          <p:cNvPr id="8" name="Text 5"/>
+          <p:cNvSpPr txBox="1"/>
+          <p:nvPr/>
+        </p:nvSpPr>
+        <p:spPr>
+          <a:xfrm>
+            <a:off x="1463040" y="2240280"/>
             <a:ext cx="7223760" cy="731520"/>
           </a:xfrm>
           <a:prstGeom prst="rect">
@@ -6368,7 +6163,7 @@
                 <a:ea typeface="Calibri" pitchFamily="34" charset="-122"/>
                 <a:cs typeface="Calibri" pitchFamily="34" charset="-120"/>
               </a:rPr>
-              <a:t>Grade the thrombus (TIMI thrombus grade) in every STEMI</a:t>
+              <a:t>Routine manual aspiration is still not recommended</a:t>
             </a:r>
             <a:endParaRPr lang="en-US" sz="1700" dirty="0"/>
           </a:p>
@@ -6376,13 +6171,13 @@
       </p:sp>
       <p:sp>
         <p:nvSpPr>
-          <p:cNvPr id="8" name="Text 5"/>
-          <p:cNvSpPr txBox="1"/>
-          <p:nvPr/>
-        </p:nvSpPr>
-        <p:spPr>
-          <a:xfrm>
-            <a:off x="457200" y="2240280"/>
+          <p:cNvPr id="9" name="Text 6"/>
+          <p:cNvSpPr txBox="1"/>
+          <p:nvPr/>
+        </p:nvSpPr>
+        <p:spPr>
+          <a:xfrm>
+            <a:off x="457200" y="3246120"/>
             <a:ext cx="914400" cy="731520"/>
           </a:xfrm>
           <a:prstGeom prst="rect">
@@ -6407,7 +6202,7 @@
                 <a:ea typeface="Cambria" pitchFamily="34" charset="-122"/>
                 <a:cs typeface="Cambria" pitchFamily="34" charset="-120"/>
               </a:rPr>
-              <a:t>02</a:t>
+              <a:t>03</a:t>
             </a:r>
             <a:endParaRPr lang="en-US" sz="3600" dirty="0"/>
           </a:p>
@@ -6415,85 +6210,7 @@
       </p:sp>
       <p:sp>
         <p:nvSpPr>
-          <p:cNvPr id="9" name="Text 6"/>
-          <p:cNvSpPr txBox="1"/>
-          <p:nvPr/>
-        </p:nvSpPr>
-        <p:spPr>
-          <a:xfrm>
-            <a:off x="1463040" y="2240280"/>
-            <a:ext cx="7223760" cy="731520"/>
-          </a:xfrm>
-          <a:prstGeom prst="rect">
-            <a:avLst/>
-          </a:prstGeom>
-          <a:noFill/>
-          <a:ln/>
-        </p:spPr>
-        <p:txBody>
-          <a:bodyPr wrap="square" lIns="0" tIns="0" rIns="0" bIns="0" rtlCol="0" anchor="ctr"/>
-          <a:lstStyle/>
-          <a:p>
-            <a:pPr indent="0" marL="0">
-              <a:buNone/>
-            </a:pPr>
-            <a:r>
-              <a:rPr lang="en-US" sz="1700" dirty="0">
-                <a:solidFill>
-                  <a:srgbClr val="1F2937"/>
-                </a:solidFill>
-                <a:latin typeface="Calibri" pitchFamily="34" charset="0"/>
-                <a:ea typeface="Calibri" pitchFamily="34" charset="-122"/>
-                <a:cs typeface="Calibri" pitchFamily="34" charset="-120"/>
-              </a:rPr>
-              <a:t>Routine manual aspiration is still not recommended</a:t>
-            </a:r>
-            <a:endParaRPr lang="en-US" sz="1700" dirty="0"/>
-          </a:p>
-        </p:txBody>
-      </p:sp>
-      <p:sp>
-        <p:nvSpPr>
           <p:cNvPr id="10" name="Text 7"/>
-          <p:cNvSpPr txBox="1"/>
-          <p:nvPr/>
-        </p:nvSpPr>
-        <p:spPr>
-          <a:xfrm>
-            <a:off x="457200" y="3246120"/>
-            <a:ext cx="914400" cy="731520"/>
-          </a:xfrm>
-          <a:prstGeom prst="rect">
-            <a:avLst/>
-          </a:prstGeom>
-          <a:noFill/>
-          <a:ln/>
-        </p:spPr>
-        <p:txBody>
-          <a:bodyPr wrap="square" lIns="0" tIns="0" rIns="0" bIns="0" rtlCol="0" anchor="ctr"/>
-          <a:lstStyle/>
-          <a:p>
-            <a:pPr indent="0" marL="0">
-              <a:buNone/>
-            </a:pPr>
-            <a:r>
-              <a:rPr lang="en-US" sz="3600" b="1" dirty="0">
-                <a:solidFill>
-                  <a:srgbClr val="8C1D40"/>
-                </a:solidFill>
-                <a:latin typeface="Cambria" pitchFamily="34" charset="0"/>
-                <a:ea typeface="Cambria" pitchFamily="34" charset="-122"/>
-                <a:cs typeface="Cambria" pitchFamily="34" charset="-120"/>
-              </a:rPr>
-              <a:t>03</a:t>
-            </a:r>
-            <a:endParaRPr lang="en-US" sz="3600" dirty="0"/>
-          </a:p>
-        </p:txBody>
-      </p:sp>
-      <p:sp>
-        <p:nvSpPr>
-          <p:cNvPr id="11" name="Text 8"/>
           <p:cNvSpPr txBox="1"/>
           <p:nvPr/>
         </p:nvSpPr>
@@ -6609,8 +6326,8 @@
         </p:nvSpPr>
         <p:spPr>
           <a:xfrm>
-            <a:off x="457200" y="4709160"/>
-            <a:ext cx="5486400" cy="228600"/>
+            <a:off x="8229600" y="4709160"/>
+            <a:ext cx="457200" cy="228600"/>
           </a:xfrm>
           <a:prstGeom prst="rect">
             <a:avLst/>
@@ -6622,19 +6339,19 @@
           <a:bodyPr wrap="square" lIns="0" tIns="0" rIns="0" bIns="0" rtlCol="0" anchor="ctr"/>
           <a:lstStyle/>
           <a:p>
-            <a:pPr indent="0" marL="0">
-              <a:buNone/>
-            </a:pPr>
-            <a:r>
-              <a:rPr lang="en-US" sz="900" dirty="0">
-                <a:solidFill>
-                  <a:srgbClr val="6B7280"/>
+            <a:pPr algn="r" indent="0" marL="0">
+              <a:buNone/>
+            </a:pPr>
+            <a:r>
+              <a:rPr lang="en-US" sz="900" b="1" dirty="0">
+                <a:solidFill>
+                  <a:srgbClr val="8C1D40"/>
                 </a:solidFill>
                 <a:latin typeface="Calibri" pitchFamily="34" charset="0"/>
                 <a:ea typeface="Calibri" pitchFamily="34" charset="-122"/>
                 <a:cs typeface="Calibri" pitchFamily="34" charset="-120"/>
               </a:rPr>
-              <a:t>NATURE Trial · Journal Club · Cardiac Centre, BVH Bahawalpur</a:t>
+              <a:t>16</a:t>
             </a:r>
             <a:endParaRPr lang="en-US" sz="900" dirty="0"/>
           </a:p>
@@ -6642,46 +6359,7 @@
       </p:sp>
       <p:sp>
         <p:nvSpPr>
-          <p:cNvPr id="4" name="Text 2"/>
-          <p:cNvSpPr txBox="1"/>
-          <p:nvPr/>
-        </p:nvSpPr>
-        <p:spPr>
-          <a:xfrm>
-            <a:off x="8229600" y="4709160"/>
-            <a:ext cx="457200" cy="228600"/>
-          </a:xfrm>
-          <a:prstGeom prst="rect">
-            <a:avLst/>
-          </a:prstGeom>
-          <a:noFill/>
-          <a:ln/>
-        </p:spPr>
-        <p:txBody>
-          <a:bodyPr wrap="square" lIns="0" tIns="0" rIns="0" bIns="0" rtlCol="0" anchor="ctr"/>
-          <a:lstStyle/>
-          <a:p>
-            <a:pPr algn="r" indent="0" marL="0">
-              <a:buNone/>
-            </a:pPr>
-            <a:r>
-              <a:rPr lang="en-US" sz="900" b="1" dirty="0">
-                <a:solidFill>
-                  <a:srgbClr val="8C1D40"/>
-                </a:solidFill>
-                <a:latin typeface="Calibri" pitchFamily="34" charset="0"/>
-                <a:ea typeface="Calibri" pitchFamily="34" charset="-122"/>
-                <a:cs typeface="Calibri" pitchFamily="34" charset="-120"/>
-              </a:rPr>
-              <a:t>16</a:t>
-            </a:r>
-            <a:endParaRPr lang="en-US" sz="900" dirty="0"/>
-          </a:p>
-        </p:txBody>
-      </p:sp>
-      <p:sp>
-        <p:nvSpPr>
-          <p:cNvPr id="6" name="Text 3"/>
+          <p:cNvPr id="5" name="Text 2"/>
           <p:cNvSpPr txBox="1"/>
           <p:nvPr/>
         </p:nvSpPr>
@@ -7061,8 +6739,8 @@
         </p:nvSpPr>
         <p:spPr>
           <a:xfrm>
-            <a:off x="457200" y="4709160"/>
-            <a:ext cx="5486400" cy="228600"/>
+            <a:off x="8229600" y="4709160"/>
+            <a:ext cx="457200" cy="228600"/>
           </a:xfrm>
           <a:prstGeom prst="rect">
             <a:avLst/>
@@ -7074,19 +6752,19 @@
           <a:bodyPr wrap="square" lIns="0" tIns="0" rIns="0" bIns="0" rtlCol="0" anchor="ctr"/>
           <a:lstStyle/>
           <a:p>
-            <a:pPr indent="0" marL="0">
-              <a:buNone/>
-            </a:pPr>
-            <a:r>
-              <a:rPr lang="en-US" sz="900" dirty="0">
-                <a:solidFill>
-                  <a:srgbClr val="6B7280"/>
+            <a:pPr algn="r" indent="0" marL="0">
+              <a:buNone/>
+            </a:pPr>
+            <a:r>
+              <a:rPr lang="en-US" sz="900" b="1" dirty="0">
+                <a:solidFill>
+                  <a:srgbClr val="8C1D40"/>
                 </a:solidFill>
                 <a:latin typeface="Calibri" pitchFamily="34" charset="0"/>
                 <a:ea typeface="Calibri" pitchFamily="34" charset="-122"/>
                 <a:cs typeface="Calibri" pitchFamily="34" charset="-120"/>
               </a:rPr>
-              <a:t>NATURE Trial · Journal Club · Cardiac Centre, BVH Bahawalpur</a:t>
+              <a:t>2</a:t>
             </a:r>
             <a:endParaRPr lang="en-US" sz="900" dirty="0"/>
           </a:p>
@@ -7094,46 +6772,7 @@
       </p:sp>
       <p:sp>
         <p:nvSpPr>
-          <p:cNvPr id="4" name="Text 2"/>
-          <p:cNvSpPr txBox="1"/>
-          <p:nvPr/>
-        </p:nvSpPr>
-        <p:spPr>
-          <a:xfrm>
-            <a:off x="8229600" y="4709160"/>
-            <a:ext cx="457200" cy="228600"/>
-          </a:xfrm>
-          <a:prstGeom prst="rect">
-            <a:avLst/>
-          </a:prstGeom>
-          <a:noFill/>
-          <a:ln/>
-        </p:spPr>
-        <p:txBody>
-          <a:bodyPr wrap="square" lIns="0" tIns="0" rIns="0" bIns="0" rtlCol="0" anchor="ctr"/>
-          <a:lstStyle/>
-          <a:p>
-            <a:pPr algn="r" indent="0" marL="0">
-              <a:buNone/>
-            </a:pPr>
-            <a:r>
-              <a:rPr lang="en-US" sz="900" b="1" dirty="0">
-                <a:solidFill>
-                  <a:srgbClr val="8C1D40"/>
-                </a:solidFill>
-                <a:latin typeface="Calibri" pitchFamily="34" charset="0"/>
-                <a:ea typeface="Calibri" pitchFamily="34" charset="-122"/>
-                <a:cs typeface="Calibri" pitchFamily="34" charset="-120"/>
-              </a:rPr>
-              <a:t>2</a:t>
-            </a:r>
-            <a:endParaRPr lang="en-US" sz="900" dirty="0"/>
-          </a:p>
-        </p:txBody>
-      </p:sp>
-      <p:sp>
-        <p:nvSpPr>
-          <p:cNvPr id="6" name="Shape 3"/>
+          <p:cNvPr id="5" name="Shape 2"/>
           <p:cNvSpPr/>
           <p:nvPr/>
         </p:nvSpPr>
@@ -7160,7 +6799,7 @@
       </p:sp>
       <p:sp>
         <p:nvSpPr>
-          <p:cNvPr id="7" name="Text 4"/>
+          <p:cNvPr id="6" name="Text 3"/>
           <p:cNvSpPr txBox="1"/>
           <p:nvPr/>
         </p:nvSpPr>
@@ -7199,7 +6838,7 @@
       </p:sp>
       <p:pic>
         <p:nvPicPr>
-          <p:cNvPr id="8" name="Image 0" descr="preencoded.png">    </p:cNvPr>
+          <p:cNvPr id="7" name="Image 0" descr="preencoded.png">    </p:cNvPr>
           <p:cNvPicPr>
             <a:picLocks noChangeAspect="1"/>
           </p:cNvPicPr>
@@ -7223,7 +6862,7 @@
       </p:pic>
       <p:sp>
         <p:nvSpPr>
-          <p:cNvPr id="9" name="Shape 5"/>
+          <p:cNvPr id="8" name="Shape 4"/>
           <p:cNvSpPr/>
           <p:nvPr/>
         </p:nvSpPr>
@@ -7250,7 +6889,7 @@
       </p:sp>
       <p:sp>
         <p:nvSpPr>
-          <p:cNvPr id="10" name="Text 6"/>
+          <p:cNvPr id="9" name="Text 5"/>
           <p:cNvSpPr txBox="1"/>
           <p:nvPr/>
         </p:nvSpPr>
@@ -7289,7 +6928,7 @@
       </p:sp>
       <p:pic>
         <p:nvPicPr>
-          <p:cNvPr id="11" name="Image 1" descr="preencoded.png">    </p:cNvPr>
+          <p:cNvPr id="10" name="Image 1" descr="preencoded.png">    </p:cNvPr>
           <p:cNvPicPr>
             <a:picLocks noChangeAspect="1"/>
           </p:cNvPicPr>
@@ -7313,7 +6952,7 @@
       </p:pic>
       <p:sp>
         <p:nvSpPr>
-          <p:cNvPr id="12" name="Shape 7"/>
+          <p:cNvPr id="11" name="Shape 6"/>
           <p:cNvSpPr/>
           <p:nvPr/>
         </p:nvSpPr>
@@ -7340,7 +6979,7 @@
       </p:sp>
       <p:sp>
         <p:nvSpPr>
-          <p:cNvPr id="13" name="Text 8"/>
+          <p:cNvPr id="12" name="Text 7"/>
           <p:cNvSpPr txBox="1"/>
           <p:nvPr/>
         </p:nvSpPr>
@@ -7379,7 +7018,7 @@
       </p:sp>
       <p:pic>
         <p:nvPicPr>
-          <p:cNvPr id="14" name="Image 2" descr="preencoded.png">    </p:cNvPr>
+          <p:cNvPr id="13" name="Image 2" descr="preencoded.png">    </p:cNvPr>
           <p:cNvPicPr>
             <a:picLocks noChangeAspect="1"/>
           </p:cNvPicPr>
@@ -7403,7 +7042,7 @@
       </p:pic>
       <p:sp>
         <p:nvSpPr>
-          <p:cNvPr id="15" name="Shape 9"/>
+          <p:cNvPr id="14" name="Shape 8"/>
           <p:cNvSpPr/>
           <p:nvPr/>
         </p:nvSpPr>
@@ -7430,7 +7069,7 @@
       </p:sp>
       <p:sp>
         <p:nvSpPr>
-          <p:cNvPr id="16" name="Text 10"/>
+          <p:cNvPr id="15" name="Text 9"/>
           <p:cNvSpPr txBox="1"/>
           <p:nvPr/>
         </p:nvSpPr>
@@ -7469,7 +7108,7 @@
       </p:sp>
       <p:sp>
         <p:nvSpPr>
-          <p:cNvPr id="17" name="Text 11"/>
+          <p:cNvPr id="16" name="Text 10"/>
           <p:cNvSpPr txBox="1"/>
           <p:nvPr/>
         </p:nvSpPr>
@@ -7508,7 +7147,7 @@
       </p:sp>
       <p:sp>
         <p:nvSpPr>
-          <p:cNvPr id="18" name="Text 12"/>
+          <p:cNvPr id="17" name="Text 11"/>
           <p:cNvSpPr txBox="1"/>
           <p:nvPr/>
         </p:nvSpPr>
@@ -7691,8 +7330,8 @@
         </p:nvSpPr>
         <p:spPr>
           <a:xfrm>
-            <a:off x="457200" y="4709160"/>
-            <a:ext cx="5486400" cy="228600"/>
+            <a:off x="8229600" y="4709160"/>
+            <a:ext cx="457200" cy="228600"/>
           </a:xfrm>
           <a:prstGeom prst="rect">
             <a:avLst/>
@@ -7704,57 +7343,18 @@
           <a:bodyPr wrap="square" lIns="0" tIns="0" rIns="0" bIns="0" rtlCol="0" anchor="ctr"/>
           <a:lstStyle/>
           <a:p>
-            <a:pPr indent="0" marL="0">
-              <a:buNone/>
-            </a:pPr>
-            <a:r>
-              <a:rPr lang="en-US" sz="900" dirty="0">
-                <a:solidFill>
-                  <a:srgbClr val="6B7280"/>
+            <a:pPr algn="r" indent="0" marL="0">
+              <a:buNone/>
+            </a:pPr>
+            <a:r>
+              <a:rPr lang="en-US" sz="900" b="1" dirty="0">
+                <a:solidFill>
+                  <a:srgbClr val="8C1D40"/>
                 </a:solidFill>
                 <a:latin typeface="Calibri" pitchFamily="34" charset="0"/>
                 <a:ea typeface="Calibri" pitchFamily="34" charset="-122"/>
                 <a:cs typeface="Calibri" pitchFamily="34" charset="-120"/>
               </a:rPr>
-              <a:t>NATURE Trial · Journal Club · Cardiac Centre, BVH Bahawalpur</a:t>
-            </a:r>
-            <a:endParaRPr lang="en-US" sz="900" dirty="0"/>
-          </a:p>
-        </p:txBody>
-      </p:sp>
-      <p:sp>
-        <p:nvSpPr>
-          <p:cNvPr id="4" name="Text 2"/>
-          <p:cNvSpPr txBox="1"/>
-          <p:nvPr/>
-        </p:nvSpPr>
-        <p:spPr>
-          <a:xfrm>
-            <a:off x="8229600" y="4709160"/>
-            <a:ext cx="457200" cy="228600"/>
-          </a:xfrm>
-          <a:prstGeom prst="rect">
-            <a:avLst/>
-          </a:prstGeom>
-          <a:noFill/>
-          <a:ln/>
-        </p:spPr>
-        <p:txBody>
-          <a:bodyPr wrap="square" lIns="0" tIns="0" rIns="0" bIns="0" rtlCol="0" anchor="ctr"/>
-          <a:lstStyle/>
-          <a:p>
-            <a:pPr algn="r" indent="0" marL="0">
-              <a:buNone/>
-            </a:pPr>
-            <a:r>
-              <a:rPr lang="en-US" sz="900" b="1" dirty="0">
-                <a:solidFill>
-                  <a:srgbClr val="8C1D40"/>
-                </a:solidFill>
-                <a:latin typeface="Calibri" pitchFamily="34" charset="0"/>
-                <a:ea typeface="Calibri" pitchFamily="34" charset="-122"/>
-                <a:cs typeface="Calibri" pitchFamily="34" charset="-120"/>
-              </a:rPr>
               <a:t>3</a:t>
             </a:r>
             <a:endParaRPr lang="en-US" sz="900" dirty="0"/>
@@ -7763,7 +7363,7 @@
       </p:sp>
       <p:pic>
         <p:nvPicPr>
-          <p:cNvPr id="6" name="Image 0" descr="preencoded.png">    </p:cNvPr>
+          <p:cNvPr id="5" name="Image 0" descr="preencoded.png">    </p:cNvPr>
           <p:cNvPicPr>
             <a:picLocks noChangeAspect="1"/>
           </p:cNvPicPr>
@@ -7787,7 +7387,7 @@
       </p:pic>
       <p:sp>
         <p:nvSpPr>
-          <p:cNvPr id="7" name="Text 3"/>
+          <p:cNvPr id="6" name="Text 2"/>
           <p:cNvSpPr txBox="1"/>
           <p:nvPr/>
         </p:nvSpPr>
@@ -7903,8 +7503,8 @@
         </p:nvSpPr>
         <p:spPr>
           <a:xfrm>
-            <a:off x="457200" y="4709160"/>
-            <a:ext cx="5486400" cy="228600"/>
+            <a:off x="8229600" y="4709160"/>
+            <a:ext cx="457200" cy="228600"/>
           </a:xfrm>
           <a:prstGeom prst="rect">
             <a:avLst/>
@@ -7916,19 +7516,19 @@
           <a:bodyPr wrap="square" lIns="0" tIns="0" rIns="0" bIns="0" rtlCol="0" anchor="ctr"/>
           <a:lstStyle/>
           <a:p>
-            <a:pPr indent="0" marL="0">
-              <a:buNone/>
-            </a:pPr>
-            <a:r>
-              <a:rPr lang="en-US" sz="900" dirty="0">
-                <a:solidFill>
-                  <a:srgbClr val="6B7280"/>
+            <a:pPr algn="r" indent="0" marL="0">
+              <a:buNone/>
+            </a:pPr>
+            <a:r>
+              <a:rPr lang="en-US" sz="900" b="1" dirty="0">
+                <a:solidFill>
+                  <a:srgbClr val="8C1D40"/>
                 </a:solidFill>
                 <a:latin typeface="Calibri" pitchFamily="34" charset="0"/>
                 <a:ea typeface="Calibri" pitchFamily="34" charset="-122"/>
                 <a:cs typeface="Calibri" pitchFamily="34" charset="-120"/>
               </a:rPr>
-              <a:t>NATURE Trial · Journal Club · Cardiac Centre, BVH Bahawalpur</a:t>
+              <a:t>4</a:t>
             </a:r>
             <a:endParaRPr lang="en-US" sz="900" dirty="0"/>
           </a:p>
@@ -7936,46 +7536,7 @@
       </p:sp>
       <p:sp>
         <p:nvSpPr>
-          <p:cNvPr id="4" name="Text 2"/>
-          <p:cNvSpPr txBox="1"/>
-          <p:nvPr/>
-        </p:nvSpPr>
-        <p:spPr>
-          <a:xfrm>
-            <a:off x="8229600" y="4709160"/>
-            <a:ext cx="457200" cy="228600"/>
-          </a:xfrm>
-          <a:prstGeom prst="rect">
-            <a:avLst/>
-          </a:prstGeom>
-          <a:noFill/>
-          <a:ln/>
-        </p:spPr>
-        <p:txBody>
-          <a:bodyPr wrap="square" lIns="0" tIns="0" rIns="0" bIns="0" rtlCol="0" anchor="ctr"/>
-          <a:lstStyle/>
-          <a:p>
-            <a:pPr algn="r" indent="0" marL="0">
-              <a:buNone/>
-            </a:pPr>
-            <a:r>
-              <a:rPr lang="en-US" sz="900" b="1" dirty="0">
-                <a:solidFill>
-                  <a:srgbClr val="8C1D40"/>
-                </a:solidFill>
-                <a:latin typeface="Calibri" pitchFamily="34" charset="0"/>
-                <a:ea typeface="Calibri" pitchFamily="34" charset="-122"/>
-                <a:cs typeface="Calibri" pitchFamily="34" charset="-120"/>
-              </a:rPr>
-              <a:t>4</a:t>
-            </a:r>
-            <a:endParaRPr lang="en-US" sz="900" dirty="0"/>
-          </a:p>
-        </p:txBody>
-      </p:sp>
-      <p:sp>
-        <p:nvSpPr>
-          <p:cNvPr id="6" name="Shape 3"/>
+          <p:cNvPr id="5" name="Shape 2"/>
           <p:cNvSpPr/>
           <p:nvPr/>
         </p:nvSpPr>
@@ -8000,7 +7561,7 @@
       </p:sp>
       <p:pic>
         <p:nvPicPr>
-          <p:cNvPr id="7" name="Image 0" descr="preencoded.png">    </p:cNvPr>
+          <p:cNvPr id="6" name="Image 0" descr="preencoded.png">    </p:cNvPr>
           <p:cNvPicPr>
             <a:picLocks noChangeAspect="1"/>
           </p:cNvPicPr>
@@ -8024,7 +7585,7 @@
       </p:pic>
       <p:sp>
         <p:nvSpPr>
-          <p:cNvPr id="8" name="Shape 4"/>
+          <p:cNvPr id="7" name="Shape 3"/>
           <p:cNvSpPr/>
           <p:nvPr/>
         </p:nvSpPr>
@@ -8049,7 +7610,7 @@
       </p:sp>
       <p:sp>
         <p:nvSpPr>
-          <p:cNvPr id="9" name="Text 5"/>
+          <p:cNvPr id="8" name="Text 4"/>
           <p:cNvSpPr txBox="1"/>
           <p:nvPr/>
         </p:nvSpPr>
@@ -8088,7 +7649,7 @@
       </p:sp>
       <p:sp>
         <p:nvSpPr>
-          <p:cNvPr id="10" name="Text 6"/>
+          <p:cNvPr id="9" name="Text 5"/>
           <p:cNvSpPr txBox="1"/>
           <p:nvPr/>
         </p:nvSpPr>
@@ -8127,7 +7688,7 @@
       </p:sp>
       <p:sp>
         <p:nvSpPr>
-          <p:cNvPr id="11" name="Text 7"/>
+          <p:cNvPr id="10" name="Text 6"/>
           <p:cNvSpPr txBox="1"/>
           <p:nvPr/>
         </p:nvSpPr>
@@ -8166,7 +7727,7 @@
       </p:sp>
       <p:sp>
         <p:nvSpPr>
-          <p:cNvPr id="12" name="Shape 8"/>
+          <p:cNvPr id="11" name="Shape 7"/>
           <p:cNvSpPr/>
           <p:nvPr/>
         </p:nvSpPr>
@@ -8191,7 +7752,7 @@
       </p:sp>
       <p:pic>
         <p:nvPicPr>
-          <p:cNvPr id="13" name="Image 1" descr="preencoded.png">    </p:cNvPr>
+          <p:cNvPr id="12" name="Image 1" descr="preencoded.png">    </p:cNvPr>
           <p:cNvPicPr>
             <a:picLocks noChangeAspect="1"/>
           </p:cNvPicPr>
@@ -8215,7 +7776,7 @@
       </p:pic>
       <p:sp>
         <p:nvSpPr>
-          <p:cNvPr id="14" name="Shape 9"/>
+          <p:cNvPr id="13" name="Shape 8"/>
           <p:cNvSpPr/>
           <p:nvPr/>
         </p:nvSpPr>
@@ -8240,7 +7801,7 @@
       </p:sp>
       <p:sp>
         <p:nvSpPr>
-          <p:cNvPr id="15" name="Text 10"/>
+          <p:cNvPr id="14" name="Text 9"/>
           <p:cNvSpPr txBox="1"/>
           <p:nvPr/>
         </p:nvSpPr>
@@ -8279,7 +7840,7 @@
       </p:sp>
       <p:sp>
         <p:nvSpPr>
-          <p:cNvPr id="16" name="Text 11"/>
+          <p:cNvPr id="15" name="Text 10"/>
           <p:cNvSpPr txBox="1"/>
           <p:nvPr/>
         </p:nvSpPr>
@@ -8318,7 +7879,7 @@
       </p:sp>
       <p:sp>
         <p:nvSpPr>
-          <p:cNvPr id="17" name="Text 12"/>
+          <p:cNvPr id="16" name="Text 11"/>
           <p:cNvSpPr txBox="1"/>
           <p:nvPr/>
         </p:nvSpPr>
@@ -8357,7 +7918,7 @@
       </p:sp>
       <p:sp>
         <p:nvSpPr>
-          <p:cNvPr id="18" name="Shape 13"/>
+          <p:cNvPr id="17" name="Shape 12"/>
           <p:cNvSpPr/>
           <p:nvPr/>
         </p:nvSpPr>
@@ -8382,7 +7943,7 @@
       </p:sp>
       <p:pic>
         <p:nvPicPr>
-          <p:cNvPr id="19" name="Image 2" descr="preencoded.png">    </p:cNvPr>
+          <p:cNvPr id="18" name="Image 2" descr="preencoded.png">    </p:cNvPr>
           <p:cNvPicPr>
             <a:picLocks noChangeAspect="1"/>
           </p:cNvPicPr>
@@ -8406,7 +7967,7 @@
       </p:pic>
       <p:sp>
         <p:nvSpPr>
-          <p:cNvPr id="20" name="Shape 14"/>
+          <p:cNvPr id="19" name="Shape 13"/>
           <p:cNvSpPr/>
           <p:nvPr/>
         </p:nvSpPr>
@@ -8431,7 +7992,7 @@
       </p:sp>
       <p:sp>
         <p:nvSpPr>
-          <p:cNvPr id="21" name="Text 15"/>
+          <p:cNvPr id="20" name="Text 14"/>
           <p:cNvSpPr txBox="1"/>
           <p:nvPr/>
         </p:nvSpPr>
@@ -8470,7 +8031,7 @@
       </p:sp>
       <p:sp>
         <p:nvSpPr>
-          <p:cNvPr id="22" name="Text 16"/>
+          <p:cNvPr id="21" name="Text 15"/>
           <p:cNvSpPr txBox="1"/>
           <p:nvPr/>
         </p:nvSpPr>
@@ -8509,7 +8070,7 @@
       </p:sp>
       <p:sp>
         <p:nvSpPr>
-          <p:cNvPr id="23" name="Text 17"/>
+          <p:cNvPr id="22" name="Text 16"/>
           <p:cNvSpPr txBox="1"/>
           <p:nvPr/>
         </p:nvSpPr>
@@ -8548,7 +8109,7 @@
       </p:sp>
       <p:sp>
         <p:nvSpPr>
-          <p:cNvPr id="24" name="Shape 18"/>
+          <p:cNvPr id="23" name="Shape 17"/>
           <p:cNvSpPr/>
           <p:nvPr/>
         </p:nvSpPr>
@@ -8573,7 +8134,7 @@
       </p:sp>
       <p:pic>
         <p:nvPicPr>
-          <p:cNvPr id="25" name="Image 3" descr="preencoded.png">    </p:cNvPr>
+          <p:cNvPr id="24" name="Image 3" descr="preencoded.png">    </p:cNvPr>
           <p:cNvPicPr>
             <a:picLocks noChangeAspect="1"/>
           </p:cNvPicPr>
@@ -8597,7 +8158,7 @@
       </p:pic>
       <p:sp>
         <p:nvSpPr>
-          <p:cNvPr id="26" name="Shape 19"/>
+          <p:cNvPr id="25" name="Shape 18"/>
           <p:cNvSpPr/>
           <p:nvPr/>
         </p:nvSpPr>
@@ -8622,7 +8183,7 @@
       </p:sp>
       <p:sp>
         <p:nvSpPr>
-          <p:cNvPr id="27" name="Text 20"/>
+          <p:cNvPr id="26" name="Text 19"/>
           <p:cNvSpPr txBox="1"/>
           <p:nvPr/>
         </p:nvSpPr>
@@ -8661,7 +8222,7 @@
       </p:sp>
       <p:sp>
         <p:nvSpPr>
-          <p:cNvPr id="28" name="Text 21"/>
+          <p:cNvPr id="27" name="Text 20"/>
           <p:cNvSpPr txBox="1"/>
           <p:nvPr/>
         </p:nvSpPr>
@@ -8700,7 +8261,7 @@
       </p:sp>
       <p:sp>
         <p:nvSpPr>
-          <p:cNvPr id="29" name="Text 22"/>
+          <p:cNvPr id="28" name="Text 21"/>
           <p:cNvSpPr txBox="1"/>
           <p:nvPr/>
         </p:nvSpPr>
@@ -8739,7 +8300,7 @@
       </p:sp>
       <p:sp>
         <p:nvSpPr>
-          <p:cNvPr id="30" name="Text 23"/>
+          <p:cNvPr id="29" name="Text 22"/>
           <p:cNvSpPr txBox="1"/>
           <p:nvPr/>
         </p:nvSpPr>
@@ -8855,8 +8416,8 @@
         </p:nvSpPr>
         <p:spPr>
           <a:xfrm>
-            <a:off x="457200" y="4709160"/>
-            <a:ext cx="5486400" cy="228600"/>
+            <a:off x="8229600" y="4709160"/>
+            <a:ext cx="457200" cy="228600"/>
           </a:xfrm>
           <a:prstGeom prst="rect">
             <a:avLst/>
@@ -8868,19 +8429,19 @@
           <a:bodyPr wrap="square" lIns="0" tIns="0" rIns="0" bIns="0" rtlCol="0" anchor="ctr"/>
           <a:lstStyle/>
           <a:p>
-            <a:pPr indent="0" marL="0">
-              <a:buNone/>
-            </a:pPr>
-            <a:r>
-              <a:rPr lang="en-US" sz="900" dirty="0">
-                <a:solidFill>
-                  <a:srgbClr val="6B7280"/>
+            <a:pPr algn="r" indent="0" marL="0">
+              <a:buNone/>
+            </a:pPr>
+            <a:r>
+              <a:rPr lang="en-US" sz="900" b="1" dirty="0">
+                <a:solidFill>
+                  <a:srgbClr val="8C1D40"/>
                 </a:solidFill>
                 <a:latin typeface="Calibri" pitchFamily="34" charset="0"/>
                 <a:ea typeface="Calibri" pitchFamily="34" charset="-122"/>
                 <a:cs typeface="Calibri" pitchFamily="34" charset="-120"/>
               </a:rPr>
-              <a:t>NATURE Trial · Journal Club · Cardiac Centre, BVH Bahawalpur</a:t>
+              <a:t>5</a:t>
             </a:r>
             <a:endParaRPr lang="en-US" sz="900" dirty="0"/>
           </a:p>
@@ -8888,46 +8449,7 @@
       </p:sp>
       <p:sp>
         <p:nvSpPr>
-          <p:cNvPr id="4" name="Text 2"/>
-          <p:cNvSpPr txBox="1"/>
-          <p:nvPr/>
-        </p:nvSpPr>
-        <p:spPr>
-          <a:xfrm>
-            <a:off x="8229600" y="4709160"/>
-            <a:ext cx="457200" cy="228600"/>
-          </a:xfrm>
-          <a:prstGeom prst="rect">
-            <a:avLst/>
-          </a:prstGeom>
-          <a:noFill/>
-          <a:ln/>
-        </p:spPr>
-        <p:txBody>
-          <a:bodyPr wrap="square" lIns="0" tIns="0" rIns="0" bIns="0" rtlCol="0" anchor="ctr"/>
-          <a:lstStyle/>
-          <a:p>
-            <a:pPr algn="r" indent="0" marL="0">
-              <a:buNone/>
-            </a:pPr>
-            <a:r>
-              <a:rPr lang="en-US" sz="900" b="1" dirty="0">
-                <a:solidFill>
-                  <a:srgbClr val="8C1D40"/>
-                </a:solidFill>
-                <a:latin typeface="Calibri" pitchFamily="34" charset="0"/>
-                <a:ea typeface="Calibri" pitchFamily="34" charset="-122"/>
-                <a:cs typeface="Calibri" pitchFamily="34" charset="-120"/>
-              </a:rPr>
-              <a:t>5</a:t>
-            </a:r>
-            <a:endParaRPr lang="en-US" sz="900" dirty="0"/>
-          </a:p>
-        </p:txBody>
-      </p:sp>
-      <p:sp>
-        <p:nvSpPr>
-          <p:cNvPr id="6" name="Shape 3"/>
+          <p:cNvPr id="5" name="Shape 2"/>
           <p:cNvSpPr/>
           <p:nvPr/>
         </p:nvSpPr>
@@ -8954,7 +8476,7 @@
       </p:sp>
       <p:sp>
         <p:nvSpPr>
-          <p:cNvPr id="7" name="Text 4"/>
+          <p:cNvPr id="6" name="Text 3"/>
           <p:cNvSpPr txBox="1"/>
           <p:nvPr/>
         </p:nvSpPr>
@@ -8993,7 +8515,7 @@
       </p:sp>
       <p:pic>
         <p:nvPicPr>
-          <p:cNvPr id="8" name="Image 0" descr="preencoded.png">    </p:cNvPr>
+          <p:cNvPr id="7" name="Image 0" descr="preencoded.png">    </p:cNvPr>
           <p:cNvPicPr>
             <a:picLocks noChangeAspect="1"/>
           </p:cNvPicPr>
@@ -9017,7 +8539,7 @@
       </p:pic>
       <p:sp>
         <p:nvSpPr>
-          <p:cNvPr id="9" name="Text 5"/>
+          <p:cNvPr id="8" name="Text 4"/>
           <p:cNvSpPr txBox="1"/>
           <p:nvPr/>
         </p:nvSpPr>
@@ -9056,7 +8578,7 @@
       </p:sp>
       <p:pic>
         <p:nvPicPr>
-          <p:cNvPr id="10" name="Image 1" descr="preencoded.png">    </p:cNvPr>
+          <p:cNvPr id="9" name="Image 1" descr="preencoded.png">    </p:cNvPr>
           <p:cNvPicPr>
             <a:picLocks noChangeAspect="1"/>
           </p:cNvPicPr>
@@ -9080,7 +8602,7 @@
       </p:pic>
       <p:pic>
         <p:nvPicPr>
-          <p:cNvPr id="11" name="Image 2" descr="preencoded.png">    </p:cNvPr>
+          <p:cNvPr id="10" name="Image 2" descr="preencoded.png">    </p:cNvPr>
           <p:cNvPicPr>
             <a:picLocks noChangeAspect="1"/>
           </p:cNvPicPr>
@@ -9104,7 +8626,7 @@
       </p:pic>
       <p:sp>
         <p:nvSpPr>
-          <p:cNvPr id="12" name="Shape 6"/>
+          <p:cNvPr id="11" name="Shape 5"/>
           <p:cNvSpPr/>
           <p:nvPr/>
         </p:nvSpPr>
@@ -9131,7 +8653,7 @@
       </p:sp>
       <p:sp>
         <p:nvSpPr>
-          <p:cNvPr id="13" name="Text 7"/>
+          <p:cNvPr id="12" name="Text 6"/>
           <p:cNvSpPr txBox="1"/>
           <p:nvPr/>
         </p:nvSpPr>
@@ -9187,7 +8709,7 @@
       </p:sp>
       <p:sp>
         <p:nvSpPr>
-          <p:cNvPr id="14" name="Shape 8"/>
+          <p:cNvPr id="13" name="Shape 7"/>
           <p:cNvSpPr/>
           <p:nvPr/>
         </p:nvSpPr>
@@ -9214,7 +8736,7 @@
       </p:sp>
       <p:sp>
         <p:nvSpPr>
-          <p:cNvPr id="15" name="Text 9"/>
+          <p:cNvPr id="14" name="Text 8"/>
           <p:cNvSpPr txBox="1"/>
           <p:nvPr/>
         </p:nvSpPr>
@@ -9270,7 +8792,7 @@
       </p:sp>
       <p:sp>
         <p:nvSpPr>
-          <p:cNvPr id="16" name="Text 10"/>
+          <p:cNvPr id="15" name="Text 9"/>
           <p:cNvSpPr txBox="1"/>
           <p:nvPr/>
         </p:nvSpPr>
@@ -9309,7 +8831,7 @@
       </p:sp>
       <p:sp>
         <p:nvSpPr>
-          <p:cNvPr id="17" name="Text 11"/>
+          <p:cNvPr id="16" name="Text 10"/>
           <p:cNvSpPr txBox="1"/>
           <p:nvPr/>
         </p:nvSpPr>
@@ -9348,7 +8870,7 @@
       </p:sp>
       <p:sp>
         <p:nvSpPr>
-          <p:cNvPr id="18" name="Shape 12"/>
+          <p:cNvPr id="17" name="Shape 11"/>
           <p:cNvSpPr/>
           <p:nvPr/>
         </p:nvSpPr>
@@ -9371,7 +8893,7 @@
       </p:sp>
       <p:sp>
         <p:nvSpPr>
-          <p:cNvPr id="19" name="Text 13"/>
+          <p:cNvPr id="18" name="Text 12"/>
           <p:cNvSpPr txBox="1"/>
           <p:nvPr/>
         </p:nvSpPr>
@@ -9410,7 +8932,7 @@
       </p:sp>
       <p:sp>
         <p:nvSpPr>
-          <p:cNvPr id="20" name="Text 14"/>
+          <p:cNvPr id="19" name="Text 13"/>
           <p:cNvSpPr txBox="1"/>
           <p:nvPr/>
         </p:nvSpPr>
@@ -9449,7 +8971,7 @@
       </p:sp>
       <p:sp>
         <p:nvSpPr>
-          <p:cNvPr id="21" name="Shape 15"/>
+          <p:cNvPr id="20" name="Shape 14"/>
           <p:cNvSpPr/>
           <p:nvPr/>
         </p:nvSpPr>
@@ -9472,7 +8994,7 @@
       </p:sp>
       <p:sp>
         <p:nvSpPr>
-          <p:cNvPr id="22" name="Text 16"/>
+          <p:cNvPr id="21" name="Text 15"/>
           <p:cNvSpPr txBox="1"/>
           <p:nvPr/>
         </p:nvSpPr>
@@ -9511,7 +9033,7 @@
       </p:sp>
       <p:sp>
         <p:nvSpPr>
-          <p:cNvPr id="23" name="Text 17"/>
+          <p:cNvPr id="22" name="Text 16"/>
           <p:cNvSpPr txBox="1"/>
           <p:nvPr/>
         </p:nvSpPr>
@@ -9550,7 +9072,7 @@
       </p:sp>
       <p:sp>
         <p:nvSpPr>
-          <p:cNvPr id="24" name="Shape 18"/>
+          <p:cNvPr id="23" name="Shape 17"/>
           <p:cNvSpPr/>
           <p:nvPr/>
         </p:nvSpPr>
@@ -9573,7 +9095,7 @@
       </p:sp>
       <p:sp>
         <p:nvSpPr>
-          <p:cNvPr id="25" name="Text 19"/>
+          <p:cNvPr id="24" name="Text 18"/>
           <p:cNvSpPr txBox="1"/>
           <p:nvPr/>
         </p:nvSpPr>
@@ -9612,7 +9134,7 @@
       </p:sp>
       <p:sp>
         <p:nvSpPr>
-          <p:cNvPr id="26" name="Text 20"/>
+          <p:cNvPr id="25" name="Text 19"/>
           <p:cNvSpPr txBox="1"/>
           <p:nvPr/>
         </p:nvSpPr>
@@ -9651,7 +9173,7 @@
       </p:sp>
       <p:sp>
         <p:nvSpPr>
-          <p:cNvPr id="27" name="Shape 21"/>
+          <p:cNvPr id="26" name="Shape 20"/>
           <p:cNvSpPr/>
           <p:nvPr/>
         </p:nvSpPr>
@@ -9674,7 +9196,7 @@
       </p:sp>
       <p:sp>
         <p:nvSpPr>
-          <p:cNvPr id="28" name="Text 22"/>
+          <p:cNvPr id="27" name="Text 21"/>
           <p:cNvSpPr txBox="1"/>
           <p:nvPr/>
         </p:nvSpPr>
@@ -9713,7 +9235,7 @@
       </p:sp>
       <p:sp>
         <p:nvSpPr>
-          <p:cNvPr id="29" name="Text 23"/>
+          <p:cNvPr id="28" name="Text 22"/>
           <p:cNvSpPr txBox="1"/>
           <p:nvPr/>
         </p:nvSpPr>
@@ -9829,8 +9351,8 @@
         </p:nvSpPr>
         <p:spPr>
           <a:xfrm>
-            <a:off x="457200" y="4709160"/>
-            <a:ext cx="5486400" cy="228600"/>
+            <a:off x="8229600" y="4709160"/>
+            <a:ext cx="457200" cy="228600"/>
           </a:xfrm>
           <a:prstGeom prst="rect">
             <a:avLst/>
@@ -9842,19 +9364,19 @@
           <a:bodyPr wrap="square" lIns="0" tIns="0" rIns="0" bIns="0" rtlCol="0" anchor="ctr"/>
           <a:lstStyle/>
           <a:p>
-            <a:pPr indent="0" marL="0">
-              <a:buNone/>
-            </a:pPr>
-            <a:r>
-              <a:rPr lang="en-US" sz="900" dirty="0">
-                <a:solidFill>
-                  <a:srgbClr val="6B7280"/>
+            <a:pPr algn="r" indent="0" marL="0">
+              <a:buNone/>
+            </a:pPr>
+            <a:r>
+              <a:rPr lang="en-US" sz="900" b="1" dirty="0">
+                <a:solidFill>
+                  <a:srgbClr val="8C1D40"/>
                 </a:solidFill>
                 <a:latin typeface="Calibri" pitchFamily="34" charset="0"/>
                 <a:ea typeface="Calibri" pitchFamily="34" charset="-122"/>
                 <a:cs typeface="Calibri" pitchFamily="34" charset="-120"/>
               </a:rPr>
-              <a:t>NATURE Trial · Journal Club · Cardiac Centre, BVH Bahawalpur</a:t>
+              <a:t>6</a:t>
             </a:r>
             <a:endParaRPr lang="en-US" sz="900" dirty="0"/>
           </a:p>
@@ -9862,46 +9384,7 @@
       </p:sp>
       <p:sp>
         <p:nvSpPr>
-          <p:cNvPr id="4" name="Text 2"/>
-          <p:cNvSpPr txBox="1"/>
-          <p:nvPr/>
-        </p:nvSpPr>
-        <p:spPr>
-          <a:xfrm>
-            <a:off x="8229600" y="4709160"/>
-            <a:ext cx="457200" cy="228600"/>
-          </a:xfrm>
-          <a:prstGeom prst="rect">
-            <a:avLst/>
-          </a:prstGeom>
-          <a:noFill/>
-          <a:ln/>
-        </p:spPr>
-        <p:txBody>
-          <a:bodyPr wrap="square" lIns="0" tIns="0" rIns="0" bIns="0" rtlCol="0" anchor="ctr"/>
-          <a:lstStyle/>
-          <a:p>
-            <a:pPr algn="r" indent="0" marL="0">
-              <a:buNone/>
-            </a:pPr>
-            <a:r>
-              <a:rPr lang="en-US" sz="900" b="1" dirty="0">
-                <a:solidFill>
-                  <a:srgbClr val="8C1D40"/>
-                </a:solidFill>
-                <a:latin typeface="Calibri" pitchFamily="34" charset="0"/>
-                <a:ea typeface="Calibri" pitchFamily="34" charset="-122"/>
-                <a:cs typeface="Calibri" pitchFamily="34" charset="-120"/>
-              </a:rPr>
-              <a:t>6</a:t>
-            </a:r>
-            <a:endParaRPr lang="en-US" sz="900" dirty="0"/>
-          </a:p>
-        </p:txBody>
-      </p:sp>
-      <p:sp>
-        <p:nvSpPr>
-          <p:cNvPr id="6" name="Shape 3"/>
+          <p:cNvPr id="5" name="Shape 2"/>
           <p:cNvSpPr/>
           <p:nvPr/>
         </p:nvSpPr>
@@ -9926,7 +9409,7 @@
       </p:sp>
       <p:pic>
         <p:nvPicPr>
-          <p:cNvPr id="7" name="Image 0" descr="preencoded.png">    </p:cNvPr>
+          <p:cNvPr id="6" name="Image 0" descr="preencoded.png">    </p:cNvPr>
           <p:cNvPicPr>
             <a:picLocks noChangeAspect="1"/>
           </p:cNvPicPr>
@@ -9950,7 +9433,7 @@
       </p:pic>
       <p:sp>
         <p:nvSpPr>
-          <p:cNvPr id="8" name="Text 4"/>
+          <p:cNvPr id="7" name="Text 3"/>
           <p:cNvSpPr txBox="1"/>
           <p:nvPr/>
         </p:nvSpPr>
@@ -9989,7 +9472,7 @@
       </p:sp>
       <p:sp>
         <p:nvSpPr>
-          <p:cNvPr id="9" name="Shape 5"/>
+          <p:cNvPr id="8" name="Shape 4"/>
           <p:cNvSpPr/>
           <p:nvPr/>
         </p:nvSpPr>
@@ -10014,7 +9497,7 @@
       </p:sp>
       <p:pic>
         <p:nvPicPr>
-          <p:cNvPr id="10" name="Image 1" descr="preencoded.png">    </p:cNvPr>
+          <p:cNvPr id="9" name="Image 1" descr="preencoded.png">    </p:cNvPr>
           <p:cNvPicPr>
             <a:picLocks noChangeAspect="1"/>
           </p:cNvPicPr>
@@ -10038,7 +9521,7 @@
       </p:pic>
       <p:sp>
         <p:nvSpPr>
-          <p:cNvPr id="11" name="Text 6"/>
+          <p:cNvPr id="10" name="Text 5"/>
           <p:cNvSpPr txBox="1"/>
           <p:nvPr/>
         </p:nvSpPr>
@@ -10077,7 +9560,7 @@
       </p:sp>
       <p:sp>
         <p:nvSpPr>
-          <p:cNvPr id="12" name="Shape 7"/>
+          <p:cNvPr id="11" name="Shape 6"/>
           <p:cNvSpPr/>
           <p:nvPr/>
         </p:nvSpPr>
@@ -10102,7 +9585,7 @@
       </p:sp>
       <p:pic>
         <p:nvPicPr>
-          <p:cNvPr id="13" name="Image 2" descr="preencoded.png">    </p:cNvPr>
+          <p:cNvPr id="12" name="Image 2" descr="preencoded.png">    </p:cNvPr>
           <p:cNvPicPr>
             <a:picLocks noChangeAspect="1"/>
           </p:cNvPicPr>
@@ -10126,7 +9609,7 @@
       </p:pic>
       <p:sp>
         <p:nvSpPr>
-          <p:cNvPr id="14" name="Text 8"/>
+          <p:cNvPr id="13" name="Text 7"/>
           <p:cNvSpPr txBox="1"/>
           <p:nvPr/>
         </p:nvSpPr>
@@ -10165,7 +9648,7 @@
       </p:sp>
       <p:sp>
         <p:nvSpPr>
-          <p:cNvPr id="15" name="Shape 9"/>
+          <p:cNvPr id="14" name="Shape 8"/>
           <p:cNvSpPr/>
           <p:nvPr/>
         </p:nvSpPr>
@@ -10190,7 +9673,7 @@
       </p:sp>
       <p:pic>
         <p:nvPicPr>
-          <p:cNvPr id="16" name="Image 3" descr="preencoded.png">    </p:cNvPr>
+          <p:cNvPr id="15" name="Image 3" descr="preencoded.png">    </p:cNvPr>
           <p:cNvPicPr>
             <a:picLocks noChangeAspect="1"/>
           </p:cNvPicPr>
@@ -10214,7 +9697,7 @@
       </p:pic>
       <p:sp>
         <p:nvSpPr>
-          <p:cNvPr id="17" name="Text 10"/>
+          <p:cNvPr id="16" name="Text 9"/>
           <p:cNvSpPr txBox="1"/>
           <p:nvPr/>
         </p:nvSpPr>
@@ -10253,7 +9736,7 @@
       </p:sp>
       <p:sp>
         <p:nvSpPr>
-          <p:cNvPr id="18" name="Shape 11"/>
+          <p:cNvPr id="17" name="Shape 10"/>
           <p:cNvSpPr/>
           <p:nvPr/>
         </p:nvSpPr>
@@ -10278,7 +9761,7 @@
       </p:sp>
       <p:pic>
         <p:nvPicPr>
-          <p:cNvPr id="19" name="Image 4" descr="preencoded.png">    </p:cNvPr>
+          <p:cNvPr id="18" name="Image 4" descr="preencoded.png">    </p:cNvPr>
           <p:cNvPicPr>
             <a:picLocks noChangeAspect="1"/>
           </p:cNvPicPr>
@@ -10302,7 +9785,7 @@
       </p:pic>
       <p:sp>
         <p:nvSpPr>
-          <p:cNvPr id="20" name="Text 12"/>
+          <p:cNvPr id="19" name="Text 11"/>
           <p:cNvSpPr txBox="1"/>
           <p:nvPr/>
         </p:nvSpPr>
@@ -10341,7 +9824,7 @@
       </p:sp>
       <p:sp>
         <p:nvSpPr>
-          <p:cNvPr id="21" name="Shape 13"/>
+          <p:cNvPr id="20" name="Shape 12"/>
           <p:cNvSpPr/>
           <p:nvPr/>
         </p:nvSpPr>
@@ -10368,7 +9851,7 @@
       </p:sp>
       <p:pic>
         <p:nvPicPr>
-          <p:cNvPr id="22" name="Image 5" descr="preencoded.png">    </p:cNvPr>
+          <p:cNvPr id="21" name="Image 5" descr="preencoded.png">    </p:cNvPr>
           <p:cNvPicPr>
             <a:picLocks noChangeAspect="1"/>
           </p:cNvPicPr>
@@ -10392,7 +9875,7 @@
       </p:pic>
       <p:sp>
         <p:nvSpPr>
-          <p:cNvPr id="23" name="Text 14"/>
+          <p:cNvPr id="22" name="Text 13"/>
           <p:cNvSpPr txBox="1"/>
           <p:nvPr/>
         </p:nvSpPr>
@@ -10431,7 +9914,7 @@
       </p:sp>
       <p:sp>
         <p:nvSpPr>
-          <p:cNvPr id="24" name="Text 15"/>
+          <p:cNvPr id="23" name="Text 14"/>
           <p:cNvSpPr txBox="1"/>
           <p:nvPr/>
         </p:nvSpPr>
@@ -10470,7 +9953,7 @@
       </p:sp>
       <p:sp>
         <p:nvSpPr>
-          <p:cNvPr id="25" name="Text 16"/>
+          <p:cNvPr id="24" name="Text 15"/>
           <p:cNvSpPr txBox="1"/>
           <p:nvPr/>
         </p:nvSpPr>
@@ -10586,8 +10069,8 @@
         </p:nvSpPr>
         <p:spPr>
           <a:xfrm>
-            <a:off x="457200" y="4709160"/>
-            <a:ext cx="5486400" cy="228600"/>
+            <a:off x="8229600" y="4709160"/>
+            <a:ext cx="457200" cy="228600"/>
           </a:xfrm>
           <a:prstGeom prst="rect">
             <a:avLst/>
@@ -10599,19 +10082,19 @@
           <a:bodyPr wrap="square" lIns="0" tIns="0" rIns="0" bIns="0" rtlCol="0" anchor="ctr"/>
           <a:lstStyle/>
           <a:p>
-            <a:pPr indent="0" marL="0">
-              <a:buNone/>
-            </a:pPr>
-            <a:r>
-              <a:rPr lang="en-US" sz="900" dirty="0">
-                <a:solidFill>
-                  <a:srgbClr val="6B7280"/>
+            <a:pPr algn="r" indent="0" marL="0">
+              <a:buNone/>
+            </a:pPr>
+            <a:r>
+              <a:rPr lang="en-US" sz="900" b="1" dirty="0">
+                <a:solidFill>
+                  <a:srgbClr val="8C1D40"/>
                 </a:solidFill>
                 <a:latin typeface="Calibri" pitchFamily="34" charset="0"/>
                 <a:ea typeface="Calibri" pitchFamily="34" charset="-122"/>
                 <a:cs typeface="Calibri" pitchFamily="34" charset="-120"/>
               </a:rPr>
-              <a:t>NATURE Trial · Journal Club · Cardiac Centre, BVH Bahawalpur</a:t>
+              <a:t>7</a:t>
             </a:r>
             <a:endParaRPr lang="en-US" sz="900" dirty="0"/>
           </a:p>
@@ -10619,46 +10102,7 @@
       </p:sp>
       <p:sp>
         <p:nvSpPr>
-          <p:cNvPr id="4" name="Text 2"/>
-          <p:cNvSpPr txBox="1"/>
-          <p:nvPr/>
-        </p:nvSpPr>
-        <p:spPr>
-          <a:xfrm>
-            <a:off x="8229600" y="4709160"/>
-            <a:ext cx="457200" cy="228600"/>
-          </a:xfrm>
-          <a:prstGeom prst="rect">
-            <a:avLst/>
-          </a:prstGeom>
-          <a:noFill/>
-          <a:ln/>
-        </p:spPr>
-        <p:txBody>
-          <a:bodyPr wrap="square" lIns="0" tIns="0" rIns="0" bIns="0" rtlCol="0" anchor="ctr"/>
-          <a:lstStyle/>
-          <a:p>
-            <a:pPr algn="r" indent="0" marL="0">
-              <a:buNone/>
-            </a:pPr>
-            <a:r>
-              <a:rPr lang="en-US" sz="900" b="1" dirty="0">
-                <a:solidFill>
-                  <a:srgbClr val="8C1D40"/>
-                </a:solidFill>
-                <a:latin typeface="Calibri" pitchFamily="34" charset="0"/>
-                <a:ea typeface="Calibri" pitchFamily="34" charset="-122"/>
-                <a:cs typeface="Calibri" pitchFamily="34" charset="-120"/>
-              </a:rPr>
-              <a:t>7</a:t>
-            </a:r>
-            <a:endParaRPr lang="en-US" sz="900" dirty="0"/>
-          </a:p>
-        </p:txBody>
-      </p:sp>
-      <p:sp>
-        <p:nvSpPr>
-          <p:cNvPr id="6" name="Shape 3"/>
+          <p:cNvPr id="5" name="Shape 2"/>
           <p:cNvSpPr/>
           <p:nvPr/>
         </p:nvSpPr>
@@ -10683,7 +10127,7 @@
       </p:sp>
       <p:pic>
         <p:nvPicPr>
-          <p:cNvPr id="7" name="Image 0" descr="preencoded.png">    </p:cNvPr>
+          <p:cNvPr id="6" name="Image 0" descr="preencoded.png">    </p:cNvPr>
           <p:cNvPicPr>
             <a:picLocks noChangeAspect="1"/>
           </p:cNvPicPr>
@@ -10707,7 +10151,7 @@
       </p:pic>
       <p:sp>
         <p:nvSpPr>
-          <p:cNvPr id="8" name="Text 4"/>
+          <p:cNvPr id="7" name="Text 3"/>
           <p:cNvSpPr txBox="1"/>
           <p:nvPr/>
         </p:nvSpPr>
@@ -10746,7 +10190,7 @@
       </p:sp>
       <p:sp>
         <p:nvSpPr>
-          <p:cNvPr id="9" name="Shape 5"/>
+          <p:cNvPr id="8" name="Shape 4"/>
           <p:cNvSpPr/>
           <p:nvPr/>
         </p:nvSpPr>
@@ -10771,7 +10215,7 @@
       </p:sp>
       <p:pic>
         <p:nvPicPr>
-          <p:cNvPr id="10" name="Image 1" descr="preencoded.png">    </p:cNvPr>
+          <p:cNvPr id="9" name="Image 1" descr="preencoded.png">    </p:cNvPr>
           <p:cNvPicPr>
             <a:picLocks noChangeAspect="1"/>
           </p:cNvPicPr>
@@ -10795,7 +10239,7 @@
       </p:pic>
       <p:sp>
         <p:nvSpPr>
-          <p:cNvPr id="11" name="Text 6"/>
+          <p:cNvPr id="10" name="Text 5"/>
           <p:cNvSpPr txBox="1"/>
           <p:nvPr/>
         </p:nvSpPr>
@@ -10834,7 +10278,7 @@
       </p:sp>
       <p:sp>
         <p:nvSpPr>
-          <p:cNvPr id="12" name="Shape 7"/>
+          <p:cNvPr id="11" name="Shape 6"/>
           <p:cNvSpPr/>
           <p:nvPr/>
         </p:nvSpPr>
@@ -10859,7 +10303,7 @@
       </p:sp>
       <p:pic>
         <p:nvPicPr>
-          <p:cNvPr id="13" name="Image 2" descr="preencoded.png">    </p:cNvPr>
+          <p:cNvPr id="12" name="Image 2" descr="preencoded.png">    </p:cNvPr>
           <p:cNvPicPr>
             <a:picLocks noChangeAspect="1"/>
           </p:cNvPicPr>
@@ -10883,7 +10327,7 @@
       </p:pic>
       <p:sp>
         <p:nvSpPr>
-          <p:cNvPr id="14" name="Text 8"/>
+          <p:cNvPr id="13" name="Text 7"/>
           <p:cNvSpPr txBox="1"/>
           <p:nvPr/>
         </p:nvSpPr>
@@ -10922,7 +10366,7 @@
       </p:sp>
       <p:sp>
         <p:nvSpPr>
-          <p:cNvPr id="15" name="Shape 9"/>
+          <p:cNvPr id="14" name="Shape 8"/>
           <p:cNvSpPr/>
           <p:nvPr/>
         </p:nvSpPr>
@@ -10947,7 +10391,7 @@
       </p:sp>
       <p:pic>
         <p:nvPicPr>
-          <p:cNvPr id="16" name="Image 3" descr="preencoded.png">    </p:cNvPr>
+          <p:cNvPr id="15" name="Image 3" descr="preencoded.png">    </p:cNvPr>
           <p:cNvPicPr>
             <a:picLocks noChangeAspect="1"/>
           </p:cNvPicPr>
@@ -10971,7 +10415,7 @@
       </p:pic>
       <p:sp>
         <p:nvSpPr>
-          <p:cNvPr id="17" name="Text 10"/>
+          <p:cNvPr id="16" name="Text 9"/>
           <p:cNvSpPr txBox="1"/>
           <p:nvPr/>
         </p:nvSpPr>
@@ -11010,7 +10454,7 @@
       </p:sp>
       <p:sp>
         <p:nvSpPr>
-          <p:cNvPr id="18" name="Shape 11"/>
+          <p:cNvPr id="17" name="Shape 10"/>
           <p:cNvSpPr/>
           <p:nvPr/>
         </p:nvSpPr>
@@ -11035,7 +10479,7 @@
       </p:sp>
       <p:pic>
         <p:nvPicPr>
-          <p:cNvPr id="19" name="Image 4" descr="preencoded.png">    </p:cNvPr>
+          <p:cNvPr id="18" name="Image 4" descr="preencoded.png">    </p:cNvPr>
           <p:cNvPicPr>
             <a:picLocks noChangeAspect="1"/>
           </p:cNvPicPr>
@@ -11059,7 +10503,7 @@
       </p:pic>
       <p:sp>
         <p:nvSpPr>
-          <p:cNvPr id="20" name="Text 12"/>
+          <p:cNvPr id="19" name="Text 11"/>
           <p:cNvSpPr txBox="1"/>
           <p:nvPr/>
         </p:nvSpPr>
@@ -11098,7 +10542,7 @@
       </p:sp>
       <p:sp>
         <p:nvSpPr>
-          <p:cNvPr id="21" name="Shape 13"/>
+          <p:cNvPr id="20" name="Shape 12"/>
           <p:cNvSpPr/>
           <p:nvPr/>
         </p:nvSpPr>
@@ -11123,7 +10567,7 @@
       </p:sp>
       <p:pic>
         <p:nvPicPr>
-          <p:cNvPr id="22" name="Image 5" descr="preencoded.png">    </p:cNvPr>
+          <p:cNvPr id="21" name="Image 5" descr="preencoded.png">    </p:cNvPr>
           <p:cNvPicPr>
             <a:picLocks noChangeAspect="1"/>
           </p:cNvPicPr>
@@ -11147,7 +10591,7 @@
       </p:pic>
       <p:sp>
         <p:nvSpPr>
-          <p:cNvPr id="23" name="Text 14"/>
+          <p:cNvPr id="22" name="Text 13"/>
           <p:cNvSpPr txBox="1"/>
           <p:nvPr/>
         </p:nvSpPr>
@@ -11186,7 +10630,7 @@
       </p:sp>
       <p:sp>
         <p:nvSpPr>
-          <p:cNvPr id="24" name="Shape 15"/>
+          <p:cNvPr id="23" name="Shape 14"/>
           <p:cNvSpPr/>
           <p:nvPr/>
         </p:nvSpPr>
@@ -11211,7 +10655,7 @@
       </p:sp>
       <p:pic>
         <p:nvPicPr>
-          <p:cNvPr id="25" name="Image 6" descr="preencoded.png">    </p:cNvPr>
+          <p:cNvPr id="24" name="Image 6" descr="preencoded.png">    </p:cNvPr>
           <p:cNvPicPr>
             <a:picLocks noChangeAspect="1"/>
           </p:cNvPicPr>
@@ -11235,7 +10679,7 @@
       </p:pic>
       <p:sp>
         <p:nvSpPr>
-          <p:cNvPr id="26" name="Text 16"/>
+          <p:cNvPr id="25" name="Text 15"/>
           <p:cNvSpPr txBox="1"/>
           <p:nvPr/>
         </p:nvSpPr>
@@ -11274,7 +10718,7 @@
       </p:sp>
       <p:sp>
         <p:nvSpPr>
-          <p:cNvPr id="27" name="Shape 17"/>
+          <p:cNvPr id="26" name="Shape 16"/>
           <p:cNvSpPr/>
           <p:nvPr/>
         </p:nvSpPr>
@@ -11301,7 +10745,7 @@
       </p:sp>
       <p:pic>
         <p:nvPicPr>
-          <p:cNvPr id="28" name="Image 7" descr="preencoded.png">    </p:cNvPr>
+          <p:cNvPr id="27" name="Image 7" descr="preencoded.png">    </p:cNvPr>
           <p:cNvPicPr>
             <a:picLocks noChangeAspect="1"/>
           </p:cNvPicPr>
@@ -11325,7 +10769,7 @@
       </p:pic>
       <p:sp>
         <p:nvSpPr>
-          <p:cNvPr id="29" name="Text 18"/>
+          <p:cNvPr id="28" name="Text 17"/>
           <p:cNvSpPr txBox="1"/>
           <p:nvPr/>
         </p:nvSpPr>
@@ -11364,7 +10808,7 @@
       </p:sp>
       <p:sp>
         <p:nvSpPr>
-          <p:cNvPr id="30" name="Text 19"/>
+          <p:cNvPr id="29" name="Text 18"/>
           <p:cNvSpPr txBox="1"/>
           <p:nvPr/>
         </p:nvSpPr>
@@ -11505,8 +10949,8 @@
         </p:nvSpPr>
         <p:spPr>
           <a:xfrm>
-            <a:off x="457200" y="4709160"/>
-            <a:ext cx="5486400" cy="228600"/>
+            <a:off x="8229600" y="4709160"/>
+            <a:ext cx="457200" cy="228600"/>
           </a:xfrm>
           <a:prstGeom prst="rect">
             <a:avLst/>
@@ -11518,19 +10962,19 @@
           <a:bodyPr wrap="square" lIns="0" tIns="0" rIns="0" bIns="0" rtlCol="0" anchor="ctr"/>
           <a:lstStyle/>
           <a:p>
-            <a:pPr indent="0" marL="0">
-              <a:buNone/>
-            </a:pPr>
-            <a:r>
-              <a:rPr lang="en-US" sz="900" dirty="0">
-                <a:solidFill>
-                  <a:srgbClr val="6B7280"/>
+            <a:pPr algn="r" indent="0" marL="0">
+              <a:buNone/>
+            </a:pPr>
+            <a:r>
+              <a:rPr lang="en-US" sz="900" b="1" dirty="0">
+                <a:solidFill>
+                  <a:srgbClr val="8C1D40"/>
                 </a:solidFill>
                 <a:latin typeface="Calibri" pitchFamily="34" charset="0"/>
                 <a:ea typeface="Calibri" pitchFamily="34" charset="-122"/>
                 <a:cs typeface="Calibri" pitchFamily="34" charset="-120"/>
               </a:rPr>
-              <a:t>NATURE Trial · Journal Club · Cardiac Centre, BVH Bahawalpur</a:t>
+              <a:t>8</a:t>
             </a:r>
             <a:endParaRPr lang="en-US" sz="900" dirty="0"/>
           </a:p>
@@ -11538,46 +10982,7 @@
       </p:sp>
       <p:sp>
         <p:nvSpPr>
-          <p:cNvPr id="4" name="Text 2"/>
-          <p:cNvSpPr txBox="1"/>
-          <p:nvPr/>
-        </p:nvSpPr>
-        <p:spPr>
-          <a:xfrm>
-            <a:off x="8229600" y="4709160"/>
-            <a:ext cx="457200" cy="228600"/>
-          </a:xfrm>
-          <a:prstGeom prst="rect">
-            <a:avLst/>
-          </a:prstGeom>
-          <a:noFill/>
-          <a:ln/>
-        </p:spPr>
-        <p:txBody>
-          <a:bodyPr wrap="square" lIns="0" tIns="0" rIns="0" bIns="0" rtlCol="0" anchor="ctr"/>
-          <a:lstStyle/>
-          <a:p>
-            <a:pPr algn="r" indent="0" marL="0">
-              <a:buNone/>
-            </a:pPr>
-            <a:r>
-              <a:rPr lang="en-US" sz="900" b="1" dirty="0">
-                <a:solidFill>
-                  <a:srgbClr val="8C1D40"/>
-                </a:solidFill>
-                <a:latin typeface="Calibri" pitchFamily="34" charset="0"/>
-                <a:ea typeface="Calibri" pitchFamily="34" charset="-122"/>
-                <a:cs typeface="Calibri" pitchFamily="34" charset="-120"/>
-              </a:rPr>
-              <a:t>8</a:t>
-            </a:r>
-            <a:endParaRPr lang="en-US" sz="900" dirty="0"/>
-          </a:p>
-        </p:txBody>
-      </p:sp>
-      <p:sp>
-        <p:nvSpPr>
-          <p:cNvPr id="6" name="Shape 3"/>
+          <p:cNvPr id="5" name="Shape 2"/>
           <p:cNvSpPr/>
           <p:nvPr/>
         </p:nvSpPr>
@@ -11604,7 +11009,7 @@
       </p:sp>
       <p:sp>
         <p:nvSpPr>
-          <p:cNvPr id="7" name="Shape 4"/>
+          <p:cNvPr id="6" name="Shape 3"/>
           <p:cNvSpPr/>
           <p:nvPr/>
         </p:nvSpPr>
@@ -11629,7 +11034,7 @@
       </p:sp>
       <p:pic>
         <p:nvPicPr>
-          <p:cNvPr id="8" name="Image 0" descr="preencoded.png">    </p:cNvPr>
+          <p:cNvPr id="7" name="Image 0" descr="preencoded.png">    </p:cNvPr>
           <p:cNvPicPr>
             <a:picLocks noChangeAspect="1"/>
           </p:cNvPicPr>
@@ -11653,7 +11058,7 @@
       </p:pic>
       <p:sp>
         <p:nvSpPr>
-          <p:cNvPr id="9" name="Text 5"/>
+          <p:cNvPr id="8" name="Text 4"/>
           <p:cNvSpPr txBox="1"/>
           <p:nvPr/>
         </p:nvSpPr>
@@ -11692,7 +11097,7 @@
       </p:sp>
       <p:sp>
         <p:nvSpPr>
-          <p:cNvPr id="10" name="Text 6"/>
+          <p:cNvPr id="9" name="Text 5"/>
           <p:cNvSpPr txBox="1"/>
           <p:nvPr/>
         </p:nvSpPr>
@@ -11731,7 +11136,7 @@
       </p:sp>
       <p:sp>
         <p:nvSpPr>
-          <p:cNvPr id="11" name="Shape 7"/>
+          <p:cNvPr id="10" name="Shape 6"/>
           <p:cNvSpPr/>
           <p:nvPr/>
         </p:nvSpPr>
@@ -11758,7 +11163,7 @@
       </p:sp>
       <p:sp>
         <p:nvSpPr>
-          <p:cNvPr id="12" name="Shape 8"/>
+          <p:cNvPr id="11" name="Shape 7"/>
           <p:cNvSpPr/>
           <p:nvPr/>
         </p:nvSpPr>
@@ -11783,7 +11188,7 @@
       </p:sp>
       <p:pic>
         <p:nvPicPr>
-          <p:cNvPr id="13" name="Image 1" descr="preencoded.png">    </p:cNvPr>
+          <p:cNvPr id="12" name="Image 1" descr="preencoded.png">    </p:cNvPr>
           <p:cNvPicPr>
             <a:picLocks noChangeAspect="1"/>
           </p:cNvPicPr>
@@ -11807,7 +11212,7 @@
       </p:pic>
       <p:sp>
         <p:nvSpPr>
-          <p:cNvPr id="14" name="Text 9"/>
+          <p:cNvPr id="13" name="Text 8"/>
           <p:cNvSpPr txBox="1"/>
           <p:nvPr/>
         </p:nvSpPr>
@@ -11846,7 +11251,7 @@
       </p:sp>
       <p:sp>
         <p:nvSpPr>
-          <p:cNvPr id="15" name="Text 10"/>
+          <p:cNvPr id="14" name="Text 9"/>
           <p:cNvSpPr txBox="1"/>
           <p:nvPr/>
         </p:nvSpPr>
@@ -11885,7 +11290,7 @@
       </p:sp>
       <p:sp>
         <p:nvSpPr>
-          <p:cNvPr id="16" name="Shape 11"/>
+          <p:cNvPr id="15" name="Shape 10"/>
           <p:cNvSpPr/>
           <p:nvPr/>
         </p:nvSpPr>
@@ -11912,7 +11317,7 @@
       </p:sp>
       <p:sp>
         <p:nvSpPr>
-          <p:cNvPr id="17" name="Shape 12"/>
+          <p:cNvPr id="16" name="Shape 11"/>
           <p:cNvSpPr/>
           <p:nvPr/>
         </p:nvSpPr>
@@ -11937,7 +11342,7 @@
       </p:sp>
       <p:pic>
         <p:nvPicPr>
-          <p:cNvPr id="18" name="Image 2" descr="preencoded.png">    </p:cNvPr>
+          <p:cNvPr id="17" name="Image 2" descr="preencoded.png">    </p:cNvPr>
           <p:cNvPicPr>
             <a:picLocks noChangeAspect="1"/>
           </p:cNvPicPr>
@@ -11961,7 +11366,7 @@
       </p:pic>
       <p:sp>
         <p:nvSpPr>
-          <p:cNvPr id="19" name="Text 13"/>
+          <p:cNvPr id="18" name="Text 12"/>
           <p:cNvSpPr txBox="1"/>
           <p:nvPr/>
         </p:nvSpPr>
@@ -12000,7 +11405,7 @@
       </p:sp>
       <p:sp>
         <p:nvSpPr>
-          <p:cNvPr id="20" name="Text 14"/>
+          <p:cNvPr id="19" name="Text 13"/>
           <p:cNvSpPr txBox="1"/>
           <p:nvPr/>
         </p:nvSpPr>
@@ -12116,8 +11521,8 @@
         </p:nvSpPr>
         <p:spPr>
           <a:xfrm>
-            <a:off x="457200" y="4709160"/>
-            <a:ext cx="5486400" cy="228600"/>
+            <a:off x="8229600" y="4709160"/>
+            <a:ext cx="457200" cy="228600"/>
           </a:xfrm>
           <a:prstGeom prst="rect">
             <a:avLst/>
@@ -12129,19 +11534,19 @@
           <a:bodyPr wrap="square" lIns="0" tIns="0" rIns="0" bIns="0" rtlCol="0" anchor="ctr"/>
           <a:lstStyle/>
           <a:p>
-            <a:pPr indent="0" marL="0">
-              <a:buNone/>
-            </a:pPr>
-            <a:r>
-              <a:rPr lang="en-US" sz="900" dirty="0">
-                <a:solidFill>
-                  <a:srgbClr val="6B7280"/>
+            <a:pPr algn="r" indent="0" marL="0">
+              <a:buNone/>
+            </a:pPr>
+            <a:r>
+              <a:rPr lang="en-US" sz="900" b="1" dirty="0">
+                <a:solidFill>
+                  <a:srgbClr val="8C1D40"/>
                 </a:solidFill>
                 <a:latin typeface="Calibri" pitchFamily="34" charset="0"/>
                 <a:ea typeface="Calibri" pitchFamily="34" charset="-122"/>
                 <a:cs typeface="Calibri" pitchFamily="34" charset="-120"/>
               </a:rPr>
-              <a:t>NATURE Trial · Journal Club · Cardiac Centre, BVH Bahawalpur</a:t>
+              <a:t>9</a:t>
             </a:r>
             <a:endParaRPr lang="en-US" sz="900" dirty="0"/>
           </a:p>
@@ -12149,14 +11554,14 @@
       </p:sp>
       <p:sp>
         <p:nvSpPr>
-          <p:cNvPr id="4" name="Text 2"/>
-          <p:cNvSpPr txBox="1"/>
-          <p:nvPr/>
-        </p:nvSpPr>
-        <p:spPr>
-          <a:xfrm>
-            <a:off x="8229600" y="4709160"/>
-            <a:ext cx="457200" cy="228600"/>
+          <p:cNvPr id="5" name="Text 2"/>
+          <p:cNvSpPr txBox="1"/>
+          <p:nvPr/>
+        </p:nvSpPr>
+        <p:spPr>
+          <a:xfrm>
+            <a:off x="457200" y="1234440"/>
+            <a:ext cx="3657600" cy="1097280"/>
           </a:xfrm>
           <a:prstGeom prst="rect">
             <a:avLst/>
@@ -12168,96 +11573,57 @@
           <a:bodyPr wrap="square" lIns="0" tIns="0" rIns="0" bIns="0" rtlCol="0" anchor="ctr"/>
           <a:lstStyle/>
           <a:p>
-            <a:pPr algn="r" indent="0" marL="0">
-              <a:buNone/>
-            </a:pPr>
-            <a:r>
-              <a:rPr lang="en-US" sz="900" b="1" dirty="0">
+            <a:pPr indent="0" marL="0">
+              <a:buNone/>
+            </a:pPr>
+            <a:r>
+              <a:rPr lang="en-US" sz="8000" b="1" dirty="0">
                 <a:solidFill>
                   <a:srgbClr val="8C1D40"/>
+                </a:solidFill>
+                <a:latin typeface="Cambria" pitchFamily="34" charset="0"/>
+                <a:ea typeface="Cambria" pitchFamily="34" charset="-122"/>
+                <a:cs typeface="Cambria" pitchFamily="34" charset="-120"/>
+              </a:rPr>
+              <a:t>26%</a:t>
+            </a:r>
+            <a:endParaRPr lang="en-US" sz="8000" dirty="0"/>
+          </a:p>
+        </p:txBody>
+      </p:sp>
+      <p:sp>
+        <p:nvSpPr>
+          <p:cNvPr id="6" name="Text 3"/>
+          <p:cNvSpPr txBox="1"/>
+          <p:nvPr/>
+        </p:nvSpPr>
+        <p:spPr>
+          <a:xfrm>
+            <a:off x="457200" y="2377440"/>
+            <a:ext cx="3566160" cy="685800"/>
+          </a:xfrm>
+          <a:prstGeom prst="rect">
+            <a:avLst/>
+          </a:prstGeom>
+          <a:noFill/>
+          <a:ln/>
+        </p:spPr>
+        <p:txBody>
+          <a:bodyPr wrap="square" lIns="0" tIns="0" rIns="0" bIns="0" rtlCol="0" anchor="t"/>
+          <a:lstStyle/>
+          <a:p>
+            <a:pPr indent="0" marL="0">
+              <a:buNone/>
+            </a:pPr>
+            <a:r>
+              <a:rPr lang="en-US" sz="1500" dirty="0">
+                <a:solidFill>
+                  <a:srgbClr val="1F2937"/>
                 </a:solidFill>
                 <a:latin typeface="Calibri" pitchFamily="34" charset="0"/>
                 <a:ea typeface="Calibri" pitchFamily="34" charset="-122"/>
                 <a:cs typeface="Calibri" pitchFamily="34" charset="-120"/>
               </a:rPr>
-              <a:t>9</a:t>
-            </a:r>
-            <a:endParaRPr lang="en-US" sz="900" dirty="0"/>
-          </a:p>
-        </p:txBody>
-      </p:sp>
-      <p:sp>
-        <p:nvSpPr>
-          <p:cNvPr id="6" name="Text 3"/>
-          <p:cNvSpPr txBox="1"/>
-          <p:nvPr/>
-        </p:nvSpPr>
-        <p:spPr>
-          <a:xfrm>
-            <a:off x="457200" y="1234440"/>
-            <a:ext cx="3657600" cy="1097280"/>
-          </a:xfrm>
-          <a:prstGeom prst="rect">
-            <a:avLst/>
-          </a:prstGeom>
-          <a:noFill/>
-          <a:ln/>
-        </p:spPr>
-        <p:txBody>
-          <a:bodyPr wrap="square" lIns="0" tIns="0" rIns="0" bIns="0" rtlCol="0" anchor="ctr"/>
-          <a:lstStyle/>
-          <a:p>
-            <a:pPr indent="0" marL="0">
-              <a:buNone/>
-            </a:pPr>
-            <a:r>
-              <a:rPr lang="en-US" sz="8000" b="1" dirty="0">
-                <a:solidFill>
-                  <a:srgbClr val="8C1D40"/>
-                </a:solidFill>
-                <a:latin typeface="Cambria" pitchFamily="34" charset="0"/>
-                <a:ea typeface="Cambria" pitchFamily="34" charset="-122"/>
-                <a:cs typeface="Cambria" pitchFamily="34" charset="-120"/>
-              </a:rPr>
-              <a:t>26%</a:t>
-            </a:r>
-            <a:endParaRPr lang="en-US" sz="8000" dirty="0"/>
-          </a:p>
-        </p:txBody>
-      </p:sp>
-      <p:sp>
-        <p:nvSpPr>
-          <p:cNvPr id="7" name="Text 4"/>
-          <p:cNvSpPr txBox="1"/>
-          <p:nvPr/>
-        </p:nvSpPr>
-        <p:spPr>
-          <a:xfrm>
-            <a:off x="457200" y="2377440"/>
-            <a:ext cx="3566160" cy="685800"/>
-          </a:xfrm>
-          <a:prstGeom prst="rect">
-            <a:avLst/>
-          </a:prstGeom>
-          <a:noFill/>
-          <a:ln/>
-        </p:spPr>
-        <p:txBody>
-          <a:bodyPr wrap="square" lIns="0" tIns="0" rIns="0" bIns="0" rtlCol="0" anchor="t"/>
-          <a:lstStyle/>
-          <a:p>
-            <a:pPr indent="0" marL="0">
-              <a:buNone/>
-            </a:pPr>
-            <a:r>
-              <a:rPr lang="en-US" sz="1500" dirty="0">
-                <a:solidFill>
-                  <a:srgbClr val="1F2937"/>
-                </a:solidFill>
-                <a:latin typeface="Calibri" pitchFamily="34" charset="0"/>
-                <a:ea typeface="Calibri" pitchFamily="34" charset="-122"/>
-                <a:cs typeface="Calibri" pitchFamily="34" charset="-120"/>
-              </a:rPr>
               <a:t>relative reduction in infarct size (CK-MB AUC) with enVast versus standard PCI</a:t>
             </a:r>
             <a:endParaRPr lang="en-US" sz="1500" dirty="0"/>
@@ -12266,7 +11632,7 @@
       </p:sp>
       <p:sp>
         <p:nvSpPr>
-          <p:cNvPr id="8" name="Shape 5"/>
+          <p:cNvPr id="7" name="Shape 4"/>
           <p:cNvSpPr/>
           <p:nvPr/>
         </p:nvSpPr>
@@ -12293,7 +11659,7 @@
       </p:sp>
       <p:sp>
         <p:nvSpPr>
-          <p:cNvPr id="9" name="Text 6"/>
+          <p:cNvPr id="8" name="Text 5"/>
           <p:cNvSpPr txBox="1"/>
           <p:nvPr/>
         </p:nvSpPr>
@@ -12332,7 +11698,7 @@
       </p:sp>
       <p:graphicFrame>
         <p:nvGraphicFramePr>
-          <p:cNvPr id="10" name="Chart 0" descr=""/>
+          <p:cNvPr id="9" name="Chart 0" descr=""/>
           <p:cNvGraphicFramePr/>
           <p:nvPr/>
         </p:nvGraphicFramePr>

--- a/presentations/NATURE_Trial_2026.pptx
+++ b/presentations/NATURE_Trial_2026.pptx
@@ -6551,7 +6551,7 @@
         </p:nvSpPr>
         <p:spPr>
           <a:xfrm>
-            <a:off x="457200" y="1417320"/>
+            <a:off x="457200" y="1691640"/>
             <a:ext cx="8229600" cy="1005840"/>
           </a:xfrm>
           <a:prstGeom prst="rect">
@@ -6590,7 +6590,7 @@
         </p:nvSpPr>
         <p:spPr>
           <a:xfrm>
-            <a:off x="457200" y="2468880"/>
+            <a:off x="457200" y="2743200"/>
             <a:ext cx="8229600" cy="457200"/>
           </a:xfrm>
           <a:prstGeom prst="rect">
@@ -6618,45 +6618,6 @@
               <a:t>Questions and discussion</a:t>
             </a:r>
             <a:endParaRPr lang="en-US" sz="2000" dirty="0"/>
-          </a:p>
-        </p:txBody>
-      </p:sp>
-      <p:sp>
-        <p:nvSpPr>
-          <p:cNvPr id="4" name="Text 2"/>
-          <p:cNvSpPr txBox="1"/>
-          <p:nvPr/>
-        </p:nvSpPr>
-        <p:spPr>
-          <a:xfrm>
-            <a:off x="457200" y="4023360"/>
-            <a:ext cx="8229600" cy="365760"/>
-          </a:xfrm>
-          <a:prstGeom prst="rect">
-            <a:avLst/>
-          </a:prstGeom>
-          <a:noFill/>
-          <a:ln/>
-        </p:spPr>
-        <p:txBody>
-          <a:bodyPr wrap="square" lIns="0" tIns="0" rIns="0" bIns="0" rtlCol="0" anchor="ctr"/>
-          <a:lstStyle/>
-          <a:p>
-            <a:pPr algn="ctr" indent="0" marL="0">
-              <a:buNone/>
-            </a:pPr>
-            <a:r>
-              <a:rPr lang="en-US" sz="1300" dirty="0">
-                <a:solidFill>
-                  <a:srgbClr val="FFFFFF"/>
-                </a:solidFill>
-                <a:latin typeface="Calibri" pitchFamily="34" charset="0"/>
-                <a:ea typeface="Calibri" pitchFamily="34" charset="-122"/>
-                <a:cs typeface="Calibri" pitchFamily="34" charset="-120"/>
-              </a:rPr>
-              <a:t>Dr M. Waqas Saleem  ·  PGR Cardiology  ·  Cardiac Centre, BVH Bahawalpur</a:t>
-            </a:r>
-            <a:endParaRPr lang="en-US" sz="1300" dirty="0"/>
           </a:p>
         </p:txBody>
       </p:sp>

--- a/presentations/NATURE_Trial_2026.pptx
+++ b/presentations/NATURE_Trial_2026.pptx
@@ -22,9 +22,10 @@
     <p:sldId id="270" r:id="rId16"/>
     <p:sldId id="271" r:id="rId17"/>
     <p:sldId id="272" r:id="rId18"/>
+    <p:sldId id="273" r:id="rId19"/>
   </p:sldIdLst>
   <p:notesMasterIdLst>
-    <p:notesMasterId r:id="rId19"/>
+    <p:notesMasterId r:id="rId20"/>
   </p:notesMasterIdLst>
   <p:sldSz cx="9144000" cy="5143500"/>
   <p:notesSz cx="5143500" cy="9144000"/>
@@ -1216,7 +1217,7 @@
           <a:p>
             <a:r>
               <a:rPr lang="en-US" dirty="0"/>
-              <a:t>Cardiac MRI at day 3 showed about a 25% relative reduction in infarct size as a percentage of LV mass. It was a positive trend rather than a formally significant result, but it agrees with the CK-MB finding.</a:t>
+              <a:t>Enzymatic infarct size by CK-MB AUC was about 26% lower with enVast (P = 0.001). The chart shows the relative effect with control set to 100; absolute values are in the primary presentation.</a:t>
             </a:r>
             <a:endParaRPr lang="en-US" dirty="0"/>
           </a:p>
@@ -1304,7 +1305,7 @@
           <a:p>
             <a:r>
               <a:rPr lang="en-US" dirty="0"/>
-              <a:t>At 30 days: stroke 0% vs 1.3%, death 0% vs 2.6%, MACE 1.3% vs 3.8% (enVast vs control). Reassuring given the stroke signal with aspiration in TOTAL, but the event numbers are very small.</a:t>
+              <a:t>Cardiac MRI at day 3 showed about a 25% relative reduction in infarct size as a percentage of LV mass. It was a positive trend rather than a formally significant result, but it agrees with the CK-MB finding.</a:t>
             </a:r>
             <a:endParaRPr lang="en-US" dirty="0"/>
           </a:p>
@@ -1392,7 +1393,7 @@
           <a:p>
             <a:r>
               <a:rPr lang="en-US" dirty="0"/>
-              <a:t>Randomised multicentre design, a population chosen where benefit is plausible, agreement between biomarker and MRI, and no early safety signal.</a:t>
+              <a:t>At 30 days: stroke 0% vs 1.3%, death 0% vs 2.6%, MACE 1.3% vs 3.8% (enVast vs control). Reassuring given the stroke signal with aspiration in TOTAL, but the event numbers are very small.</a:t>
             </a:r>
             <a:endParaRPr lang="en-US" dirty="0"/>
           </a:p>
@@ -1480,7 +1481,7 @@
           <a:p>
             <a:r>
               <a:rPr lang="en-US" dirty="0"/>
-              <a:t>Small sample, surrogate primary endpoint, operators unavoidably aware of device use, the MRI result only a trend, and industry sponsorship.</a:t>
+              <a:t>Randomised multicentre design, a population chosen where benefit is plausible, agreement between biomarker and MRI, and no early safety signal.</a:t>
             </a:r>
             <a:endParaRPr lang="en-US" dirty="0"/>
           </a:p>
@@ -1568,7 +1569,7 @@
           <a:p>
             <a:r>
               <a:rPr lang="en-US" dirty="0"/>
-              <a:t>NATURE met its superiority hypothesis on infarct size, with reassuring 30-day safety. Because it is small and uses a surrogate endpoint, it should not yet change routine practice; an outcomes trial is the next step.</a:t>
+              <a:t>Small sample, surrogate primary endpoint, operators unavoidably aware of device use, the MRI result only a trend, and industry sponsorship.</a:t>
             </a:r>
             <a:endParaRPr lang="en-US" dirty="0"/>
           </a:p>
@@ -1656,7 +1657,7 @@
           <a:p>
             <a:r>
               <a:rPr lang="en-US" dirty="0"/>
-              <a:t>Practical messages for discussion: grade thrombus burden, do not use routine aspiration, and follow the evidence as outcome trials report.</a:t>
+              <a:t>NATURE met its superiority hypothesis on infarct size, with reassuring 30-day safety. Because it is small and uses a surrogate endpoint, it should not yet change routine practice; an outcomes trial is the next step.</a:t>
             </a:r>
             <a:endParaRPr lang="en-US" dirty="0"/>
           </a:p>
@@ -1744,7 +1745,7 @@
           <a:p>
             <a:r>
               <a:rPr lang="en-US" dirty="0"/>
-              <a:t>NATURE figures are from the ESC 2026 late-breaking presentation and press reports; check the peer-reviewed publication for final values.</a:t>
+              <a:t>Practical messages for discussion: grade thrombus burden, do not use routine aspiration, and follow the evidence as outcome trials report.</a:t>
             </a:r>
             <a:endParaRPr lang="en-US" dirty="0"/>
           </a:p>
@@ -1832,7 +1833,7 @@
           <a:p>
             <a:r>
               <a:rPr lang="en-US" dirty="0"/>
-              <a:t/>
+              <a:t>NATURE figures are from the ESC 2026 late-breaking presentation and press reports; check the peer-reviewed publication for final values.</a:t>
             </a:r>
             <a:endParaRPr lang="en-US" dirty="0"/>
           </a:p>
@@ -1856,6 +1857,94 @@
             <a:fld id="{F7021451-1387-4CA6-816F-3879F97B5CBC}" type="slidenum">
               <a:rPr lang="en-US"/>
               <a:t>17</a:t>
+            </a:fld>
+            <a:endParaRPr lang="en-US"/>
+          </a:p>
+        </p:txBody>
+      </p:sp>
+    </p:spTree>
+    <p:extLst>
+      <p:ext uri="{BB962C8B-B14F-4D97-AF65-F5344CB8AC3E}">
+        <p14:creationId xmlns:p14="http://schemas.microsoft.com/office/powerpoint/2010/main" val="1024086991"/>
+      </p:ext>
+    </p:extLst>
+  </p:cSld>
+  <p:clrMapOvr>
+    <a:masterClrMapping/>
+  </p:clrMapOvr>
+</p:notes>
+</file>
+
+<file path=ppt/notesSlides/notesSlide18.xml><?xml version="1.0" encoding="utf-8"?>
+<p:notes xmlns:a="http://schemas.openxmlformats.org/drawingml/2006/main" xmlns:r="http://schemas.openxmlformats.org/officeDocument/2006/relationships" xmlns:p="http://schemas.openxmlformats.org/presentationml/2006/main">
+  <p:cSld>
+    <p:spTree>
+      <p:nvGrpSpPr>
+        <p:cNvPr id="1" name=""/>
+        <p:cNvGrpSpPr/>
+        <p:nvPr/>
+      </p:nvGrpSpPr>
+      <p:grpSpPr>
+        <a:xfrm>
+          <a:off x="0" y="0"/>
+          <a:ext cx="0" cy="0"/>
+          <a:chOff x="0" y="0"/>
+          <a:chExt cx="0" cy="0"/>
+        </a:xfrm>
+      </p:grpSpPr>
+      <p:sp>
+        <p:nvSpPr>
+          <p:cNvPr id="2" name="Slide Image Placeholder 1"/>
+          <p:cNvSpPr>
+            <a:spLocks noGrp="1" noRot="1" noChangeAspect="1"/>
+          </p:cNvSpPr>
+          <p:nvPr>
+            <p:ph type="sldImg"/>
+          </p:nvPr>
+        </p:nvSpPr>
+        <p:spPr/>
+      </p:sp>
+      <p:sp>
+        <p:nvSpPr>
+          <p:cNvPr id="3" name="Notes Placeholder 2"/>
+          <p:cNvSpPr>
+            <a:spLocks noGrp="1"/>
+          </p:cNvSpPr>
+          <p:nvPr>
+            <p:ph type="body" idx="1"/>
+          </p:nvPr>
+        </p:nvSpPr>
+        <p:spPr/>
+        <p:txBody>
+          <a:bodyPr/>
+          <a:lstStyle/>
+          <a:p>
+            <a:r>
+              <a:rPr lang="en-US" dirty="0"/>
+              <a:t/>
+            </a:r>
+            <a:endParaRPr lang="en-US" dirty="0"/>
+          </a:p>
+        </p:txBody>
+      </p:sp>
+      <p:sp>
+        <p:nvSpPr>
+          <p:cNvPr id="4" name="Slide Number Placeholder 3"/>
+          <p:cNvSpPr>
+            <a:spLocks noGrp="1"/>
+          </p:cNvSpPr>
+          <p:nvPr>
+            <p:ph type="sldNum" sz="quarter" idx="10"/>
+          </p:nvPr>
+        </p:nvSpPr>
+        <p:spPr/>
+        <p:txBody>
+          <a:bodyPr/>
+          <a:lstStyle/>
+          <a:p>
+            <a:fld id="{F7021451-1387-4CA6-816F-3879F97B5CBC}" type="slidenum">
+              <a:rPr lang="en-US"/>
+              <a:t>18</a:t>
             </a:fld>
             <a:endParaRPr lang="en-US"/>
           </a:p>
@@ -2184,7 +2273,7 @@
           <a:p>
             <a:r>
               <a:rPr lang="en-US" dirty="0"/>
-              <a:t>154 patients at 11 centres were randomised 1:1 to enVast-assisted thrombectomy followed by conventional PCI, or to standard primary PCI. The hypothesis was superiority of enVast on infarct size. Design paper: Landi et al., Cardiovascular Revascularization Medicine, 2026.</a:t>
+              <a:t>Official Vesalio animation of the enVast coronary thrombectomy procedure, embedded from YouTube. Click the video to play it; the laptop must be online. If it does not play, use the 'Watch on YouTube' link.</a:t>
             </a:r>
             <a:endParaRPr lang="en-US" dirty="0"/>
           </a:p>
@@ -2272,7 +2361,7 @@
           <a:p>
             <a:r>
               <a:rPr lang="en-US" dirty="0"/>
-              <a:t>Inclusion criteria as listed on ClinicalTrials.gov (NCT04969471). The key criterion is TIMI thrombus grade 3 or more, re-confirmed after wiring if the artery is occluded.</a:t>
+              <a:t>154 patients at 11 centres were randomised 1:1 to enVast-assisted thrombectomy followed by conventional PCI, or to standard primary PCI. The hypothesis was superiority of enVast on infarct size. Design paper: Landi et al., Cardiovascular Revascularization Medicine, 2026.</a:t>
             </a:r>
             <a:endParaRPr lang="en-US" dirty="0"/>
           </a:p>
@@ -2360,7 +2449,7 @@
           <a:p>
             <a:r>
               <a:rPr lang="en-US" dirty="0"/>
-              <a:t>Exclusion criteria as listed on ClinicalTrials.gov (NCT04969471). Most exclude anatomy where a retriever is hard to deliver safely, or situations that would confound the infarct-size endpoint.</a:t>
+              <a:t>Inclusion criteria as listed on ClinicalTrials.gov (NCT04969471). The key criterion is TIMI thrombus grade 3 or more, re-confirmed after wiring if the artery is occluded.</a:t>
             </a:r>
             <a:endParaRPr lang="en-US" dirty="0"/>
           </a:p>
@@ -2448,7 +2537,7 @@
           <a:p>
             <a:r>
               <a:rPr lang="en-US" dirty="0"/>
-              <a:t>The primary endpoint is enzymatic infarct size (CK-MB area under the curve). The key secondary endpoint is infarct size on cardiac MRI at day 3. Safety was assessed at 30 days.</a:t>
+              <a:t>Exclusion criteria as listed on ClinicalTrials.gov (NCT04969471). Most exclude anatomy where a retriever is hard to deliver safely, or situations that would confound the infarct-size endpoint.</a:t>
             </a:r>
             <a:endParaRPr lang="en-US" dirty="0"/>
           </a:p>
@@ -2536,7 +2625,7 @@
           <a:p>
             <a:r>
               <a:rPr lang="en-US" dirty="0"/>
-              <a:t>Enzymatic infarct size by CK-MB AUC was about 26% lower with enVast (P = 0.001). The chart shows the relative effect with control set to 100; absolute values are in the primary presentation.</a:t>
+              <a:t>The primary endpoint is enzymatic infarct size (CK-MB area under the curve). The key secondary endpoint is infarct size on cardiac MRI at day 3. Safety was assessed at 30 days.</a:t>
             </a:r>
             <a:endParaRPr lang="en-US" dirty="0"/>
           </a:p>
@@ -3208,7 +3297,7 @@
                 <a:ea typeface="Cambria" pitchFamily="34" charset="-122"/>
                 <a:cs typeface="Cambria" pitchFamily="34" charset="-120"/>
               </a:rPr>
-              <a:t>Secondary endpoint: cardiac MRI</a:t>
+              <a:t>Primary endpoint: met</a:t>
             </a:r>
             <a:endParaRPr lang="en-US" sz="2800" dirty="0"/>
           </a:p>
@@ -3262,7 +3351,7 @@
         <p:spPr>
           <a:xfrm>
             <a:off x="457200" y="1234440"/>
-            <a:ext cx="5486400" cy="365760"/>
+            <a:ext cx="3657600" cy="1097280"/>
           </a:xfrm>
           <a:prstGeom prst="rect">
             <a:avLst/>
@@ -3278,17 +3367,17 @@
               <a:buNone/>
             </a:pPr>
             <a:r>
-              <a:rPr lang="en-US" sz="1700" b="1" dirty="0">
-                <a:solidFill>
-                  <a:srgbClr val="1F2937"/>
+              <a:rPr lang="en-US" sz="8000" b="1" dirty="0">
+                <a:solidFill>
+                  <a:srgbClr val="8C1D40"/>
                 </a:solidFill>
                 <a:latin typeface="Cambria" pitchFamily="34" charset="0"/>
                 <a:ea typeface="Cambria" pitchFamily="34" charset="-122"/>
                 <a:cs typeface="Cambria" pitchFamily="34" charset="-120"/>
               </a:rPr>
-              <a:t>CK-MB AUC (primary)</a:t>
-            </a:r>
-            <a:endParaRPr lang="en-US" sz="1700" dirty="0"/>
+              <a:t>26%</a:t>
+            </a:r>
+            <a:endParaRPr lang="en-US" sz="8000" dirty="0"/>
           </a:p>
         </p:txBody>
       </p:sp>
@@ -3300,96 +3389,59 @@
         </p:nvSpPr>
         <p:spPr>
           <a:xfrm>
-            <a:off x="6217920" y="1234440"/>
-            <a:ext cx="2468880" cy="365760"/>
-          </a:xfrm>
-          <a:prstGeom prst="rect">
-            <a:avLst/>
-          </a:prstGeom>
-          <a:noFill/>
-          <a:ln/>
-        </p:spPr>
-        <p:txBody>
-          <a:bodyPr wrap="square" lIns="0" tIns="0" rIns="0" bIns="0" rtlCol="0" anchor="ctr"/>
-          <a:lstStyle/>
-          <a:p>
-            <a:pPr algn="r" indent="0" marL="0">
-              <a:buNone/>
-            </a:pPr>
-            <a:r>
-              <a:rPr lang="en-US" sz="2000" b="1" dirty="0">
-                <a:solidFill>
-                  <a:srgbClr val="8C1D40"/>
-                </a:solidFill>
-                <a:latin typeface="Cambria" pitchFamily="34" charset="0"/>
-                <a:ea typeface="Cambria" pitchFamily="34" charset="-122"/>
-                <a:cs typeface="Cambria" pitchFamily="34" charset="-120"/>
-              </a:rPr>
-              <a:t>26% smaller</a:t>
-            </a:r>
-            <a:endParaRPr lang="en-US" sz="2000" dirty="0"/>
-          </a:p>
-        </p:txBody>
-      </p:sp>
-      <p:sp>
-        <p:nvSpPr>
-          <p:cNvPr id="7" name="Text 4"/>
-          <p:cNvSpPr txBox="1"/>
-          <p:nvPr/>
-        </p:nvSpPr>
-        <p:spPr>
-          <a:xfrm>
-            <a:off x="457200" y="1691640"/>
-            <a:ext cx="1280160" cy="274320"/>
-          </a:xfrm>
-          <a:prstGeom prst="rect">
-            <a:avLst/>
-          </a:prstGeom>
-          <a:noFill/>
-          <a:ln/>
-        </p:spPr>
-        <p:txBody>
-          <a:bodyPr wrap="square" lIns="0" tIns="0" rIns="0" bIns="0" rtlCol="0" anchor="ctr"/>
+            <a:off x="457200" y="2377440"/>
+            <a:ext cx="3566160" cy="685800"/>
+          </a:xfrm>
+          <a:prstGeom prst="rect">
+            <a:avLst/>
+          </a:prstGeom>
+          <a:noFill/>
+          <a:ln/>
+        </p:spPr>
+        <p:txBody>
+          <a:bodyPr wrap="square" lIns="0" tIns="0" rIns="0" bIns="0" rtlCol="0" anchor="t"/>
           <a:lstStyle/>
           <a:p>
             <a:pPr indent="0" marL="0">
               <a:buNone/>
             </a:pPr>
             <a:r>
-              <a:rPr lang="en-US" sz="1100" dirty="0">
-                <a:solidFill>
-                  <a:srgbClr val="6B7280"/>
+              <a:rPr lang="en-US" sz="1500" dirty="0">
+                <a:solidFill>
+                  <a:srgbClr val="1F2937"/>
                 </a:solidFill>
                 <a:latin typeface="Calibri" pitchFamily="34" charset="0"/>
                 <a:ea typeface="Calibri" pitchFamily="34" charset="-122"/>
                 <a:cs typeface="Calibri" pitchFamily="34" charset="-120"/>
               </a:rPr>
-              <a:t>Standard PCI</a:t>
-            </a:r>
-            <a:endParaRPr lang="en-US" sz="1100" dirty="0"/>
-          </a:p>
-        </p:txBody>
-      </p:sp>
-      <p:sp>
-        <p:nvSpPr>
-          <p:cNvPr id="8" name="Shape 5"/>
+              <a:t>relative reduction in infarct size (CK-MB AUC) with enVast versus standard PCI</a:t>
+            </a:r>
+            <a:endParaRPr lang="en-US" sz="1500" dirty="0"/>
+          </a:p>
+        </p:txBody>
+      </p:sp>
+      <p:sp>
+        <p:nvSpPr>
+          <p:cNvPr id="7" name="Shape 4"/>
           <p:cNvSpPr/>
           <p:nvPr/>
         </p:nvSpPr>
         <p:spPr>
           <a:xfrm>
-            <a:off x="1783080" y="1709928"/>
-            <a:ext cx="6903720" cy="237744"/>
-          </a:xfrm>
-          <a:prstGeom prst="rect">
-            <a:avLst/>
+            <a:off x="457200" y="3291840"/>
+            <a:ext cx="1645920" cy="502920"/>
+          </a:xfrm>
+          <a:prstGeom prst="roundRect">
+            <a:avLst>
+              <a:gd name="adj" fmla="val 14545"/>
+            </a:avLst>
           </a:prstGeom>
           <a:solidFill>
-            <a:srgbClr val="A3AAB6"/>
+            <a:srgbClr val="F8F0F3"/>
           </a:solidFill>
           <a:ln w="12700">
             <a:solidFill>
-              <a:srgbClr val="A3AAB6"/>
+              <a:srgbClr val="F8F0F3"/>
             </a:solidFill>
             <a:prstDash val="solid"/>
           </a:ln>
@@ -3397,14 +3449,14 @@
       </p:sp>
       <p:sp>
         <p:nvSpPr>
-          <p:cNvPr id="9" name="Text 6"/>
-          <p:cNvSpPr txBox="1"/>
-          <p:nvPr/>
-        </p:nvSpPr>
-        <p:spPr>
-          <a:xfrm>
-            <a:off x="457200" y="2039112"/>
-            <a:ext cx="1280160" cy="274320"/>
+          <p:cNvPr id="8" name="Text 5"/>
+          <p:cNvSpPr txBox="1"/>
+          <p:nvPr/>
+        </p:nvSpPr>
+        <p:spPr>
+          <a:xfrm>
+            <a:off x="457200" y="3291840"/>
+            <a:ext cx="1645920" cy="502920"/>
           </a:xfrm>
           <a:prstGeom prst="rect">
             <a:avLst/>
@@ -3416,372 +3468,40 @@
           <a:bodyPr wrap="square" lIns="0" tIns="0" rIns="0" bIns="0" rtlCol="0" anchor="ctr"/>
           <a:lstStyle/>
           <a:p>
-            <a:pPr indent="0" marL="0">
-              <a:buNone/>
-            </a:pPr>
-            <a:r>
-              <a:rPr lang="en-US" sz="1100" dirty="0">
-                <a:solidFill>
-                  <a:srgbClr val="6B7280"/>
+            <a:pPr algn="ctr" indent="0" marL="0">
+              <a:buNone/>
+            </a:pPr>
+            <a:r>
+              <a:rPr lang="en-US" sz="1600" b="1" dirty="0">
+                <a:solidFill>
+                  <a:srgbClr val="8C1D40"/>
                 </a:solidFill>
                 <a:latin typeface="Calibri" pitchFamily="34" charset="0"/>
                 <a:ea typeface="Calibri" pitchFamily="34" charset="-122"/>
                 <a:cs typeface="Calibri" pitchFamily="34" charset="-120"/>
               </a:rPr>
-              <a:t>enVast + PCI</a:t>
-            </a:r>
-            <a:endParaRPr lang="en-US" sz="1100" dirty="0"/>
-          </a:p>
-        </p:txBody>
-      </p:sp>
-      <p:sp>
-        <p:nvSpPr>
-          <p:cNvPr id="10" name="Shape 7"/>
-          <p:cNvSpPr/>
-          <p:nvPr/>
-        </p:nvSpPr>
-        <p:spPr>
-          <a:xfrm>
-            <a:off x="1783080" y="2057400"/>
-            <a:ext cx="5108753" cy="237744"/>
-          </a:xfrm>
-          <a:prstGeom prst="rect">
-            <a:avLst/>
-          </a:prstGeom>
-          <a:solidFill>
-            <a:srgbClr val="8C1D40"/>
-          </a:solidFill>
-          <a:ln w="12700">
-            <a:solidFill>
-              <a:srgbClr val="8C1D40"/>
-            </a:solidFill>
-            <a:prstDash val="solid"/>
-          </a:ln>
-        </p:spPr>
-      </p:sp>
-      <p:sp>
-        <p:nvSpPr>
-          <p:cNvPr id="11" name="Text 8"/>
-          <p:cNvSpPr txBox="1"/>
-          <p:nvPr/>
-        </p:nvSpPr>
-        <p:spPr>
-          <a:xfrm>
-            <a:off x="7028993" y="2039112"/>
-            <a:ext cx="1645920" cy="274320"/>
-          </a:xfrm>
-          <a:prstGeom prst="rect">
-            <a:avLst/>
-          </a:prstGeom>
-          <a:noFill/>
-          <a:ln/>
-        </p:spPr>
-        <p:txBody>
-          <a:bodyPr wrap="square" lIns="0" tIns="0" rIns="0" bIns="0" rtlCol="0" anchor="ctr"/>
-          <a:lstStyle/>
-          <a:p>
-            <a:pPr indent="0" marL="0">
-              <a:buNone/>
-            </a:pPr>
-            <a:r>
-              <a:rPr lang="en-US" sz="1100" i="1" dirty="0">
-                <a:solidFill>
-                  <a:srgbClr val="1F2937"/>
-                </a:solidFill>
-                <a:latin typeface="Calibri" pitchFamily="34" charset="0"/>
-                <a:ea typeface="Calibri" pitchFamily="34" charset="-122"/>
-                <a:cs typeface="Calibri" pitchFamily="34" charset="-120"/>
-              </a:rPr>
-              <a:t>Significant, P = 0.001</a:t>
-            </a:r>
-            <a:endParaRPr lang="en-US" sz="1100" dirty="0"/>
-          </a:p>
-        </p:txBody>
-      </p:sp>
-      <p:sp>
-        <p:nvSpPr>
-          <p:cNvPr id="12" name="Text 9"/>
-          <p:cNvSpPr txBox="1"/>
-          <p:nvPr/>
-        </p:nvSpPr>
-        <p:spPr>
-          <a:xfrm>
-            <a:off x="457200" y="2743200"/>
-            <a:ext cx="5486400" cy="365760"/>
-          </a:xfrm>
-          <a:prstGeom prst="rect">
-            <a:avLst/>
-          </a:prstGeom>
-          <a:noFill/>
-          <a:ln/>
-        </p:spPr>
-        <p:txBody>
-          <a:bodyPr wrap="square" lIns="0" tIns="0" rIns="0" bIns="0" rtlCol="0" anchor="ctr"/>
-          <a:lstStyle/>
-          <a:p>
-            <a:pPr indent="0" marL="0">
-              <a:buNone/>
-            </a:pPr>
-            <a:r>
-              <a:rPr lang="en-US" sz="1700" b="1" dirty="0">
-                <a:solidFill>
-                  <a:srgbClr val="1F2937"/>
-                </a:solidFill>
-                <a:latin typeface="Cambria" pitchFamily="34" charset="0"/>
-                <a:ea typeface="Cambria" pitchFamily="34" charset="-122"/>
-                <a:cs typeface="Cambria" pitchFamily="34" charset="-120"/>
-              </a:rPr>
-              <a:t>Cardiac MRI at day 3 (secondary)</a:t>
-            </a:r>
-            <a:endParaRPr lang="en-US" sz="1700" dirty="0"/>
-          </a:p>
-        </p:txBody>
-      </p:sp>
-      <p:sp>
-        <p:nvSpPr>
-          <p:cNvPr id="13" name="Text 10"/>
-          <p:cNvSpPr txBox="1"/>
-          <p:nvPr/>
-        </p:nvSpPr>
-        <p:spPr>
-          <a:xfrm>
-            <a:off x="6217920" y="2743200"/>
-            <a:ext cx="2468880" cy="365760"/>
-          </a:xfrm>
-          <a:prstGeom prst="rect">
-            <a:avLst/>
-          </a:prstGeom>
-          <a:noFill/>
-          <a:ln/>
-        </p:spPr>
-        <p:txBody>
-          <a:bodyPr wrap="square" lIns="0" tIns="0" rIns="0" bIns="0" rtlCol="0" anchor="ctr"/>
-          <a:lstStyle/>
-          <a:p>
-            <a:pPr algn="r" indent="0" marL="0">
-              <a:buNone/>
-            </a:pPr>
-            <a:r>
-              <a:rPr lang="en-US" sz="2000" b="1" dirty="0">
-                <a:solidFill>
-                  <a:srgbClr val="8C1D40"/>
-                </a:solidFill>
-                <a:latin typeface="Cambria" pitchFamily="34" charset="0"/>
-                <a:ea typeface="Cambria" pitchFamily="34" charset="-122"/>
-                <a:cs typeface="Cambria" pitchFamily="34" charset="-120"/>
-              </a:rPr>
-              <a:t>25% smaller</a:t>
-            </a:r>
-            <a:endParaRPr lang="en-US" sz="2000" dirty="0"/>
-          </a:p>
-        </p:txBody>
-      </p:sp>
-      <p:sp>
-        <p:nvSpPr>
-          <p:cNvPr id="14" name="Text 11"/>
-          <p:cNvSpPr txBox="1"/>
-          <p:nvPr/>
-        </p:nvSpPr>
-        <p:spPr>
-          <a:xfrm>
-            <a:off x="457200" y="3200400"/>
-            <a:ext cx="1280160" cy="274320"/>
-          </a:xfrm>
-          <a:prstGeom prst="rect">
-            <a:avLst/>
-          </a:prstGeom>
-          <a:noFill/>
-          <a:ln/>
-        </p:spPr>
-        <p:txBody>
-          <a:bodyPr wrap="square" lIns="0" tIns="0" rIns="0" bIns="0" rtlCol="0" anchor="ctr"/>
-          <a:lstStyle/>
-          <a:p>
-            <a:pPr indent="0" marL="0">
-              <a:buNone/>
-            </a:pPr>
-            <a:r>
-              <a:rPr lang="en-US" sz="1100" dirty="0">
-                <a:solidFill>
-                  <a:srgbClr val="6B7280"/>
-                </a:solidFill>
-                <a:latin typeface="Calibri" pitchFamily="34" charset="0"/>
-                <a:ea typeface="Calibri" pitchFamily="34" charset="-122"/>
-                <a:cs typeface="Calibri" pitchFamily="34" charset="-120"/>
-              </a:rPr>
-              <a:t>Standard PCI</a:t>
-            </a:r>
-            <a:endParaRPr lang="en-US" sz="1100" dirty="0"/>
-          </a:p>
-        </p:txBody>
-      </p:sp>
-      <p:sp>
-        <p:nvSpPr>
-          <p:cNvPr id="15" name="Shape 12"/>
-          <p:cNvSpPr/>
-          <p:nvPr/>
-        </p:nvSpPr>
-        <p:spPr>
-          <a:xfrm>
-            <a:off x="1783080" y="3218688"/>
-            <a:ext cx="6903720" cy="237744"/>
-          </a:xfrm>
-          <a:prstGeom prst="rect">
-            <a:avLst/>
-          </a:prstGeom>
-          <a:solidFill>
-            <a:srgbClr val="A3AAB6"/>
-          </a:solidFill>
-          <a:ln w="12700">
-            <a:solidFill>
-              <a:srgbClr val="A3AAB6"/>
-            </a:solidFill>
-            <a:prstDash val="solid"/>
-          </a:ln>
-        </p:spPr>
-      </p:sp>
-      <p:sp>
-        <p:nvSpPr>
-          <p:cNvPr id="16" name="Text 13"/>
-          <p:cNvSpPr txBox="1"/>
-          <p:nvPr/>
-        </p:nvSpPr>
-        <p:spPr>
-          <a:xfrm>
-            <a:off x="457200" y="3547872"/>
-            <a:ext cx="1280160" cy="274320"/>
-          </a:xfrm>
-          <a:prstGeom prst="rect">
-            <a:avLst/>
-          </a:prstGeom>
-          <a:noFill/>
-          <a:ln/>
-        </p:spPr>
-        <p:txBody>
-          <a:bodyPr wrap="square" lIns="0" tIns="0" rIns="0" bIns="0" rtlCol="0" anchor="ctr"/>
-          <a:lstStyle/>
-          <a:p>
-            <a:pPr indent="0" marL="0">
-              <a:buNone/>
-            </a:pPr>
-            <a:r>
-              <a:rPr lang="en-US" sz="1100" dirty="0">
-                <a:solidFill>
-                  <a:srgbClr val="6B7280"/>
-                </a:solidFill>
-                <a:latin typeface="Calibri" pitchFamily="34" charset="0"/>
-                <a:ea typeface="Calibri" pitchFamily="34" charset="-122"/>
-                <a:cs typeface="Calibri" pitchFamily="34" charset="-120"/>
-              </a:rPr>
-              <a:t>enVast + PCI</a:t>
-            </a:r>
-            <a:endParaRPr lang="en-US" sz="1100" dirty="0"/>
-          </a:p>
-        </p:txBody>
-      </p:sp>
-      <p:sp>
-        <p:nvSpPr>
-          <p:cNvPr id="17" name="Shape 14"/>
-          <p:cNvSpPr/>
-          <p:nvPr/>
-        </p:nvSpPr>
-        <p:spPr>
-          <a:xfrm>
-            <a:off x="1783080" y="3566160"/>
-            <a:ext cx="5177790" cy="237744"/>
-          </a:xfrm>
-          <a:prstGeom prst="rect">
-            <a:avLst/>
-          </a:prstGeom>
-          <a:solidFill>
-            <a:srgbClr val="8C1D40"/>
-          </a:solidFill>
-          <a:ln w="12700">
-            <a:solidFill>
-              <a:srgbClr val="8C1D40"/>
-            </a:solidFill>
-            <a:prstDash val="solid"/>
-          </a:ln>
-        </p:spPr>
-      </p:sp>
-      <p:sp>
-        <p:nvSpPr>
-          <p:cNvPr id="18" name="Text 15"/>
-          <p:cNvSpPr txBox="1"/>
-          <p:nvPr/>
-        </p:nvSpPr>
-        <p:spPr>
-          <a:xfrm>
-            <a:off x="7098030" y="3547872"/>
-            <a:ext cx="1645920" cy="274320"/>
-          </a:xfrm>
-          <a:prstGeom prst="rect">
-            <a:avLst/>
-          </a:prstGeom>
-          <a:noFill/>
-          <a:ln/>
-        </p:spPr>
-        <p:txBody>
-          <a:bodyPr wrap="square" lIns="0" tIns="0" rIns="0" bIns="0" rtlCol="0" anchor="ctr"/>
-          <a:lstStyle/>
-          <a:p>
-            <a:pPr indent="0" marL="0">
-              <a:buNone/>
-            </a:pPr>
-            <a:r>
-              <a:rPr lang="en-US" sz="1100" i="1" dirty="0">
-                <a:solidFill>
-                  <a:srgbClr val="1F2937"/>
-                </a:solidFill>
-                <a:latin typeface="Calibri" pitchFamily="34" charset="0"/>
-                <a:ea typeface="Calibri" pitchFamily="34" charset="-122"/>
-                <a:cs typeface="Calibri" pitchFamily="34" charset="-120"/>
-              </a:rPr>
-              <a:t>Trend in the same direction</a:t>
-            </a:r>
-            <a:endParaRPr lang="en-US" sz="1100" dirty="0"/>
-          </a:p>
-        </p:txBody>
-      </p:sp>
-      <p:sp>
-        <p:nvSpPr>
-          <p:cNvPr id="19" name="Text 16"/>
-          <p:cNvSpPr txBox="1"/>
-          <p:nvPr/>
-        </p:nvSpPr>
-        <p:spPr>
-          <a:xfrm>
-            <a:off x="457200" y="4206240"/>
-            <a:ext cx="8229600" cy="320040"/>
-          </a:xfrm>
-          <a:prstGeom prst="rect">
-            <a:avLst/>
-          </a:prstGeom>
-          <a:noFill/>
-          <a:ln/>
-        </p:spPr>
-        <p:txBody>
-          <a:bodyPr wrap="square" lIns="0" tIns="0" rIns="0" bIns="0" rtlCol="0" anchor="ctr"/>
-          <a:lstStyle/>
-          <a:p>
-            <a:pPr indent="0" marL="0">
-              <a:buNone/>
-            </a:pPr>
-            <a:r>
-              <a:rPr lang="en-US" sz="1300" i="1" dirty="0">
-                <a:solidFill>
-                  <a:srgbClr val="6B7280"/>
-                </a:solidFill>
-                <a:latin typeface="Calibri" pitchFamily="34" charset="0"/>
-                <a:ea typeface="Calibri" pitchFamily="34" charset="-122"/>
-                <a:cs typeface="Calibri" pitchFamily="34" charset="-120"/>
-              </a:rPr>
-              <a:t>Two different measures, a blood test and imaging, point the same way.</a:t>
-            </a:r>
-            <a:endParaRPr lang="en-US" sz="1300" dirty="0"/>
-          </a:p>
-        </p:txBody>
-      </p:sp>
+              <a:t>P = 0.001</a:t>
+            </a:r>
+            <a:endParaRPr lang="en-US" sz="1600" dirty="0"/>
+          </a:p>
+        </p:txBody>
+      </p:sp>
+      <p:graphicFrame>
+        <p:nvGraphicFramePr>
+          <p:cNvPr id="9" name="Chart 0" descr=""/>
+          <p:cNvGraphicFramePr/>
+          <p:nvPr/>
+        </p:nvGraphicFramePr>
+        <p:xfrm>
+          <a:off x="4572000" y="1097280"/>
+          <a:ext cx="4114800" cy="3383280"/>
+        </p:xfrm>
+        <a:graphic xmlns:a="http://schemas.openxmlformats.org/drawingml/2006/main">
+          <a:graphicData uri="http://schemas.openxmlformats.org/drawingml/2006/chart">
+            <c:chart xmlns:c="http://schemas.openxmlformats.org/drawingml/2006/chart" r:id="rId1"/>
+          </a:graphicData>
+        </a:graphic>
+      </p:graphicFrame>
     </p:spTree>
   </p:cSld>
   <p:clrMapOvr>
@@ -3847,7 +3567,7 @@
                 <a:ea typeface="Cambria" pitchFamily="34" charset="-122"/>
                 <a:cs typeface="Cambria" pitchFamily="34" charset="-120"/>
               </a:rPr>
-              <a:t>Safety at 30 days</a:t>
+              <a:t>Secondary endpoint: cardiac MRI</a:t>
             </a:r>
             <a:endParaRPr lang="en-US" sz="2800" dirty="0"/>
           </a:p>
@@ -3892,44 +3612,143 @@
           </a:p>
         </p:txBody>
       </p:sp>
-      <p:graphicFrame>
-        <p:nvGraphicFramePr>
-          <p:cNvPr id="5" name="Chart 0" descr=""/>
-          <p:cNvGraphicFramePr/>
-          <p:nvPr/>
-        </p:nvGraphicFramePr>
-        <p:xfrm>
-          <a:off x="365760" y="1051560"/>
-          <a:ext cx="5303520" cy="3474720"/>
-        </p:xfrm>
-        <a:graphic xmlns:a="http://schemas.openxmlformats.org/drawingml/2006/main">
-          <a:graphicData uri="http://schemas.openxmlformats.org/drawingml/2006/chart">
-            <c:chart xmlns:c="http://schemas.openxmlformats.org/drawingml/2006/chart" r:id="rId1"/>
-          </a:graphicData>
-        </a:graphic>
-      </p:graphicFrame>
-      <p:sp>
-        <p:nvSpPr>
-          <p:cNvPr id="6" name="Shape 2"/>
+      <p:sp>
+        <p:nvSpPr>
+          <p:cNvPr id="5" name="Text 2"/>
+          <p:cNvSpPr txBox="1"/>
+          <p:nvPr/>
+        </p:nvSpPr>
+        <p:spPr>
+          <a:xfrm>
+            <a:off x="457200" y="1234440"/>
+            <a:ext cx="5486400" cy="365760"/>
+          </a:xfrm>
+          <a:prstGeom prst="rect">
+            <a:avLst/>
+          </a:prstGeom>
+          <a:noFill/>
+          <a:ln/>
+        </p:spPr>
+        <p:txBody>
+          <a:bodyPr wrap="square" lIns="0" tIns="0" rIns="0" bIns="0" rtlCol="0" anchor="ctr"/>
+          <a:lstStyle/>
+          <a:p>
+            <a:pPr indent="0" marL="0">
+              <a:buNone/>
+            </a:pPr>
+            <a:r>
+              <a:rPr lang="en-US" sz="1700" b="1" dirty="0">
+                <a:solidFill>
+                  <a:srgbClr val="1F2937"/>
+                </a:solidFill>
+                <a:latin typeface="Cambria" pitchFamily="34" charset="0"/>
+                <a:ea typeface="Cambria" pitchFamily="34" charset="-122"/>
+                <a:cs typeface="Cambria" pitchFamily="34" charset="-120"/>
+              </a:rPr>
+              <a:t>CK-MB AUC (primary)</a:t>
+            </a:r>
+            <a:endParaRPr lang="en-US" sz="1700" dirty="0"/>
+          </a:p>
+        </p:txBody>
+      </p:sp>
+      <p:sp>
+        <p:nvSpPr>
+          <p:cNvPr id="6" name="Text 3"/>
+          <p:cNvSpPr txBox="1"/>
+          <p:nvPr/>
+        </p:nvSpPr>
+        <p:spPr>
+          <a:xfrm>
+            <a:off x="6217920" y="1234440"/>
+            <a:ext cx="2468880" cy="365760"/>
+          </a:xfrm>
+          <a:prstGeom prst="rect">
+            <a:avLst/>
+          </a:prstGeom>
+          <a:noFill/>
+          <a:ln/>
+        </p:spPr>
+        <p:txBody>
+          <a:bodyPr wrap="square" lIns="0" tIns="0" rIns="0" bIns="0" rtlCol="0" anchor="ctr"/>
+          <a:lstStyle/>
+          <a:p>
+            <a:pPr algn="r" indent="0" marL="0">
+              <a:buNone/>
+            </a:pPr>
+            <a:r>
+              <a:rPr lang="en-US" sz="2000" b="1" dirty="0">
+                <a:solidFill>
+                  <a:srgbClr val="8C1D40"/>
+                </a:solidFill>
+                <a:latin typeface="Cambria" pitchFamily="34" charset="0"/>
+                <a:ea typeface="Cambria" pitchFamily="34" charset="-122"/>
+                <a:cs typeface="Cambria" pitchFamily="34" charset="-120"/>
+              </a:rPr>
+              <a:t>26% smaller</a:t>
+            </a:r>
+            <a:endParaRPr lang="en-US" sz="2000" dirty="0"/>
+          </a:p>
+        </p:txBody>
+      </p:sp>
+      <p:sp>
+        <p:nvSpPr>
+          <p:cNvPr id="7" name="Text 4"/>
+          <p:cNvSpPr txBox="1"/>
+          <p:nvPr/>
+        </p:nvSpPr>
+        <p:spPr>
+          <a:xfrm>
+            <a:off x="457200" y="1691640"/>
+            <a:ext cx="1280160" cy="274320"/>
+          </a:xfrm>
+          <a:prstGeom prst="rect">
+            <a:avLst/>
+          </a:prstGeom>
+          <a:noFill/>
+          <a:ln/>
+        </p:spPr>
+        <p:txBody>
+          <a:bodyPr wrap="square" lIns="0" tIns="0" rIns="0" bIns="0" rtlCol="0" anchor="ctr"/>
+          <a:lstStyle/>
+          <a:p>
+            <a:pPr indent="0" marL="0">
+              <a:buNone/>
+            </a:pPr>
+            <a:r>
+              <a:rPr lang="en-US" sz="1100" dirty="0">
+                <a:solidFill>
+                  <a:srgbClr val="6B7280"/>
+                </a:solidFill>
+                <a:latin typeface="Calibri" pitchFamily="34" charset="0"/>
+                <a:ea typeface="Calibri" pitchFamily="34" charset="-122"/>
+                <a:cs typeface="Calibri" pitchFamily="34" charset="-120"/>
+              </a:rPr>
+              <a:t>Standard PCI</a:t>
+            </a:r>
+            <a:endParaRPr lang="en-US" sz="1100" dirty="0"/>
+          </a:p>
+        </p:txBody>
+      </p:sp>
+      <p:sp>
+        <p:nvSpPr>
+          <p:cNvPr id="8" name="Shape 5"/>
           <p:cNvSpPr/>
           <p:nvPr/>
         </p:nvSpPr>
         <p:spPr>
           <a:xfrm>
-            <a:off x="5943600" y="1188720"/>
-            <a:ext cx="2743200" cy="3200400"/>
-          </a:xfrm>
-          <a:prstGeom prst="roundRect">
-            <a:avLst>
-              <a:gd name="adj" fmla="val 2667"/>
-            </a:avLst>
+            <a:off x="1783080" y="1709928"/>
+            <a:ext cx="6903720" cy="237744"/>
+          </a:xfrm>
+          <a:prstGeom prst="rect">
+            <a:avLst/>
           </a:prstGeom>
           <a:solidFill>
-            <a:srgbClr val="F8F0F3"/>
+            <a:srgbClr val="A3AAB6"/>
           </a:solidFill>
           <a:ln w="12700">
             <a:solidFill>
-              <a:srgbClr val="F8F0F3"/>
+              <a:srgbClr val="A3AAB6"/>
             </a:solidFill>
             <a:prstDash val="solid"/>
           </a:ln>
@@ -3937,115 +3756,339 @@
       </p:sp>
       <p:sp>
         <p:nvSpPr>
-          <p:cNvPr id="7" name="Text 3"/>
-          <p:cNvSpPr txBox="1"/>
-          <p:nvPr/>
-        </p:nvSpPr>
-        <p:spPr>
-          <a:xfrm>
-            <a:off x="6172200" y="1371600"/>
-            <a:ext cx="2331720" cy="731520"/>
-          </a:xfrm>
-          <a:prstGeom prst="rect">
-            <a:avLst/>
-          </a:prstGeom>
-          <a:noFill/>
-          <a:ln/>
-        </p:spPr>
-        <p:txBody>
-          <a:bodyPr wrap="square" lIns="0" tIns="0" rIns="0" bIns="0" rtlCol="0" anchor="t"/>
+          <p:cNvPr id="9" name="Text 6"/>
+          <p:cNvSpPr txBox="1"/>
+          <p:nvPr/>
+        </p:nvSpPr>
+        <p:spPr>
+          <a:xfrm>
+            <a:off x="457200" y="2039112"/>
+            <a:ext cx="1280160" cy="274320"/>
+          </a:xfrm>
+          <a:prstGeom prst="rect">
+            <a:avLst/>
+          </a:prstGeom>
+          <a:noFill/>
+          <a:ln/>
+        </p:spPr>
+        <p:txBody>
+          <a:bodyPr wrap="square" lIns="0" tIns="0" rIns="0" bIns="0" rtlCol="0" anchor="ctr"/>
           <a:lstStyle/>
           <a:p>
             <a:pPr indent="0" marL="0">
               <a:buNone/>
             </a:pPr>
             <a:r>
-              <a:rPr lang="en-US" sz="1600" b="1" dirty="0">
-                <a:solidFill>
-                  <a:srgbClr val="8C1D40"/>
+              <a:rPr lang="en-US" sz="1100" dirty="0">
+                <a:solidFill>
+                  <a:srgbClr val="6B7280"/>
+                </a:solidFill>
+                <a:latin typeface="Calibri" pitchFamily="34" charset="0"/>
+                <a:ea typeface="Calibri" pitchFamily="34" charset="-122"/>
+                <a:cs typeface="Calibri" pitchFamily="34" charset="-120"/>
+              </a:rPr>
+              <a:t>enVast + PCI</a:t>
+            </a:r>
+            <a:endParaRPr lang="en-US" sz="1100" dirty="0"/>
+          </a:p>
+        </p:txBody>
+      </p:sp>
+      <p:sp>
+        <p:nvSpPr>
+          <p:cNvPr id="10" name="Shape 7"/>
+          <p:cNvSpPr/>
+          <p:nvPr/>
+        </p:nvSpPr>
+        <p:spPr>
+          <a:xfrm>
+            <a:off x="1783080" y="2057400"/>
+            <a:ext cx="5108753" cy="237744"/>
+          </a:xfrm>
+          <a:prstGeom prst="rect">
+            <a:avLst/>
+          </a:prstGeom>
+          <a:solidFill>
+            <a:srgbClr val="8C1D40"/>
+          </a:solidFill>
+          <a:ln w="12700">
+            <a:solidFill>
+              <a:srgbClr val="8C1D40"/>
+            </a:solidFill>
+            <a:prstDash val="solid"/>
+          </a:ln>
+        </p:spPr>
+      </p:sp>
+      <p:sp>
+        <p:nvSpPr>
+          <p:cNvPr id="11" name="Text 8"/>
+          <p:cNvSpPr txBox="1"/>
+          <p:nvPr/>
+        </p:nvSpPr>
+        <p:spPr>
+          <a:xfrm>
+            <a:off x="7028993" y="2039112"/>
+            <a:ext cx="1645920" cy="274320"/>
+          </a:xfrm>
+          <a:prstGeom prst="rect">
+            <a:avLst/>
+          </a:prstGeom>
+          <a:noFill/>
+          <a:ln/>
+        </p:spPr>
+        <p:txBody>
+          <a:bodyPr wrap="square" lIns="0" tIns="0" rIns="0" bIns="0" rtlCol="0" anchor="ctr"/>
+          <a:lstStyle/>
+          <a:p>
+            <a:pPr indent="0" marL="0">
+              <a:buNone/>
+            </a:pPr>
+            <a:r>
+              <a:rPr lang="en-US" sz="1100" i="1" dirty="0">
+                <a:solidFill>
+                  <a:srgbClr val="1F2937"/>
+                </a:solidFill>
+                <a:latin typeface="Calibri" pitchFamily="34" charset="0"/>
+                <a:ea typeface="Calibri" pitchFamily="34" charset="-122"/>
+                <a:cs typeface="Calibri" pitchFamily="34" charset="-120"/>
+              </a:rPr>
+              <a:t>Significant, P = 0.001</a:t>
+            </a:r>
+            <a:endParaRPr lang="en-US" sz="1100" dirty="0"/>
+          </a:p>
+        </p:txBody>
+      </p:sp>
+      <p:sp>
+        <p:nvSpPr>
+          <p:cNvPr id="12" name="Text 9"/>
+          <p:cNvSpPr txBox="1"/>
+          <p:nvPr/>
+        </p:nvSpPr>
+        <p:spPr>
+          <a:xfrm>
+            <a:off x="457200" y="2743200"/>
+            <a:ext cx="5486400" cy="365760"/>
+          </a:xfrm>
+          <a:prstGeom prst="rect">
+            <a:avLst/>
+          </a:prstGeom>
+          <a:noFill/>
+          <a:ln/>
+        </p:spPr>
+        <p:txBody>
+          <a:bodyPr wrap="square" lIns="0" tIns="0" rIns="0" bIns="0" rtlCol="0" anchor="ctr"/>
+          <a:lstStyle/>
+          <a:p>
+            <a:pPr indent="0" marL="0">
+              <a:buNone/>
+            </a:pPr>
+            <a:r>
+              <a:rPr lang="en-US" sz="1700" b="1" dirty="0">
+                <a:solidFill>
+                  <a:srgbClr val="1F2937"/>
                 </a:solidFill>
                 <a:latin typeface="Cambria" pitchFamily="34" charset="0"/>
                 <a:ea typeface="Cambria" pitchFamily="34" charset="-122"/>
                 <a:cs typeface="Cambria" pitchFamily="34" charset="-120"/>
               </a:rPr>
-              <a:t>No strokes and no deaths with enVast</a:t>
-            </a:r>
-            <a:endParaRPr lang="en-US" sz="1600" dirty="0"/>
-          </a:p>
-        </p:txBody>
-      </p:sp>
-      <p:sp>
-        <p:nvSpPr>
-          <p:cNvPr id="8" name="Text 4"/>
-          <p:cNvSpPr txBox="1"/>
-          <p:nvPr/>
-        </p:nvSpPr>
-        <p:spPr>
-          <a:xfrm>
-            <a:off x="6172200" y="2194560"/>
-            <a:ext cx="2331720" cy="2103120"/>
-          </a:xfrm>
-          <a:prstGeom prst="rect">
-            <a:avLst/>
-          </a:prstGeom>
-          <a:noFill/>
-          <a:ln/>
-        </p:spPr>
-        <p:txBody>
-          <a:bodyPr wrap="square" lIns="0" tIns="0" rIns="0" bIns="0" rtlCol="0" anchor="t"/>
-          <a:lstStyle/>
-          <a:p>
-            <a:pPr marL="342900" indent="-342900">
-              <a:spcAft>
-                <a:spcPts val="800"/>
-              </a:spcAft>
-              <a:buSzPct val="100000"/>
-              <a:buChar char="•"/>
-            </a:pPr>
-            <a:r>
-              <a:rPr lang="en-US" sz="1300" dirty="0">
-                <a:solidFill>
-                  <a:srgbClr val="1F2937"/>
+              <a:t>Cardiac MRI at day 3 (secondary)</a:t>
+            </a:r>
+            <a:endParaRPr lang="en-US" sz="1700" dirty="0"/>
+          </a:p>
+        </p:txBody>
+      </p:sp>
+      <p:sp>
+        <p:nvSpPr>
+          <p:cNvPr id="13" name="Text 10"/>
+          <p:cNvSpPr txBox="1"/>
+          <p:nvPr/>
+        </p:nvSpPr>
+        <p:spPr>
+          <a:xfrm>
+            <a:off x="6217920" y="2743200"/>
+            <a:ext cx="2468880" cy="365760"/>
+          </a:xfrm>
+          <a:prstGeom prst="rect">
+            <a:avLst/>
+          </a:prstGeom>
+          <a:noFill/>
+          <a:ln/>
+        </p:spPr>
+        <p:txBody>
+          <a:bodyPr wrap="square" lIns="0" tIns="0" rIns="0" bIns="0" rtlCol="0" anchor="ctr"/>
+          <a:lstStyle/>
+          <a:p>
+            <a:pPr algn="r" indent="0" marL="0">
+              <a:buNone/>
+            </a:pPr>
+            <a:r>
+              <a:rPr lang="en-US" sz="2000" b="1" dirty="0">
+                <a:solidFill>
+                  <a:srgbClr val="8C1D40"/>
+                </a:solidFill>
+                <a:latin typeface="Cambria" pitchFamily="34" charset="0"/>
+                <a:ea typeface="Cambria" pitchFamily="34" charset="-122"/>
+                <a:cs typeface="Cambria" pitchFamily="34" charset="-120"/>
+              </a:rPr>
+              <a:t>25% smaller</a:t>
+            </a:r>
+            <a:endParaRPr lang="en-US" sz="2000" dirty="0"/>
+          </a:p>
+        </p:txBody>
+      </p:sp>
+      <p:sp>
+        <p:nvSpPr>
+          <p:cNvPr id="14" name="Text 11"/>
+          <p:cNvSpPr txBox="1"/>
+          <p:nvPr/>
+        </p:nvSpPr>
+        <p:spPr>
+          <a:xfrm>
+            <a:off x="457200" y="3200400"/>
+            <a:ext cx="1280160" cy="274320"/>
+          </a:xfrm>
+          <a:prstGeom prst="rect">
+            <a:avLst/>
+          </a:prstGeom>
+          <a:noFill/>
+          <a:ln/>
+        </p:spPr>
+        <p:txBody>
+          <a:bodyPr wrap="square" lIns="0" tIns="0" rIns="0" bIns="0" rtlCol="0" anchor="ctr"/>
+          <a:lstStyle/>
+          <a:p>
+            <a:pPr indent="0" marL="0">
+              <a:buNone/>
+            </a:pPr>
+            <a:r>
+              <a:rPr lang="en-US" sz="1100" dirty="0">
+                <a:solidFill>
+                  <a:srgbClr val="6B7280"/>
                 </a:solidFill>
                 <a:latin typeface="Calibri" pitchFamily="34" charset="0"/>
                 <a:ea typeface="Calibri" pitchFamily="34" charset="-122"/>
                 <a:cs typeface="Calibri" pitchFamily="34" charset="-120"/>
               </a:rPr>
-              <a:t>Important because aspiration in TOTAL increased stroke</a:t>
-            </a:r>
-            <a:endParaRPr lang="en-US" sz="1300" dirty="0"/>
-          </a:p>
-          <a:p>
-            <a:pPr marL="342900" indent="-342900">
-              <a:spcAft>
-                <a:spcPts val="800"/>
-              </a:spcAft>
-              <a:buSzPct val="100000"/>
-              <a:buChar char="•"/>
-            </a:pPr>
-            <a:r>
-              <a:rPr lang="en-US" sz="1300" dirty="0">
-                <a:solidFill>
-                  <a:srgbClr val="1F2937"/>
+              <a:t>Standard PCI</a:t>
+            </a:r>
+            <a:endParaRPr lang="en-US" sz="1100" dirty="0"/>
+          </a:p>
+        </p:txBody>
+      </p:sp>
+      <p:sp>
+        <p:nvSpPr>
+          <p:cNvPr id="15" name="Shape 12"/>
+          <p:cNvSpPr/>
+          <p:nvPr/>
+        </p:nvSpPr>
+        <p:spPr>
+          <a:xfrm>
+            <a:off x="1783080" y="3218688"/>
+            <a:ext cx="6903720" cy="237744"/>
+          </a:xfrm>
+          <a:prstGeom prst="rect">
+            <a:avLst/>
+          </a:prstGeom>
+          <a:solidFill>
+            <a:srgbClr val="A3AAB6"/>
+          </a:solidFill>
+          <a:ln w="12700">
+            <a:solidFill>
+              <a:srgbClr val="A3AAB6"/>
+            </a:solidFill>
+            <a:prstDash val="solid"/>
+          </a:ln>
+        </p:spPr>
+      </p:sp>
+      <p:sp>
+        <p:nvSpPr>
+          <p:cNvPr id="16" name="Text 13"/>
+          <p:cNvSpPr txBox="1"/>
+          <p:nvPr/>
+        </p:nvSpPr>
+        <p:spPr>
+          <a:xfrm>
+            <a:off x="457200" y="3547872"/>
+            <a:ext cx="1280160" cy="274320"/>
+          </a:xfrm>
+          <a:prstGeom prst="rect">
+            <a:avLst/>
+          </a:prstGeom>
+          <a:noFill/>
+          <a:ln/>
+        </p:spPr>
+        <p:txBody>
+          <a:bodyPr wrap="square" lIns="0" tIns="0" rIns="0" bIns="0" rtlCol="0" anchor="ctr"/>
+          <a:lstStyle/>
+          <a:p>
+            <a:pPr indent="0" marL="0">
+              <a:buNone/>
+            </a:pPr>
+            <a:r>
+              <a:rPr lang="en-US" sz="1100" dirty="0">
+                <a:solidFill>
+                  <a:srgbClr val="6B7280"/>
                 </a:solidFill>
                 <a:latin typeface="Calibri" pitchFamily="34" charset="0"/>
                 <a:ea typeface="Calibri" pitchFamily="34" charset="-122"/>
                 <a:cs typeface="Calibri" pitchFamily="34" charset="-120"/>
               </a:rPr>
-              <a:t>Very few events overall</a:t>
-            </a:r>
-            <a:endParaRPr lang="en-US" sz="1300" dirty="0"/>
-          </a:p>
-          <a:p>
-            <a:pPr marL="342900" indent="-342900">
-              <a:spcAft>
-                <a:spcPts val="800"/>
-              </a:spcAft>
-              <a:buSzPct val="100000"/>
-              <a:buChar char="•"/>
-            </a:pPr>
-            <a:r>
-              <a:rPr lang="en-US" sz="1300" dirty="0">
+              <a:t>enVast + PCI</a:t>
+            </a:r>
+            <a:endParaRPr lang="en-US" sz="1100" dirty="0"/>
+          </a:p>
+        </p:txBody>
+      </p:sp>
+      <p:sp>
+        <p:nvSpPr>
+          <p:cNvPr id="17" name="Shape 14"/>
+          <p:cNvSpPr/>
+          <p:nvPr/>
+        </p:nvSpPr>
+        <p:spPr>
+          <a:xfrm>
+            <a:off x="1783080" y="3566160"/>
+            <a:ext cx="5177790" cy="237744"/>
+          </a:xfrm>
+          <a:prstGeom prst="rect">
+            <a:avLst/>
+          </a:prstGeom>
+          <a:solidFill>
+            <a:srgbClr val="8C1D40"/>
+          </a:solidFill>
+          <a:ln w="12700">
+            <a:solidFill>
+              <a:srgbClr val="8C1D40"/>
+            </a:solidFill>
+            <a:prstDash val="solid"/>
+          </a:ln>
+        </p:spPr>
+      </p:sp>
+      <p:sp>
+        <p:nvSpPr>
+          <p:cNvPr id="18" name="Text 15"/>
+          <p:cNvSpPr txBox="1"/>
+          <p:nvPr/>
+        </p:nvSpPr>
+        <p:spPr>
+          <a:xfrm>
+            <a:off x="7098030" y="3547872"/>
+            <a:ext cx="1645920" cy="274320"/>
+          </a:xfrm>
+          <a:prstGeom prst="rect">
+            <a:avLst/>
+          </a:prstGeom>
+          <a:noFill/>
+          <a:ln/>
+        </p:spPr>
+        <p:txBody>
+          <a:bodyPr wrap="square" lIns="0" tIns="0" rIns="0" bIns="0" rtlCol="0" anchor="ctr"/>
+          <a:lstStyle/>
+          <a:p>
+            <a:pPr indent="0" marL="0">
+              <a:buNone/>
+            </a:pPr>
+            <a:r>
+              <a:rPr lang="en-US" sz="1100" i="1" dirty="0">
                 <a:solidFill>
                   <a:srgbClr val="1F2937"/>
                 </a:solidFill>
@@ -4053,7 +4096,46 @@
                 <a:ea typeface="Calibri" pitchFamily="34" charset="-122"/>
                 <a:cs typeface="Calibri" pitchFamily="34" charset="-120"/>
               </a:rPr>
-              <a:t>The trial was not powered for clinical outcomes</a:t>
+              <a:t>Trend in the same direction</a:t>
+            </a:r>
+            <a:endParaRPr lang="en-US" sz="1100" dirty="0"/>
+          </a:p>
+        </p:txBody>
+      </p:sp>
+      <p:sp>
+        <p:nvSpPr>
+          <p:cNvPr id="19" name="Text 16"/>
+          <p:cNvSpPr txBox="1"/>
+          <p:nvPr/>
+        </p:nvSpPr>
+        <p:spPr>
+          <a:xfrm>
+            <a:off x="457200" y="4206240"/>
+            <a:ext cx="8229600" cy="320040"/>
+          </a:xfrm>
+          <a:prstGeom prst="rect">
+            <a:avLst/>
+          </a:prstGeom>
+          <a:noFill/>
+          <a:ln/>
+        </p:spPr>
+        <p:txBody>
+          <a:bodyPr wrap="square" lIns="0" tIns="0" rIns="0" bIns="0" rtlCol="0" anchor="ctr"/>
+          <a:lstStyle/>
+          <a:p>
+            <a:pPr indent="0" marL="0">
+              <a:buNone/>
+            </a:pPr>
+            <a:r>
+              <a:rPr lang="en-US" sz="1300" i="1" dirty="0">
+                <a:solidFill>
+                  <a:srgbClr val="6B7280"/>
+                </a:solidFill>
+                <a:latin typeface="Calibri" pitchFamily="34" charset="0"/>
+                <a:ea typeface="Calibri" pitchFamily="34" charset="-122"/>
+                <a:cs typeface="Calibri" pitchFamily="34" charset="-120"/>
+              </a:rPr>
+              <a:t>Two different measures, a blood test and imaging, point the same way.</a:t>
             </a:r>
             <a:endParaRPr lang="en-US" sz="1300" dirty="0"/>
           </a:p>
@@ -4124,7 +4206,7 @@
                 <a:ea typeface="Cambria" pitchFamily="34" charset="-122"/>
                 <a:cs typeface="Cambria" pitchFamily="34" charset="-120"/>
               </a:rPr>
-              <a:t>Strengths</a:t>
+              <a:t>Safety at 30 days</a:t>
             </a:r>
             <a:endParaRPr lang="en-US" sz="2800" dirty="0"/>
           </a:p>
@@ -4169,20 +4251,36 @@
           </a:p>
         </p:txBody>
       </p:sp>
-      <p:sp>
-        <p:nvSpPr>
-          <p:cNvPr id="5" name="Shape 2"/>
+      <p:graphicFrame>
+        <p:nvGraphicFramePr>
+          <p:cNvPr id="5" name="Chart 0" descr=""/>
+          <p:cNvGraphicFramePr/>
+          <p:nvPr/>
+        </p:nvGraphicFramePr>
+        <p:xfrm>
+          <a:off x="365760" y="1051560"/>
+          <a:ext cx="5303520" cy="3474720"/>
+        </p:xfrm>
+        <a:graphic xmlns:a="http://schemas.openxmlformats.org/drawingml/2006/main">
+          <a:graphicData uri="http://schemas.openxmlformats.org/drawingml/2006/chart">
+            <c:chart xmlns:c="http://schemas.openxmlformats.org/drawingml/2006/chart" r:id="rId1"/>
+          </a:graphicData>
+        </a:graphic>
+      </p:graphicFrame>
+      <p:sp>
+        <p:nvSpPr>
+          <p:cNvPr id="6" name="Shape 2"/>
           <p:cNvSpPr/>
           <p:nvPr/>
         </p:nvSpPr>
         <p:spPr>
           <a:xfrm>
-            <a:off x="457200" y="1234440"/>
-            <a:ext cx="4023360" cy="1280160"/>
+            <a:off x="5943600" y="1188720"/>
+            <a:ext cx="2743200" cy="3200400"/>
           </a:xfrm>
           <a:prstGeom prst="roundRect">
             <a:avLst>
-              <a:gd name="adj" fmla="val 5714"/>
+              <a:gd name="adj" fmla="val 2667"/>
             </a:avLst>
           </a:prstGeom>
           <a:solidFill>
@@ -4198,72 +4296,23 @@
       </p:sp>
       <p:sp>
         <p:nvSpPr>
-          <p:cNvPr id="6" name="Shape 3"/>
-          <p:cNvSpPr/>
-          <p:nvPr/>
-        </p:nvSpPr>
-        <p:spPr>
-          <a:xfrm>
-            <a:off x="731520" y="1508760"/>
-            <a:ext cx="411480" cy="411480"/>
-          </a:xfrm>
-          <a:prstGeom prst="ellipse">
-            <a:avLst/>
-          </a:prstGeom>
-          <a:solidFill>
-            <a:srgbClr val="8C1D40"/>
-          </a:solidFill>
-          <a:ln w="12700">
-            <a:solidFill>
-              <a:srgbClr val="8C1D40"/>
-            </a:solidFill>
-            <a:prstDash val="solid"/>
-          </a:ln>
-        </p:spPr>
-      </p:sp>
-      <p:pic>
-        <p:nvPicPr>
-          <p:cNvPr id="7" name="Image 0" descr="preencoded.png">    </p:cNvPr>
-          <p:cNvPicPr>
-            <a:picLocks noChangeAspect="1"/>
-          </p:cNvPicPr>
-          <p:nvPr/>
-        </p:nvPicPr>
-        <p:blipFill>
-          <a:blip r:embed="rId1"/>
-          <a:stretch>
-            <a:fillRect/>
-          </a:stretch>
-        </p:blipFill>
-        <p:spPr>
-          <a:xfrm>
-            <a:off x="842620" y="1619860"/>
-            <a:ext cx="189281" cy="189281"/>
-          </a:xfrm>
-          <a:prstGeom prst="rect">
-            <a:avLst/>
-          </a:prstGeom>
-        </p:spPr>
-      </p:pic>
-      <p:sp>
-        <p:nvSpPr>
-          <p:cNvPr id="8" name="Text 4"/>
-          <p:cNvSpPr txBox="1"/>
-          <p:nvPr/>
-        </p:nvSpPr>
-        <p:spPr>
-          <a:xfrm>
-            <a:off x="1325880" y="1508760"/>
-            <a:ext cx="3017520" cy="411480"/>
-          </a:xfrm>
-          <a:prstGeom prst="rect">
-            <a:avLst/>
-          </a:prstGeom>
-          <a:noFill/>
-          <a:ln/>
-        </p:spPr>
-        <p:txBody>
-          <a:bodyPr wrap="square" lIns="0" tIns="0" rIns="0" bIns="0" rtlCol="0" anchor="ctr"/>
+          <p:cNvPr id="7" name="Text 3"/>
+          <p:cNvSpPr txBox="1"/>
+          <p:nvPr/>
+        </p:nvSpPr>
+        <p:spPr>
+          <a:xfrm>
+            <a:off x="6172200" y="1371600"/>
+            <a:ext cx="2331720" cy="731520"/>
+          </a:xfrm>
+          <a:prstGeom prst="rect">
+            <a:avLst/>
+          </a:prstGeom>
+          <a:noFill/>
+          <a:ln/>
+        </p:spPr>
+        <p:txBody>
+          <a:bodyPr wrap="square" lIns="0" tIns="0" rIns="0" bIns="0" rtlCol="0" anchor="t"/>
           <a:lstStyle/>
           <a:p>
             <a:pPr indent="0" marL="0">
@@ -4272,13 +4321,13 @@
             <a:r>
               <a:rPr lang="en-US" sz="1600" b="1" dirty="0">
                 <a:solidFill>
-                  <a:srgbClr val="1F2937"/>
+                  <a:srgbClr val="8C1D40"/>
                 </a:solidFill>
                 <a:latin typeface="Cambria" pitchFamily="34" charset="0"/>
                 <a:ea typeface="Cambria" pitchFamily="34" charset="-122"/>
                 <a:cs typeface="Cambria" pitchFamily="34" charset="-120"/>
               </a:rPr>
-              <a:t>Randomised, multicentre</a:t>
+              <a:t>No strokes and no deaths with enVast</a:t>
             </a:r>
             <a:endParaRPr lang="en-US" sz="1600" dirty="0"/>
           </a:p>
@@ -4286,14 +4335,14 @@
       </p:sp>
       <p:sp>
         <p:nvSpPr>
-          <p:cNvPr id="9" name="Text 5"/>
-          <p:cNvSpPr txBox="1"/>
-          <p:nvPr/>
-        </p:nvSpPr>
-        <p:spPr>
-          <a:xfrm>
-            <a:off x="1325880" y="1965960"/>
-            <a:ext cx="3017520" cy="548640"/>
+          <p:cNvPr id="8" name="Text 4"/>
+          <p:cNvSpPr txBox="1"/>
+          <p:nvPr/>
+        </p:nvSpPr>
+        <p:spPr>
+          <a:xfrm>
+            <a:off x="6172200" y="2194560"/>
+            <a:ext cx="2331720" cy="2103120"/>
           </a:xfrm>
           <a:prstGeom prst="rect">
             <a:avLst/>
@@ -4305,481 +4354,65 @@
           <a:bodyPr wrap="square" lIns="0" tIns="0" rIns="0" bIns="0" rtlCol="0" anchor="t"/>
           <a:lstStyle/>
           <a:p>
-            <a:pPr indent="0" marL="0">
-              <a:buNone/>
+            <a:pPr marL="342900" indent="-342900">
+              <a:spcAft>
+                <a:spcPts val="800"/>
+              </a:spcAft>
+              <a:buSzPct val="100000"/>
+              <a:buChar char="•"/>
             </a:pPr>
             <a:r>
               <a:rPr lang="en-US" sz="1300" dirty="0">
                 <a:solidFill>
-                  <a:srgbClr val="6B7280"/>
+                  <a:srgbClr val="1F2937"/>
                 </a:solidFill>
                 <a:latin typeface="Calibri" pitchFamily="34" charset="0"/>
                 <a:ea typeface="Calibri" pitchFamily="34" charset="-122"/>
                 <a:cs typeface="Calibri" pitchFamily="34" charset="-120"/>
               </a:rPr>
-              <a:t>11 centres, 1:1 allocation</a:t>
+              <a:t>Important because aspiration in TOTAL increased stroke</a:t>
             </a:r>
             <a:endParaRPr lang="en-US" sz="1300" dirty="0"/>
           </a:p>
-        </p:txBody>
-      </p:sp>
-      <p:sp>
-        <p:nvSpPr>
-          <p:cNvPr id="10" name="Shape 6"/>
-          <p:cNvSpPr/>
-          <p:nvPr/>
-        </p:nvSpPr>
-        <p:spPr>
-          <a:xfrm>
-            <a:off x="4663440" y="1234440"/>
-            <a:ext cx="4023360" cy="1280160"/>
-          </a:xfrm>
-          <a:prstGeom prst="roundRect">
-            <a:avLst>
-              <a:gd name="adj" fmla="val 5714"/>
-            </a:avLst>
-          </a:prstGeom>
-          <a:solidFill>
-            <a:srgbClr val="F8F0F3"/>
-          </a:solidFill>
-          <a:ln w="12700">
-            <a:solidFill>
-              <a:srgbClr val="F8F0F3"/>
-            </a:solidFill>
-            <a:prstDash val="solid"/>
-          </a:ln>
-        </p:spPr>
-      </p:sp>
-      <p:sp>
-        <p:nvSpPr>
-          <p:cNvPr id="11" name="Shape 7"/>
-          <p:cNvSpPr/>
-          <p:nvPr/>
-        </p:nvSpPr>
-        <p:spPr>
-          <a:xfrm>
-            <a:off x="4937760" y="1508760"/>
-            <a:ext cx="411480" cy="411480"/>
-          </a:xfrm>
-          <a:prstGeom prst="ellipse">
-            <a:avLst/>
-          </a:prstGeom>
-          <a:solidFill>
-            <a:srgbClr val="8C1D40"/>
-          </a:solidFill>
-          <a:ln w="12700">
-            <a:solidFill>
-              <a:srgbClr val="8C1D40"/>
-            </a:solidFill>
-            <a:prstDash val="solid"/>
-          </a:ln>
-        </p:spPr>
-      </p:sp>
-      <p:pic>
-        <p:nvPicPr>
-          <p:cNvPr id="12" name="Image 1" descr="preencoded.png">    </p:cNvPr>
-          <p:cNvPicPr>
-            <a:picLocks noChangeAspect="1"/>
-          </p:cNvPicPr>
-          <p:nvPr/>
-        </p:nvPicPr>
-        <p:blipFill>
-          <a:blip r:embed="rId2"/>
-          <a:stretch>
-            <a:fillRect/>
-          </a:stretch>
-        </p:blipFill>
-        <p:spPr>
-          <a:xfrm>
-            <a:off x="5048860" y="1619860"/>
-            <a:ext cx="189281" cy="189281"/>
-          </a:xfrm>
-          <a:prstGeom prst="rect">
-            <a:avLst/>
-          </a:prstGeom>
-        </p:spPr>
-      </p:pic>
-      <p:sp>
-        <p:nvSpPr>
-          <p:cNvPr id="13" name="Text 8"/>
-          <p:cNvSpPr txBox="1"/>
-          <p:nvPr/>
-        </p:nvSpPr>
-        <p:spPr>
-          <a:xfrm>
-            <a:off x="5532120" y="1508760"/>
-            <a:ext cx="3017520" cy="411480"/>
-          </a:xfrm>
-          <a:prstGeom prst="rect">
-            <a:avLst/>
-          </a:prstGeom>
-          <a:noFill/>
-          <a:ln/>
-        </p:spPr>
-        <p:txBody>
-          <a:bodyPr wrap="square" lIns="0" tIns="0" rIns="0" bIns="0" rtlCol="0" anchor="ctr"/>
-          <a:lstStyle/>
-          <a:p>
-            <a:pPr indent="0" marL="0">
-              <a:buNone/>
-            </a:pPr>
-            <a:r>
-              <a:rPr lang="en-US" sz="1600" b="1" dirty="0">
+          <a:p>
+            <a:pPr marL="342900" indent="-342900">
+              <a:spcAft>
+                <a:spcPts val="800"/>
+              </a:spcAft>
+              <a:buSzPct val="100000"/>
+              <a:buChar char="•"/>
+            </a:pPr>
+            <a:r>
+              <a:rPr lang="en-US" sz="1300" dirty="0">
                 <a:solidFill>
                   <a:srgbClr val="1F2937"/>
-                </a:solidFill>
-                <a:latin typeface="Cambria" pitchFamily="34" charset="0"/>
-                <a:ea typeface="Cambria" pitchFamily="34" charset="-122"/>
-                <a:cs typeface="Cambria" pitchFamily="34" charset="-120"/>
-              </a:rPr>
-              <a:t>Right population</a:t>
-            </a:r>
-            <a:endParaRPr lang="en-US" sz="1600" dirty="0"/>
-          </a:p>
-        </p:txBody>
-      </p:sp>
-      <p:sp>
-        <p:nvSpPr>
-          <p:cNvPr id="14" name="Text 9"/>
-          <p:cNvSpPr txBox="1"/>
-          <p:nvPr/>
-        </p:nvSpPr>
-        <p:spPr>
-          <a:xfrm>
-            <a:off x="5532120" y="1965960"/>
-            <a:ext cx="3017520" cy="548640"/>
-          </a:xfrm>
-          <a:prstGeom prst="rect">
-            <a:avLst/>
-          </a:prstGeom>
-          <a:noFill/>
-          <a:ln/>
-        </p:spPr>
-        <p:txBody>
-          <a:bodyPr wrap="square" lIns="0" tIns="0" rIns="0" bIns="0" rtlCol="0" anchor="t"/>
-          <a:lstStyle/>
-          <a:p>
-            <a:pPr indent="0" marL="0">
-              <a:buNone/>
-            </a:pPr>
-            <a:r>
-              <a:rPr lang="en-US" sz="1300" dirty="0">
-                <a:solidFill>
-                  <a:srgbClr val="6B7280"/>
                 </a:solidFill>
                 <a:latin typeface="Calibri" pitchFamily="34" charset="0"/>
                 <a:ea typeface="Calibri" pitchFamily="34" charset="-122"/>
                 <a:cs typeface="Calibri" pitchFamily="34" charset="-120"/>
               </a:rPr>
-              <a:t>Only patients with a large thrombus</a:t>
+              <a:t>Very few events overall</a:t>
             </a:r>
             <a:endParaRPr lang="en-US" sz="1300" dirty="0"/>
           </a:p>
-        </p:txBody>
-      </p:sp>
-      <p:sp>
-        <p:nvSpPr>
-          <p:cNvPr id="15" name="Shape 10"/>
-          <p:cNvSpPr/>
-          <p:nvPr/>
-        </p:nvSpPr>
-        <p:spPr>
-          <a:xfrm>
-            <a:off x="457200" y="2743200"/>
-            <a:ext cx="4023360" cy="1280160"/>
-          </a:xfrm>
-          <a:prstGeom prst="roundRect">
-            <a:avLst>
-              <a:gd name="adj" fmla="val 5714"/>
-            </a:avLst>
-          </a:prstGeom>
-          <a:solidFill>
-            <a:srgbClr val="F8F0F3"/>
-          </a:solidFill>
-          <a:ln w="12700">
-            <a:solidFill>
-              <a:srgbClr val="F8F0F3"/>
-            </a:solidFill>
-            <a:prstDash val="solid"/>
-          </a:ln>
-        </p:spPr>
-      </p:sp>
-      <p:sp>
-        <p:nvSpPr>
-          <p:cNvPr id="16" name="Shape 11"/>
-          <p:cNvSpPr/>
-          <p:nvPr/>
-        </p:nvSpPr>
-        <p:spPr>
-          <a:xfrm>
-            <a:off x="731520" y="3017520"/>
-            <a:ext cx="411480" cy="411480"/>
-          </a:xfrm>
-          <a:prstGeom prst="ellipse">
-            <a:avLst/>
-          </a:prstGeom>
-          <a:solidFill>
-            <a:srgbClr val="8C1D40"/>
-          </a:solidFill>
-          <a:ln w="12700">
-            <a:solidFill>
-              <a:srgbClr val="8C1D40"/>
-            </a:solidFill>
-            <a:prstDash val="solid"/>
-          </a:ln>
-        </p:spPr>
-      </p:sp>
-      <p:pic>
-        <p:nvPicPr>
-          <p:cNvPr id="17" name="Image 2" descr="preencoded.png">    </p:cNvPr>
-          <p:cNvPicPr>
-            <a:picLocks noChangeAspect="1"/>
-          </p:cNvPicPr>
-          <p:nvPr/>
-        </p:nvPicPr>
-        <p:blipFill>
-          <a:blip r:embed="rId3"/>
-          <a:stretch>
-            <a:fillRect/>
-          </a:stretch>
-        </p:blipFill>
-        <p:spPr>
-          <a:xfrm>
-            <a:off x="842620" y="3128620"/>
-            <a:ext cx="189281" cy="189281"/>
-          </a:xfrm>
-          <a:prstGeom prst="rect">
-            <a:avLst/>
-          </a:prstGeom>
-        </p:spPr>
-      </p:pic>
-      <p:sp>
-        <p:nvSpPr>
-          <p:cNvPr id="18" name="Text 12"/>
-          <p:cNvSpPr txBox="1"/>
-          <p:nvPr/>
-        </p:nvSpPr>
-        <p:spPr>
-          <a:xfrm>
-            <a:off x="1325880" y="3017520"/>
-            <a:ext cx="3017520" cy="411480"/>
-          </a:xfrm>
-          <a:prstGeom prst="rect">
-            <a:avLst/>
-          </a:prstGeom>
-          <a:noFill/>
-          <a:ln/>
-        </p:spPr>
-        <p:txBody>
-          <a:bodyPr wrap="square" lIns="0" tIns="0" rIns="0" bIns="0" rtlCol="0" anchor="ctr"/>
-          <a:lstStyle/>
-          <a:p>
-            <a:pPr indent="0" marL="0">
-              <a:buNone/>
-            </a:pPr>
-            <a:r>
-              <a:rPr lang="en-US" sz="1600" b="1" dirty="0">
+          <a:p>
+            <a:pPr marL="342900" indent="-342900">
+              <a:spcAft>
+                <a:spcPts val="800"/>
+              </a:spcAft>
+              <a:buSzPct val="100000"/>
+              <a:buChar char="•"/>
+            </a:pPr>
+            <a:r>
+              <a:rPr lang="en-US" sz="1300" dirty="0">
                 <a:solidFill>
                   <a:srgbClr val="1F2937"/>
-                </a:solidFill>
-                <a:latin typeface="Cambria" pitchFamily="34" charset="0"/>
-                <a:ea typeface="Cambria" pitchFamily="34" charset="-122"/>
-                <a:cs typeface="Cambria" pitchFamily="34" charset="-120"/>
-              </a:rPr>
-              <a:t>Consistent results</a:t>
-            </a:r>
-            <a:endParaRPr lang="en-US" sz="1600" dirty="0"/>
-          </a:p>
-        </p:txBody>
-      </p:sp>
-      <p:sp>
-        <p:nvSpPr>
-          <p:cNvPr id="19" name="Text 13"/>
-          <p:cNvSpPr txBox="1"/>
-          <p:nvPr/>
-        </p:nvSpPr>
-        <p:spPr>
-          <a:xfrm>
-            <a:off x="1325880" y="3474720"/>
-            <a:ext cx="3017520" cy="548640"/>
-          </a:xfrm>
-          <a:prstGeom prst="rect">
-            <a:avLst/>
-          </a:prstGeom>
-          <a:noFill/>
-          <a:ln/>
-        </p:spPr>
-        <p:txBody>
-          <a:bodyPr wrap="square" lIns="0" tIns="0" rIns="0" bIns="0" rtlCol="0" anchor="t"/>
-          <a:lstStyle/>
-          <a:p>
-            <a:pPr indent="0" marL="0">
-              <a:buNone/>
-            </a:pPr>
-            <a:r>
-              <a:rPr lang="en-US" sz="1300" dirty="0">
-                <a:solidFill>
-                  <a:srgbClr val="6B7280"/>
                 </a:solidFill>
                 <a:latin typeface="Calibri" pitchFamily="34" charset="0"/>
                 <a:ea typeface="Calibri" pitchFamily="34" charset="-122"/>
                 <a:cs typeface="Calibri" pitchFamily="34" charset="-120"/>
               </a:rPr>
-              <a:t>CK-MB and cardiac MRI agree</a:t>
-            </a:r>
-            <a:endParaRPr lang="en-US" sz="1300" dirty="0"/>
-          </a:p>
-        </p:txBody>
-      </p:sp>
-      <p:sp>
-        <p:nvSpPr>
-          <p:cNvPr id="20" name="Shape 14"/>
-          <p:cNvSpPr/>
-          <p:nvPr/>
-        </p:nvSpPr>
-        <p:spPr>
-          <a:xfrm>
-            <a:off x="4663440" y="2743200"/>
-            <a:ext cx="4023360" cy="1280160"/>
-          </a:xfrm>
-          <a:prstGeom prst="roundRect">
-            <a:avLst>
-              <a:gd name="adj" fmla="val 5714"/>
-            </a:avLst>
-          </a:prstGeom>
-          <a:solidFill>
-            <a:srgbClr val="F8F0F3"/>
-          </a:solidFill>
-          <a:ln w="12700">
-            <a:solidFill>
-              <a:srgbClr val="F8F0F3"/>
-            </a:solidFill>
-            <a:prstDash val="solid"/>
-          </a:ln>
-        </p:spPr>
-      </p:sp>
-      <p:sp>
-        <p:nvSpPr>
-          <p:cNvPr id="21" name="Shape 15"/>
-          <p:cNvSpPr/>
-          <p:nvPr/>
-        </p:nvSpPr>
-        <p:spPr>
-          <a:xfrm>
-            <a:off x="4937760" y="3017520"/>
-            <a:ext cx="411480" cy="411480"/>
-          </a:xfrm>
-          <a:prstGeom prst="ellipse">
-            <a:avLst/>
-          </a:prstGeom>
-          <a:solidFill>
-            <a:srgbClr val="8C1D40"/>
-          </a:solidFill>
-          <a:ln w="12700">
-            <a:solidFill>
-              <a:srgbClr val="8C1D40"/>
-            </a:solidFill>
-            <a:prstDash val="solid"/>
-          </a:ln>
-        </p:spPr>
-      </p:sp>
-      <p:pic>
-        <p:nvPicPr>
-          <p:cNvPr id="22" name="Image 3" descr="preencoded.png">    </p:cNvPr>
-          <p:cNvPicPr>
-            <a:picLocks noChangeAspect="1"/>
-          </p:cNvPicPr>
-          <p:nvPr/>
-        </p:nvPicPr>
-        <p:blipFill>
-          <a:blip r:embed="rId4"/>
-          <a:stretch>
-            <a:fillRect/>
-          </a:stretch>
-        </p:blipFill>
-        <p:spPr>
-          <a:xfrm>
-            <a:off x="5048860" y="3128620"/>
-            <a:ext cx="189281" cy="189281"/>
-          </a:xfrm>
-          <a:prstGeom prst="rect">
-            <a:avLst/>
-          </a:prstGeom>
-        </p:spPr>
-      </p:pic>
-      <p:sp>
-        <p:nvSpPr>
-          <p:cNvPr id="23" name="Text 16"/>
-          <p:cNvSpPr txBox="1"/>
-          <p:nvPr/>
-        </p:nvSpPr>
-        <p:spPr>
-          <a:xfrm>
-            <a:off x="5532120" y="3017520"/>
-            <a:ext cx="3017520" cy="411480"/>
-          </a:xfrm>
-          <a:prstGeom prst="rect">
-            <a:avLst/>
-          </a:prstGeom>
-          <a:noFill/>
-          <a:ln/>
-        </p:spPr>
-        <p:txBody>
-          <a:bodyPr wrap="square" lIns="0" tIns="0" rIns="0" bIns="0" rtlCol="0" anchor="ctr"/>
-          <a:lstStyle/>
-          <a:p>
-            <a:pPr indent="0" marL="0">
-              <a:buNone/>
-            </a:pPr>
-            <a:r>
-              <a:rPr lang="en-US" sz="1600" b="1" dirty="0">
-                <a:solidFill>
-                  <a:srgbClr val="1F2937"/>
-                </a:solidFill>
-                <a:latin typeface="Cambria" pitchFamily="34" charset="0"/>
-                <a:ea typeface="Cambria" pitchFamily="34" charset="-122"/>
-                <a:cs typeface="Cambria" pitchFamily="34" charset="-120"/>
-              </a:rPr>
-              <a:t>Safe early course</a:t>
-            </a:r>
-            <a:endParaRPr lang="en-US" sz="1600" dirty="0"/>
-          </a:p>
-        </p:txBody>
-      </p:sp>
-      <p:sp>
-        <p:nvSpPr>
-          <p:cNvPr id="24" name="Text 17"/>
-          <p:cNvSpPr txBox="1"/>
-          <p:nvPr/>
-        </p:nvSpPr>
-        <p:spPr>
-          <a:xfrm>
-            <a:off x="5532120" y="3474720"/>
-            <a:ext cx="3017520" cy="548640"/>
-          </a:xfrm>
-          <a:prstGeom prst="rect">
-            <a:avLst/>
-          </a:prstGeom>
-          <a:noFill/>
-          <a:ln/>
-        </p:spPr>
-        <p:txBody>
-          <a:bodyPr wrap="square" lIns="0" tIns="0" rIns="0" bIns="0" rtlCol="0" anchor="t"/>
-          <a:lstStyle/>
-          <a:p>
-            <a:pPr indent="0" marL="0">
-              <a:buNone/>
-            </a:pPr>
-            <a:r>
-              <a:rPr lang="en-US" sz="1300" dirty="0">
-                <a:solidFill>
-                  <a:srgbClr val="6B7280"/>
-                </a:solidFill>
-                <a:latin typeface="Calibri" pitchFamily="34" charset="0"/>
-                <a:ea typeface="Calibri" pitchFamily="34" charset="-122"/>
-                <a:cs typeface="Calibri" pitchFamily="34" charset="-120"/>
-              </a:rPr>
-              <a:t>No stroke or death with enVast at 30 days</a:t>
+              <a:t>The trial was not powered for clinical outcomes</a:t>
             </a:r>
             <a:endParaRPr lang="en-US" sz="1300" dirty="0"/>
           </a:p>
@@ -4850,7 +4483,7 @@
                 <a:ea typeface="Cambria" pitchFamily="34" charset="-122"/>
                 <a:cs typeface="Cambria" pitchFamily="34" charset="-120"/>
               </a:rPr>
-              <a:t>Limitations</a:t>
+              <a:t>Strengths</a:t>
             </a:r>
             <a:endParaRPr lang="en-US" sz="2800" dirty="0"/>
           </a:p>
@@ -4912,11 +4545,11 @@
             </a:avLst>
           </a:prstGeom>
           <a:solidFill>
-            <a:srgbClr val="FFFFFF"/>
+            <a:srgbClr val="F8F0F3"/>
           </a:solidFill>
-          <a:ln w="15875">
+          <a:ln w="12700">
             <a:solidFill>
-              <a:srgbClr val="E5E7EB"/>
+              <a:srgbClr val="F8F0F3"/>
             </a:solidFill>
             <a:prstDash val="solid"/>
           </a:ln>
@@ -4937,26 +4570,50 @@
             <a:avLst/>
           </a:prstGeom>
           <a:solidFill>
-            <a:srgbClr val="A3AAB6"/>
+            <a:srgbClr val="8C1D40"/>
           </a:solidFill>
           <a:ln w="12700">
             <a:solidFill>
-              <a:srgbClr val="A3AAB6"/>
+              <a:srgbClr val="8C1D40"/>
             </a:solidFill>
             <a:prstDash val="solid"/>
           </a:ln>
         </p:spPr>
       </p:sp>
-      <p:sp>
-        <p:nvSpPr>
-          <p:cNvPr id="7" name="Text 4"/>
-          <p:cNvSpPr txBox="1"/>
-          <p:nvPr/>
-        </p:nvSpPr>
-        <p:spPr>
-          <a:xfrm>
-            <a:off x="731520" y="1508760"/>
-            <a:ext cx="411480" cy="411480"/>
+      <p:pic>
+        <p:nvPicPr>
+          <p:cNvPr id="7" name="Image 0" descr="preencoded.png">    </p:cNvPr>
+          <p:cNvPicPr>
+            <a:picLocks noChangeAspect="1"/>
+          </p:cNvPicPr>
+          <p:nvPr/>
+        </p:nvPicPr>
+        <p:blipFill>
+          <a:blip r:embed="rId1"/>
+          <a:stretch>
+            <a:fillRect/>
+          </a:stretch>
+        </p:blipFill>
+        <p:spPr>
+          <a:xfrm>
+            <a:off x="842620" y="1619860"/>
+            <a:ext cx="189281" cy="189281"/>
+          </a:xfrm>
+          <a:prstGeom prst="rect">
+            <a:avLst/>
+          </a:prstGeom>
+        </p:spPr>
+      </p:pic>
+      <p:sp>
+        <p:nvSpPr>
+          <p:cNvPr id="8" name="Text 4"/>
+          <p:cNvSpPr txBox="1"/>
+          <p:nvPr/>
+        </p:nvSpPr>
+        <p:spPr>
+          <a:xfrm>
+            <a:off x="1325880" y="1508760"/>
+            <a:ext cx="3017520" cy="411480"/>
           </a:xfrm>
           <a:prstGeom prst="rect">
             <a:avLst/>
@@ -4968,19 +4625,58 @@
           <a:bodyPr wrap="square" lIns="0" tIns="0" rIns="0" bIns="0" rtlCol="0" anchor="ctr"/>
           <a:lstStyle/>
           <a:p>
-            <a:pPr algn="ctr" indent="0" marL="0">
-              <a:buNone/>
-            </a:pPr>
-            <a:r>
-              <a:rPr lang="en-US" sz="1300" b="1" dirty="0">
-                <a:solidFill>
-                  <a:srgbClr val="FFFFFF"/>
+            <a:pPr indent="0" marL="0">
+              <a:buNone/>
+            </a:pPr>
+            <a:r>
+              <a:rPr lang="en-US" sz="1600" b="1" dirty="0">
+                <a:solidFill>
+                  <a:srgbClr val="1F2937"/>
+                </a:solidFill>
+                <a:latin typeface="Cambria" pitchFamily="34" charset="0"/>
+                <a:ea typeface="Cambria" pitchFamily="34" charset="-122"/>
+                <a:cs typeface="Cambria" pitchFamily="34" charset="-120"/>
+              </a:rPr>
+              <a:t>Randomised, multicentre</a:t>
+            </a:r>
+            <a:endParaRPr lang="en-US" sz="1600" dirty="0"/>
+          </a:p>
+        </p:txBody>
+      </p:sp>
+      <p:sp>
+        <p:nvSpPr>
+          <p:cNvPr id="9" name="Text 5"/>
+          <p:cNvSpPr txBox="1"/>
+          <p:nvPr/>
+        </p:nvSpPr>
+        <p:spPr>
+          <a:xfrm>
+            <a:off x="1325880" y="1965960"/>
+            <a:ext cx="3017520" cy="548640"/>
+          </a:xfrm>
+          <a:prstGeom prst="rect">
+            <a:avLst/>
+          </a:prstGeom>
+          <a:noFill/>
+          <a:ln/>
+        </p:spPr>
+        <p:txBody>
+          <a:bodyPr wrap="square" lIns="0" tIns="0" rIns="0" bIns="0" rtlCol="0" anchor="t"/>
+          <a:lstStyle/>
+          <a:p>
+            <a:pPr indent="0" marL="0">
+              <a:buNone/>
+            </a:pPr>
+            <a:r>
+              <a:rPr lang="en-US" sz="1300" dirty="0">
+                <a:solidFill>
+                  <a:srgbClr val="6B7280"/>
                 </a:solidFill>
                 <a:latin typeface="Calibri" pitchFamily="34" charset="0"/>
                 <a:ea typeface="Calibri" pitchFamily="34" charset="-122"/>
                 <a:cs typeface="Calibri" pitchFamily="34" charset="-120"/>
               </a:rPr>
-              <a:t>1</a:t>
+              <a:t>11 centres, 1:1 allocation</a:t>
             </a:r>
             <a:endParaRPr lang="en-US" sz="1300" dirty="0"/>
           </a:p>
@@ -4988,85 +4684,7 @@
       </p:sp>
       <p:sp>
         <p:nvSpPr>
-          <p:cNvPr id="8" name="Text 5"/>
-          <p:cNvSpPr txBox="1"/>
-          <p:nvPr/>
-        </p:nvSpPr>
-        <p:spPr>
-          <a:xfrm>
-            <a:off x="1325880" y="1508760"/>
-            <a:ext cx="3017520" cy="411480"/>
-          </a:xfrm>
-          <a:prstGeom prst="rect">
-            <a:avLst/>
-          </a:prstGeom>
-          <a:noFill/>
-          <a:ln/>
-        </p:spPr>
-        <p:txBody>
-          <a:bodyPr wrap="square" lIns="0" tIns="0" rIns="0" bIns="0" rtlCol="0" anchor="ctr"/>
-          <a:lstStyle/>
-          <a:p>
-            <a:pPr indent="0" marL="0">
-              <a:buNone/>
-            </a:pPr>
-            <a:r>
-              <a:rPr lang="en-US" sz="1600" b="1" dirty="0">
-                <a:solidFill>
-                  <a:srgbClr val="1F2937"/>
-                </a:solidFill>
-                <a:latin typeface="Cambria" pitchFamily="34" charset="0"/>
-                <a:ea typeface="Cambria" pitchFamily="34" charset="-122"/>
-                <a:cs typeface="Cambria" pitchFamily="34" charset="-120"/>
-              </a:rPr>
-              <a:t>Small trial</a:t>
-            </a:r>
-            <a:endParaRPr lang="en-US" sz="1600" dirty="0"/>
-          </a:p>
-        </p:txBody>
-      </p:sp>
-      <p:sp>
-        <p:nvSpPr>
-          <p:cNvPr id="9" name="Text 6"/>
-          <p:cNvSpPr txBox="1"/>
-          <p:nvPr/>
-        </p:nvSpPr>
-        <p:spPr>
-          <a:xfrm>
-            <a:off x="1325880" y="1965960"/>
-            <a:ext cx="3017520" cy="548640"/>
-          </a:xfrm>
-          <a:prstGeom prst="rect">
-            <a:avLst/>
-          </a:prstGeom>
-          <a:noFill/>
-          <a:ln/>
-        </p:spPr>
-        <p:txBody>
-          <a:bodyPr wrap="square" lIns="0" tIns="0" rIns="0" bIns="0" rtlCol="0" anchor="t"/>
-          <a:lstStyle/>
-          <a:p>
-            <a:pPr indent="0" marL="0">
-              <a:buNone/>
-            </a:pPr>
-            <a:r>
-              <a:rPr lang="en-US" sz="1300" dirty="0">
-                <a:solidFill>
-                  <a:srgbClr val="6B7280"/>
-                </a:solidFill>
-                <a:latin typeface="Calibri" pitchFamily="34" charset="0"/>
-                <a:ea typeface="Calibri" pitchFamily="34" charset="-122"/>
-                <a:cs typeface="Calibri" pitchFamily="34" charset="-120"/>
-              </a:rPr>
-              <a:t>Only 154 patients</a:t>
-            </a:r>
-            <a:endParaRPr lang="en-US" sz="1300" dirty="0"/>
-          </a:p>
-        </p:txBody>
-      </p:sp>
-      <p:sp>
-        <p:nvSpPr>
-          <p:cNvPr id="10" name="Shape 7"/>
+          <p:cNvPr id="10" name="Shape 6"/>
           <p:cNvSpPr/>
           <p:nvPr/>
         </p:nvSpPr>
@@ -5081,11 +4699,11 @@
             </a:avLst>
           </a:prstGeom>
           <a:solidFill>
-            <a:srgbClr val="FFFFFF"/>
+            <a:srgbClr val="F8F0F3"/>
           </a:solidFill>
-          <a:ln w="15875">
+          <a:ln w="12700">
             <a:solidFill>
-              <a:srgbClr val="E5E7EB"/>
+              <a:srgbClr val="F8F0F3"/>
             </a:solidFill>
             <a:prstDash val="solid"/>
           </a:ln>
@@ -5093,7 +4711,7 @@
       </p:sp>
       <p:sp>
         <p:nvSpPr>
-          <p:cNvPr id="11" name="Shape 8"/>
+          <p:cNvPr id="11" name="Shape 7"/>
           <p:cNvSpPr/>
           <p:nvPr/>
         </p:nvSpPr>
@@ -5106,26 +4724,50 @@
             <a:avLst/>
           </a:prstGeom>
           <a:solidFill>
-            <a:srgbClr val="A3AAB6"/>
+            <a:srgbClr val="8C1D40"/>
           </a:solidFill>
           <a:ln w="12700">
             <a:solidFill>
-              <a:srgbClr val="A3AAB6"/>
+              <a:srgbClr val="8C1D40"/>
             </a:solidFill>
             <a:prstDash val="solid"/>
           </a:ln>
         </p:spPr>
       </p:sp>
-      <p:sp>
-        <p:nvSpPr>
-          <p:cNvPr id="12" name="Text 9"/>
-          <p:cNvSpPr txBox="1"/>
-          <p:nvPr/>
-        </p:nvSpPr>
-        <p:spPr>
-          <a:xfrm>
-            <a:off x="4937760" y="1508760"/>
-            <a:ext cx="411480" cy="411480"/>
+      <p:pic>
+        <p:nvPicPr>
+          <p:cNvPr id="12" name="Image 1" descr="preencoded.png">    </p:cNvPr>
+          <p:cNvPicPr>
+            <a:picLocks noChangeAspect="1"/>
+          </p:cNvPicPr>
+          <p:nvPr/>
+        </p:nvPicPr>
+        <p:blipFill>
+          <a:blip r:embed="rId2"/>
+          <a:stretch>
+            <a:fillRect/>
+          </a:stretch>
+        </p:blipFill>
+        <p:spPr>
+          <a:xfrm>
+            <a:off x="5048860" y="1619860"/>
+            <a:ext cx="189281" cy="189281"/>
+          </a:xfrm>
+          <a:prstGeom prst="rect">
+            <a:avLst/>
+          </a:prstGeom>
+        </p:spPr>
+      </p:pic>
+      <p:sp>
+        <p:nvSpPr>
+          <p:cNvPr id="13" name="Text 8"/>
+          <p:cNvSpPr txBox="1"/>
+          <p:nvPr/>
+        </p:nvSpPr>
+        <p:spPr>
+          <a:xfrm>
+            <a:off x="5532120" y="1508760"/>
+            <a:ext cx="3017520" cy="411480"/>
           </a:xfrm>
           <a:prstGeom prst="rect">
             <a:avLst/>
@@ -5137,19 +4779,58 @@
           <a:bodyPr wrap="square" lIns="0" tIns="0" rIns="0" bIns="0" rtlCol="0" anchor="ctr"/>
           <a:lstStyle/>
           <a:p>
-            <a:pPr algn="ctr" indent="0" marL="0">
-              <a:buNone/>
-            </a:pPr>
-            <a:r>
-              <a:rPr lang="en-US" sz="1300" b="1" dirty="0">
-                <a:solidFill>
-                  <a:srgbClr val="FFFFFF"/>
+            <a:pPr indent="0" marL="0">
+              <a:buNone/>
+            </a:pPr>
+            <a:r>
+              <a:rPr lang="en-US" sz="1600" b="1" dirty="0">
+                <a:solidFill>
+                  <a:srgbClr val="1F2937"/>
+                </a:solidFill>
+                <a:latin typeface="Cambria" pitchFamily="34" charset="0"/>
+                <a:ea typeface="Cambria" pitchFamily="34" charset="-122"/>
+                <a:cs typeface="Cambria" pitchFamily="34" charset="-120"/>
+              </a:rPr>
+              <a:t>Right population</a:t>
+            </a:r>
+            <a:endParaRPr lang="en-US" sz="1600" dirty="0"/>
+          </a:p>
+        </p:txBody>
+      </p:sp>
+      <p:sp>
+        <p:nvSpPr>
+          <p:cNvPr id="14" name="Text 9"/>
+          <p:cNvSpPr txBox="1"/>
+          <p:nvPr/>
+        </p:nvSpPr>
+        <p:spPr>
+          <a:xfrm>
+            <a:off x="5532120" y="1965960"/>
+            <a:ext cx="3017520" cy="548640"/>
+          </a:xfrm>
+          <a:prstGeom prst="rect">
+            <a:avLst/>
+          </a:prstGeom>
+          <a:noFill/>
+          <a:ln/>
+        </p:spPr>
+        <p:txBody>
+          <a:bodyPr wrap="square" lIns="0" tIns="0" rIns="0" bIns="0" rtlCol="0" anchor="t"/>
+          <a:lstStyle/>
+          <a:p>
+            <a:pPr indent="0" marL="0">
+              <a:buNone/>
+            </a:pPr>
+            <a:r>
+              <a:rPr lang="en-US" sz="1300" dirty="0">
+                <a:solidFill>
+                  <a:srgbClr val="6B7280"/>
                 </a:solidFill>
                 <a:latin typeface="Calibri" pitchFamily="34" charset="0"/>
                 <a:ea typeface="Calibri" pitchFamily="34" charset="-122"/>
                 <a:cs typeface="Calibri" pitchFamily="34" charset="-120"/>
               </a:rPr>
-              <a:t>2</a:t>
+              <a:t>Only patients with a large thrombus</a:t>
             </a:r>
             <a:endParaRPr lang="en-US" sz="1300" dirty="0"/>
           </a:p>
@@ -5157,85 +4838,7 @@
       </p:sp>
       <p:sp>
         <p:nvSpPr>
-          <p:cNvPr id="13" name="Text 10"/>
-          <p:cNvSpPr txBox="1"/>
-          <p:nvPr/>
-        </p:nvSpPr>
-        <p:spPr>
-          <a:xfrm>
-            <a:off x="5532120" y="1508760"/>
-            <a:ext cx="3017520" cy="411480"/>
-          </a:xfrm>
-          <a:prstGeom prst="rect">
-            <a:avLst/>
-          </a:prstGeom>
-          <a:noFill/>
-          <a:ln/>
-        </p:spPr>
-        <p:txBody>
-          <a:bodyPr wrap="square" lIns="0" tIns="0" rIns="0" bIns="0" rtlCol="0" anchor="ctr"/>
-          <a:lstStyle/>
-          <a:p>
-            <a:pPr indent="0" marL="0">
-              <a:buNone/>
-            </a:pPr>
-            <a:r>
-              <a:rPr lang="en-US" sz="1600" b="1" dirty="0">
-                <a:solidFill>
-                  <a:srgbClr val="1F2937"/>
-                </a:solidFill>
-                <a:latin typeface="Cambria" pitchFamily="34" charset="0"/>
-                <a:ea typeface="Cambria" pitchFamily="34" charset="-122"/>
-                <a:cs typeface="Cambria" pitchFamily="34" charset="-120"/>
-              </a:rPr>
-              <a:t>Surrogate endpoint</a:t>
-            </a:r>
-            <a:endParaRPr lang="en-US" sz="1600" dirty="0"/>
-          </a:p>
-        </p:txBody>
-      </p:sp>
-      <p:sp>
-        <p:nvSpPr>
-          <p:cNvPr id="14" name="Text 11"/>
-          <p:cNvSpPr txBox="1"/>
-          <p:nvPr/>
-        </p:nvSpPr>
-        <p:spPr>
-          <a:xfrm>
-            <a:off x="5532120" y="1965960"/>
-            <a:ext cx="3017520" cy="548640"/>
-          </a:xfrm>
-          <a:prstGeom prst="rect">
-            <a:avLst/>
-          </a:prstGeom>
-          <a:noFill/>
-          <a:ln/>
-        </p:spPr>
-        <p:txBody>
-          <a:bodyPr wrap="square" lIns="0" tIns="0" rIns="0" bIns="0" rtlCol="0" anchor="t"/>
-          <a:lstStyle/>
-          <a:p>
-            <a:pPr indent="0" marL="0">
-              <a:buNone/>
-            </a:pPr>
-            <a:r>
-              <a:rPr lang="en-US" sz="1300" dirty="0">
-                <a:solidFill>
-                  <a:srgbClr val="6B7280"/>
-                </a:solidFill>
-                <a:latin typeface="Calibri" pitchFamily="34" charset="0"/>
-                <a:ea typeface="Calibri" pitchFamily="34" charset="-122"/>
-                <a:cs typeface="Calibri" pitchFamily="34" charset="-120"/>
-              </a:rPr>
-              <a:t>Infarct size, not death or heart failure</a:t>
-            </a:r>
-            <a:endParaRPr lang="en-US" sz="1300" dirty="0"/>
-          </a:p>
-        </p:txBody>
-      </p:sp>
-      <p:sp>
-        <p:nvSpPr>
-          <p:cNvPr id="15" name="Shape 12"/>
+          <p:cNvPr id="15" name="Shape 10"/>
           <p:cNvSpPr/>
           <p:nvPr/>
         </p:nvSpPr>
@@ -5250,11 +4853,11 @@
             </a:avLst>
           </a:prstGeom>
           <a:solidFill>
-            <a:srgbClr val="FFFFFF"/>
+            <a:srgbClr val="F8F0F3"/>
           </a:solidFill>
-          <a:ln w="15875">
+          <a:ln w="12700">
             <a:solidFill>
-              <a:srgbClr val="E5E7EB"/>
+              <a:srgbClr val="F8F0F3"/>
             </a:solidFill>
             <a:prstDash val="solid"/>
           </a:ln>
@@ -5262,7 +4865,7 @@
       </p:sp>
       <p:sp>
         <p:nvSpPr>
-          <p:cNvPr id="16" name="Shape 13"/>
+          <p:cNvPr id="16" name="Shape 11"/>
           <p:cNvSpPr/>
           <p:nvPr/>
         </p:nvSpPr>
@@ -5275,26 +4878,50 @@
             <a:avLst/>
           </a:prstGeom>
           <a:solidFill>
-            <a:srgbClr val="A3AAB6"/>
+            <a:srgbClr val="8C1D40"/>
           </a:solidFill>
           <a:ln w="12700">
             <a:solidFill>
-              <a:srgbClr val="A3AAB6"/>
+              <a:srgbClr val="8C1D40"/>
             </a:solidFill>
             <a:prstDash val="solid"/>
           </a:ln>
         </p:spPr>
       </p:sp>
-      <p:sp>
-        <p:nvSpPr>
-          <p:cNvPr id="17" name="Text 14"/>
-          <p:cNvSpPr txBox="1"/>
-          <p:nvPr/>
-        </p:nvSpPr>
-        <p:spPr>
-          <a:xfrm>
-            <a:off x="731520" y="3017520"/>
-            <a:ext cx="411480" cy="411480"/>
+      <p:pic>
+        <p:nvPicPr>
+          <p:cNvPr id="17" name="Image 2" descr="preencoded.png">    </p:cNvPr>
+          <p:cNvPicPr>
+            <a:picLocks noChangeAspect="1"/>
+          </p:cNvPicPr>
+          <p:nvPr/>
+        </p:nvPicPr>
+        <p:blipFill>
+          <a:blip r:embed="rId3"/>
+          <a:stretch>
+            <a:fillRect/>
+          </a:stretch>
+        </p:blipFill>
+        <p:spPr>
+          <a:xfrm>
+            <a:off x="842620" y="3128620"/>
+            <a:ext cx="189281" cy="189281"/>
+          </a:xfrm>
+          <a:prstGeom prst="rect">
+            <a:avLst/>
+          </a:prstGeom>
+        </p:spPr>
+      </p:pic>
+      <p:sp>
+        <p:nvSpPr>
+          <p:cNvPr id="18" name="Text 12"/>
+          <p:cNvSpPr txBox="1"/>
+          <p:nvPr/>
+        </p:nvSpPr>
+        <p:spPr>
+          <a:xfrm>
+            <a:off x="1325880" y="3017520"/>
+            <a:ext cx="3017520" cy="411480"/>
           </a:xfrm>
           <a:prstGeom prst="rect">
             <a:avLst/>
@@ -5306,19 +4933,58 @@
           <a:bodyPr wrap="square" lIns="0" tIns="0" rIns="0" bIns="0" rtlCol="0" anchor="ctr"/>
           <a:lstStyle/>
           <a:p>
-            <a:pPr algn="ctr" indent="0" marL="0">
-              <a:buNone/>
-            </a:pPr>
-            <a:r>
-              <a:rPr lang="en-US" sz="1300" b="1" dirty="0">
-                <a:solidFill>
-                  <a:srgbClr val="FFFFFF"/>
+            <a:pPr indent="0" marL="0">
+              <a:buNone/>
+            </a:pPr>
+            <a:r>
+              <a:rPr lang="en-US" sz="1600" b="1" dirty="0">
+                <a:solidFill>
+                  <a:srgbClr val="1F2937"/>
+                </a:solidFill>
+                <a:latin typeface="Cambria" pitchFamily="34" charset="0"/>
+                <a:ea typeface="Cambria" pitchFamily="34" charset="-122"/>
+                <a:cs typeface="Cambria" pitchFamily="34" charset="-120"/>
+              </a:rPr>
+              <a:t>Consistent results</a:t>
+            </a:r>
+            <a:endParaRPr lang="en-US" sz="1600" dirty="0"/>
+          </a:p>
+        </p:txBody>
+      </p:sp>
+      <p:sp>
+        <p:nvSpPr>
+          <p:cNvPr id="19" name="Text 13"/>
+          <p:cNvSpPr txBox="1"/>
+          <p:nvPr/>
+        </p:nvSpPr>
+        <p:spPr>
+          <a:xfrm>
+            <a:off x="1325880" y="3474720"/>
+            <a:ext cx="3017520" cy="548640"/>
+          </a:xfrm>
+          <a:prstGeom prst="rect">
+            <a:avLst/>
+          </a:prstGeom>
+          <a:noFill/>
+          <a:ln/>
+        </p:spPr>
+        <p:txBody>
+          <a:bodyPr wrap="square" lIns="0" tIns="0" rIns="0" bIns="0" rtlCol="0" anchor="t"/>
+          <a:lstStyle/>
+          <a:p>
+            <a:pPr indent="0" marL="0">
+              <a:buNone/>
+            </a:pPr>
+            <a:r>
+              <a:rPr lang="en-US" sz="1300" dirty="0">
+                <a:solidFill>
+                  <a:srgbClr val="6B7280"/>
                 </a:solidFill>
                 <a:latin typeface="Calibri" pitchFamily="34" charset="0"/>
                 <a:ea typeface="Calibri" pitchFamily="34" charset="-122"/>
                 <a:cs typeface="Calibri" pitchFamily="34" charset="-120"/>
               </a:rPr>
-              <a:t>3</a:t>
+              <a:t>CK-MB and cardiac MRI agree</a:t>
             </a:r>
             <a:endParaRPr lang="en-US" sz="1300" dirty="0"/>
           </a:p>
@@ -5326,85 +4992,7 @@
       </p:sp>
       <p:sp>
         <p:nvSpPr>
-          <p:cNvPr id="18" name="Text 15"/>
-          <p:cNvSpPr txBox="1"/>
-          <p:nvPr/>
-        </p:nvSpPr>
-        <p:spPr>
-          <a:xfrm>
-            <a:off x="1325880" y="3017520"/>
-            <a:ext cx="3017520" cy="411480"/>
-          </a:xfrm>
-          <a:prstGeom prst="rect">
-            <a:avLst/>
-          </a:prstGeom>
-          <a:noFill/>
-          <a:ln/>
-        </p:spPr>
-        <p:txBody>
-          <a:bodyPr wrap="square" lIns="0" tIns="0" rIns="0" bIns="0" rtlCol="0" anchor="ctr"/>
-          <a:lstStyle/>
-          <a:p>
-            <a:pPr indent="0" marL="0">
-              <a:buNone/>
-            </a:pPr>
-            <a:r>
-              <a:rPr lang="en-US" sz="1600" b="1" dirty="0">
-                <a:solidFill>
-                  <a:srgbClr val="1F2937"/>
-                </a:solidFill>
-                <a:latin typeface="Cambria" pitchFamily="34" charset="0"/>
-                <a:ea typeface="Cambria" pitchFamily="34" charset="-122"/>
-                <a:cs typeface="Cambria" pitchFamily="34" charset="-120"/>
-              </a:rPr>
-              <a:t>Operators not blinded</a:t>
-            </a:r>
-            <a:endParaRPr lang="en-US" sz="1600" dirty="0"/>
-          </a:p>
-        </p:txBody>
-      </p:sp>
-      <p:sp>
-        <p:nvSpPr>
-          <p:cNvPr id="19" name="Text 16"/>
-          <p:cNvSpPr txBox="1"/>
-          <p:nvPr/>
-        </p:nvSpPr>
-        <p:spPr>
-          <a:xfrm>
-            <a:off x="1325880" y="3474720"/>
-            <a:ext cx="3017520" cy="548640"/>
-          </a:xfrm>
-          <a:prstGeom prst="rect">
-            <a:avLst/>
-          </a:prstGeom>
-          <a:noFill/>
-          <a:ln/>
-        </p:spPr>
-        <p:txBody>
-          <a:bodyPr wrap="square" lIns="0" tIns="0" rIns="0" bIns="0" rtlCol="0" anchor="t"/>
-          <a:lstStyle/>
-          <a:p>
-            <a:pPr indent="0" marL="0">
-              <a:buNone/>
-            </a:pPr>
-            <a:r>
-              <a:rPr lang="en-US" sz="1300" dirty="0">
-                <a:solidFill>
-                  <a:srgbClr val="6B7280"/>
-                </a:solidFill>
-                <a:latin typeface="Calibri" pitchFamily="34" charset="0"/>
-                <a:ea typeface="Calibri" pitchFamily="34" charset="-122"/>
-                <a:cs typeface="Calibri" pitchFamily="34" charset="-120"/>
-              </a:rPr>
-              <a:t>Device use cannot be hidden</a:t>
-            </a:r>
-            <a:endParaRPr lang="en-US" sz="1300" dirty="0"/>
-          </a:p>
-        </p:txBody>
-      </p:sp>
-      <p:sp>
-        <p:nvSpPr>
-          <p:cNvPr id="20" name="Shape 17"/>
+          <p:cNvPr id="20" name="Shape 14"/>
           <p:cNvSpPr/>
           <p:nvPr/>
         </p:nvSpPr>
@@ -5419,11 +5007,11 @@
             </a:avLst>
           </a:prstGeom>
           <a:solidFill>
-            <a:srgbClr val="FFFFFF"/>
+            <a:srgbClr val="F8F0F3"/>
           </a:solidFill>
-          <a:ln w="15875">
+          <a:ln w="12700">
             <a:solidFill>
-              <a:srgbClr val="E5E7EB"/>
+              <a:srgbClr val="F8F0F3"/>
             </a:solidFill>
             <a:prstDash val="solid"/>
           </a:ln>
@@ -5431,7 +5019,7 @@
       </p:sp>
       <p:sp>
         <p:nvSpPr>
-          <p:cNvPr id="21" name="Shape 18"/>
+          <p:cNvPr id="21" name="Shape 15"/>
           <p:cNvSpPr/>
           <p:nvPr/>
         </p:nvSpPr>
@@ -5444,26 +5032,50 @@
             <a:avLst/>
           </a:prstGeom>
           <a:solidFill>
-            <a:srgbClr val="A3AAB6"/>
+            <a:srgbClr val="8C1D40"/>
           </a:solidFill>
           <a:ln w="12700">
             <a:solidFill>
-              <a:srgbClr val="A3AAB6"/>
+              <a:srgbClr val="8C1D40"/>
             </a:solidFill>
             <a:prstDash val="solid"/>
           </a:ln>
         </p:spPr>
       </p:sp>
-      <p:sp>
-        <p:nvSpPr>
-          <p:cNvPr id="22" name="Text 19"/>
-          <p:cNvSpPr txBox="1"/>
-          <p:nvPr/>
-        </p:nvSpPr>
-        <p:spPr>
-          <a:xfrm>
-            <a:off x="4937760" y="3017520"/>
-            <a:ext cx="411480" cy="411480"/>
+      <p:pic>
+        <p:nvPicPr>
+          <p:cNvPr id="22" name="Image 3" descr="preencoded.png">    </p:cNvPr>
+          <p:cNvPicPr>
+            <a:picLocks noChangeAspect="1"/>
+          </p:cNvPicPr>
+          <p:nvPr/>
+        </p:nvPicPr>
+        <p:blipFill>
+          <a:blip r:embed="rId4"/>
+          <a:stretch>
+            <a:fillRect/>
+          </a:stretch>
+        </p:blipFill>
+        <p:spPr>
+          <a:xfrm>
+            <a:off x="5048860" y="3128620"/>
+            <a:ext cx="189281" cy="189281"/>
+          </a:xfrm>
+          <a:prstGeom prst="rect">
+            <a:avLst/>
+          </a:prstGeom>
+        </p:spPr>
+      </p:pic>
+      <p:sp>
+        <p:nvSpPr>
+          <p:cNvPr id="23" name="Text 16"/>
+          <p:cNvSpPr txBox="1"/>
+          <p:nvPr/>
+        </p:nvSpPr>
+        <p:spPr>
+          <a:xfrm>
+            <a:off x="5532120" y="3017520"/>
+            <a:ext cx="3017520" cy="411480"/>
           </a:xfrm>
           <a:prstGeom prst="rect">
             <a:avLst/>
@@ -5475,97 +5087,58 @@
           <a:bodyPr wrap="square" lIns="0" tIns="0" rIns="0" bIns="0" rtlCol="0" anchor="ctr"/>
           <a:lstStyle/>
           <a:p>
-            <a:pPr algn="ctr" indent="0" marL="0">
-              <a:buNone/>
-            </a:pPr>
-            <a:r>
-              <a:rPr lang="en-US" sz="1300" b="1" dirty="0">
-                <a:solidFill>
-                  <a:srgbClr val="FFFFFF"/>
+            <a:pPr indent="0" marL="0">
+              <a:buNone/>
+            </a:pPr>
+            <a:r>
+              <a:rPr lang="en-US" sz="1600" b="1" dirty="0">
+                <a:solidFill>
+                  <a:srgbClr val="1F2937"/>
+                </a:solidFill>
+                <a:latin typeface="Cambria" pitchFamily="34" charset="0"/>
+                <a:ea typeface="Cambria" pitchFamily="34" charset="-122"/>
+                <a:cs typeface="Cambria" pitchFamily="34" charset="-120"/>
+              </a:rPr>
+              <a:t>Safe early course</a:t>
+            </a:r>
+            <a:endParaRPr lang="en-US" sz="1600" dirty="0"/>
+          </a:p>
+        </p:txBody>
+      </p:sp>
+      <p:sp>
+        <p:nvSpPr>
+          <p:cNvPr id="24" name="Text 17"/>
+          <p:cNvSpPr txBox="1"/>
+          <p:nvPr/>
+        </p:nvSpPr>
+        <p:spPr>
+          <a:xfrm>
+            <a:off x="5532120" y="3474720"/>
+            <a:ext cx="3017520" cy="548640"/>
+          </a:xfrm>
+          <a:prstGeom prst="rect">
+            <a:avLst/>
+          </a:prstGeom>
+          <a:noFill/>
+          <a:ln/>
+        </p:spPr>
+        <p:txBody>
+          <a:bodyPr wrap="square" lIns="0" tIns="0" rIns="0" bIns="0" rtlCol="0" anchor="t"/>
+          <a:lstStyle/>
+          <a:p>
+            <a:pPr indent="0" marL="0">
+              <a:buNone/>
+            </a:pPr>
+            <a:r>
+              <a:rPr lang="en-US" sz="1300" dirty="0">
+                <a:solidFill>
+                  <a:srgbClr val="6B7280"/>
                 </a:solidFill>
                 <a:latin typeface="Calibri" pitchFamily="34" charset="0"/>
                 <a:ea typeface="Calibri" pitchFamily="34" charset="-122"/>
                 <a:cs typeface="Calibri" pitchFamily="34" charset="-120"/>
               </a:rPr>
-              <a:t>4</a:t>
-            </a:r>
-            <a:endParaRPr lang="en-US" sz="1300" dirty="0"/>
-          </a:p>
-        </p:txBody>
-      </p:sp>
-      <p:sp>
-        <p:nvSpPr>
-          <p:cNvPr id="23" name="Text 20"/>
-          <p:cNvSpPr txBox="1"/>
-          <p:nvPr/>
-        </p:nvSpPr>
-        <p:spPr>
-          <a:xfrm>
-            <a:off x="5532120" y="3017520"/>
-            <a:ext cx="3017520" cy="411480"/>
-          </a:xfrm>
-          <a:prstGeom prst="rect">
-            <a:avLst/>
-          </a:prstGeom>
-          <a:noFill/>
-          <a:ln/>
-        </p:spPr>
-        <p:txBody>
-          <a:bodyPr wrap="square" lIns="0" tIns="0" rIns="0" bIns="0" rtlCol="0" anchor="ctr"/>
-          <a:lstStyle/>
-          <a:p>
-            <a:pPr indent="0" marL="0">
-              <a:buNone/>
-            </a:pPr>
-            <a:r>
-              <a:rPr lang="en-US" sz="1600" b="1" dirty="0">
-                <a:solidFill>
-                  <a:srgbClr val="1F2937"/>
-                </a:solidFill>
-                <a:latin typeface="Cambria" pitchFamily="34" charset="0"/>
-                <a:ea typeface="Cambria" pitchFamily="34" charset="-122"/>
-                <a:cs typeface="Cambria" pitchFamily="34" charset="-120"/>
-              </a:rPr>
-              <a:t>MRI only a trend</a:t>
-            </a:r>
-            <a:endParaRPr lang="en-US" sz="1600" dirty="0"/>
-          </a:p>
-        </p:txBody>
-      </p:sp>
-      <p:sp>
-        <p:nvSpPr>
-          <p:cNvPr id="24" name="Text 21"/>
-          <p:cNvSpPr txBox="1"/>
-          <p:nvPr/>
-        </p:nvSpPr>
-        <p:spPr>
-          <a:xfrm>
-            <a:off x="5532120" y="3474720"/>
-            <a:ext cx="3017520" cy="548640"/>
-          </a:xfrm>
-          <a:prstGeom prst="rect">
-            <a:avLst/>
-          </a:prstGeom>
-          <a:noFill/>
-          <a:ln/>
-        </p:spPr>
-        <p:txBody>
-          <a:bodyPr wrap="square" lIns="0" tIns="0" rIns="0" bIns="0" rtlCol="0" anchor="t"/>
-          <a:lstStyle/>
-          <a:p>
-            <a:pPr indent="0" marL="0">
-              <a:buNone/>
-            </a:pPr>
-            <a:r>
-              <a:rPr lang="en-US" sz="1300" dirty="0">
-                <a:solidFill>
-                  <a:srgbClr val="6B7280"/>
-                </a:solidFill>
-                <a:latin typeface="Calibri" pitchFamily="34" charset="0"/>
-                <a:ea typeface="Calibri" pitchFamily="34" charset="-122"/>
-                <a:cs typeface="Calibri" pitchFamily="34" charset="-120"/>
-              </a:rPr>
-              <a:t>Industry-funded; needs independent confirmation</a:t>
+              <a:t>No stroke or death with enVast at 30 days</a:t>
             </a:r>
             <a:endParaRPr lang="en-US" sz="1300" dirty="0"/>
           </a:p>
@@ -5636,7 +5209,7 @@
                 <a:ea typeface="Cambria" pitchFamily="34" charset="-122"/>
                 <a:cs typeface="Cambria" pitchFamily="34" charset="-120"/>
               </a:rPr>
-              <a:t>Conclusion</a:t>
+              <a:t>Limitations</a:t>
             </a:r>
             <a:endParaRPr lang="en-US" sz="2800" dirty="0"/>
           </a:p>
@@ -5689,20 +5262,45 @@
         </p:nvSpPr>
         <p:spPr>
           <a:xfrm>
-            <a:off x="457200" y="1097280"/>
-            <a:ext cx="8229600" cy="1371600"/>
+            <a:off x="457200" y="1234440"/>
+            <a:ext cx="4023360" cy="1280160"/>
           </a:xfrm>
           <a:prstGeom prst="roundRect">
             <a:avLst>
-              <a:gd name="adj" fmla="val 5333"/>
+              <a:gd name="adj" fmla="val 5714"/>
             </a:avLst>
           </a:prstGeom>
           <a:solidFill>
-            <a:srgbClr val="8C1D40"/>
+            <a:srgbClr val="FFFFFF"/>
+          </a:solidFill>
+          <a:ln w="15875">
+            <a:solidFill>
+              <a:srgbClr val="E5E7EB"/>
+            </a:solidFill>
+            <a:prstDash val="solid"/>
+          </a:ln>
+        </p:spPr>
+      </p:sp>
+      <p:sp>
+        <p:nvSpPr>
+          <p:cNvPr id="6" name="Shape 3"/>
+          <p:cNvSpPr/>
+          <p:nvPr/>
+        </p:nvSpPr>
+        <p:spPr>
+          <a:xfrm>
+            <a:off x="731520" y="1508760"/>
+            <a:ext cx="411480" cy="411480"/>
+          </a:xfrm>
+          <a:prstGeom prst="ellipse">
+            <a:avLst/>
+          </a:prstGeom>
+          <a:solidFill>
+            <a:srgbClr val="A3AAB6"/>
           </a:solidFill>
           <a:ln w="12700">
             <a:solidFill>
-              <a:srgbClr val="8C1D40"/>
+              <a:srgbClr val="A3AAB6"/>
             </a:solidFill>
             <a:prstDash val="solid"/>
           </a:ln>
@@ -5710,14 +5308,14 @@
       </p:sp>
       <p:sp>
         <p:nvSpPr>
-          <p:cNvPr id="6" name="Text 3"/>
-          <p:cNvSpPr txBox="1"/>
-          <p:nvPr/>
-        </p:nvSpPr>
-        <p:spPr>
-          <a:xfrm>
-            <a:off x="731520" y="1097280"/>
-            <a:ext cx="7680960" cy="1371600"/>
+          <p:cNvPr id="7" name="Text 4"/>
+          <p:cNvSpPr txBox="1"/>
+          <p:nvPr/>
+        </p:nvSpPr>
+        <p:spPr>
+          <a:xfrm>
+            <a:off x="731520" y="1508760"/>
+            <a:ext cx="411480" cy="411480"/>
           </a:xfrm>
           <a:prstGeom prst="rect">
             <a:avLst/>
@@ -5729,34 +5327,164 @@
           <a:bodyPr wrap="square" lIns="0" tIns="0" rIns="0" bIns="0" rtlCol="0" anchor="ctr"/>
           <a:lstStyle/>
           <a:p>
+            <a:pPr algn="ctr" indent="0" marL="0">
+              <a:buNone/>
+            </a:pPr>
+            <a:r>
+              <a:rPr lang="en-US" sz="1300" b="1" dirty="0">
+                <a:solidFill>
+                  <a:srgbClr val="FFFFFF"/>
+                </a:solidFill>
+                <a:latin typeface="Calibri" pitchFamily="34" charset="0"/>
+                <a:ea typeface="Calibri" pitchFamily="34" charset="-122"/>
+                <a:cs typeface="Calibri" pitchFamily="34" charset="-120"/>
+              </a:rPr>
+              <a:t>1</a:t>
+            </a:r>
+            <a:endParaRPr lang="en-US" sz="1300" dirty="0"/>
+          </a:p>
+        </p:txBody>
+      </p:sp>
+      <p:sp>
+        <p:nvSpPr>
+          <p:cNvPr id="8" name="Text 5"/>
+          <p:cNvSpPr txBox="1"/>
+          <p:nvPr/>
+        </p:nvSpPr>
+        <p:spPr>
+          <a:xfrm>
+            <a:off x="1325880" y="1508760"/>
+            <a:ext cx="3017520" cy="411480"/>
+          </a:xfrm>
+          <a:prstGeom prst="rect">
+            <a:avLst/>
+          </a:prstGeom>
+          <a:noFill/>
+          <a:ln/>
+        </p:spPr>
+        <p:txBody>
+          <a:bodyPr wrap="square" lIns="0" tIns="0" rIns="0" bIns="0" rtlCol="0" anchor="ctr"/>
+          <a:lstStyle/>
+          <a:p>
             <a:pPr indent="0" marL="0">
               <a:buNone/>
             </a:pPr>
             <a:r>
-              <a:rPr lang="en-US" sz="1900" i="1" dirty="0">
-                <a:solidFill>
-                  <a:srgbClr val="FFFFFF"/>
+              <a:rPr lang="en-US" sz="1600" b="1" dirty="0">
+                <a:solidFill>
+                  <a:srgbClr val="1F2937"/>
                 </a:solidFill>
                 <a:latin typeface="Cambria" pitchFamily="34" charset="0"/>
                 <a:ea typeface="Cambria" pitchFamily="34" charset="-122"/>
                 <a:cs typeface="Cambria" pitchFamily="34" charset="-120"/>
               </a:rPr>
-              <a:t>In STEMI with a large thrombus, enVast thrombectomy before PCI was superior to standard PCI in reducing infarct size, with no early safety concern.</a:t>
-            </a:r>
-            <a:endParaRPr lang="en-US" sz="1900" dirty="0"/>
-          </a:p>
-        </p:txBody>
-      </p:sp>
-      <p:sp>
-        <p:nvSpPr>
-          <p:cNvPr id="7" name="Text 4"/>
-          <p:cNvSpPr txBox="1"/>
-          <p:nvPr/>
-        </p:nvSpPr>
-        <p:spPr>
-          <a:xfrm>
-            <a:off x="457200" y="2743200"/>
-            <a:ext cx="4023360" cy="365760"/>
+              <a:t>Small trial</a:t>
+            </a:r>
+            <a:endParaRPr lang="en-US" sz="1600" dirty="0"/>
+          </a:p>
+        </p:txBody>
+      </p:sp>
+      <p:sp>
+        <p:nvSpPr>
+          <p:cNvPr id="9" name="Text 6"/>
+          <p:cNvSpPr txBox="1"/>
+          <p:nvPr/>
+        </p:nvSpPr>
+        <p:spPr>
+          <a:xfrm>
+            <a:off x="1325880" y="1965960"/>
+            <a:ext cx="3017520" cy="548640"/>
+          </a:xfrm>
+          <a:prstGeom prst="rect">
+            <a:avLst/>
+          </a:prstGeom>
+          <a:noFill/>
+          <a:ln/>
+        </p:spPr>
+        <p:txBody>
+          <a:bodyPr wrap="square" lIns="0" tIns="0" rIns="0" bIns="0" rtlCol="0" anchor="t"/>
+          <a:lstStyle/>
+          <a:p>
+            <a:pPr indent="0" marL="0">
+              <a:buNone/>
+            </a:pPr>
+            <a:r>
+              <a:rPr lang="en-US" sz="1300" dirty="0">
+                <a:solidFill>
+                  <a:srgbClr val="6B7280"/>
+                </a:solidFill>
+                <a:latin typeface="Calibri" pitchFamily="34" charset="0"/>
+                <a:ea typeface="Calibri" pitchFamily="34" charset="-122"/>
+                <a:cs typeface="Calibri" pitchFamily="34" charset="-120"/>
+              </a:rPr>
+              <a:t>Only 154 patients</a:t>
+            </a:r>
+            <a:endParaRPr lang="en-US" sz="1300" dirty="0"/>
+          </a:p>
+        </p:txBody>
+      </p:sp>
+      <p:sp>
+        <p:nvSpPr>
+          <p:cNvPr id="10" name="Shape 7"/>
+          <p:cNvSpPr/>
+          <p:nvPr/>
+        </p:nvSpPr>
+        <p:spPr>
+          <a:xfrm>
+            <a:off x="4663440" y="1234440"/>
+            <a:ext cx="4023360" cy="1280160"/>
+          </a:xfrm>
+          <a:prstGeom prst="roundRect">
+            <a:avLst>
+              <a:gd name="adj" fmla="val 5714"/>
+            </a:avLst>
+          </a:prstGeom>
+          <a:solidFill>
+            <a:srgbClr val="FFFFFF"/>
+          </a:solidFill>
+          <a:ln w="15875">
+            <a:solidFill>
+              <a:srgbClr val="E5E7EB"/>
+            </a:solidFill>
+            <a:prstDash val="solid"/>
+          </a:ln>
+        </p:spPr>
+      </p:sp>
+      <p:sp>
+        <p:nvSpPr>
+          <p:cNvPr id="11" name="Shape 8"/>
+          <p:cNvSpPr/>
+          <p:nvPr/>
+        </p:nvSpPr>
+        <p:spPr>
+          <a:xfrm>
+            <a:off x="4937760" y="1508760"/>
+            <a:ext cx="411480" cy="411480"/>
+          </a:xfrm>
+          <a:prstGeom prst="ellipse">
+            <a:avLst/>
+          </a:prstGeom>
+          <a:solidFill>
+            <a:srgbClr val="A3AAB6"/>
+          </a:solidFill>
+          <a:ln w="12700">
+            <a:solidFill>
+              <a:srgbClr val="A3AAB6"/>
+            </a:solidFill>
+            <a:prstDash val="solid"/>
+          </a:ln>
+        </p:spPr>
+      </p:sp>
+      <p:sp>
+        <p:nvSpPr>
+          <p:cNvPr id="12" name="Text 9"/>
+          <p:cNvSpPr txBox="1"/>
+          <p:nvPr/>
+        </p:nvSpPr>
+        <p:spPr>
+          <a:xfrm>
+            <a:off x="4937760" y="1508760"/>
+            <a:ext cx="411480" cy="411480"/>
           </a:xfrm>
           <a:prstGeom prst="rect">
             <a:avLst/>
@@ -5768,34 +5496,73 @@
           <a:bodyPr wrap="square" lIns="0" tIns="0" rIns="0" bIns="0" rtlCol="0" anchor="ctr"/>
           <a:lstStyle/>
           <a:p>
+            <a:pPr algn="ctr" indent="0" marL="0">
+              <a:buNone/>
+            </a:pPr>
+            <a:r>
+              <a:rPr lang="en-US" sz="1300" b="1" dirty="0">
+                <a:solidFill>
+                  <a:srgbClr val="FFFFFF"/>
+                </a:solidFill>
+                <a:latin typeface="Calibri" pitchFamily="34" charset="0"/>
+                <a:ea typeface="Calibri" pitchFamily="34" charset="-122"/>
+                <a:cs typeface="Calibri" pitchFamily="34" charset="-120"/>
+              </a:rPr>
+              <a:t>2</a:t>
+            </a:r>
+            <a:endParaRPr lang="en-US" sz="1300" dirty="0"/>
+          </a:p>
+        </p:txBody>
+      </p:sp>
+      <p:sp>
+        <p:nvSpPr>
+          <p:cNvPr id="13" name="Text 10"/>
+          <p:cNvSpPr txBox="1"/>
+          <p:nvPr/>
+        </p:nvSpPr>
+        <p:spPr>
+          <a:xfrm>
+            <a:off x="5532120" y="1508760"/>
+            <a:ext cx="3017520" cy="411480"/>
+          </a:xfrm>
+          <a:prstGeom prst="rect">
+            <a:avLst/>
+          </a:prstGeom>
+          <a:noFill/>
+          <a:ln/>
+        </p:spPr>
+        <p:txBody>
+          <a:bodyPr wrap="square" lIns="0" tIns="0" rIns="0" bIns="0" rtlCol="0" anchor="ctr"/>
+          <a:lstStyle/>
+          <a:p>
             <a:pPr indent="0" marL="0">
               <a:buNone/>
             </a:pPr>
             <a:r>
-              <a:rPr lang="en-US" sz="1700" b="1" dirty="0">
-                <a:solidFill>
-                  <a:srgbClr val="8C1D40"/>
+              <a:rPr lang="en-US" sz="1600" b="1" dirty="0">
+                <a:solidFill>
+                  <a:srgbClr val="1F2937"/>
                 </a:solidFill>
                 <a:latin typeface="Cambria" pitchFamily="34" charset="0"/>
                 <a:ea typeface="Cambria" pitchFamily="34" charset="-122"/>
                 <a:cs typeface="Cambria" pitchFamily="34" charset="-120"/>
               </a:rPr>
-              <a:t>Today</a:t>
-            </a:r>
-            <a:endParaRPr lang="en-US" sz="1700" dirty="0"/>
-          </a:p>
-        </p:txBody>
-      </p:sp>
-      <p:sp>
-        <p:nvSpPr>
-          <p:cNvPr id="8" name="Text 5"/>
-          <p:cNvSpPr txBox="1"/>
-          <p:nvPr/>
-        </p:nvSpPr>
-        <p:spPr>
-          <a:xfrm>
-            <a:off x="457200" y="3154680"/>
-            <a:ext cx="3931920" cy="1097280"/>
+              <a:t>Surrogate endpoint</a:t>
+            </a:r>
+            <a:endParaRPr lang="en-US" sz="1600" dirty="0"/>
+          </a:p>
+        </p:txBody>
+      </p:sp>
+      <p:sp>
+        <p:nvSpPr>
+          <p:cNvPr id="14" name="Text 11"/>
+          <p:cNvSpPr txBox="1"/>
+          <p:nvPr/>
+        </p:nvSpPr>
+        <p:spPr>
+          <a:xfrm>
+            <a:off x="5532120" y="1965960"/>
+            <a:ext cx="3017520" cy="548640"/>
           </a:xfrm>
           <a:prstGeom prst="rect">
             <a:avLst/>
@@ -5811,30 +5578,82 @@
               <a:buNone/>
             </a:pPr>
             <a:r>
-              <a:rPr lang="en-US" sz="1400" dirty="0">
-                <a:solidFill>
-                  <a:srgbClr val="1F2937"/>
+              <a:rPr lang="en-US" sz="1300" dirty="0">
+                <a:solidFill>
+                  <a:srgbClr val="6B7280"/>
                 </a:solidFill>
                 <a:latin typeface="Calibri" pitchFamily="34" charset="0"/>
                 <a:ea typeface="Calibri" pitchFamily="34" charset="-122"/>
                 <a:cs typeface="Calibri" pitchFamily="34" charset="-120"/>
               </a:rPr>
-              <a:t>Promising for selected large-thrombus cases, but not yet routine. Guidelines are unchanged.</a:t>
-            </a:r>
-            <a:endParaRPr lang="en-US" sz="1400" dirty="0"/>
-          </a:p>
-        </p:txBody>
-      </p:sp>
-      <p:sp>
-        <p:nvSpPr>
-          <p:cNvPr id="9" name="Text 6"/>
-          <p:cNvSpPr txBox="1"/>
-          <p:nvPr/>
-        </p:nvSpPr>
-        <p:spPr>
-          <a:xfrm>
-            <a:off x="4663440" y="2743200"/>
-            <a:ext cx="4023360" cy="365760"/>
+              <a:t>Infarct size, not death or heart failure</a:t>
+            </a:r>
+            <a:endParaRPr lang="en-US" sz="1300" dirty="0"/>
+          </a:p>
+        </p:txBody>
+      </p:sp>
+      <p:sp>
+        <p:nvSpPr>
+          <p:cNvPr id="15" name="Shape 12"/>
+          <p:cNvSpPr/>
+          <p:nvPr/>
+        </p:nvSpPr>
+        <p:spPr>
+          <a:xfrm>
+            <a:off x="457200" y="2743200"/>
+            <a:ext cx="4023360" cy="1280160"/>
+          </a:xfrm>
+          <a:prstGeom prst="roundRect">
+            <a:avLst>
+              <a:gd name="adj" fmla="val 5714"/>
+            </a:avLst>
+          </a:prstGeom>
+          <a:solidFill>
+            <a:srgbClr val="FFFFFF"/>
+          </a:solidFill>
+          <a:ln w="15875">
+            <a:solidFill>
+              <a:srgbClr val="E5E7EB"/>
+            </a:solidFill>
+            <a:prstDash val="solid"/>
+          </a:ln>
+        </p:spPr>
+      </p:sp>
+      <p:sp>
+        <p:nvSpPr>
+          <p:cNvPr id="16" name="Shape 13"/>
+          <p:cNvSpPr/>
+          <p:nvPr/>
+        </p:nvSpPr>
+        <p:spPr>
+          <a:xfrm>
+            <a:off x="731520" y="3017520"/>
+            <a:ext cx="411480" cy="411480"/>
+          </a:xfrm>
+          <a:prstGeom prst="ellipse">
+            <a:avLst/>
+          </a:prstGeom>
+          <a:solidFill>
+            <a:srgbClr val="A3AAB6"/>
+          </a:solidFill>
+          <a:ln w="12700">
+            <a:solidFill>
+              <a:srgbClr val="A3AAB6"/>
+            </a:solidFill>
+            <a:prstDash val="solid"/>
+          </a:ln>
+        </p:spPr>
+      </p:sp>
+      <p:sp>
+        <p:nvSpPr>
+          <p:cNvPr id="17" name="Text 14"/>
+          <p:cNvSpPr txBox="1"/>
+          <p:nvPr/>
+        </p:nvSpPr>
+        <p:spPr>
+          <a:xfrm>
+            <a:off x="731520" y="3017520"/>
+            <a:ext cx="411480" cy="411480"/>
           </a:xfrm>
           <a:prstGeom prst="rect">
             <a:avLst/>
@@ -5846,34 +5665,73 @@
           <a:bodyPr wrap="square" lIns="0" tIns="0" rIns="0" bIns="0" rtlCol="0" anchor="ctr"/>
           <a:lstStyle/>
           <a:p>
+            <a:pPr algn="ctr" indent="0" marL="0">
+              <a:buNone/>
+            </a:pPr>
+            <a:r>
+              <a:rPr lang="en-US" sz="1300" b="1" dirty="0">
+                <a:solidFill>
+                  <a:srgbClr val="FFFFFF"/>
+                </a:solidFill>
+                <a:latin typeface="Calibri" pitchFamily="34" charset="0"/>
+                <a:ea typeface="Calibri" pitchFamily="34" charset="-122"/>
+                <a:cs typeface="Calibri" pitchFamily="34" charset="-120"/>
+              </a:rPr>
+              <a:t>3</a:t>
+            </a:r>
+            <a:endParaRPr lang="en-US" sz="1300" dirty="0"/>
+          </a:p>
+        </p:txBody>
+      </p:sp>
+      <p:sp>
+        <p:nvSpPr>
+          <p:cNvPr id="18" name="Text 15"/>
+          <p:cNvSpPr txBox="1"/>
+          <p:nvPr/>
+        </p:nvSpPr>
+        <p:spPr>
+          <a:xfrm>
+            <a:off x="1325880" y="3017520"/>
+            <a:ext cx="3017520" cy="411480"/>
+          </a:xfrm>
+          <a:prstGeom prst="rect">
+            <a:avLst/>
+          </a:prstGeom>
+          <a:noFill/>
+          <a:ln/>
+        </p:spPr>
+        <p:txBody>
+          <a:bodyPr wrap="square" lIns="0" tIns="0" rIns="0" bIns="0" rtlCol="0" anchor="ctr"/>
+          <a:lstStyle/>
+          <a:p>
             <a:pPr indent="0" marL="0">
               <a:buNone/>
             </a:pPr>
             <a:r>
-              <a:rPr lang="en-US" sz="1700" b="1" dirty="0">
-                <a:solidFill>
-                  <a:srgbClr val="8C1D40"/>
+              <a:rPr lang="en-US" sz="1600" b="1" dirty="0">
+                <a:solidFill>
+                  <a:srgbClr val="1F2937"/>
                 </a:solidFill>
                 <a:latin typeface="Cambria" pitchFamily="34" charset="0"/>
                 <a:ea typeface="Cambria" pitchFamily="34" charset="-122"/>
                 <a:cs typeface="Cambria" pitchFamily="34" charset="-120"/>
               </a:rPr>
-              <a:t>Next</a:t>
-            </a:r>
-            <a:endParaRPr lang="en-US" sz="1700" dirty="0"/>
-          </a:p>
-        </p:txBody>
-      </p:sp>
-      <p:sp>
-        <p:nvSpPr>
-          <p:cNvPr id="10" name="Text 7"/>
-          <p:cNvSpPr txBox="1"/>
-          <p:nvPr/>
-        </p:nvSpPr>
-        <p:spPr>
-          <a:xfrm>
-            <a:off x="4663440" y="3154680"/>
-            <a:ext cx="3931920" cy="1097280"/>
+              <a:t>Operators not blinded</a:t>
+            </a:r>
+            <a:endParaRPr lang="en-US" sz="1600" dirty="0"/>
+          </a:p>
+        </p:txBody>
+      </p:sp>
+      <p:sp>
+        <p:nvSpPr>
+          <p:cNvPr id="19" name="Text 16"/>
+          <p:cNvSpPr txBox="1"/>
+          <p:nvPr/>
+        </p:nvSpPr>
+        <p:spPr>
+          <a:xfrm>
+            <a:off x="1325880" y="3474720"/>
+            <a:ext cx="3017520" cy="548640"/>
           </a:xfrm>
           <a:prstGeom prst="rect">
             <a:avLst/>
@@ -5889,17 +5747,186 @@
               <a:buNone/>
             </a:pPr>
             <a:r>
-              <a:rPr lang="en-US" sz="1400" dirty="0">
-                <a:solidFill>
-                  <a:srgbClr val="1F2937"/>
+              <a:rPr lang="en-US" sz="1300" dirty="0">
+                <a:solidFill>
+                  <a:srgbClr val="6B7280"/>
                 </a:solidFill>
                 <a:latin typeface="Calibri" pitchFamily="34" charset="0"/>
                 <a:ea typeface="Calibri" pitchFamily="34" charset="-122"/>
                 <a:cs typeface="Calibri" pitchFamily="34" charset="-120"/>
               </a:rPr>
-              <a:t>A larger trial with hard outcomes: death, heart failure and stroke.</a:t>
-            </a:r>
-            <a:endParaRPr lang="en-US" sz="1400" dirty="0"/>
+              <a:t>Device use cannot be hidden</a:t>
+            </a:r>
+            <a:endParaRPr lang="en-US" sz="1300" dirty="0"/>
+          </a:p>
+        </p:txBody>
+      </p:sp>
+      <p:sp>
+        <p:nvSpPr>
+          <p:cNvPr id="20" name="Shape 17"/>
+          <p:cNvSpPr/>
+          <p:nvPr/>
+        </p:nvSpPr>
+        <p:spPr>
+          <a:xfrm>
+            <a:off x="4663440" y="2743200"/>
+            <a:ext cx="4023360" cy="1280160"/>
+          </a:xfrm>
+          <a:prstGeom prst="roundRect">
+            <a:avLst>
+              <a:gd name="adj" fmla="val 5714"/>
+            </a:avLst>
+          </a:prstGeom>
+          <a:solidFill>
+            <a:srgbClr val="FFFFFF"/>
+          </a:solidFill>
+          <a:ln w="15875">
+            <a:solidFill>
+              <a:srgbClr val="E5E7EB"/>
+            </a:solidFill>
+            <a:prstDash val="solid"/>
+          </a:ln>
+        </p:spPr>
+      </p:sp>
+      <p:sp>
+        <p:nvSpPr>
+          <p:cNvPr id="21" name="Shape 18"/>
+          <p:cNvSpPr/>
+          <p:nvPr/>
+        </p:nvSpPr>
+        <p:spPr>
+          <a:xfrm>
+            <a:off x="4937760" y="3017520"/>
+            <a:ext cx="411480" cy="411480"/>
+          </a:xfrm>
+          <a:prstGeom prst="ellipse">
+            <a:avLst/>
+          </a:prstGeom>
+          <a:solidFill>
+            <a:srgbClr val="A3AAB6"/>
+          </a:solidFill>
+          <a:ln w="12700">
+            <a:solidFill>
+              <a:srgbClr val="A3AAB6"/>
+            </a:solidFill>
+            <a:prstDash val="solid"/>
+          </a:ln>
+        </p:spPr>
+      </p:sp>
+      <p:sp>
+        <p:nvSpPr>
+          <p:cNvPr id="22" name="Text 19"/>
+          <p:cNvSpPr txBox="1"/>
+          <p:nvPr/>
+        </p:nvSpPr>
+        <p:spPr>
+          <a:xfrm>
+            <a:off x="4937760" y="3017520"/>
+            <a:ext cx="411480" cy="411480"/>
+          </a:xfrm>
+          <a:prstGeom prst="rect">
+            <a:avLst/>
+          </a:prstGeom>
+          <a:noFill/>
+          <a:ln/>
+        </p:spPr>
+        <p:txBody>
+          <a:bodyPr wrap="square" lIns="0" tIns="0" rIns="0" bIns="0" rtlCol="0" anchor="ctr"/>
+          <a:lstStyle/>
+          <a:p>
+            <a:pPr algn="ctr" indent="0" marL="0">
+              <a:buNone/>
+            </a:pPr>
+            <a:r>
+              <a:rPr lang="en-US" sz="1300" b="1" dirty="0">
+                <a:solidFill>
+                  <a:srgbClr val="FFFFFF"/>
+                </a:solidFill>
+                <a:latin typeface="Calibri" pitchFamily="34" charset="0"/>
+                <a:ea typeface="Calibri" pitchFamily="34" charset="-122"/>
+                <a:cs typeface="Calibri" pitchFamily="34" charset="-120"/>
+              </a:rPr>
+              <a:t>4</a:t>
+            </a:r>
+            <a:endParaRPr lang="en-US" sz="1300" dirty="0"/>
+          </a:p>
+        </p:txBody>
+      </p:sp>
+      <p:sp>
+        <p:nvSpPr>
+          <p:cNvPr id="23" name="Text 20"/>
+          <p:cNvSpPr txBox="1"/>
+          <p:nvPr/>
+        </p:nvSpPr>
+        <p:spPr>
+          <a:xfrm>
+            <a:off x="5532120" y="3017520"/>
+            <a:ext cx="3017520" cy="411480"/>
+          </a:xfrm>
+          <a:prstGeom prst="rect">
+            <a:avLst/>
+          </a:prstGeom>
+          <a:noFill/>
+          <a:ln/>
+        </p:spPr>
+        <p:txBody>
+          <a:bodyPr wrap="square" lIns="0" tIns="0" rIns="0" bIns="0" rtlCol="0" anchor="ctr"/>
+          <a:lstStyle/>
+          <a:p>
+            <a:pPr indent="0" marL="0">
+              <a:buNone/>
+            </a:pPr>
+            <a:r>
+              <a:rPr lang="en-US" sz="1600" b="1" dirty="0">
+                <a:solidFill>
+                  <a:srgbClr val="1F2937"/>
+                </a:solidFill>
+                <a:latin typeface="Cambria" pitchFamily="34" charset="0"/>
+                <a:ea typeface="Cambria" pitchFamily="34" charset="-122"/>
+                <a:cs typeface="Cambria" pitchFamily="34" charset="-120"/>
+              </a:rPr>
+              <a:t>MRI only a trend</a:t>
+            </a:r>
+            <a:endParaRPr lang="en-US" sz="1600" dirty="0"/>
+          </a:p>
+        </p:txBody>
+      </p:sp>
+      <p:sp>
+        <p:nvSpPr>
+          <p:cNvPr id="24" name="Text 21"/>
+          <p:cNvSpPr txBox="1"/>
+          <p:nvPr/>
+        </p:nvSpPr>
+        <p:spPr>
+          <a:xfrm>
+            <a:off x="5532120" y="3474720"/>
+            <a:ext cx="3017520" cy="548640"/>
+          </a:xfrm>
+          <a:prstGeom prst="rect">
+            <a:avLst/>
+          </a:prstGeom>
+          <a:noFill/>
+          <a:ln/>
+        </p:spPr>
+        <p:txBody>
+          <a:bodyPr wrap="square" lIns="0" tIns="0" rIns="0" bIns="0" rtlCol="0" anchor="t"/>
+          <a:lstStyle/>
+          <a:p>
+            <a:pPr indent="0" marL="0">
+              <a:buNone/>
+            </a:pPr>
+            <a:r>
+              <a:rPr lang="en-US" sz="1300" dirty="0">
+                <a:solidFill>
+                  <a:srgbClr val="6B7280"/>
+                </a:solidFill>
+                <a:latin typeface="Calibri" pitchFamily="34" charset="0"/>
+                <a:ea typeface="Calibri" pitchFamily="34" charset="-122"/>
+                <a:cs typeface="Calibri" pitchFamily="34" charset="-120"/>
+              </a:rPr>
+              <a:t>Industry-funded; needs independent confirmation</a:t>
+            </a:r>
+            <a:endParaRPr lang="en-US" sz="1300" dirty="0"/>
           </a:p>
         </p:txBody>
       </p:sp>
@@ -5968,7 +5995,7 @@
                 <a:ea typeface="Cambria" pitchFamily="34" charset="-122"/>
                 <a:cs typeface="Cambria" pitchFamily="34" charset="-120"/>
               </a:rPr>
-              <a:t>Take-home for our cath lab</a:t>
+              <a:t>Conclusion</a:t>
             </a:r>
             <a:endParaRPr lang="en-US" sz="2800" dirty="0"/>
           </a:p>
@@ -6015,14 +6042,41 @@
       </p:sp>
       <p:sp>
         <p:nvSpPr>
-          <p:cNvPr id="5" name="Text 2"/>
-          <p:cNvSpPr txBox="1"/>
-          <p:nvPr/>
-        </p:nvSpPr>
-        <p:spPr>
-          <a:xfrm>
-            <a:off x="457200" y="1234440"/>
-            <a:ext cx="914400" cy="731520"/>
+          <p:cNvPr id="5" name="Shape 2"/>
+          <p:cNvSpPr/>
+          <p:nvPr/>
+        </p:nvSpPr>
+        <p:spPr>
+          <a:xfrm>
+            <a:off x="457200" y="1097280"/>
+            <a:ext cx="8229600" cy="1371600"/>
+          </a:xfrm>
+          <a:prstGeom prst="roundRect">
+            <a:avLst>
+              <a:gd name="adj" fmla="val 5333"/>
+            </a:avLst>
+          </a:prstGeom>
+          <a:solidFill>
+            <a:srgbClr val="8C1D40"/>
+          </a:solidFill>
+          <a:ln w="12700">
+            <a:solidFill>
+              <a:srgbClr val="8C1D40"/>
+            </a:solidFill>
+            <a:prstDash val="solid"/>
+          </a:ln>
+        </p:spPr>
+      </p:sp>
+      <p:sp>
+        <p:nvSpPr>
+          <p:cNvPr id="6" name="Text 3"/>
+          <p:cNvSpPr txBox="1"/>
+          <p:nvPr/>
+        </p:nvSpPr>
+        <p:spPr>
+          <a:xfrm>
+            <a:off x="731520" y="1097280"/>
+            <a:ext cx="7680960" cy="1371600"/>
           </a:xfrm>
           <a:prstGeom prst="rect">
             <a:avLst/>
@@ -6038,30 +6092,30 @@
               <a:buNone/>
             </a:pPr>
             <a:r>
-              <a:rPr lang="en-US" sz="3600" b="1" dirty="0">
-                <a:solidFill>
-                  <a:srgbClr val="8C1D40"/>
+              <a:rPr lang="en-US" sz="1900" i="1" dirty="0">
+                <a:solidFill>
+                  <a:srgbClr val="FFFFFF"/>
                 </a:solidFill>
                 <a:latin typeface="Cambria" pitchFamily="34" charset="0"/>
                 <a:ea typeface="Cambria" pitchFamily="34" charset="-122"/>
                 <a:cs typeface="Cambria" pitchFamily="34" charset="-120"/>
               </a:rPr>
-              <a:t>01</a:t>
-            </a:r>
-            <a:endParaRPr lang="en-US" sz="3600" dirty="0"/>
-          </a:p>
-        </p:txBody>
-      </p:sp>
-      <p:sp>
-        <p:nvSpPr>
-          <p:cNvPr id="6" name="Text 3"/>
-          <p:cNvSpPr txBox="1"/>
-          <p:nvPr/>
-        </p:nvSpPr>
-        <p:spPr>
-          <a:xfrm>
-            <a:off x="1463040" y="1234440"/>
-            <a:ext cx="7223760" cy="731520"/>
+              <a:t>In STEMI with a large thrombus, enVast thrombectomy before PCI was superior to standard PCI in reducing infarct size, with no early safety concern.</a:t>
+            </a:r>
+            <a:endParaRPr lang="en-US" sz="1900" dirty="0"/>
+          </a:p>
+        </p:txBody>
+      </p:sp>
+      <p:sp>
+        <p:nvSpPr>
+          <p:cNvPr id="7" name="Text 4"/>
+          <p:cNvSpPr txBox="1"/>
+          <p:nvPr/>
+        </p:nvSpPr>
+        <p:spPr>
+          <a:xfrm>
+            <a:off x="457200" y="2743200"/>
+            <a:ext cx="4023360" cy="365760"/>
           </a:xfrm>
           <a:prstGeom prst="rect">
             <a:avLst/>
@@ -6077,7 +6131,46 @@
               <a:buNone/>
             </a:pPr>
             <a:r>
-              <a:rPr lang="en-US" sz="1700" dirty="0">
+              <a:rPr lang="en-US" sz="1700" b="1" dirty="0">
+                <a:solidFill>
+                  <a:srgbClr val="8C1D40"/>
+                </a:solidFill>
+                <a:latin typeface="Cambria" pitchFamily="34" charset="0"/>
+                <a:ea typeface="Cambria" pitchFamily="34" charset="-122"/>
+                <a:cs typeface="Cambria" pitchFamily="34" charset="-120"/>
+              </a:rPr>
+              <a:t>Today</a:t>
+            </a:r>
+            <a:endParaRPr lang="en-US" sz="1700" dirty="0"/>
+          </a:p>
+        </p:txBody>
+      </p:sp>
+      <p:sp>
+        <p:nvSpPr>
+          <p:cNvPr id="8" name="Text 5"/>
+          <p:cNvSpPr txBox="1"/>
+          <p:nvPr/>
+        </p:nvSpPr>
+        <p:spPr>
+          <a:xfrm>
+            <a:off x="457200" y="3154680"/>
+            <a:ext cx="3931920" cy="1097280"/>
+          </a:xfrm>
+          <a:prstGeom prst="rect">
+            <a:avLst/>
+          </a:prstGeom>
+          <a:noFill/>
+          <a:ln/>
+        </p:spPr>
+        <p:txBody>
+          <a:bodyPr wrap="square" lIns="0" tIns="0" rIns="0" bIns="0" rtlCol="0" anchor="t"/>
+          <a:lstStyle/>
+          <a:p>
+            <a:pPr indent="0" marL="0">
+              <a:buNone/>
+            </a:pPr>
+            <a:r>
+              <a:rPr lang="en-US" sz="1400" dirty="0">
                 <a:solidFill>
                   <a:srgbClr val="1F2937"/>
                 </a:solidFill>
@@ -6085,22 +6178,22 @@
                 <a:ea typeface="Calibri" pitchFamily="34" charset="-122"/>
                 <a:cs typeface="Calibri" pitchFamily="34" charset="-120"/>
               </a:rPr>
-              <a:t>Grade the thrombus (TIMI thrombus grade) in every STEMI</a:t>
-            </a:r>
-            <a:endParaRPr lang="en-US" sz="1700" dirty="0"/>
-          </a:p>
-        </p:txBody>
-      </p:sp>
-      <p:sp>
-        <p:nvSpPr>
-          <p:cNvPr id="7" name="Text 4"/>
-          <p:cNvSpPr txBox="1"/>
-          <p:nvPr/>
-        </p:nvSpPr>
-        <p:spPr>
-          <a:xfrm>
-            <a:off x="457200" y="2240280"/>
-            <a:ext cx="914400" cy="731520"/>
+              <a:t>Promising for selected large-thrombus cases, but not yet routine. Guidelines are unchanged.</a:t>
+            </a:r>
+            <a:endParaRPr lang="en-US" sz="1400" dirty="0"/>
+          </a:p>
+        </p:txBody>
+      </p:sp>
+      <p:sp>
+        <p:nvSpPr>
+          <p:cNvPr id="9" name="Text 6"/>
+          <p:cNvSpPr txBox="1"/>
+          <p:nvPr/>
+        </p:nvSpPr>
+        <p:spPr>
+          <a:xfrm>
+            <a:off x="4663440" y="2743200"/>
+            <a:ext cx="4023360" cy="365760"/>
           </a:xfrm>
           <a:prstGeom prst="rect">
             <a:avLst/>
@@ -6116,7 +6209,7 @@
               <a:buNone/>
             </a:pPr>
             <a:r>
-              <a:rPr lang="en-US" sz="3600" b="1" dirty="0">
+              <a:rPr lang="en-US" sz="1700" b="1" dirty="0">
                 <a:solidFill>
                   <a:srgbClr val="8C1D40"/>
                 </a:solidFill>
@@ -6124,38 +6217,38 @@
                 <a:ea typeface="Cambria" pitchFamily="34" charset="-122"/>
                 <a:cs typeface="Cambria" pitchFamily="34" charset="-120"/>
               </a:rPr>
-              <a:t>02</a:t>
-            </a:r>
-            <a:endParaRPr lang="en-US" sz="3600" dirty="0"/>
-          </a:p>
-        </p:txBody>
-      </p:sp>
-      <p:sp>
-        <p:nvSpPr>
-          <p:cNvPr id="8" name="Text 5"/>
-          <p:cNvSpPr txBox="1"/>
-          <p:nvPr/>
-        </p:nvSpPr>
-        <p:spPr>
-          <a:xfrm>
-            <a:off x="1463040" y="2240280"/>
-            <a:ext cx="7223760" cy="731520"/>
-          </a:xfrm>
-          <a:prstGeom prst="rect">
-            <a:avLst/>
-          </a:prstGeom>
-          <a:noFill/>
-          <a:ln/>
-        </p:spPr>
-        <p:txBody>
-          <a:bodyPr wrap="square" lIns="0" tIns="0" rIns="0" bIns="0" rtlCol="0" anchor="ctr"/>
+              <a:t>Next</a:t>
+            </a:r>
+            <a:endParaRPr lang="en-US" sz="1700" dirty="0"/>
+          </a:p>
+        </p:txBody>
+      </p:sp>
+      <p:sp>
+        <p:nvSpPr>
+          <p:cNvPr id="10" name="Text 7"/>
+          <p:cNvSpPr txBox="1"/>
+          <p:nvPr/>
+        </p:nvSpPr>
+        <p:spPr>
+          <a:xfrm>
+            <a:off x="4663440" y="3154680"/>
+            <a:ext cx="3931920" cy="1097280"/>
+          </a:xfrm>
+          <a:prstGeom prst="rect">
+            <a:avLst/>
+          </a:prstGeom>
+          <a:noFill/>
+          <a:ln/>
+        </p:spPr>
+        <p:txBody>
+          <a:bodyPr wrap="square" lIns="0" tIns="0" rIns="0" bIns="0" rtlCol="0" anchor="t"/>
           <a:lstStyle/>
           <a:p>
             <a:pPr indent="0" marL="0">
               <a:buNone/>
             </a:pPr>
             <a:r>
-              <a:rPr lang="en-US" sz="1700" dirty="0">
+              <a:rPr lang="en-US" sz="1400" dirty="0">
                 <a:solidFill>
                   <a:srgbClr val="1F2937"/>
                 </a:solidFill>
@@ -6163,87 +6256,9 @@
                 <a:ea typeface="Calibri" pitchFamily="34" charset="-122"/>
                 <a:cs typeface="Calibri" pitchFamily="34" charset="-120"/>
               </a:rPr>
-              <a:t>Routine manual aspiration is still not recommended</a:t>
-            </a:r>
-            <a:endParaRPr lang="en-US" sz="1700" dirty="0"/>
-          </a:p>
-        </p:txBody>
-      </p:sp>
-      <p:sp>
-        <p:nvSpPr>
-          <p:cNvPr id="9" name="Text 6"/>
-          <p:cNvSpPr txBox="1"/>
-          <p:nvPr/>
-        </p:nvSpPr>
-        <p:spPr>
-          <a:xfrm>
-            <a:off x="457200" y="3246120"/>
-            <a:ext cx="914400" cy="731520"/>
-          </a:xfrm>
-          <a:prstGeom prst="rect">
-            <a:avLst/>
-          </a:prstGeom>
-          <a:noFill/>
-          <a:ln/>
-        </p:spPr>
-        <p:txBody>
-          <a:bodyPr wrap="square" lIns="0" tIns="0" rIns="0" bIns="0" rtlCol="0" anchor="ctr"/>
-          <a:lstStyle/>
-          <a:p>
-            <a:pPr indent="0" marL="0">
-              <a:buNone/>
-            </a:pPr>
-            <a:r>
-              <a:rPr lang="en-US" sz="3600" b="1" dirty="0">
-                <a:solidFill>
-                  <a:srgbClr val="8C1D40"/>
-                </a:solidFill>
-                <a:latin typeface="Cambria" pitchFamily="34" charset="0"/>
-                <a:ea typeface="Cambria" pitchFamily="34" charset="-122"/>
-                <a:cs typeface="Cambria" pitchFamily="34" charset="-120"/>
-              </a:rPr>
-              <a:t>03</a:t>
-            </a:r>
-            <a:endParaRPr lang="en-US" sz="3600" dirty="0"/>
-          </a:p>
-        </p:txBody>
-      </p:sp>
-      <p:sp>
-        <p:nvSpPr>
-          <p:cNvPr id="10" name="Text 7"/>
-          <p:cNvSpPr txBox="1"/>
-          <p:nvPr/>
-        </p:nvSpPr>
-        <p:spPr>
-          <a:xfrm>
-            <a:off x="1463040" y="3246120"/>
-            <a:ext cx="7223760" cy="731520"/>
-          </a:xfrm>
-          <a:prstGeom prst="rect">
-            <a:avLst/>
-          </a:prstGeom>
-          <a:noFill/>
-          <a:ln/>
-        </p:spPr>
-        <p:txBody>
-          <a:bodyPr wrap="square" lIns="0" tIns="0" rIns="0" bIns="0" rtlCol="0" anchor="ctr"/>
-          <a:lstStyle/>
-          <a:p>
-            <a:pPr indent="0" marL="0">
-              <a:buNone/>
-            </a:pPr>
-            <a:r>
-              <a:rPr lang="en-US" sz="1700" dirty="0">
-                <a:solidFill>
-                  <a:srgbClr val="1F2937"/>
-                </a:solidFill>
-                <a:latin typeface="Calibri" pitchFamily="34" charset="0"/>
-                <a:ea typeface="Calibri" pitchFamily="34" charset="-122"/>
-                <a:cs typeface="Calibri" pitchFamily="34" charset="-120"/>
-              </a:rPr>
-              <a:t>Stent-retriever thrombectomy is promising for large thrombus, but awaits outcome data</a:t>
-            </a:r>
-            <a:endParaRPr lang="en-US" sz="1700" dirty="0"/>
+              <a:t>A larger trial with hard outcomes: death, heart failure and stroke.</a:t>
+            </a:r>
+            <a:endParaRPr lang="en-US" sz="1400" dirty="0"/>
           </a:p>
         </p:txBody>
       </p:sp>
@@ -6312,7 +6327,7 @@
                 <a:ea typeface="Cambria" pitchFamily="34" charset="-122"/>
                 <a:cs typeface="Cambria" pitchFamily="34" charset="-120"/>
               </a:rPr>
-              <a:t>References</a:t>
+              <a:t>Take-home for our cath lab</a:t>
             </a:r>
             <a:endParaRPr lang="en-US" sz="2800" dirty="0"/>
           </a:p>
@@ -6365,29 +6380,63 @@
         </p:nvSpPr>
         <p:spPr>
           <a:xfrm>
-            <a:off x="457200" y="1097280"/>
-            <a:ext cx="8229600" cy="3383280"/>
-          </a:xfrm>
-          <a:prstGeom prst="rect">
-            <a:avLst/>
-          </a:prstGeom>
-          <a:noFill/>
-          <a:ln/>
-        </p:spPr>
-        <p:txBody>
-          <a:bodyPr wrap="square" lIns="0" tIns="0" rIns="0" bIns="0" rtlCol="0" anchor="t"/>
-          <a:lstStyle/>
-          <a:p>
-            <a:pPr marL="342900" indent="-342900">
-              <a:spcAft>
-                <a:spcPts val="800"/>
-              </a:spcAft>
-              <a:buSzPct val="100000"/>
-              <a:buFont typeface="+mj-lt"/>
-              <a:buAutoNum type="arabicPeriod" startAt="1"/>
-            </a:pPr>
-            <a:r>
-              <a:rPr lang="en-US" sz="1300" dirty="0">
+            <a:off x="457200" y="1234440"/>
+            <a:ext cx="914400" cy="731520"/>
+          </a:xfrm>
+          <a:prstGeom prst="rect">
+            <a:avLst/>
+          </a:prstGeom>
+          <a:noFill/>
+          <a:ln/>
+        </p:spPr>
+        <p:txBody>
+          <a:bodyPr wrap="square" lIns="0" tIns="0" rIns="0" bIns="0" rtlCol="0" anchor="ctr"/>
+          <a:lstStyle/>
+          <a:p>
+            <a:pPr indent="0" marL="0">
+              <a:buNone/>
+            </a:pPr>
+            <a:r>
+              <a:rPr lang="en-US" sz="3600" b="1" dirty="0">
+                <a:solidFill>
+                  <a:srgbClr val="8C1D40"/>
+                </a:solidFill>
+                <a:latin typeface="Cambria" pitchFamily="34" charset="0"/>
+                <a:ea typeface="Cambria" pitchFamily="34" charset="-122"/>
+                <a:cs typeface="Cambria" pitchFamily="34" charset="-120"/>
+              </a:rPr>
+              <a:t>01</a:t>
+            </a:r>
+            <a:endParaRPr lang="en-US" sz="3600" dirty="0"/>
+          </a:p>
+        </p:txBody>
+      </p:sp>
+      <p:sp>
+        <p:nvSpPr>
+          <p:cNvPr id="6" name="Text 3"/>
+          <p:cNvSpPr txBox="1"/>
+          <p:nvPr/>
+        </p:nvSpPr>
+        <p:spPr>
+          <a:xfrm>
+            <a:off x="1463040" y="1234440"/>
+            <a:ext cx="7223760" cy="731520"/>
+          </a:xfrm>
+          <a:prstGeom prst="rect">
+            <a:avLst/>
+          </a:prstGeom>
+          <a:noFill/>
+          <a:ln/>
+        </p:spPr>
+        <p:txBody>
+          <a:bodyPr wrap="square" lIns="0" tIns="0" rIns="0" bIns="0" rtlCol="0" anchor="ctr"/>
+          <a:lstStyle/>
+          <a:p>
+            <a:pPr indent="0" marL="0">
+              <a:buNone/>
+            </a:pPr>
+            <a:r>
+              <a:rPr lang="en-US" sz="1700" dirty="0">
                 <a:solidFill>
                   <a:srgbClr val="1F2937"/>
                 </a:solidFill>
@@ -6395,21 +6444,77 @@
                 <a:ea typeface="Calibri" pitchFamily="34" charset="-122"/>
                 <a:cs typeface="Calibri" pitchFamily="34" charset="-120"/>
               </a:rPr>
-              <a:t>Valgimigli M. NATURE trial. Late-Breaking Clinical Trial, ESC Congress 2026, Munich.</a:t>
-            </a:r>
-            <a:endParaRPr lang="en-US" sz="1300" dirty="0"/>
-          </a:p>
-          <a:p>
-            <a:pPr marL="342900" indent="-342900">
-              <a:spcAft>
-                <a:spcPts val="800"/>
-              </a:spcAft>
-              <a:buSzPct val="100000"/>
-              <a:buFont typeface="+mj-lt"/>
-              <a:buAutoNum type="arabicPeriod" startAt="1"/>
-            </a:pPr>
-            <a:r>
-              <a:rPr lang="en-US" sz="1300" dirty="0">
+              <a:t>Grade the thrombus (TIMI thrombus grade) in every STEMI</a:t>
+            </a:r>
+            <a:endParaRPr lang="en-US" sz="1700" dirty="0"/>
+          </a:p>
+        </p:txBody>
+      </p:sp>
+      <p:sp>
+        <p:nvSpPr>
+          <p:cNvPr id="7" name="Text 4"/>
+          <p:cNvSpPr txBox="1"/>
+          <p:nvPr/>
+        </p:nvSpPr>
+        <p:spPr>
+          <a:xfrm>
+            <a:off x="457200" y="2240280"/>
+            <a:ext cx="914400" cy="731520"/>
+          </a:xfrm>
+          <a:prstGeom prst="rect">
+            <a:avLst/>
+          </a:prstGeom>
+          <a:noFill/>
+          <a:ln/>
+        </p:spPr>
+        <p:txBody>
+          <a:bodyPr wrap="square" lIns="0" tIns="0" rIns="0" bIns="0" rtlCol="0" anchor="ctr"/>
+          <a:lstStyle/>
+          <a:p>
+            <a:pPr indent="0" marL="0">
+              <a:buNone/>
+            </a:pPr>
+            <a:r>
+              <a:rPr lang="en-US" sz="3600" b="1" dirty="0">
+                <a:solidFill>
+                  <a:srgbClr val="8C1D40"/>
+                </a:solidFill>
+                <a:latin typeface="Cambria" pitchFamily="34" charset="0"/>
+                <a:ea typeface="Cambria" pitchFamily="34" charset="-122"/>
+                <a:cs typeface="Cambria" pitchFamily="34" charset="-120"/>
+              </a:rPr>
+              <a:t>02</a:t>
+            </a:r>
+            <a:endParaRPr lang="en-US" sz="3600" dirty="0"/>
+          </a:p>
+        </p:txBody>
+      </p:sp>
+      <p:sp>
+        <p:nvSpPr>
+          <p:cNvPr id="8" name="Text 5"/>
+          <p:cNvSpPr txBox="1"/>
+          <p:nvPr/>
+        </p:nvSpPr>
+        <p:spPr>
+          <a:xfrm>
+            <a:off x="1463040" y="2240280"/>
+            <a:ext cx="7223760" cy="731520"/>
+          </a:xfrm>
+          <a:prstGeom prst="rect">
+            <a:avLst/>
+          </a:prstGeom>
+          <a:noFill/>
+          <a:ln/>
+        </p:spPr>
+        <p:txBody>
+          <a:bodyPr wrap="square" lIns="0" tIns="0" rIns="0" bIns="0" rtlCol="0" anchor="ctr"/>
+          <a:lstStyle/>
+          <a:p>
+            <a:pPr indent="0" marL="0">
+              <a:buNone/>
+            </a:pPr>
+            <a:r>
+              <a:rPr lang="en-US" sz="1700" dirty="0">
                 <a:solidFill>
                   <a:srgbClr val="1F2937"/>
                 </a:solidFill>
@@ -6417,21 +6522,77 @@
                 <a:ea typeface="Calibri" pitchFamily="34" charset="-122"/>
                 <a:cs typeface="Calibri" pitchFamily="34" charset="-120"/>
               </a:rPr>
-              <a:t>Landi A, et al. Mechanical thrombectomy in STEMI with large thrombus burden: design and rationale of the NATURE trial. Cardiovasc Revasc Med. 2026.</a:t>
-            </a:r>
-            <a:endParaRPr lang="en-US" sz="1300" dirty="0"/>
-          </a:p>
-          <a:p>
-            <a:pPr marL="342900" indent="-342900">
-              <a:spcAft>
-                <a:spcPts val="800"/>
-              </a:spcAft>
-              <a:buSzPct val="100000"/>
-              <a:buFont typeface="+mj-lt"/>
-              <a:buAutoNum type="arabicPeriod" startAt="1"/>
-            </a:pPr>
-            <a:r>
-              <a:rPr lang="en-US" sz="1300" dirty="0">
+              <a:t>Routine manual aspiration is still not recommended</a:t>
+            </a:r>
+            <a:endParaRPr lang="en-US" sz="1700" dirty="0"/>
+          </a:p>
+        </p:txBody>
+      </p:sp>
+      <p:sp>
+        <p:nvSpPr>
+          <p:cNvPr id="9" name="Text 6"/>
+          <p:cNvSpPr txBox="1"/>
+          <p:nvPr/>
+        </p:nvSpPr>
+        <p:spPr>
+          <a:xfrm>
+            <a:off x="457200" y="3246120"/>
+            <a:ext cx="914400" cy="731520"/>
+          </a:xfrm>
+          <a:prstGeom prst="rect">
+            <a:avLst/>
+          </a:prstGeom>
+          <a:noFill/>
+          <a:ln/>
+        </p:spPr>
+        <p:txBody>
+          <a:bodyPr wrap="square" lIns="0" tIns="0" rIns="0" bIns="0" rtlCol="0" anchor="ctr"/>
+          <a:lstStyle/>
+          <a:p>
+            <a:pPr indent="0" marL="0">
+              <a:buNone/>
+            </a:pPr>
+            <a:r>
+              <a:rPr lang="en-US" sz="3600" b="1" dirty="0">
+                <a:solidFill>
+                  <a:srgbClr val="8C1D40"/>
+                </a:solidFill>
+                <a:latin typeface="Cambria" pitchFamily="34" charset="0"/>
+                <a:ea typeface="Cambria" pitchFamily="34" charset="-122"/>
+                <a:cs typeface="Cambria" pitchFamily="34" charset="-120"/>
+              </a:rPr>
+              <a:t>03</a:t>
+            </a:r>
+            <a:endParaRPr lang="en-US" sz="3600" dirty="0"/>
+          </a:p>
+        </p:txBody>
+      </p:sp>
+      <p:sp>
+        <p:nvSpPr>
+          <p:cNvPr id="10" name="Text 7"/>
+          <p:cNvSpPr txBox="1"/>
+          <p:nvPr/>
+        </p:nvSpPr>
+        <p:spPr>
+          <a:xfrm>
+            <a:off x="1463040" y="3246120"/>
+            <a:ext cx="7223760" cy="731520"/>
+          </a:xfrm>
+          <a:prstGeom prst="rect">
+            <a:avLst/>
+          </a:prstGeom>
+          <a:noFill/>
+          <a:ln/>
+        </p:spPr>
+        <p:txBody>
+          <a:bodyPr wrap="square" lIns="0" tIns="0" rIns="0" bIns="0" rtlCol="0" anchor="ctr"/>
+          <a:lstStyle/>
+          <a:p>
+            <a:pPr indent="0" marL="0">
+              <a:buNone/>
+            </a:pPr>
+            <a:r>
+              <a:rPr lang="en-US" sz="1700" dirty="0">
                 <a:solidFill>
                   <a:srgbClr val="1F2937"/>
                 </a:solidFill>
@@ -6439,75 +6600,9 @@
                 <a:ea typeface="Calibri" pitchFamily="34" charset="-122"/>
                 <a:cs typeface="Calibri" pitchFamily="34" charset="-120"/>
               </a:rPr>
-              <a:t>ClinicalTrials.gov NCT04969471: NATURE (enVast as an adjunct to PPCI in STEMI).</a:t>
-            </a:r>
-            <a:endParaRPr lang="en-US" sz="1300" dirty="0"/>
-          </a:p>
-          <a:p>
-            <a:pPr marL="342900" indent="-342900">
-              <a:spcAft>
-                <a:spcPts val="800"/>
-              </a:spcAft>
-              <a:buSzPct val="100000"/>
-              <a:buFont typeface="+mj-lt"/>
-              <a:buAutoNum type="arabicPeriod" startAt="1"/>
-            </a:pPr>
-            <a:r>
-              <a:rPr lang="en-US" sz="1300" dirty="0">
-                <a:solidFill>
-                  <a:srgbClr val="1F2937"/>
-                </a:solidFill>
-                <a:latin typeface="Calibri" pitchFamily="34" charset="0"/>
-                <a:ea typeface="Calibri" pitchFamily="34" charset="-122"/>
-                <a:cs typeface="Calibri" pitchFamily="34" charset="-120"/>
-              </a:rPr>
-              <a:t>Fröbert O, et al. Thrombus aspiration during STEMI (TASTE). N Engl J Med. 2013.</a:t>
-            </a:r>
-            <a:endParaRPr lang="en-US" sz="1300" dirty="0"/>
-          </a:p>
-          <a:p>
-            <a:pPr marL="342900" indent="-342900">
-              <a:spcAft>
-                <a:spcPts val="800"/>
-              </a:spcAft>
-              <a:buSzPct val="100000"/>
-              <a:buFont typeface="+mj-lt"/>
-              <a:buAutoNum type="arabicPeriod" startAt="1"/>
-            </a:pPr>
-            <a:r>
-              <a:rPr lang="en-US" sz="1300" dirty="0">
-                <a:solidFill>
-                  <a:srgbClr val="1F2937"/>
-                </a:solidFill>
-                <a:latin typeface="Calibri" pitchFamily="34" charset="0"/>
-                <a:ea typeface="Calibri" pitchFamily="34" charset="-122"/>
-                <a:cs typeface="Calibri" pitchFamily="34" charset="-120"/>
-              </a:rPr>
-              <a:t>Jolly SS, et al. Primary PCI with or without routine manual thrombectomy (TOTAL). N Engl J Med. 2015.</a:t>
-            </a:r>
-            <a:endParaRPr lang="en-US" sz="1300" dirty="0"/>
-          </a:p>
-          <a:p>
-            <a:pPr marL="342900" indent="-342900">
-              <a:spcAft>
-                <a:spcPts val="800"/>
-              </a:spcAft>
-              <a:buSzPct val="100000"/>
-              <a:buFont typeface="+mj-lt"/>
-              <a:buAutoNum type="arabicPeriod" startAt="1"/>
-            </a:pPr>
-            <a:r>
-              <a:rPr lang="en-US" sz="1300" dirty="0">
-                <a:solidFill>
-                  <a:srgbClr val="1F2937"/>
-                </a:solidFill>
-                <a:latin typeface="Calibri" pitchFamily="34" charset="0"/>
-                <a:ea typeface="Calibri" pitchFamily="34" charset="-122"/>
-                <a:cs typeface="Calibri" pitchFamily="34" charset="-120"/>
-              </a:rPr>
-              <a:t>Byrne RA, et al. 2023 ESC Guidelines for the management of acute coronary syndromes. Eur Heart J. 2023.</a:t>
-            </a:r>
-            <a:endParaRPr lang="en-US" sz="1300" dirty="0"/>
+              <a:t>Stent-retriever thrombectomy is promising for large thrombus, but awaits outcome data</a:t>
+            </a:r>
+            <a:endParaRPr lang="en-US" sz="1700" dirty="0"/>
           </a:p>
         </p:txBody>
       </p:sp>
@@ -6522,6 +6617,270 @@
 <file path=ppt/slides/slide17.xml><?xml version="1.0" encoding="utf-8"?>
 <p:sld xmlns:a="http://schemas.openxmlformats.org/drawingml/2006/main" xmlns:r="http://schemas.openxmlformats.org/officeDocument/2006/relationships" xmlns:p="http://schemas.openxmlformats.org/presentationml/2006/main">
   <p:cSld name="Slide 17">
+    <p:bg>
+      <p:bgPr>
+        <a:solidFill>
+          <a:srgbClr val="FFFFFF"/>
+        </a:solidFill>
+      </p:bgPr>
+    </p:bg>
+    <p:spTree>
+      <p:nvGrpSpPr>
+        <p:cNvPr id="1" name=""/>
+        <p:cNvGrpSpPr/>
+        <p:nvPr/>
+      </p:nvGrpSpPr>
+      <p:grpSpPr>
+        <a:xfrm>
+          <a:off x="0" y="0"/>
+          <a:ext cx="0" cy="0"/>
+          <a:chOff x="0" y="0"/>
+          <a:chExt cx="0" cy="0"/>
+        </a:xfrm>
+      </p:grpSpPr>
+      <p:sp>
+        <p:nvSpPr>
+          <p:cNvPr id="2" name="Text 0"/>
+          <p:cNvSpPr txBox="1"/>
+          <p:nvPr/>
+        </p:nvSpPr>
+        <p:spPr>
+          <a:xfrm>
+            <a:off x="457200" y="320040"/>
+            <a:ext cx="8229600" cy="548640"/>
+          </a:xfrm>
+          <a:prstGeom prst="rect">
+            <a:avLst/>
+          </a:prstGeom>
+          <a:noFill/>
+          <a:ln/>
+        </p:spPr>
+        <p:txBody>
+          <a:bodyPr wrap="square" lIns="0" tIns="0" rIns="0" bIns="0" rtlCol="0" anchor="ctr"/>
+          <a:lstStyle/>
+          <a:p>
+            <a:pPr indent="0" marL="0">
+              <a:buNone/>
+            </a:pPr>
+            <a:r>
+              <a:rPr lang="en-US" sz="2800" b="1" dirty="0">
+                <a:solidFill>
+                  <a:srgbClr val="1F2937"/>
+                </a:solidFill>
+                <a:latin typeface="Cambria" pitchFamily="34" charset="0"/>
+                <a:ea typeface="Cambria" pitchFamily="34" charset="-122"/>
+                <a:cs typeface="Cambria" pitchFamily="34" charset="-120"/>
+              </a:rPr>
+              <a:t>References</a:t>
+            </a:r>
+            <a:endParaRPr lang="en-US" sz="2800" dirty="0"/>
+          </a:p>
+        </p:txBody>
+      </p:sp>
+      <p:sp>
+        <p:nvSpPr>
+          <p:cNvPr id="3" name="Text 1"/>
+          <p:cNvSpPr txBox="1"/>
+          <p:nvPr/>
+        </p:nvSpPr>
+        <p:spPr>
+          <a:xfrm>
+            <a:off x="8229600" y="4709160"/>
+            <a:ext cx="457200" cy="228600"/>
+          </a:xfrm>
+          <a:prstGeom prst="rect">
+            <a:avLst/>
+          </a:prstGeom>
+          <a:noFill/>
+          <a:ln/>
+        </p:spPr>
+        <p:txBody>
+          <a:bodyPr wrap="square" lIns="0" tIns="0" rIns="0" bIns="0" rtlCol="0" anchor="ctr"/>
+          <a:lstStyle/>
+          <a:p>
+            <a:pPr algn="r" indent="0" marL="0">
+              <a:buNone/>
+            </a:pPr>
+            <a:r>
+              <a:rPr lang="en-US" sz="900" b="1" dirty="0">
+                <a:solidFill>
+                  <a:srgbClr val="8C1D40"/>
+                </a:solidFill>
+                <a:latin typeface="Calibri" pitchFamily="34" charset="0"/>
+                <a:ea typeface="Calibri" pitchFamily="34" charset="-122"/>
+                <a:cs typeface="Calibri" pitchFamily="34" charset="-120"/>
+              </a:rPr>
+              <a:t>17</a:t>
+            </a:r>
+            <a:endParaRPr lang="en-US" sz="900" dirty="0"/>
+          </a:p>
+        </p:txBody>
+      </p:sp>
+      <p:sp>
+        <p:nvSpPr>
+          <p:cNvPr id="5" name="Text 2"/>
+          <p:cNvSpPr txBox="1"/>
+          <p:nvPr/>
+        </p:nvSpPr>
+        <p:spPr>
+          <a:xfrm>
+            <a:off x="457200" y="1097280"/>
+            <a:ext cx="8229600" cy="3383280"/>
+          </a:xfrm>
+          <a:prstGeom prst="rect">
+            <a:avLst/>
+          </a:prstGeom>
+          <a:noFill/>
+          <a:ln/>
+        </p:spPr>
+        <p:txBody>
+          <a:bodyPr wrap="square" lIns="0" tIns="0" rIns="0" bIns="0" rtlCol="0" anchor="t"/>
+          <a:lstStyle/>
+          <a:p>
+            <a:pPr marL="342900" indent="-342900">
+              <a:spcAft>
+                <a:spcPts val="800"/>
+              </a:spcAft>
+              <a:buSzPct val="100000"/>
+              <a:buFont typeface="+mj-lt"/>
+              <a:buAutoNum type="arabicPeriod" startAt="1"/>
+            </a:pPr>
+            <a:r>
+              <a:rPr lang="en-US" sz="1300" dirty="0">
+                <a:solidFill>
+                  <a:srgbClr val="1F2937"/>
+                </a:solidFill>
+                <a:latin typeface="Calibri" pitchFamily="34" charset="0"/>
+                <a:ea typeface="Calibri" pitchFamily="34" charset="-122"/>
+                <a:cs typeface="Calibri" pitchFamily="34" charset="-120"/>
+              </a:rPr>
+              <a:t>Valgimigli M. NATURE trial. Late-Breaking Clinical Trial, ESC Congress 2026, Munich.</a:t>
+            </a:r>
+            <a:endParaRPr lang="en-US" sz="1300" dirty="0"/>
+          </a:p>
+          <a:p>
+            <a:pPr marL="342900" indent="-342900">
+              <a:spcAft>
+                <a:spcPts val="800"/>
+              </a:spcAft>
+              <a:buSzPct val="100000"/>
+              <a:buFont typeface="+mj-lt"/>
+              <a:buAutoNum type="arabicPeriod" startAt="1"/>
+            </a:pPr>
+            <a:r>
+              <a:rPr lang="en-US" sz="1300" dirty="0">
+                <a:solidFill>
+                  <a:srgbClr val="1F2937"/>
+                </a:solidFill>
+                <a:latin typeface="Calibri" pitchFamily="34" charset="0"/>
+                <a:ea typeface="Calibri" pitchFamily="34" charset="-122"/>
+                <a:cs typeface="Calibri" pitchFamily="34" charset="-120"/>
+              </a:rPr>
+              <a:t>Landi A, et al. Mechanical thrombectomy in STEMI with large thrombus burden: design and rationale of the NATURE trial. Cardiovasc Revasc Med. 2026.</a:t>
+            </a:r>
+            <a:endParaRPr lang="en-US" sz="1300" dirty="0"/>
+          </a:p>
+          <a:p>
+            <a:pPr marL="342900" indent="-342900">
+              <a:spcAft>
+                <a:spcPts val="800"/>
+              </a:spcAft>
+              <a:buSzPct val="100000"/>
+              <a:buFont typeface="+mj-lt"/>
+              <a:buAutoNum type="arabicPeriod" startAt="1"/>
+            </a:pPr>
+            <a:r>
+              <a:rPr lang="en-US" sz="1300" dirty="0">
+                <a:solidFill>
+                  <a:srgbClr val="1F2937"/>
+                </a:solidFill>
+                <a:latin typeface="Calibri" pitchFamily="34" charset="0"/>
+                <a:ea typeface="Calibri" pitchFamily="34" charset="-122"/>
+                <a:cs typeface="Calibri" pitchFamily="34" charset="-120"/>
+              </a:rPr>
+              <a:t>ClinicalTrials.gov NCT04969471: NATURE (enVast as an adjunct to PPCI in STEMI).</a:t>
+            </a:r>
+            <a:endParaRPr lang="en-US" sz="1300" dirty="0"/>
+          </a:p>
+          <a:p>
+            <a:pPr marL="342900" indent="-342900">
+              <a:spcAft>
+                <a:spcPts val="800"/>
+              </a:spcAft>
+              <a:buSzPct val="100000"/>
+              <a:buFont typeface="+mj-lt"/>
+              <a:buAutoNum type="arabicPeriod" startAt="1"/>
+            </a:pPr>
+            <a:r>
+              <a:rPr lang="en-US" sz="1300" dirty="0">
+                <a:solidFill>
+                  <a:srgbClr val="1F2937"/>
+                </a:solidFill>
+                <a:latin typeface="Calibri" pitchFamily="34" charset="0"/>
+                <a:ea typeface="Calibri" pitchFamily="34" charset="-122"/>
+                <a:cs typeface="Calibri" pitchFamily="34" charset="-120"/>
+              </a:rPr>
+              <a:t>Fröbert O, et al. Thrombus aspiration during STEMI (TASTE). N Engl J Med. 2013.</a:t>
+            </a:r>
+            <a:endParaRPr lang="en-US" sz="1300" dirty="0"/>
+          </a:p>
+          <a:p>
+            <a:pPr marL="342900" indent="-342900">
+              <a:spcAft>
+                <a:spcPts val="800"/>
+              </a:spcAft>
+              <a:buSzPct val="100000"/>
+              <a:buFont typeface="+mj-lt"/>
+              <a:buAutoNum type="arabicPeriod" startAt="1"/>
+            </a:pPr>
+            <a:r>
+              <a:rPr lang="en-US" sz="1300" dirty="0">
+                <a:solidFill>
+                  <a:srgbClr val="1F2937"/>
+                </a:solidFill>
+                <a:latin typeface="Calibri" pitchFamily="34" charset="0"/>
+                <a:ea typeface="Calibri" pitchFamily="34" charset="-122"/>
+                <a:cs typeface="Calibri" pitchFamily="34" charset="-120"/>
+              </a:rPr>
+              <a:t>Jolly SS, et al. Primary PCI with or without routine manual thrombectomy (TOTAL). N Engl J Med. 2015.</a:t>
+            </a:r>
+            <a:endParaRPr lang="en-US" sz="1300" dirty="0"/>
+          </a:p>
+          <a:p>
+            <a:pPr marL="342900" indent="-342900">
+              <a:spcAft>
+                <a:spcPts val="800"/>
+              </a:spcAft>
+              <a:buSzPct val="100000"/>
+              <a:buFont typeface="+mj-lt"/>
+              <a:buAutoNum type="arabicPeriod" startAt="1"/>
+            </a:pPr>
+            <a:r>
+              <a:rPr lang="en-US" sz="1300" dirty="0">
+                <a:solidFill>
+                  <a:srgbClr val="1F2937"/>
+                </a:solidFill>
+                <a:latin typeface="Calibri" pitchFamily="34" charset="0"/>
+                <a:ea typeface="Calibri" pitchFamily="34" charset="-122"/>
+                <a:cs typeface="Calibri" pitchFamily="34" charset="-120"/>
+              </a:rPr>
+              <a:t>Byrne RA, et al. 2023 ESC Guidelines for the management of acute coronary syndromes. Eur Heart J. 2023.</a:t>
+            </a:r>
+            <a:endParaRPr lang="en-US" sz="1300" dirty="0"/>
+          </a:p>
+        </p:txBody>
+      </p:sp>
+    </p:spTree>
+  </p:cSld>
+  <p:clrMapOvr>
+    <a:masterClrMapping/>
+  </p:clrMapOvr>
+</p:sld>
+</file>
+
+<file path=ppt/slides/slide18.xml><?xml version="1.0" encoding="utf-8"?>
+<p:sld xmlns:a="http://schemas.openxmlformats.org/drawingml/2006/main" xmlns:r="http://schemas.openxmlformats.org/officeDocument/2006/relationships" xmlns:p="http://schemas.openxmlformats.org/presentationml/2006/main">
+  <p:cSld name="Slide 18">
     <p:bg>
       <p:bgPr>
         <a:solidFill>
@@ -8363,7 +8722,7 @@
                 <a:ea typeface="Cambria" pitchFamily="34" charset="-122"/>
                 <a:cs typeface="Cambria" pitchFamily="34" charset="-120"/>
               </a:rPr>
-              <a:t>Trial design</a:t>
+              <a:t>Procedure animation (video)</a:t>
             </a:r>
             <a:endParaRPr lang="en-US" sz="2800" dirty="0"/>
           </a:p>
@@ -8408,142 +8767,13 @@
           </a:p>
         </p:txBody>
       </p:sp>
-      <p:sp>
-        <p:nvSpPr>
-          <p:cNvPr id="5" name="Shape 2"/>
-          <p:cNvSpPr/>
-          <p:nvPr/>
-        </p:nvSpPr>
-        <p:spPr>
-          <a:xfrm>
-            <a:off x="457200" y="1097280"/>
-            <a:ext cx="4937760" cy="640080"/>
-          </a:xfrm>
-          <a:prstGeom prst="roundRect">
-            <a:avLst>
-              <a:gd name="adj" fmla="val 11429"/>
-            </a:avLst>
-          </a:prstGeom>
-          <a:solidFill>
-            <a:srgbClr val="1F2937"/>
-          </a:solidFill>
-          <a:ln w="12700">
-            <a:solidFill>
-              <a:srgbClr val="1F2937"/>
-            </a:solidFill>
-            <a:prstDash val="solid"/>
-          </a:ln>
-        </p:spPr>
-      </p:sp>
-      <p:sp>
-        <p:nvSpPr>
-          <p:cNvPr id="6" name="Text 3"/>
-          <p:cNvSpPr txBox="1"/>
-          <p:nvPr/>
-        </p:nvSpPr>
-        <p:spPr>
-          <a:xfrm>
-            <a:off x="457200" y="1097280"/>
-            <a:ext cx="4937760" cy="640080"/>
-          </a:xfrm>
-          <a:prstGeom prst="rect">
-            <a:avLst/>
-          </a:prstGeom>
-          <a:noFill/>
-          <a:ln/>
-        </p:spPr>
-        <p:txBody>
-          <a:bodyPr wrap="square" lIns="0" tIns="0" rIns="0" bIns="0" rtlCol="0" anchor="ctr"/>
-          <a:lstStyle/>
-          <a:p>
-            <a:pPr algn="ctr" indent="0" marL="0">
-              <a:buNone/>
-            </a:pPr>
-            <a:r>
-              <a:rPr lang="en-US" sz="1500" b="1" dirty="0">
-                <a:solidFill>
-                  <a:srgbClr val="FFFFFF"/>
-                </a:solidFill>
-                <a:latin typeface="Calibri" pitchFamily="34" charset="0"/>
-                <a:ea typeface="Calibri" pitchFamily="34" charset="-122"/>
-                <a:cs typeface="Calibri" pitchFamily="34" charset="-120"/>
-              </a:rPr>
-              <a:t>154 STEMI patients with large thrombus · 11 centres</a:t>
-            </a:r>
-            <a:endParaRPr lang="en-US" sz="1500" dirty="0"/>
-          </a:p>
-        </p:txBody>
-      </p:sp>
       <p:pic>
         <p:nvPicPr>
-          <p:cNvPr id="7" name="Image 0" descr="preencoded.png">    </p:cNvPr>
-          <p:cNvPicPr>
-            <a:picLocks noChangeAspect="1"/>
-          </p:cNvPicPr>
-          <p:nvPr/>
-        </p:nvPicPr>
-        <p:blipFill>
-          <a:blip r:embed="rId1"/>
-          <a:stretch>
-            <a:fillRect/>
-          </a:stretch>
-        </p:blipFill>
-        <p:spPr>
-          <a:xfrm>
-            <a:off x="2816352" y="1828800"/>
-            <a:ext cx="219456" cy="219456"/>
-          </a:xfrm>
-          <a:prstGeom prst="rect">
-            <a:avLst/>
-          </a:prstGeom>
-        </p:spPr>
-      </p:pic>
-      <p:sp>
-        <p:nvSpPr>
-          <p:cNvPr id="8" name="Text 4"/>
-          <p:cNvSpPr txBox="1"/>
-          <p:nvPr/>
-        </p:nvSpPr>
-        <p:spPr>
-          <a:xfrm>
-            <a:off x="1554480" y="2103120"/>
-            <a:ext cx="2743200" cy="365760"/>
-          </a:xfrm>
-          <a:prstGeom prst="rect">
-            <a:avLst/>
-          </a:prstGeom>
-          <a:noFill/>
-          <a:ln/>
-        </p:spPr>
-        <p:txBody>
-          <a:bodyPr wrap="square" lIns="0" tIns="0" rIns="0" bIns="0" rtlCol="0" anchor="ctr"/>
-          <a:lstStyle/>
-          <a:p>
-            <a:pPr algn="ctr" indent="0" marL="0">
-              <a:buNone/>
-            </a:pPr>
-            <a:r>
-              <a:rPr lang="en-US" sz="1300" b="1" dirty="0">
-                <a:solidFill>
-                  <a:srgbClr val="8C1D40"/>
-                </a:solidFill>
-                <a:latin typeface="Calibri" pitchFamily="34" charset="0"/>
-                <a:ea typeface="Calibri" pitchFamily="34" charset="-122"/>
-                <a:cs typeface="Calibri" pitchFamily="34" charset="-120"/>
-              </a:rPr>
-              <a:t>Randomised 1 : 1</a:t>
-            </a:r>
-            <a:endParaRPr lang="en-US" sz="1300" dirty="0"/>
-          </a:p>
-        </p:txBody>
-      </p:sp>
-      <p:pic>
-        <p:nvPicPr>
-          <p:cNvPr id="9" name="Image 1" descr="preencoded.png">    </p:cNvPr>
-          <p:cNvPicPr>
-            <a:picLocks noChangeAspect="1"/>
-          </p:cNvPicPr>
-          <p:nvPr/>
+          <p:cNvPr id="3" name="Media 0"/>
+          <p:cNvPicPr/>
+          <p:nvPr>
+            <a:videoFile r:link="rId1"/>
+          </p:nvPr>
         </p:nvPicPr>
         <p:blipFill>
           <a:blip r:embed="rId2"/>
@@ -8553,52 +8783,133 @@
         </p:blipFill>
         <p:spPr>
           <a:xfrm>
-            <a:off x="1554480" y="2542032"/>
-            <a:ext cx="219456" cy="219456"/>
+            <a:off x="457200" y="1051560"/>
+            <a:ext cx="5669280" cy="3191256"/>
           </a:xfrm>
           <a:prstGeom prst="rect">
             <a:avLst/>
           </a:prstGeom>
         </p:spPr>
       </p:pic>
-      <p:pic>
-        <p:nvPicPr>
-          <p:cNvPr id="10" name="Image 2" descr="preencoded.png">    </p:cNvPr>
-          <p:cNvPicPr>
-            <a:picLocks noChangeAspect="1"/>
-          </p:cNvPicPr>
-          <p:nvPr/>
-        </p:nvPicPr>
-        <p:blipFill>
-          <a:blip r:embed="rId3"/>
-          <a:stretch>
-            <a:fillRect/>
-          </a:stretch>
-        </p:blipFill>
-        <p:spPr>
-          <a:xfrm>
-            <a:off x="4078224" y="2542032"/>
-            <a:ext cx="219456" cy="219456"/>
-          </a:xfrm>
-          <a:prstGeom prst="rect">
-            <a:avLst/>
-          </a:prstGeom>
-        </p:spPr>
-      </p:pic>
-      <p:sp>
-        <p:nvSpPr>
-          <p:cNvPr id="11" name="Shape 5"/>
+      <p:sp>
+        <p:nvSpPr>
+          <p:cNvPr id="6" name="Shape 2"/>
           <p:cNvSpPr/>
           <p:nvPr/>
         </p:nvSpPr>
         <p:spPr>
           <a:xfrm>
-            <a:off x="457200" y="2834640"/>
-            <a:ext cx="2377440" cy="914400"/>
+            <a:off x="6400800" y="1051560"/>
+            <a:ext cx="2286000" cy="3191256"/>
           </a:xfrm>
           <a:prstGeom prst="roundRect">
             <a:avLst>
-              <a:gd name="adj" fmla="val 8000"/>
+              <a:gd name="adj" fmla="val 3200"/>
+            </a:avLst>
+          </a:prstGeom>
+          <a:solidFill>
+            <a:srgbClr val="F8F0F3"/>
+          </a:solidFill>
+          <a:ln w="12700">
+            <a:solidFill>
+              <a:srgbClr val="F8F0F3"/>
+            </a:solidFill>
+            <a:prstDash val="solid"/>
+          </a:ln>
+        </p:spPr>
+      </p:sp>
+      <p:sp>
+        <p:nvSpPr>
+          <p:cNvPr id="7" name="Text 3"/>
+          <p:cNvSpPr txBox="1"/>
+          <p:nvPr/>
+        </p:nvSpPr>
+        <p:spPr>
+          <a:xfrm>
+            <a:off x="6583680" y="1234440"/>
+            <a:ext cx="1920240" cy="274320"/>
+          </a:xfrm>
+          <a:prstGeom prst="rect">
+            <a:avLst/>
+          </a:prstGeom>
+          <a:noFill/>
+          <a:ln/>
+        </p:spPr>
+        <p:txBody>
+          <a:bodyPr wrap="square" lIns="0" tIns="0" rIns="0" bIns="0" rtlCol="0" anchor="ctr"/>
+          <a:lstStyle/>
+          <a:p>
+            <a:pPr indent="0" marL="0">
+              <a:buNone/>
+            </a:pPr>
+            <a:r>
+              <a:rPr lang="en-US" sz="1400" b="1" dirty="0">
+                <a:solidFill>
+                  <a:srgbClr val="8C1D40"/>
+                </a:solidFill>
+                <a:latin typeface="Cambria" pitchFamily="34" charset="0"/>
+                <a:ea typeface="Cambria" pitchFamily="34" charset="-122"/>
+                <a:cs typeface="Cambria" pitchFamily="34" charset="-120"/>
+              </a:rPr>
+              <a:t>Source</a:t>
+            </a:r>
+            <a:endParaRPr lang="en-US" sz="1400" dirty="0"/>
+          </a:p>
+        </p:txBody>
+      </p:sp>
+      <p:sp>
+        <p:nvSpPr>
+          <p:cNvPr id="8" name="Text 4"/>
+          <p:cNvSpPr txBox="1"/>
+          <p:nvPr/>
+        </p:nvSpPr>
+        <p:spPr>
+          <a:xfrm>
+            <a:off x="6583680" y="1554480"/>
+            <a:ext cx="1920240" cy="914400"/>
+          </a:xfrm>
+          <a:prstGeom prst="rect">
+            <a:avLst/>
+          </a:prstGeom>
+          <a:noFill/>
+          <a:ln/>
+        </p:spPr>
+        <p:txBody>
+          <a:bodyPr wrap="square" lIns="0" tIns="0" rIns="0" bIns="0" rtlCol="0" anchor="t"/>
+          <a:lstStyle/>
+          <a:p>
+            <a:pPr indent="0" marL="0">
+              <a:buNone/>
+            </a:pPr>
+            <a:r>
+              <a:rPr lang="en-US" sz="1200" dirty="0">
+                <a:solidFill>
+                  <a:srgbClr val="1F2937"/>
+                </a:solidFill>
+                <a:latin typeface="Calibri" pitchFamily="34" charset="0"/>
+                <a:ea typeface="Calibri" pitchFamily="34" charset="-122"/>
+                <a:cs typeface="Calibri" pitchFamily="34" charset="-120"/>
+              </a:rPr>
+              <a:t>Vesalio. enVast Coronary Thrombectomy System Procedure Animation. YouTube.</a:t>
+            </a:r>
+            <a:endParaRPr lang="en-US" sz="1200" dirty="0"/>
+          </a:p>
+        </p:txBody>
+      </p:sp>
+      <p:sp>
+        <p:nvSpPr>
+          <p:cNvPr id="9" name="Shape 5"/>
+          <p:cNvSpPr/>
+          <p:nvPr/>
+        </p:nvSpPr>
+        <p:spPr>
+          <a:xfrm>
+            <a:off x="6583680" y="2606040"/>
+            <a:ext cx="1920240" cy="457200"/>
+          </a:xfrm>
+          <a:prstGeom prst="roundRect">
+            <a:avLst>
+              <a:gd name="adj" fmla="val 50000"/>
             </a:avLst>
           </a:prstGeom>
           <a:solidFill>
@@ -8614,14 +8925,16 @@
       </p:sp>
       <p:sp>
         <p:nvSpPr>
-          <p:cNvPr id="12" name="Text 6"/>
-          <p:cNvSpPr txBox="1"/>
-          <p:nvPr/>
-        </p:nvSpPr>
-        <p:spPr>
-          <a:xfrm>
-            <a:off x="457200" y="2834640"/>
-            <a:ext cx="2377440" cy="914400"/>
+          <p:cNvPr id="10" name="Text 6">
+            <a:hlinkClick r:id="rId3" tooltip="https://www.youtube.com/watch?v=nmYZFin062I"/>
+          </p:cNvPr>
+          <p:cNvSpPr txBox="1"/>
+          <p:nvPr/>
+        </p:nvSpPr>
+        <p:spPr>
+          <a:xfrm>
+            <a:off x="6583680" y="2606040"/>
+            <a:ext cx="1920240" cy="457200"/>
           </a:xfrm>
           <a:prstGeom prst="rect">
             <a:avLst/>
@@ -8637,599 +8950,63 @@
               <a:buNone/>
             </a:pPr>
             <a:r>
-              <a:rPr lang="en-US" sz="1400" b="1" dirty="0">
+              <a:rPr lang="en-US" sz="1300" b="1" u="sng" dirty="0">
                 <a:solidFill>
                   <a:srgbClr val="FFFFFF"/>
                 </a:solidFill>
                 <a:latin typeface="Calibri" pitchFamily="34" charset="0"/>
                 <a:ea typeface="Calibri" pitchFamily="34" charset="-122"/>
                 <a:cs typeface="Calibri" pitchFamily="34" charset="-120"/>
-              </a:rPr>
-              <a:t>enVast thrombectomy</a:t>
-            </a:r>
-            <a:endParaRPr lang="en-US" sz="1400" dirty="0"/>
-          </a:p>
-          <a:p>
-            <a:pPr algn="ctr" indent="0" marL="0">
-              <a:buNone/>
-            </a:pPr>
-            <a:r>
-              <a:rPr lang="en-US" sz="1200" dirty="0">
-                <a:solidFill>
-                  <a:srgbClr val="FFFFFF"/>
+                <a:hlinkClick r:id="rId3" invalidUrl="" action="" tgtFrame="" tooltip="https://www.youtube.com/watch?v=nmYZFin062I" history="1" highlightClick="0" endSnd="0">
+                  <a:extLst>
+                    <a:ext uri="{A12FA001-AC4F-418D-AE19-62706E023703}">
+                      <ahyp:hlinkClr xmlns:ahyp="http://schemas.microsoft.com/office/drawing/2018/hyperlinkcolor" val="tx"/>
+                    </a:ext>
+                  </a:extLst>
+                </a:hlinkClick>
+              </a:rPr>
+              <a:t>Watch on YouTube</a:t>
+            </a:r>
+            <a:endParaRPr lang="en-US" sz="1300" dirty="0"/>
+          </a:p>
+        </p:txBody>
+      </p:sp>
+      <p:sp>
+        <p:nvSpPr>
+          <p:cNvPr id="11" name="Text 7"/>
+          <p:cNvSpPr txBox="1"/>
+          <p:nvPr/>
+        </p:nvSpPr>
+        <p:spPr>
+          <a:xfrm>
+            <a:off x="6583680" y="3246120"/>
+            <a:ext cx="1920240" cy="822960"/>
+          </a:xfrm>
+          <a:prstGeom prst="rect">
+            <a:avLst/>
+          </a:prstGeom>
+          <a:noFill/>
+          <a:ln/>
+        </p:spPr>
+        <p:txBody>
+          <a:bodyPr wrap="square" lIns="0" tIns="0" rIns="0" bIns="0" rtlCol="0" anchor="t"/>
+          <a:lstStyle/>
+          <a:p>
+            <a:pPr indent="0" marL="0">
+              <a:buNone/>
+            </a:pPr>
+            <a:r>
+              <a:rPr lang="en-US" sz="1100" i="1" dirty="0">
+                <a:solidFill>
+                  <a:srgbClr val="6B7280"/>
                 </a:solidFill>
                 <a:latin typeface="Calibri" pitchFamily="34" charset="0"/>
                 <a:ea typeface="Calibri" pitchFamily="34" charset="-122"/>
                 <a:cs typeface="Calibri" pitchFamily="34" charset="-120"/>
               </a:rPr>
-              <a:t>then conventional PCI</a:t>
-            </a:r>
-            <a:endParaRPr lang="en-US" sz="1400" dirty="0"/>
-          </a:p>
-        </p:txBody>
-      </p:sp>
-      <p:sp>
-        <p:nvSpPr>
-          <p:cNvPr id="13" name="Shape 7"/>
-          <p:cNvSpPr/>
-          <p:nvPr/>
-        </p:nvSpPr>
-        <p:spPr>
-          <a:xfrm>
-            <a:off x="3017520" y="2834640"/>
-            <a:ext cx="2377440" cy="914400"/>
-          </a:xfrm>
-          <a:prstGeom prst="roundRect">
-            <a:avLst>
-              <a:gd name="adj" fmla="val 8000"/>
-            </a:avLst>
-          </a:prstGeom>
-          <a:solidFill>
-            <a:srgbClr val="A3AAB6"/>
-          </a:solidFill>
-          <a:ln w="12700">
-            <a:solidFill>
-              <a:srgbClr val="A3AAB6"/>
-            </a:solidFill>
-            <a:prstDash val="solid"/>
-          </a:ln>
-        </p:spPr>
-      </p:sp>
-      <p:sp>
-        <p:nvSpPr>
-          <p:cNvPr id="14" name="Text 8"/>
-          <p:cNvSpPr txBox="1"/>
-          <p:nvPr/>
-        </p:nvSpPr>
-        <p:spPr>
-          <a:xfrm>
-            <a:off x="3017520" y="2834640"/>
-            <a:ext cx="2377440" cy="914400"/>
-          </a:xfrm>
-          <a:prstGeom prst="rect">
-            <a:avLst/>
-          </a:prstGeom>
-          <a:noFill/>
-          <a:ln/>
-        </p:spPr>
-        <p:txBody>
-          <a:bodyPr wrap="square" lIns="0" tIns="0" rIns="0" bIns="0" rtlCol="0" anchor="ctr"/>
-          <a:lstStyle/>
-          <a:p>
-            <a:pPr algn="ctr" indent="0" marL="0">
-              <a:buNone/>
-            </a:pPr>
-            <a:r>
-              <a:rPr lang="en-US" sz="1400" b="1" dirty="0">
-                <a:solidFill>
-                  <a:srgbClr val="FFFFFF"/>
-                </a:solidFill>
-                <a:latin typeface="Calibri" pitchFamily="34" charset="0"/>
-                <a:ea typeface="Calibri" pitchFamily="34" charset="-122"/>
-                <a:cs typeface="Calibri" pitchFamily="34" charset="-120"/>
-              </a:rPr>
-              <a:t>Standard PCI</a:t>
-            </a:r>
-            <a:endParaRPr lang="en-US" sz="1400" dirty="0"/>
-          </a:p>
-          <a:p>
-            <a:pPr algn="ctr" indent="0" marL="0">
-              <a:buNone/>
-            </a:pPr>
-            <a:r>
-              <a:rPr lang="en-US" sz="1200" dirty="0">
-                <a:solidFill>
-                  <a:srgbClr val="FFFFFF"/>
-                </a:solidFill>
-                <a:latin typeface="Calibri" pitchFamily="34" charset="0"/>
-                <a:ea typeface="Calibri" pitchFamily="34" charset="-122"/>
-                <a:cs typeface="Calibri" pitchFamily="34" charset="-120"/>
-              </a:rPr>
-              <a:t>standard of care</a:t>
-            </a:r>
-            <a:endParaRPr lang="en-US" sz="1400" dirty="0"/>
-          </a:p>
-        </p:txBody>
-      </p:sp>
-      <p:sp>
-        <p:nvSpPr>
-          <p:cNvPr id="15" name="Text 9"/>
-          <p:cNvSpPr txBox="1"/>
-          <p:nvPr/>
-        </p:nvSpPr>
-        <p:spPr>
-          <a:xfrm>
-            <a:off x="5852160" y="1097280"/>
-            <a:ext cx="960120" cy="457200"/>
-          </a:xfrm>
-          <a:prstGeom prst="rect">
-            <a:avLst/>
-          </a:prstGeom>
-          <a:noFill/>
-          <a:ln/>
-        </p:spPr>
-        <p:txBody>
-          <a:bodyPr wrap="square" lIns="0" tIns="0" rIns="0" bIns="0" rtlCol="0" anchor="ctr"/>
-          <a:lstStyle/>
-          <a:p>
-            <a:pPr indent="0" marL="0">
-              <a:buNone/>
-            </a:pPr>
-            <a:r>
-              <a:rPr lang="en-US" sz="1200" b="1" dirty="0">
-                <a:solidFill>
-                  <a:srgbClr val="8C1D40"/>
-                </a:solidFill>
-                <a:latin typeface="Calibri" pitchFamily="34" charset="0"/>
-                <a:ea typeface="Calibri" pitchFamily="34" charset="-122"/>
-                <a:cs typeface="Calibri" pitchFamily="34" charset="-120"/>
-              </a:rPr>
-              <a:t>Type</a:t>
-            </a:r>
-            <a:endParaRPr lang="en-US" sz="1200" dirty="0"/>
-          </a:p>
-        </p:txBody>
-      </p:sp>
-      <p:sp>
-        <p:nvSpPr>
-          <p:cNvPr id="16" name="Text 10"/>
-          <p:cNvSpPr txBox="1"/>
-          <p:nvPr/>
-        </p:nvSpPr>
-        <p:spPr>
-          <a:xfrm>
-            <a:off x="6812280" y="1097280"/>
-            <a:ext cx="1874520" cy="457200"/>
-          </a:xfrm>
-          <a:prstGeom prst="rect">
-            <a:avLst/>
-          </a:prstGeom>
-          <a:noFill/>
-          <a:ln/>
-        </p:spPr>
-        <p:txBody>
-          <a:bodyPr wrap="square" lIns="0" tIns="0" rIns="0" bIns="0" rtlCol="0" anchor="ctr"/>
-          <a:lstStyle/>
-          <a:p>
-            <a:pPr indent="0" marL="0">
-              <a:buNone/>
-            </a:pPr>
-            <a:r>
-              <a:rPr lang="en-US" sz="1200" dirty="0">
-                <a:solidFill>
-                  <a:srgbClr val="1F2937"/>
-                </a:solidFill>
-                <a:latin typeface="Calibri" pitchFamily="34" charset="0"/>
-                <a:ea typeface="Calibri" pitchFamily="34" charset="-122"/>
-                <a:cs typeface="Calibri" pitchFamily="34" charset="-120"/>
-              </a:rPr>
-              <a:t>Prospective, multicentre, randomised</a:t>
-            </a:r>
-            <a:endParaRPr lang="en-US" sz="1200" dirty="0"/>
-          </a:p>
-        </p:txBody>
-      </p:sp>
-      <p:sp>
-        <p:nvSpPr>
-          <p:cNvPr id="17" name="Shape 11"/>
-          <p:cNvSpPr/>
-          <p:nvPr/>
-        </p:nvSpPr>
-        <p:spPr>
-          <a:xfrm>
-            <a:off x="5852160" y="1600200"/>
-            <a:ext cx="2834640" cy="0"/>
-          </a:xfrm>
-          <a:prstGeom prst="line">
-            <a:avLst/>
-          </a:prstGeom>
-          <a:noFill/>
-          <a:ln w="12700">
-            <a:solidFill>
-              <a:srgbClr val="E5E7EB"/>
-            </a:solidFill>
-            <a:prstDash val="solid"/>
-          </a:ln>
-        </p:spPr>
-      </p:sp>
-      <p:sp>
-        <p:nvSpPr>
-          <p:cNvPr id="18" name="Text 12"/>
-          <p:cNvSpPr txBox="1"/>
-          <p:nvPr/>
-        </p:nvSpPr>
-        <p:spPr>
-          <a:xfrm>
-            <a:off x="5852160" y="1645920"/>
-            <a:ext cx="960120" cy="457200"/>
-          </a:xfrm>
-          <a:prstGeom prst="rect">
-            <a:avLst/>
-          </a:prstGeom>
-          <a:noFill/>
-          <a:ln/>
-        </p:spPr>
-        <p:txBody>
-          <a:bodyPr wrap="square" lIns="0" tIns="0" rIns="0" bIns="0" rtlCol="0" anchor="ctr"/>
-          <a:lstStyle/>
-          <a:p>
-            <a:pPr indent="0" marL="0">
-              <a:buNone/>
-            </a:pPr>
-            <a:r>
-              <a:rPr lang="en-US" sz="1200" b="1" dirty="0">
-                <a:solidFill>
-                  <a:srgbClr val="8C1D40"/>
-                </a:solidFill>
-                <a:latin typeface="Calibri" pitchFamily="34" charset="0"/>
-                <a:ea typeface="Calibri" pitchFamily="34" charset="-122"/>
-                <a:cs typeface="Calibri" pitchFamily="34" charset="-120"/>
-              </a:rPr>
-              <a:t>Hypothesis</a:t>
-            </a:r>
-            <a:endParaRPr lang="en-US" sz="1200" dirty="0"/>
-          </a:p>
-        </p:txBody>
-      </p:sp>
-      <p:sp>
-        <p:nvSpPr>
-          <p:cNvPr id="19" name="Text 13"/>
-          <p:cNvSpPr txBox="1"/>
-          <p:nvPr/>
-        </p:nvSpPr>
-        <p:spPr>
-          <a:xfrm>
-            <a:off x="6812280" y="1645920"/>
-            <a:ext cx="1874520" cy="457200"/>
-          </a:xfrm>
-          <a:prstGeom prst="rect">
-            <a:avLst/>
-          </a:prstGeom>
-          <a:noFill/>
-          <a:ln/>
-        </p:spPr>
-        <p:txBody>
-          <a:bodyPr wrap="square" lIns="0" tIns="0" rIns="0" bIns="0" rtlCol="0" anchor="ctr"/>
-          <a:lstStyle/>
-          <a:p>
-            <a:pPr indent="0" marL="0">
-              <a:buNone/>
-            </a:pPr>
-            <a:r>
-              <a:rPr lang="en-US" sz="1200" dirty="0">
-                <a:solidFill>
-                  <a:srgbClr val="1F2937"/>
-                </a:solidFill>
-                <a:latin typeface="Calibri" pitchFamily="34" charset="0"/>
-                <a:ea typeface="Calibri" pitchFamily="34" charset="-122"/>
-                <a:cs typeface="Calibri" pitchFamily="34" charset="-120"/>
-              </a:rPr>
-              <a:t>Superiority on infarct size</a:t>
-            </a:r>
-            <a:endParaRPr lang="en-US" sz="1200" dirty="0"/>
-          </a:p>
-        </p:txBody>
-      </p:sp>
-      <p:sp>
-        <p:nvSpPr>
-          <p:cNvPr id="20" name="Shape 14"/>
-          <p:cNvSpPr/>
-          <p:nvPr/>
-        </p:nvSpPr>
-        <p:spPr>
-          <a:xfrm>
-            <a:off x="5852160" y="2148840"/>
-            <a:ext cx="2834640" cy="0"/>
-          </a:xfrm>
-          <a:prstGeom prst="line">
-            <a:avLst/>
-          </a:prstGeom>
-          <a:noFill/>
-          <a:ln w="12700">
-            <a:solidFill>
-              <a:srgbClr val="E5E7EB"/>
-            </a:solidFill>
-            <a:prstDash val="solid"/>
-          </a:ln>
-        </p:spPr>
-      </p:sp>
-      <p:sp>
-        <p:nvSpPr>
-          <p:cNvPr id="21" name="Text 15"/>
-          <p:cNvSpPr txBox="1"/>
-          <p:nvPr/>
-        </p:nvSpPr>
-        <p:spPr>
-          <a:xfrm>
-            <a:off x="5852160" y="2194560"/>
-            <a:ext cx="960120" cy="457200"/>
-          </a:xfrm>
-          <a:prstGeom prst="rect">
-            <a:avLst/>
-          </a:prstGeom>
-          <a:noFill/>
-          <a:ln/>
-        </p:spPr>
-        <p:txBody>
-          <a:bodyPr wrap="square" lIns="0" tIns="0" rIns="0" bIns="0" rtlCol="0" anchor="ctr"/>
-          <a:lstStyle/>
-          <a:p>
-            <a:pPr indent="0" marL="0">
-              <a:buNone/>
-            </a:pPr>
-            <a:r>
-              <a:rPr lang="en-US" sz="1200" b="1" dirty="0">
-                <a:solidFill>
-                  <a:srgbClr val="8C1D40"/>
-                </a:solidFill>
-                <a:latin typeface="Calibri" pitchFamily="34" charset="0"/>
-                <a:ea typeface="Calibri" pitchFamily="34" charset="-122"/>
-                <a:cs typeface="Calibri" pitchFamily="34" charset="-120"/>
-              </a:rPr>
-              <a:t>PI</a:t>
-            </a:r>
-            <a:endParaRPr lang="en-US" sz="1200" dirty="0"/>
-          </a:p>
-        </p:txBody>
-      </p:sp>
-      <p:sp>
-        <p:nvSpPr>
-          <p:cNvPr id="22" name="Text 16"/>
-          <p:cNvSpPr txBox="1"/>
-          <p:nvPr/>
-        </p:nvSpPr>
-        <p:spPr>
-          <a:xfrm>
-            <a:off x="6812280" y="2194560"/>
-            <a:ext cx="1874520" cy="457200"/>
-          </a:xfrm>
-          <a:prstGeom prst="rect">
-            <a:avLst/>
-          </a:prstGeom>
-          <a:noFill/>
-          <a:ln/>
-        </p:spPr>
-        <p:txBody>
-          <a:bodyPr wrap="square" lIns="0" tIns="0" rIns="0" bIns="0" rtlCol="0" anchor="ctr"/>
-          <a:lstStyle/>
-          <a:p>
-            <a:pPr indent="0" marL="0">
-              <a:buNone/>
-            </a:pPr>
-            <a:r>
-              <a:rPr lang="en-US" sz="1200" dirty="0">
-                <a:solidFill>
-                  <a:srgbClr val="1F2937"/>
-                </a:solidFill>
-                <a:latin typeface="Calibri" pitchFamily="34" charset="0"/>
-                <a:ea typeface="Calibri" pitchFamily="34" charset="-122"/>
-                <a:cs typeface="Calibri" pitchFamily="34" charset="-120"/>
-              </a:rPr>
-              <a:t>Prof. Marco Valgimigli, Lugano</a:t>
-            </a:r>
-            <a:endParaRPr lang="en-US" sz="1200" dirty="0"/>
-          </a:p>
-        </p:txBody>
-      </p:sp>
-      <p:sp>
-        <p:nvSpPr>
-          <p:cNvPr id="23" name="Shape 17"/>
-          <p:cNvSpPr/>
-          <p:nvPr/>
-        </p:nvSpPr>
-        <p:spPr>
-          <a:xfrm>
-            <a:off x="5852160" y="2697480"/>
-            <a:ext cx="2834640" cy="0"/>
-          </a:xfrm>
-          <a:prstGeom prst="line">
-            <a:avLst/>
-          </a:prstGeom>
-          <a:noFill/>
-          <a:ln w="12700">
-            <a:solidFill>
-              <a:srgbClr val="E5E7EB"/>
-            </a:solidFill>
-            <a:prstDash val="solid"/>
-          </a:ln>
-        </p:spPr>
-      </p:sp>
-      <p:sp>
-        <p:nvSpPr>
-          <p:cNvPr id="24" name="Text 18"/>
-          <p:cNvSpPr txBox="1"/>
-          <p:nvPr/>
-        </p:nvSpPr>
-        <p:spPr>
-          <a:xfrm>
-            <a:off x="5852160" y="2743200"/>
-            <a:ext cx="960120" cy="457200"/>
-          </a:xfrm>
-          <a:prstGeom prst="rect">
-            <a:avLst/>
-          </a:prstGeom>
-          <a:noFill/>
-          <a:ln/>
-        </p:spPr>
-        <p:txBody>
-          <a:bodyPr wrap="square" lIns="0" tIns="0" rIns="0" bIns="0" rtlCol="0" anchor="ctr"/>
-          <a:lstStyle/>
-          <a:p>
-            <a:pPr indent="0" marL="0">
-              <a:buNone/>
-            </a:pPr>
-            <a:r>
-              <a:rPr lang="en-US" sz="1200" b="1" dirty="0">
-                <a:solidFill>
-                  <a:srgbClr val="8C1D40"/>
-                </a:solidFill>
-                <a:latin typeface="Calibri" pitchFamily="34" charset="0"/>
-                <a:ea typeface="Calibri" pitchFamily="34" charset="-122"/>
-                <a:cs typeface="Calibri" pitchFamily="34" charset="-120"/>
-              </a:rPr>
-              <a:t>Sponsor</a:t>
-            </a:r>
-            <a:endParaRPr lang="en-US" sz="1200" dirty="0"/>
-          </a:p>
-        </p:txBody>
-      </p:sp>
-      <p:sp>
-        <p:nvSpPr>
-          <p:cNvPr id="25" name="Text 19"/>
-          <p:cNvSpPr txBox="1"/>
-          <p:nvPr/>
-        </p:nvSpPr>
-        <p:spPr>
-          <a:xfrm>
-            <a:off x="6812280" y="2743200"/>
-            <a:ext cx="1874520" cy="457200"/>
-          </a:xfrm>
-          <a:prstGeom prst="rect">
-            <a:avLst/>
-          </a:prstGeom>
-          <a:noFill/>
-          <a:ln/>
-        </p:spPr>
-        <p:txBody>
-          <a:bodyPr wrap="square" lIns="0" tIns="0" rIns="0" bIns="0" rtlCol="0" anchor="ctr"/>
-          <a:lstStyle/>
-          <a:p>
-            <a:pPr indent="0" marL="0">
-              <a:buNone/>
-            </a:pPr>
-            <a:r>
-              <a:rPr lang="en-US" sz="1200" dirty="0">
-                <a:solidFill>
-                  <a:srgbClr val="1F2937"/>
-                </a:solidFill>
-                <a:latin typeface="Calibri" pitchFamily="34" charset="0"/>
-                <a:ea typeface="Calibri" pitchFamily="34" charset="-122"/>
-                <a:cs typeface="Calibri" pitchFamily="34" charset="-120"/>
-              </a:rPr>
-              <a:t>Vesalio</a:t>
-            </a:r>
-            <a:endParaRPr lang="en-US" sz="1200" dirty="0"/>
-          </a:p>
-        </p:txBody>
-      </p:sp>
-      <p:sp>
-        <p:nvSpPr>
-          <p:cNvPr id="26" name="Shape 20"/>
-          <p:cNvSpPr/>
-          <p:nvPr/>
-        </p:nvSpPr>
-        <p:spPr>
-          <a:xfrm>
-            <a:off x="5852160" y="3246120"/>
-            <a:ext cx="2834640" cy="0"/>
-          </a:xfrm>
-          <a:prstGeom prst="line">
-            <a:avLst/>
-          </a:prstGeom>
-          <a:noFill/>
-          <a:ln w="12700">
-            <a:solidFill>
-              <a:srgbClr val="E5E7EB"/>
-            </a:solidFill>
-            <a:prstDash val="solid"/>
-          </a:ln>
-        </p:spPr>
-      </p:sp>
-      <p:sp>
-        <p:nvSpPr>
-          <p:cNvPr id="27" name="Text 21"/>
-          <p:cNvSpPr txBox="1"/>
-          <p:nvPr/>
-        </p:nvSpPr>
-        <p:spPr>
-          <a:xfrm>
-            <a:off x="5852160" y="3291840"/>
-            <a:ext cx="960120" cy="457200"/>
-          </a:xfrm>
-          <a:prstGeom prst="rect">
-            <a:avLst/>
-          </a:prstGeom>
-          <a:noFill/>
-          <a:ln/>
-        </p:spPr>
-        <p:txBody>
-          <a:bodyPr wrap="square" lIns="0" tIns="0" rIns="0" bIns="0" rtlCol="0" anchor="ctr"/>
-          <a:lstStyle/>
-          <a:p>
-            <a:pPr indent="0" marL="0">
-              <a:buNone/>
-            </a:pPr>
-            <a:r>
-              <a:rPr lang="en-US" sz="1200" b="1" dirty="0">
-                <a:solidFill>
-                  <a:srgbClr val="8C1D40"/>
-                </a:solidFill>
-                <a:latin typeface="Calibri" pitchFamily="34" charset="0"/>
-                <a:ea typeface="Calibri" pitchFamily="34" charset="-122"/>
-                <a:cs typeface="Calibri" pitchFamily="34" charset="-120"/>
-              </a:rPr>
-              <a:t>Registry</a:t>
-            </a:r>
-            <a:endParaRPr lang="en-US" sz="1200" dirty="0"/>
-          </a:p>
-        </p:txBody>
-      </p:sp>
-      <p:sp>
-        <p:nvSpPr>
-          <p:cNvPr id="28" name="Text 22"/>
-          <p:cNvSpPr txBox="1"/>
-          <p:nvPr/>
-        </p:nvSpPr>
-        <p:spPr>
-          <a:xfrm>
-            <a:off x="6812280" y="3291840"/>
-            <a:ext cx="1874520" cy="457200"/>
-          </a:xfrm>
-          <a:prstGeom prst="rect">
-            <a:avLst/>
-          </a:prstGeom>
-          <a:noFill/>
-          <a:ln/>
-        </p:spPr>
-        <p:txBody>
-          <a:bodyPr wrap="square" lIns="0" tIns="0" rIns="0" bIns="0" rtlCol="0" anchor="ctr"/>
-          <a:lstStyle/>
-          <a:p>
-            <a:pPr indent="0" marL="0">
-              <a:buNone/>
-            </a:pPr>
-            <a:r>
-              <a:rPr lang="en-US" sz="1200" dirty="0">
-                <a:solidFill>
-                  <a:srgbClr val="1F2937"/>
-                </a:solidFill>
-                <a:latin typeface="Calibri" pitchFamily="34" charset="0"/>
-                <a:ea typeface="Calibri" pitchFamily="34" charset="-122"/>
-                <a:cs typeface="Calibri" pitchFamily="34" charset="-120"/>
-              </a:rPr>
-              <a:t>NCT04969471</a:t>
-            </a:r>
-            <a:endParaRPr lang="en-US" sz="1200" dirty="0"/>
+              <a:t>Needs an internet connection during the talk.</a:t>
+            </a:r>
+            <a:endParaRPr lang="en-US" sz="1100" dirty="0"/>
           </a:p>
         </p:txBody>
       </p:sp>
@@ -9298,7 +9075,7 @@
                 <a:ea typeface="Cambria" pitchFamily="34" charset="-122"/>
                 <a:cs typeface="Cambria" pitchFamily="34" charset="-120"/>
               </a:rPr>
-              <a:t>Inclusion criteria</a:t>
+              <a:t>Trial design</a:t>
             </a:r>
             <a:endParaRPr lang="en-US" sz="2800" dirty="0"/>
           </a:p>
@@ -9352,10 +9129,189 @@
         <p:spPr>
           <a:xfrm>
             <a:off x="457200" y="1097280"/>
-            <a:ext cx="365760" cy="365760"/>
-          </a:xfrm>
-          <a:prstGeom prst="ellipse">
-            <a:avLst/>
+            <a:ext cx="4937760" cy="640080"/>
+          </a:xfrm>
+          <a:prstGeom prst="roundRect">
+            <a:avLst>
+              <a:gd name="adj" fmla="val 11429"/>
+            </a:avLst>
+          </a:prstGeom>
+          <a:solidFill>
+            <a:srgbClr val="1F2937"/>
+          </a:solidFill>
+          <a:ln w="12700">
+            <a:solidFill>
+              <a:srgbClr val="1F2937"/>
+            </a:solidFill>
+            <a:prstDash val="solid"/>
+          </a:ln>
+        </p:spPr>
+      </p:sp>
+      <p:sp>
+        <p:nvSpPr>
+          <p:cNvPr id="6" name="Text 3"/>
+          <p:cNvSpPr txBox="1"/>
+          <p:nvPr/>
+        </p:nvSpPr>
+        <p:spPr>
+          <a:xfrm>
+            <a:off x="457200" y="1097280"/>
+            <a:ext cx="4937760" cy="640080"/>
+          </a:xfrm>
+          <a:prstGeom prst="rect">
+            <a:avLst/>
+          </a:prstGeom>
+          <a:noFill/>
+          <a:ln/>
+        </p:spPr>
+        <p:txBody>
+          <a:bodyPr wrap="square" lIns="0" tIns="0" rIns="0" bIns="0" rtlCol="0" anchor="ctr"/>
+          <a:lstStyle/>
+          <a:p>
+            <a:pPr algn="ctr" indent="0" marL="0">
+              <a:buNone/>
+            </a:pPr>
+            <a:r>
+              <a:rPr lang="en-US" sz="1500" b="1" dirty="0">
+                <a:solidFill>
+                  <a:srgbClr val="FFFFFF"/>
+                </a:solidFill>
+                <a:latin typeface="Calibri" pitchFamily="34" charset="0"/>
+                <a:ea typeface="Calibri" pitchFamily="34" charset="-122"/>
+                <a:cs typeface="Calibri" pitchFamily="34" charset="-120"/>
+              </a:rPr>
+              <a:t>154 STEMI patients with large thrombus · 11 centres</a:t>
+            </a:r>
+            <a:endParaRPr lang="en-US" sz="1500" dirty="0"/>
+          </a:p>
+        </p:txBody>
+      </p:sp>
+      <p:pic>
+        <p:nvPicPr>
+          <p:cNvPr id="7" name="Image 0" descr="preencoded.png">    </p:cNvPr>
+          <p:cNvPicPr>
+            <a:picLocks noChangeAspect="1"/>
+          </p:cNvPicPr>
+          <p:nvPr/>
+        </p:nvPicPr>
+        <p:blipFill>
+          <a:blip r:embed="rId1"/>
+          <a:stretch>
+            <a:fillRect/>
+          </a:stretch>
+        </p:blipFill>
+        <p:spPr>
+          <a:xfrm>
+            <a:off x="2816352" y="1828800"/>
+            <a:ext cx="219456" cy="219456"/>
+          </a:xfrm>
+          <a:prstGeom prst="rect">
+            <a:avLst/>
+          </a:prstGeom>
+        </p:spPr>
+      </p:pic>
+      <p:sp>
+        <p:nvSpPr>
+          <p:cNvPr id="8" name="Text 4"/>
+          <p:cNvSpPr txBox="1"/>
+          <p:nvPr/>
+        </p:nvSpPr>
+        <p:spPr>
+          <a:xfrm>
+            <a:off x="1554480" y="2103120"/>
+            <a:ext cx="2743200" cy="365760"/>
+          </a:xfrm>
+          <a:prstGeom prst="rect">
+            <a:avLst/>
+          </a:prstGeom>
+          <a:noFill/>
+          <a:ln/>
+        </p:spPr>
+        <p:txBody>
+          <a:bodyPr wrap="square" lIns="0" tIns="0" rIns="0" bIns="0" rtlCol="0" anchor="ctr"/>
+          <a:lstStyle/>
+          <a:p>
+            <a:pPr algn="ctr" indent="0" marL="0">
+              <a:buNone/>
+            </a:pPr>
+            <a:r>
+              <a:rPr lang="en-US" sz="1300" b="1" dirty="0">
+                <a:solidFill>
+                  <a:srgbClr val="8C1D40"/>
+                </a:solidFill>
+                <a:latin typeface="Calibri" pitchFamily="34" charset="0"/>
+                <a:ea typeface="Calibri" pitchFamily="34" charset="-122"/>
+                <a:cs typeface="Calibri" pitchFamily="34" charset="-120"/>
+              </a:rPr>
+              <a:t>Randomised 1 : 1</a:t>
+            </a:r>
+            <a:endParaRPr lang="en-US" sz="1300" dirty="0"/>
+          </a:p>
+        </p:txBody>
+      </p:sp>
+      <p:pic>
+        <p:nvPicPr>
+          <p:cNvPr id="9" name="Image 1" descr="preencoded.png">    </p:cNvPr>
+          <p:cNvPicPr>
+            <a:picLocks noChangeAspect="1"/>
+          </p:cNvPicPr>
+          <p:nvPr/>
+        </p:nvPicPr>
+        <p:blipFill>
+          <a:blip r:embed="rId2"/>
+          <a:stretch>
+            <a:fillRect/>
+          </a:stretch>
+        </p:blipFill>
+        <p:spPr>
+          <a:xfrm>
+            <a:off x="1554480" y="2542032"/>
+            <a:ext cx="219456" cy="219456"/>
+          </a:xfrm>
+          <a:prstGeom prst="rect">
+            <a:avLst/>
+          </a:prstGeom>
+        </p:spPr>
+      </p:pic>
+      <p:pic>
+        <p:nvPicPr>
+          <p:cNvPr id="10" name="Image 2" descr="preencoded.png">    </p:cNvPr>
+          <p:cNvPicPr>
+            <a:picLocks noChangeAspect="1"/>
+          </p:cNvPicPr>
+          <p:nvPr/>
+        </p:nvPicPr>
+        <p:blipFill>
+          <a:blip r:embed="rId3"/>
+          <a:stretch>
+            <a:fillRect/>
+          </a:stretch>
+        </p:blipFill>
+        <p:spPr>
+          <a:xfrm>
+            <a:off x="4078224" y="2542032"/>
+            <a:ext cx="219456" cy="219456"/>
+          </a:xfrm>
+          <a:prstGeom prst="rect">
+            <a:avLst/>
+          </a:prstGeom>
+        </p:spPr>
+      </p:pic>
+      <p:sp>
+        <p:nvSpPr>
+          <p:cNvPr id="11" name="Shape 5"/>
+          <p:cNvSpPr/>
+          <p:nvPr/>
+        </p:nvSpPr>
+        <p:spPr>
+          <a:xfrm>
+            <a:off x="457200" y="2834640"/>
+            <a:ext cx="2377440" cy="914400"/>
+          </a:xfrm>
+          <a:prstGeom prst="roundRect">
+            <a:avLst>
+              <a:gd name="adj" fmla="val 8000"/>
+            </a:avLst>
           </a:prstGeom>
           <a:solidFill>
             <a:srgbClr val="8C1D40"/>
@@ -9368,482 +9324,559 @@
           </a:ln>
         </p:spPr>
       </p:sp>
-      <p:pic>
-        <p:nvPicPr>
-          <p:cNvPr id="6" name="Image 0" descr="preencoded.png">    </p:cNvPr>
-          <p:cNvPicPr>
-            <a:picLocks noChangeAspect="1"/>
-          </p:cNvPicPr>
-          <p:nvPr/>
-        </p:nvPicPr>
-        <p:blipFill>
-          <a:blip r:embed="rId1"/>
-          <a:stretch>
-            <a:fillRect/>
-          </a:stretch>
-        </p:blipFill>
-        <p:spPr>
-          <a:xfrm>
-            <a:off x="555955" y="1196035"/>
-            <a:ext cx="168250" cy="168250"/>
-          </a:xfrm>
-          <a:prstGeom prst="rect">
-            <a:avLst/>
-          </a:prstGeom>
-        </p:spPr>
-      </p:pic>
-      <p:sp>
-        <p:nvSpPr>
-          <p:cNvPr id="7" name="Text 3"/>
-          <p:cNvSpPr txBox="1"/>
-          <p:nvPr/>
-        </p:nvSpPr>
-        <p:spPr>
-          <a:xfrm>
-            <a:off x="1005840" y="1161288"/>
-            <a:ext cx="4480560" cy="365760"/>
-          </a:xfrm>
-          <a:prstGeom prst="rect">
-            <a:avLst/>
-          </a:prstGeom>
-          <a:noFill/>
-          <a:ln/>
-        </p:spPr>
-        <p:txBody>
-          <a:bodyPr wrap="square" lIns="0" tIns="0" rIns="0" bIns="0" rtlCol="0" anchor="t"/>
-          <a:lstStyle/>
-          <a:p>
-            <a:pPr indent="0" marL="0">
-              <a:buNone/>
-            </a:pPr>
-            <a:r>
-              <a:rPr lang="en-US" sz="1400" dirty="0">
-                <a:solidFill>
-                  <a:srgbClr val="1F2937"/>
+      <p:sp>
+        <p:nvSpPr>
+          <p:cNvPr id="12" name="Text 6"/>
+          <p:cNvSpPr txBox="1"/>
+          <p:nvPr/>
+        </p:nvSpPr>
+        <p:spPr>
+          <a:xfrm>
+            <a:off x="457200" y="2834640"/>
+            <a:ext cx="2377440" cy="914400"/>
+          </a:xfrm>
+          <a:prstGeom prst="rect">
+            <a:avLst/>
+          </a:prstGeom>
+          <a:noFill/>
+          <a:ln/>
+        </p:spPr>
+        <p:txBody>
+          <a:bodyPr wrap="square" lIns="0" tIns="0" rIns="0" bIns="0" rtlCol="0" anchor="ctr"/>
+          <a:lstStyle/>
+          <a:p>
+            <a:pPr algn="ctr" indent="0" marL="0">
+              <a:buNone/>
+            </a:pPr>
+            <a:r>
+              <a:rPr lang="en-US" sz="1400" b="1" dirty="0">
+                <a:solidFill>
+                  <a:srgbClr val="FFFFFF"/>
                 </a:solidFill>
                 <a:latin typeface="Calibri" pitchFamily="34" charset="0"/>
                 <a:ea typeface="Calibri" pitchFamily="34" charset="-122"/>
                 <a:cs typeface="Calibri" pitchFamily="34" charset="-120"/>
               </a:rPr>
-              <a:t>Age ≥ 18 years</a:t>
+              <a:t>enVast thrombectomy</a:t>
             </a:r>
             <a:endParaRPr lang="en-US" sz="1400" dirty="0"/>
           </a:p>
-        </p:txBody>
-      </p:sp>
-      <p:sp>
-        <p:nvSpPr>
-          <p:cNvPr id="8" name="Shape 4"/>
+          <a:p>
+            <a:pPr algn="ctr" indent="0" marL="0">
+              <a:buNone/>
+            </a:pPr>
+            <a:r>
+              <a:rPr lang="en-US" sz="1200" dirty="0">
+                <a:solidFill>
+                  <a:srgbClr val="FFFFFF"/>
+                </a:solidFill>
+                <a:latin typeface="Calibri" pitchFamily="34" charset="0"/>
+                <a:ea typeface="Calibri" pitchFamily="34" charset="-122"/>
+                <a:cs typeface="Calibri" pitchFamily="34" charset="-120"/>
+              </a:rPr>
+              <a:t>then conventional PCI</a:t>
+            </a:r>
+            <a:endParaRPr lang="en-US" sz="1400" dirty="0"/>
+          </a:p>
+        </p:txBody>
+      </p:sp>
+      <p:sp>
+        <p:nvSpPr>
+          <p:cNvPr id="13" name="Shape 7"/>
           <p:cNvSpPr/>
           <p:nvPr/>
         </p:nvSpPr>
         <p:spPr>
           <a:xfrm>
-            <a:off x="457200" y="1737360"/>
-            <a:ext cx="365760" cy="365760"/>
-          </a:xfrm>
-          <a:prstGeom prst="ellipse">
-            <a:avLst/>
+            <a:off x="3017520" y="2834640"/>
+            <a:ext cx="2377440" cy="914400"/>
+          </a:xfrm>
+          <a:prstGeom prst="roundRect">
+            <a:avLst>
+              <a:gd name="adj" fmla="val 8000"/>
+            </a:avLst>
           </a:prstGeom>
           <a:solidFill>
-            <a:srgbClr val="8C1D40"/>
+            <a:srgbClr val="A3AAB6"/>
           </a:solidFill>
           <a:ln w="12700">
             <a:solidFill>
-              <a:srgbClr val="8C1D40"/>
+              <a:srgbClr val="A3AAB6"/>
             </a:solidFill>
             <a:prstDash val="solid"/>
           </a:ln>
         </p:spPr>
       </p:sp>
-      <p:pic>
-        <p:nvPicPr>
-          <p:cNvPr id="9" name="Image 1" descr="preencoded.png">    </p:cNvPr>
-          <p:cNvPicPr>
-            <a:picLocks noChangeAspect="1"/>
-          </p:cNvPicPr>
-          <p:nvPr/>
-        </p:nvPicPr>
-        <p:blipFill>
-          <a:blip r:embed="rId2"/>
-          <a:stretch>
-            <a:fillRect/>
-          </a:stretch>
-        </p:blipFill>
-        <p:spPr>
-          <a:xfrm>
-            <a:off x="555955" y="1836115"/>
-            <a:ext cx="168250" cy="168250"/>
-          </a:xfrm>
-          <a:prstGeom prst="rect">
-            <a:avLst/>
-          </a:prstGeom>
-        </p:spPr>
-      </p:pic>
-      <p:sp>
-        <p:nvSpPr>
-          <p:cNvPr id="10" name="Text 5"/>
-          <p:cNvSpPr txBox="1"/>
-          <p:nvPr/>
-        </p:nvSpPr>
-        <p:spPr>
-          <a:xfrm>
-            <a:off x="1005840" y="1801368"/>
-            <a:ext cx="4480560" cy="685800"/>
-          </a:xfrm>
-          <a:prstGeom prst="rect">
-            <a:avLst/>
-          </a:prstGeom>
-          <a:noFill/>
-          <a:ln/>
-        </p:spPr>
-        <p:txBody>
-          <a:bodyPr wrap="square" lIns="0" tIns="0" rIns="0" bIns="0" rtlCol="0" anchor="t"/>
-          <a:lstStyle/>
-          <a:p>
-            <a:pPr indent="0" marL="0">
-              <a:buNone/>
-            </a:pPr>
-            <a:r>
-              <a:rPr lang="en-US" sz="1400" dirty="0">
-                <a:solidFill>
-                  <a:srgbClr val="1F2937"/>
+      <p:sp>
+        <p:nvSpPr>
+          <p:cNvPr id="14" name="Text 8"/>
+          <p:cNvSpPr txBox="1"/>
+          <p:nvPr/>
+        </p:nvSpPr>
+        <p:spPr>
+          <a:xfrm>
+            <a:off x="3017520" y="2834640"/>
+            <a:ext cx="2377440" cy="914400"/>
+          </a:xfrm>
+          <a:prstGeom prst="rect">
+            <a:avLst/>
+          </a:prstGeom>
+          <a:noFill/>
+          <a:ln/>
+        </p:spPr>
+        <p:txBody>
+          <a:bodyPr wrap="square" lIns="0" tIns="0" rIns="0" bIns="0" rtlCol="0" anchor="ctr"/>
+          <a:lstStyle/>
+          <a:p>
+            <a:pPr algn="ctr" indent="0" marL="0">
+              <a:buNone/>
+            </a:pPr>
+            <a:r>
+              <a:rPr lang="en-US" sz="1400" b="1" dirty="0">
+                <a:solidFill>
+                  <a:srgbClr val="FFFFFF"/>
                 </a:solidFill>
                 <a:latin typeface="Calibri" pitchFamily="34" charset="0"/>
                 <a:ea typeface="Calibri" pitchFamily="34" charset="-122"/>
                 <a:cs typeface="Calibri" pitchFamily="34" charset="-120"/>
               </a:rPr>
-              <a:t>Chest pain &gt; 20 min with ST elevation ≥ 1 mm in ≥ 2 contiguous leads, or infero-lateral MI with ST depression ≥ 1 mm in ≥ 2 of V1–V3 and a positive terminal T wave</a:t>
+              <a:t>Standard PCI</a:t>
             </a:r>
             <a:endParaRPr lang="en-US" sz="1400" dirty="0"/>
           </a:p>
-        </p:txBody>
-      </p:sp>
-      <p:sp>
-        <p:nvSpPr>
-          <p:cNvPr id="11" name="Shape 6"/>
+          <a:p>
+            <a:pPr algn="ctr" indent="0" marL="0">
+              <a:buNone/>
+            </a:pPr>
+            <a:r>
+              <a:rPr lang="en-US" sz="1200" dirty="0">
+                <a:solidFill>
+                  <a:srgbClr val="FFFFFF"/>
+                </a:solidFill>
+                <a:latin typeface="Calibri" pitchFamily="34" charset="0"/>
+                <a:ea typeface="Calibri" pitchFamily="34" charset="-122"/>
+                <a:cs typeface="Calibri" pitchFamily="34" charset="-120"/>
+              </a:rPr>
+              <a:t>standard of care</a:t>
+            </a:r>
+            <a:endParaRPr lang="en-US" sz="1400" dirty="0"/>
+          </a:p>
+        </p:txBody>
+      </p:sp>
+      <p:sp>
+        <p:nvSpPr>
+          <p:cNvPr id="15" name="Text 9"/>
+          <p:cNvSpPr txBox="1"/>
+          <p:nvPr/>
+        </p:nvSpPr>
+        <p:spPr>
+          <a:xfrm>
+            <a:off x="5852160" y="1097280"/>
+            <a:ext cx="960120" cy="457200"/>
+          </a:xfrm>
+          <a:prstGeom prst="rect">
+            <a:avLst/>
+          </a:prstGeom>
+          <a:noFill/>
+          <a:ln/>
+        </p:spPr>
+        <p:txBody>
+          <a:bodyPr wrap="square" lIns="0" tIns="0" rIns="0" bIns="0" rtlCol="0" anchor="ctr"/>
+          <a:lstStyle/>
+          <a:p>
+            <a:pPr indent="0" marL="0">
+              <a:buNone/>
+            </a:pPr>
+            <a:r>
+              <a:rPr lang="en-US" sz="1200" b="1" dirty="0">
+                <a:solidFill>
+                  <a:srgbClr val="8C1D40"/>
+                </a:solidFill>
+                <a:latin typeface="Calibri" pitchFamily="34" charset="0"/>
+                <a:ea typeface="Calibri" pitchFamily="34" charset="-122"/>
+                <a:cs typeface="Calibri" pitchFamily="34" charset="-120"/>
+              </a:rPr>
+              <a:t>Type</a:t>
+            </a:r>
+            <a:endParaRPr lang="en-US" sz="1200" dirty="0"/>
+          </a:p>
+        </p:txBody>
+      </p:sp>
+      <p:sp>
+        <p:nvSpPr>
+          <p:cNvPr id="16" name="Text 10"/>
+          <p:cNvSpPr txBox="1"/>
+          <p:nvPr/>
+        </p:nvSpPr>
+        <p:spPr>
+          <a:xfrm>
+            <a:off x="6812280" y="1097280"/>
+            <a:ext cx="1874520" cy="457200"/>
+          </a:xfrm>
+          <a:prstGeom prst="rect">
+            <a:avLst/>
+          </a:prstGeom>
+          <a:noFill/>
+          <a:ln/>
+        </p:spPr>
+        <p:txBody>
+          <a:bodyPr wrap="square" lIns="0" tIns="0" rIns="0" bIns="0" rtlCol="0" anchor="ctr"/>
+          <a:lstStyle/>
+          <a:p>
+            <a:pPr indent="0" marL="0">
+              <a:buNone/>
+            </a:pPr>
+            <a:r>
+              <a:rPr lang="en-US" sz="1200" dirty="0">
+                <a:solidFill>
+                  <a:srgbClr val="1F2937"/>
+                </a:solidFill>
+                <a:latin typeface="Calibri" pitchFamily="34" charset="0"/>
+                <a:ea typeface="Calibri" pitchFamily="34" charset="-122"/>
+                <a:cs typeface="Calibri" pitchFamily="34" charset="-120"/>
+              </a:rPr>
+              <a:t>Prospective, multicentre, randomised</a:t>
+            </a:r>
+            <a:endParaRPr lang="en-US" sz="1200" dirty="0"/>
+          </a:p>
+        </p:txBody>
+      </p:sp>
+      <p:sp>
+        <p:nvSpPr>
+          <p:cNvPr id="17" name="Shape 11"/>
           <p:cNvSpPr/>
           <p:nvPr/>
         </p:nvSpPr>
         <p:spPr>
           <a:xfrm>
-            <a:off x="457200" y="2697480"/>
-            <a:ext cx="365760" cy="365760"/>
-          </a:xfrm>
-          <a:prstGeom prst="ellipse">
-            <a:avLst/>
-          </a:prstGeom>
-          <a:solidFill>
-            <a:srgbClr val="8C1D40"/>
-          </a:solidFill>
+            <a:off x="5852160" y="1600200"/>
+            <a:ext cx="2834640" cy="0"/>
+          </a:xfrm>
+          <a:prstGeom prst="line">
+            <a:avLst/>
+          </a:prstGeom>
+          <a:noFill/>
           <a:ln w="12700">
             <a:solidFill>
-              <a:srgbClr val="8C1D40"/>
+              <a:srgbClr val="E5E7EB"/>
             </a:solidFill>
             <a:prstDash val="solid"/>
           </a:ln>
         </p:spPr>
       </p:sp>
-      <p:pic>
-        <p:nvPicPr>
-          <p:cNvPr id="12" name="Image 2" descr="preencoded.png">    </p:cNvPr>
-          <p:cNvPicPr>
-            <a:picLocks noChangeAspect="1"/>
-          </p:cNvPicPr>
-          <p:nvPr/>
-        </p:nvPicPr>
-        <p:blipFill>
-          <a:blip r:embed="rId3"/>
-          <a:stretch>
-            <a:fillRect/>
-          </a:stretch>
-        </p:blipFill>
-        <p:spPr>
-          <a:xfrm>
-            <a:off x="555955" y="2796235"/>
-            <a:ext cx="168250" cy="168250"/>
-          </a:xfrm>
-          <a:prstGeom prst="rect">
-            <a:avLst/>
-          </a:prstGeom>
-        </p:spPr>
-      </p:pic>
-      <p:sp>
-        <p:nvSpPr>
-          <p:cNvPr id="13" name="Text 7"/>
-          <p:cNvSpPr txBox="1"/>
-          <p:nvPr/>
-        </p:nvSpPr>
-        <p:spPr>
-          <a:xfrm>
-            <a:off x="1005840" y="2761488"/>
-            <a:ext cx="4480560" cy="475488"/>
-          </a:xfrm>
-          <a:prstGeom prst="rect">
-            <a:avLst/>
-          </a:prstGeom>
-          <a:noFill/>
-          <a:ln/>
-        </p:spPr>
-        <p:txBody>
-          <a:bodyPr wrap="square" lIns="0" tIns="0" rIns="0" bIns="0" rtlCol="0" anchor="t"/>
+      <p:sp>
+        <p:nvSpPr>
+          <p:cNvPr id="18" name="Text 12"/>
+          <p:cNvSpPr txBox="1"/>
+          <p:nvPr/>
+        </p:nvSpPr>
+        <p:spPr>
+          <a:xfrm>
+            <a:off x="5852160" y="1645920"/>
+            <a:ext cx="960120" cy="457200"/>
+          </a:xfrm>
+          <a:prstGeom prst="rect">
+            <a:avLst/>
+          </a:prstGeom>
+          <a:noFill/>
+          <a:ln/>
+        </p:spPr>
+        <p:txBody>
+          <a:bodyPr wrap="square" lIns="0" tIns="0" rIns="0" bIns="0" rtlCol="0" anchor="ctr"/>
           <a:lstStyle/>
           <a:p>
             <a:pPr indent="0" marL="0">
               <a:buNone/>
             </a:pPr>
             <a:r>
-              <a:rPr lang="en-US" sz="1400" dirty="0">
-                <a:solidFill>
-                  <a:srgbClr val="1F2937"/>
+              <a:rPr lang="en-US" sz="1200" b="1" dirty="0">
+                <a:solidFill>
+                  <a:srgbClr val="8C1D40"/>
                 </a:solidFill>
                 <a:latin typeface="Calibri" pitchFamily="34" charset="0"/>
                 <a:ea typeface="Calibri" pitchFamily="34" charset="-122"/>
                 <a:cs typeface="Calibri" pitchFamily="34" charset="-120"/>
               </a:rPr>
-              <a:t>TIMI thrombus grade ≥ 3 in the infarct-related artery (re-confirmed after wiring if TIMI 0 flow)</a:t>
-            </a:r>
-            <a:endParaRPr lang="en-US" sz="1400" dirty="0"/>
-          </a:p>
-        </p:txBody>
-      </p:sp>
-      <p:sp>
-        <p:nvSpPr>
-          <p:cNvPr id="14" name="Shape 8"/>
+              <a:t>Hypothesis</a:t>
+            </a:r>
+            <a:endParaRPr lang="en-US" sz="1200" dirty="0"/>
+          </a:p>
+        </p:txBody>
+      </p:sp>
+      <p:sp>
+        <p:nvSpPr>
+          <p:cNvPr id="19" name="Text 13"/>
+          <p:cNvSpPr txBox="1"/>
+          <p:nvPr/>
+        </p:nvSpPr>
+        <p:spPr>
+          <a:xfrm>
+            <a:off x="6812280" y="1645920"/>
+            <a:ext cx="1874520" cy="457200"/>
+          </a:xfrm>
+          <a:prstGeom prst="rect">
+            <a:avLst/>
+          </a:prstGeom>
+          <a:noFill/>
+          <a:ln/>
+        </p:spPr>
+        <p:txBody>
+          <a:bodyPr wrap="square" lIns="0" tIns="0" rIns="0" bIns="0" rtlCol="0" anchor="ctr"/>
+          <a:lstStyle/>
+          <a:p>
+            <a:pPr indent="0" marL="0">
+              <a:buNone/>
+            </a:pPr>
+            <a:r>
+              <a:rPr lang="en-US" sz="1200" dirty="0">
+                <a:solidFill>
+                  <a:srgbClr val="1F2937"/>
+                </a:solidFill>
+                <a:latin typeface="Calibri" pitchFamily="34" charset="0"/>
+                <a:ea typeface="Calibri" pitchFamily="34" charset="-122"/>
+                <a:cs typeface="Calibri" pitchFamily="34" charset="-120"/>
+              </a:rPr>
+              <a:t>Superiority on infarct size</a:t>
+            </a:r>
+            <a:endParaRPr lang="en-US" sz="1200" dirty="0"/>
+          </a:p>
+        </p:txBody>
+      </p:sp>
+      <p:sp>
+        <p:nvSpPr>
+          <p:cNvPr id="20" name="Shape 14"/>
           <p:cNvSpPr/>
           <p:nvPr/>
         </p:nvSpPr>
         <p:spPr>
           <a:xfrm>
-            <a:off x="457200" y="3447288"/>
-            <a:ext cx="365760" cy="365760"/>
-          </a:xfrm>
-          <a:prstGeom prst="ellipse">
-            <a:avLst/>
-          </a:prstGeom>
-          <a:solidFill>
-            <a:srgbClr val="8C1D40"/>
-          </a:solidFill>
+            <a:off x="5852160" y="2148840"/>
+            <a:ext cx="2834640" cy="0"/>
+          </a:xfrm>
+          <a:prstGeom prst="line">
+            <a:avLst/>
+          </a:prstGeom>
+          <a:noFill/>
           <a:ln w="12700">
             <a:solidFill>
-              <a:srgbClr val="8C1D40"/>
+              <a:srgbClr val="E5E7EB"/>
             </a:solidFill>
             <a:prstDash val="solid"/>
           </a:ln>
         </p:spPr>
       </p:sp>
-      <p:pic>
-        <p:nvPicPr>
-          <p:cNvPr id="15" name="Image 3" descr="preencoded.png">    </p:cNvPr>
-          <p:cNvPicPr>
-            <a:picLocks noChangeAspect="1"/>
-          </p:cNvPicPr>
-          <p:nvPr/>
-        </p:nvPicPr>
-        <p:blipFill>
-          <a:blip r:embed="rId4"/>
-          <a:stretch>
-            <a:fillRect/>
-          </a:stretch>
-        </p:blipFill>
-        <p:spPr>
-          <a:xfrm>
-            <a:off x="555955" y="3546043"/>
-            <a:ext cx="168250" cy="168250"/>
-          </a:xfrm>
-          <a:prstGeom prst="rect">
-            <a:avLst/>
-          </a:prstGeom>
-        </p:spPr>
-      </p:pic>
-      <p:sp>
-        <p:nvSpPr>
-          <p:cNvPr id="16" name="Text 9"/>
-          <p:cNvSpPr txBox="1"/>
-          <p:nvPr/>
-        </p:nvSpPr>
-        <p:spPr>
-          <a:xfrm>
-            <a:off x="1005840" y="3511296"/>
-            <a:ext cx="4480560" cy="365760"/>
-          </a:xfrm>
-          <a:prstGeom prst="rect">
-            <a:avLst/>
-          </a:prstGeom>
-          <a:noFill/>
-          <a:ln/>
-        </p:spPr>
-        <p:txBody>
-          <a:bodyPr wrap="square" lIns="0" tIns="0" rIns="0" bIns="0" rtlCol="0" anchor="t"/>
+      <p:sp>
+        <p:nvSpPr>
+          <p:cNvPr id="21" name="Text 15"/>
+          <p:cNvSpPr txBox="1"/>
+          <p:nvPr/>
+        </p:nvSpPr>
+        <p:spPr>
+          <a:xfrm>
+            <a:off x="5852160" y="2194560"/>
+            <a:ext cx="960120" cy="457200"/>
+          </a:xfrm>
+          <a:prstGeom prst="rect">
+            <a:avLst/>
+          </a:prstGeom>
+          <a:noFill/>
+          <a:ln/>
+        </p:spPr>
+        <p:txBody>
+          <a:bodyPr wrap="square" lIns="0" tIns="0" rIns="0" bIns="0" rtlCol="0" anchor="ctr"/>
           <a:lstStyle/>
           <a:p>
             <a:pPr indent="0" marL="0">
               <a:buNone/>
             </a:pPr>
             <a:r>
-              <a:rPr lang="en-US" sz="1400" dirty="0">
-                <a:solidFill>
-                  <a:srgbClr val="1F2937"/>
+              <a:rPr lang="en-US" sz="1200" b="1" dirty="0">
+                <a:solidFill>
+                  <a:srgbClr val="8C1D40"/>
                 </a:solidFill>
                 <a:latin typeface="Calibri" pitchFamily="34" charset="0"/>
                 <a:ea typeface="Calibri" pitchFamily="34" charset="-122"/>
                 <a:cs typeface="Calibri" pitchFamily="34" charset="-120"/>
               </a:rPr>
-              <a:t>Intervention started within 8 hours of symptom onset</a:t>
-            </a:r>
-            <a:endParaRPr lang="en-US" sz="1400" dirty="0"/>
-          </a:p>
-        </p:txBody>
-      </p:sp>
-      <p:sp>
-        <p:nvSpPr>
-          <p:cNvPr id="17" name="Shape 10"/>
+              <a:t>PI</a:t>
+            </a:r>
+            <a:endParaRPr lang="en-US" sz="1200" dirty="0"/>
+          </a:p>
+        </p:txBody>
+      </p:sp>
+      <p:sp>
+        <p:nvSpPr>
+          <p:cNvPr id="22" name="Text 16"/>
+          <p:cNvSpPr txBox="1"/>
+          <p:nvPr/>
+        </p:nvSpPr>
+        <p:spPr>
+          <a:xfrm>
+            <a:off x="6812280" y="2194560"/>
+            <a:ext cx="1874520" cy="457200"/>
+          </a:xfrm>
+          <a:prstGeom prst="rect">
+            <a:avLst/>
+          </a:prstGeom>
+          <a:noFill/>
+          <a:ln/>
+        </p:spPr>
+        <p:txBody>
+          <a:bodyPr wrap="square" lIns="0" tIns="0" rIns="0" bIns="0" rtlCol="0" anchor="ctr"/>
+          <a:lstStyle/>
+          <a:p>
+            <a:pPr indent="0" marL="0">
+              <a:buNone/>
+            </a:pPr>
+            <a:r>
+              <a:rPr lang="en-US" sz="1200" dirty="0">
+                <a:solidFill>
+                  <a:srgbClr val="1F2937"/>
+                </a:solidFill>
+                <a:latin typeface="Calibri" pitchFamily="34" charset="0"/>
+                <a:ea typeface="Calibri" pitchFamily="34" charset="-122"/>
+                <a:cs typeface="Calibri" pitchFamily="34" charset="-120"/>
+              </a:rPr>
+              <a:t>Prof. Marco Valgimigli, Lugano</a:t>
+            </a:r>
+            <a:endParaRPr lang="en-US" sz="1200" dirty="0"/>
+          </a:p>
+        </p:txBody>
+      </p:sp>
+      <p:sp>
+        <p:nvSpPr>
+          <p:cNvPr id="23" name="Shape 17"/>
           <p:cNvSpPr/>
           <p:nvPr/>
         </p:nvSpPr>
         <p:spPr>
           <a:xfrm>
-            <a:off x="457200" y="4087368"/>
-            <a:ext cx="365760" cy="365760"/>
-          </a:xfrm>
-          <a:prstGeom prst="ellipse">
-            <a:avLst/>
-          </a:prstGeom>
-          <a:solidFill>
-            <a:srgbClr val="8C1D40"/>
-          </a:solidFill>
+            <a:off x="5852160" y="2697480"/>
+            <a:ext cx="2834640" cy="0"/>
+          </a:xfrm>
+          <a:prstGeom prst="line">
+            <a:avLst/>
+          </a:prstGeom>
+          <a:noFill/>
           <a:ln w="12700">
             <a:solidFill>
-              <a:srgbClr val="8C1D40"/>
+              <a:srgbClr val="E5E7EB"/>
             </a:solidFill>
             <a:prstDash val="solid"/>
           </a:ln>
         </p:spPr>
       </p:sp>
-      <p:pic>
-        <p:nvPicPr>
-          <p:cNvPr id="18" name="Image 4" descr="preencoded.png">    </p:cNvPr>
-          <p:cNvPicPr>
-            <a:picLocks noChangeAspect="1"/>
-          </p:cNvPicPr>
-          <p:nvPr/>
-        </p:nvPicPr>
-        <p:blipFill>
-          <a:blip r:embed="rId5"/>
-          <a:stretch>
-            <a:fillRect/>
-          </a:stretch>
-        </p:blipFill>
-        <p:spPr>
-          <a:xfrm>
-            <a:off x="555955" y="4186123"/>
-            <a:ext cx="168250" cy="168250"/>
-          </a:xfrm>
-          <a:prstGeom prst="rect">
-            <a:avLst/>
-          </a:prstGeom>
-        </p:spPr>
-      </p:pic>
-      <p:sp>
-        <p:nvSpPr>
-          <p:cNvPr id="19" name="Text 11"/>
-          <p:cNvSpPr txBox="1"/>
-          <p:nvPr/>
-        </p:nvSpPr>
-        <p:spPr>
-          <a:xfrm>
-            <a:off x="1005840" y="4151376"/>
-            <a:ext cx="4480560" cy="365760"/>
-          </a:xfrm>
-          <a:prstGeom prst="rect">
-            <a:avLst/>
-          </a:prstGeom>
-          <a:noFill/>
-          <a:ln/>
-        </p:spPr>
-        <p:txBody>
-          <a:bodyPr wrap="square" lIns="0" tIns="0" rIns="0" bIns="0" rtlCol="0" anchor="t"/>
+      <p:sp>
+        <p:nvSpPr>
+          <p:cNvPr id="24" name="Text 18"/>
+          <p:cNvSpPr txBox="1"/>
+          <p:nvPr/>
+        </p:nvSpPr>
+        <p:spPr>
+          <a:xfrm>
+            <a:off x="5852160" y="2743200"/>
+            <a:ext cx="960120" cy="457200"/>
+          </a:xfrm>
+          <a:prstGeom prst="rect">
+            <a:avLst/>
+          </a:prstGeom>
+          <a:noFill/>
+          <a:ln/>
+        </p:spPr>
+        <p:txBody>
+          <a:bodyPr wrap="square" lIns="0" tIns="0" rIns="0" bIns="0" rtlCol="0" anchor="ctr"/>
           <a:lstStyle/>
           <a:p>
             <a:pPr indent="0" marL="0">
               <a:buNone/>
             </a:pPr>
             <a:r>
-              <a:rPr lang="en-US" sz="1400" dirty="0">
-                <a:solidFill>
-                  <a:srgbClr val="1F2937"/>
+              <a:rPr lang="en-US" sz="1200" b="1" dirty="0">
+                <a:solidFill>
+                  <a:srgbClr val="8C1D40"/>
                 </a:solidFill>
                 <a:latin typeface="Calibri" pitchFamily="34" charset="0"/>
                 <a:ea typeface="Calibri" pitchFamily="34" charset="-122"/>
                 <a:cs typeface="Calibri" pitchFamily="34" charset="-120"/>
               </a:rPr>
-              <a:t>Informed consent before the procedure</a:t>
-            </a:r>
-            <a:endParaRPr lang="en-US" sz="1400" dirty="0"/>
-          </a:p>
-        </p:txBody>
-      </p:sp>
-      <p:sp>
-        <p:nvSpPr>
-          <p:cNvPr id="20" name="Shape 12"/>
+              <a:t>Sponsor</a:t>
+            </a:r>
+            <a:endParaRPr lang="en-US" sz="1200" dirty="0"/>
+          </a:p>
+        </p:txBody>
+      </p:sp>
+      <p:sp>
+        <p:nvSpPr>
+          <p:cNvPr id="25" name="Text 19"/>
+          <p:cNvSpPr txBox="1"/>
+          <p:nvPr/>
+        </p:nvSpPr>
+        <p:spPr>
+          <a:xfrm>
+            <a:off x="6812280" y="2743200"/>
+            <a:ext cx="1874520" cy="457200"/>
+          </a:xfrm>
+          <a:prstGeom prst="rect">
+            <a:avLst/>
+          </a:prstGeom>
+          <a:noFill/>
+          <a:ln/>
+        </p:spPr>
+        <p:txBody>
+          <a:bodyPr wrap="square" lIns="0" tIns="0" rIns="0" bIns="0" rtlCol="0" anchor="ctr"/>
+          <a:lstStyle/>
+          <a:p>
+            <a:pPr indent="0" marL="0">
+              <a:buNone/>
+            </a:pPr>
+            <a:r>
+              <a:rPr lang="en-US" sz="1200" dirty="0">
+                <a:solidFill>
+                  <a:srgbClr val="1F2937"/>
+                </a:solidFill>
+                <a:latin typeface="Calibri" pitchFamily="34" charset="0"/>
+                <a:ea typeface="Calibri" pitchFamily="34" charset="-122"/>
+                <a:cs typeface="Calibri" pitchFamily="34" charset="-120"/>
+              </a:rPr>
+              <a:t>Vesalio</a:t>
+            </a:r>
+            <a:endParaRPr lang="en-US" sz="1200" dirty="0"/>
+          </a:p>
+        </p:txBody>
+      </p:sp>
+      <p:sp>
+        <p:nvSpPr>
+          <p:cNvPr id="26" name="Shape 20"/>
           <p:cNvSpPr/>
           <p:nvPr/>
         </p:nvSpPr>
         <p:spPr>
           <a:xfrm>
-            <a:off x="5852160" y="1097280"/>
-            <a:ext cx="2834640" cy="3383280"/>
-          </a:xfrm>
-          <a:prstGeom prst="roundRect">
-            <a:avLst>
-              <a:gd name="adj" fmla="val 2581"/>
-            </a:avLst>
-          </a:prstGeom>
-          <a:solidFill>
-            <a:srgbClr val="F8F0F3"/>
-          </a:solidFill>
+            <a:off x="5852160" y="3246120"/>
+            <a:ext cx="2834640" cy="0"/>
+          </a:xfrm>
+          <a:prstGeom prst="line">
+            <a:avLst/>
+          </a:prstGeom>
+          <a:noFill/>
           <a:ln w="12700">
             <a:solidFill>
-              <a:srgbClr val="F8F0F3"/>
+              <a:srgbClr val="E5E7EB"/>
             </a:solidFill>
             <a:prstDash val="solid"/>
           </a:ln>
         </p:spPr>
       </p:sp>
-      <p:pic>
-        <p:nvPicPr>
-          <p:cNvPr id="21" name="Image 5" descr="preencoded.png">    </p:cNvPr>
-          <p:cNvPicPr>
-            <a:picLocks noChangeAspect="1"/>
-          </p:cNvPicPr>
-          <p:nvPr/>
-        </p:nvPicPr>
-        <p:blipFill>
-          <a:blip r:embed="rId6"/>
-          <a:stretch>
-            <a:fillRect/>
-          </a:stretch>
-        </p:blipFill>
-        <p:spPr>
-          <a:xfrm>
-            <a:off x="6080760" y="1298448"/>
-            <a:ext cx="347472" cy="347472"/>
-          </a:xfrm>
-          <a:prstGeom prst="rect">
-            <a:avLst/>
-          </a:prstGeom>
-        </p:spPr>
-      </p:pic>
-      <p:sp>
-        <p:nvSpPr>
-          <p:cNvPr id="22" name="Text 13"/>
-          <p:cNvSpPr txBox="1"/>
-          <p:nvPr/>
-        </p:nvSpPr>
-        <p:spPr>
-          <a:xfrm>
-            <a:off x="6537960" y="1298448"/>
-            <a:ext cx="2011680" cy="347472"/>
+      <p:sp>
+        <p:nvSpPr>
+          <p:cNvPr id="27" name="Text 21"/>
+          <p:cNvSpPr txBox="1"/>
+          <p:nvPr/>
+        </p:nvSpPr>
+        <p:spPr>
+          <a:xfrm>
+            <a:off x="5852160" y="3291840"/>
+            <a:ext cx="960120" cy="457200"/>
           </a:xfrm>
           <a:prstGeom prst="rect">
             <a:avLst/>
@@ -9859,95 +9892,56 @@
               <a:buNone/>
             </a:pPr>
             <a:r>
-              <a:rPr lang="en-US" sz="1500" b="1" dirty="0">
+              <a:rPr lang="en-US" sz="1200" b="1" dirty="0">
                 <a:solidFill>
                   <a:srgbClr val="8C1D40"/>
-                </a:solidFill>
-                <a:latin typeface="Cambria" pitchFamily="34" charset="0"/>
-                <a:ea typeface="Cambria" pitchFamily="34" charset="-122"/>
-                <a:cs typeface="Cambria" pitchFamily="34" charset="-120"/>
-              </a:rPr>
-              <a:t>Key point</a:t>
-            </a:r>
-            <a:endParaRPr lang="en-US" sz="1500" dirty="0"/>
-          </a:p>
-        </p:txBody>
-      </p:sp>
-      <p:sp>
-        <p:nvSpPr>
-          <p:cNvPr id="23" name="Text 14"/>
-          <p:cNvSpPr txBox="1"/>
-          <p:nvPr/>
-        </p:nvSpPr>
-        <p:spPr>
-          <a:xfrm>
-            <a:off x="6080760" y="1828800"/>
-            <a:ext cx="2468880" cy="365760"/>
-          </a:xfrm>
-          <a:prstGeom prst="rect">
-            <a:avLst/>
-          </a:prstGeom>
-          <a:noFill/>
-          <a:ln/>
-        </p:spPr>
-        <p:txBody>
-          <a:bodyPr wrap="square" lIns="0" tIns="0" rIns="0" bIns="0" rtlCol="0" anchor="ctr"/>
-          <a:lstStyle/>
-          <a:p>
-            <a:pPr indent="0" marL="0">
-              <a:buNone/>
-            </a:pPr>
-            <a:r>
-              <a:rPr lang="en-US" sz="1700" b="1" dirty="0">
-                <a:solidFill>
-                  <a:srgbClr val="1F2937"/>
-                </a:solidFill>
-                <a:latin typeface="Cambria" pitchFamily="34" charset="0"/>
-                <a:ea typeface="Cambria" pitchFamily="34" charset="-122"/>
-                <a:cs typeface="Cambria" pitchFamily="34" charset="-120"/>
-              </a:rPr>
-              <a:t>TIMI thrombus grade ≥ 3</a:t>
-            </a:r>
-            <a:endParaRPr lang="en-US" sz="1700" dirty="0"/>
-          </a:p>
-        </p:txBody>
-      </p:sp>
-      <p:sp>
-        <p:nvSpPr>
-          <p:cNvPr id="24" name="Text 15"/>
-          <p:cNvSpPr txBox="1"/>
-          <p:nvPr/>
-        </p:nvSpPr>
-        <p:spPr>
-          <a:xfrm>
-            <a:off x="6080760" y="2286000"/>
-            <a:ext cx="2423160" cy="2011680"/>
-          </a:xfrm>
-          <a:prstGeom prst="rect">
-            <a:avLst/>
-          </a:prstGeom>
-          <a:noFill/>
-          <a:ln/>
-        </p:spPr>
-        <p:txBody>
-          <a:bodyPr wrap="square" lIns="0" tIns="0" rIns="0" bIns="0" rtlCol="0" anchor="t"/>
-          <a:lstStyle/>
-          <a:p>
-            <a:pPr indent="0" marL="0">
-              <a:buNone/>
-            </a:pPr>
-            <a:r>
-              <a:rPr lang="en-US" sz="1300" dirty="0">
-                <a:solidFill>
-                  <a:srgbClr val="1F2937"/>
                 </a:solidFill>
                 <a:latin typeface="Calibri" pitchFamily="34" charset="0"/>
                 <a:ea typeface="Calibri" pitchFamily="34" charset="-122"/>
                 <a:cs typeface="Calibri" pitchFamily="34" charset="-120"/>
               </a:rPr>
-              <a:t>A definite clot longer than half the vessel diameter. These patients are the most likely to embolise clot during PCI, so they have the most to gain from thrombectomy.</a:t>
-            </a:r>
-            <a:endParaRPr lang="en-US" sz="1300" dirty="0"/>
+              <a:t>Registry</a:t>
+            </a:r>
+            <a:endParaRPr lang="en-US" sz="1200" dirty="0"/>
+          </a:p>
+        </p:txBody>
+      </p:sp>
+      <p:sp>
+        <p:nvSpPr>
+          <p:cNvPr id="28" name="Text 22"/>
+          <p:cNvSpPr txBox="1"/>
+          <p:nvPr/>
+        </p:nvSpPr>
+        <p:spPr>
+          <a:xfrm>
+            <a:off x="6812280" y="3291840"/>
+            <a:ext cx="1874520" cy="457200"/>
+          </a:xfrm>
+          <a:prstGeom prst="rect">
+            <a:avLst/>
+          </a:prstGeom>
+          <a:noFill/>
+          <a:ln/>
+        </p:spPr>
+        <p:txBody>
+          <a:bodyPr wrap="square" lIns="0" tIns="0" rIns="0" bIns="0" rtlCol="0" anchor="ctr"/>
+          <a:lstStyle/>
+          <a:p>
+            <a:pPr indent="0" marL="0">
+              <a:buNone/>
+            </a:pPr>
+            <a:r>
+              <a:rPr lang="en-US" sz="1200" dirty="0">
+                <a:solidFill>
+                  <a:srgbClr val="1F2937"/>
+                </a:solidFill>
+                <a:latin typeface="Calibri" pitchFamily="34" charset="0"/>
+                <a:ea typeface="Calibri" pitchFamily="34" charset="-122"/>
+                <a:cs typeface="Calibri" pitchFamily="34" charset="-120"/>
+              </a:rPr>
+              <a:t>NCT04969471</a:t>
+            </a:r>
+            <a:endParaRPr lang="en-US" sz="1200" dirty="0"/>
           </a:p>
         </p:txBody>
       </p:sp>
@@ -10016,7 +10010,7 @@
                 <a:ea typeface="Cambria" pitchFamily="34" charset="-122"/>
                 <a:cs typeface="Cambria" pitchFamily="34" charset="-120"/>
               </a:rPr>
-              <a:t>Exclusion criteria</a:t>
+              <a:t>Inclusion criteria</a:t>
             </a:r>
             <a:endParaRPr lang="en-US" sz="2800" dirty="0"/>
           </a:p>
@@ -10070,17 +10064,17 @@
         <p:spPr>
           <a:xfrm>
             <a:off x="457200" y="1097280"/>
-            <a:ext cx="347472" cy="347472"/>
+            <a:ext cx="365760" cy="365760"/>
           </a:xfrm>
           <a:prstGeom prst="ellipse">
             <a:avLst/>
           </a:prstGeom>
           <a:solidFill>
-            <a:srgbClr val="A3AAB6"/>
+            <a:srgbClr val="8C1D40"/>
           </a:solidFill>
           <a:ln w="12700">
             <a:solidFill>
-              <a:srgbClr val="A3AAB6"/>
+              <a:srgbClr val="8C1D40"/>
             </a:solidFill>
             <a:prstDash val="solid"/>
           </a:ln>
@@ -10102,8 +10096,8 @@
         </p:blipFill>
         <p:spPr>
           <a:xfrm>
-            <a:off x="551017" y="1191097"/>
-            <a:ext cx="159837" cy="159837"/>
+            <a:off x="555955" y="1196035"/>
+            <a:ext cx="168250" cy="168250"/>
           </a:xfrm>
           <a:prstGeom prst="rect">
             <a:avLst/>
@@ -10118,7 +10112,7 @@
         </p:nvSpPr>
         <p:spPr>
           <a:xfrm>
-            <a:off x="1005840" y="1152144"/>
+            <a:off x="1005840" y="1161288"/>
             <a:ext cx="4480560" cy="365760"/>
           </a:xfrm>
           <a:prstGeom prst="rect">
@@ -10143,7 +10137,7 @@
                 <a:ea typeface="Calibri" pitchFamily="34" charset="-122"/>
                 <a:cs typeface="Calibri" pitchFamily="34" charset="-120"/>
               </a:rPr>
-              <a:t>Unconscious patient</a:t>
+              <a:t>Age ≥ 18 years</a:t>
             </a:r>
             <a:endParaRPr lang="en-US" sz="1400" dirty="0"/>
           </a:p>
@@ -10157,18 +10151,18 @@
         </p:nvSpPr>
         <p:spPr>
           <a:xfrm>
-            <a:off x="457200" y="1554480"/>
-            <a:ext cx="347472" cy="347472"/>
+            <a:off x="457200" y="1737360"/>
+            <a:ext cx="365760" cy="365760"/>
           </a:xfrm>
           <a:prstGeom prst="ellipse">
             <a:avLst/>
           </a:prstGeom>
           <a:solidFill>
-            <a:srgbClr val="A3AAB6"/>
+            <a:srgbClr val="8C1D40"/>
           </a:solidFill>
           <a:ln w="12700">
             <a:solidFill>
-              <a:srgbClr val="A3AAB6"/>
+              <a:srgbClr val="8C1D40"/>
             </a:solidFill>
             <a:prstDash val="solid"/>
           </a:ln>
@@ -10190,8 +10184,8 @@
         </p:blipFill>
         <p:spPr>
           <a:xfrm>
-            <a:off x="551017" y="1648297"/>
-            <a:ext cx="159837" cy="159837"/>
+            <a:off x="555955" y="1836115"/>
+            <a:ext cx="168250" cy="168250"/>
           </a:xfrm>
           <a:prstGeom prst="rect">
             <a:avLst/>
@@ -10206,8 +10200,8 @@
         </p:nvSpPr>
         <p:spPr>
           <a:xfrm>
-            <a:off x="1005840" y="1609344"/>
-            <a:ext cx="4480560" cy="365760"/>
+            <a:off x="1005840" y="1801368"/>
+            <a:ext cx="4480560" cy="685800"/>
           </a:xfrm>
           <a:prstGeom prst="rect">
             <a:avLst/>
@@ -10231,7 +10225,7 @@
                 <a:ea typeface="Calibri" pitchFamily="34" charset="-122"/>
                 <a:cs typeface="Calibri" pitchFamily="34" charset="-120"/>
               </a:rPr>
-              <a:t>Infarct-related artery &lt; 2.5 mm (visual estimate)</a:t>
+              <a:t>Chest pain &gt; 20 min with ST elevation ≥ 1 mm in ≥ 2 contiguous leads, or infero-lateral MI with ST depression ≥ 1 mm in ≥ 2 of V1–V3 and a positive terminal T wave</a:t>
             </a:r>
             <a:endParaRPr lang="en-US" sz="1400" dirty="0"/>
           </a:p>
@@ -10245,18 +10239,18 @@
         </p:nvSpPr>
         <p:spPr>
           <a:xfrm>
-            <a:off x="457200" y="2011680"/>
-            <a:ext cx="347472" cy="347472"/>
+            <a:off x="457200" y="2697480"/>
+            <a:ext cx="365760" cy="365760"/>
           </a:xfrm>
           <a:prstGeom prst="ellipse">
             <a:avLst/>
           </a:prstGeom>
           <a:solidFill>
-            <a:srgbClr val="A3AAB6"/>
+            <a:srgbClr val="8C1D40"/>
           </a:solidFill>
           <a:ln w="12700">
             <a:solidFill>
-              <a:srgbClr val="A3AAB6"/>
+              <a:srgbClr val="8C1D40"/>
             </a:solidFill>
             <a:prstDash val="solid"/>
           </a:ln>
@@ -10278,8 +10272,8 @@
         </p:blipFill>
         <p:spPr>
           <a:xfrm>
-            <a:off x="551017" y="2105497"/>
-            <a:ext cx="159837" cy="159837"/>
+            <a:off x="555955" y="2796235"/>
+            <a:ext cx="168250" cy="168250"/>
           </a:xfrm>
           <a:prstGeom prst="rect">
             <a:avLst/>
@@ -10294,8 +10288,8 @@
         </p:nvSpPr>
         <p:spPr>
           <a:xfrm>
-            <a:off x="1005840" y="2066544"/>
-            <a:ext cx="4480560" cy="566928"/>
+            <a:off x="1005840" y="2761488"/>
+            <a:ext cx="4480560" cy="475488"/>
           </a:xfrm>
           <a:prstGeom prst="rect">
             <a:avLst/>
@@ -10319,7 +10313,7 @@
                 <a:ea typeface="Calibri" pitchFamily="34" charset="-122"/>
                 <a:cs typeface="Calibri" pitchFamily="34" charset="-120"/>
               </a:rPr>
-              <a:t>Severe calcification or extreme tortuosity at or proximal to the culprit lesion</a:t>
+              <a:t>TIMI thrombus grade ≥ 3 in the infarct-related artery (re-confirmed after wiring if TIMI 0 flow)</a:t>
             </a:r>
             <a:endParaRPr lang="en-US" sz="1400" dirty="0"/>
           </a:p>
@@ -10333,18 +10327,18 @@
         </p:nvSpPr>
         <p:spPr>
           <a:xfrm>
-            <a:off x="457200" y="2670048"/>
-            <a:ext cx="347472" cy="347472"/>
+            <a:off x="457200" y="3447288"/>
+            <a:ext cx="365760" cy="365760"/>
           </a:xfrm>
           <a:prstGeom prst="ellipse">
             <a:avLst/>
           </a:prstGeom>
           <a:solidFill>
-            <a:srgbClr val="A3AAB6"/>
+            <a:srgbClr val="8C1D40"/>
           </a:solidFill>
           <a:ln w="12700">
             <a:solidFill>
-              <a:srgbClr val="A3AAB6"/>
+              <a:srgbClr val="8C1D40"/>
             </a:solidFill>
             <a:prstDash val="solid"/>
           </a:ln>
@@ -10366,8 +10360,8 @@
         </p:blipFill>
         <p:spPr>
           <a:xfrm>
-            <a:off x="551017" y="2763865"/>
-            <a:ext cx="159837" cy="159837"/>
+            <a:off x="555955" y="3546043"/>
+            <a:ext cx="168250" cy="168250"/>
           </a:xfrm>
           <a:prstGeom prst="rect">
             <a:avLst/>
@@ -10382,7 +10376,7 @@
         </p:nvSpPr>
         <p:spPr>
           <a:xfrm>
-            <a:off x="1005840" y="2724912"/>
+            <a:off x="1005840" y="3511296"/>
             <a:ext cx="4480560" cy="365760"/>
           </a:xfrm>
           <a:prstGeom prst="rect">
@@ -10407,7 +10401,7 @@
                 <a:ea typeface="Calibri" pitchFamily="34" charset="-122"/>
                 <a:cs typeface="Calibri" pitchFamily="34" charset="-120"/>
               </a:rPr>
-              <a:t>Stent thrombosis as the culprit lesion</a:t>
+              <a:t>Intervention started within 8 hours of symptom onset</a:t>
             </a:r>
             <a:endParaRPr lang="en-US" sz="1400" dirty="0"/>
           </a:p>
@@ -10421,18 +10415,18 @@
         </p:nvSpPr>
         <p:spPr>
           <a:xfrm>
-            <a:off x="457200" y="3127248"/>
-            <a:ext cx="347472" cy="347472"/>
+            <a:off x="457200" y="4087368"/>
+            <a:ext cx="365760" cy="365760"/>
           </a:xfrm>
           <a:prstGeom prst="ellipse">
             <a:avLst/>
           </a:prstGeom>
           <a:solidFill>
-            <a:srgbClr val="A3AAB6"/>
+            <a:srgbClr val="8C1D40"/>
           </a:solidFill>
           <a:ln w="12700">
             <a:solidFill>
-              <a:srgbClr val="A3AAB6"/>
+              <a:srgbClr val="8C1D40"/>
             </a:solidFill>
             <a:prstDash val="solid"/>
           </a:ln>
@@ -10454,8 +10448,8 @@
         </p:blipFill>
         <p:spPr>
           <a:xfrm>
-            <a:off x="551017" y="3221065"/>
-            <a:ext cx="159837" cy="159837"/>
+            <a:off x="555955" y="4186123"/>
+            <a:ext cx="168250" cy="168250"/>
           </a:xfrm>
           <a:prstGeom prst="rect">
             <a:avLst/>
@@ -10470,7 +10464,7 @@
         </p:nvSpPr>
         <p:spPr>
           <a:xfrm>
-            <a:off x="1005840" y="3182112"/>
+            <a:off x="1005840" y="4151376"/>
             <a:ext cx="4480560" cy="365760"/>
           </a:xfrm>
           <a:prstGeom prst="rect">
@@ -10495,7 +10489,7 @@
                 <a:ea typeface="Calibri" pitchFamily="34" charset="-122"/>
                 <a:cs typeface="Calibri" pitchFamily="34" charset="-120"/>
               </a:rPr>
-              <a:t>Previous MI in the same territory</a:t>
+              <a:t>Informed consent before the procedure</a:t>
             </a:r>
             <a:endParaRPr lang="en-US" sz="1400" dirty="0"/>
           </a:p>
@@ -10504,182 +10498,6 @@
       <p:sp>
         <p:nvSpPr>
           <p:cNvPr id="20" name="Shape 12"/>
-          <p:cNvSpPr/>
-          <p:nvPr/>
-        </p:nvSpPr>
-        <p:spPr>
-          <a:xfrm>
-            <a:off x="457200" y="3584448"/>
-            <a:ext cx="347472" cy="347472"/>
-          </a:xfrm>
-          <a:prstGeom prst="ellipse">
-            <a:avLst/>
-          </a:prstGeom>
-          <a:solidFill>
-            <a:srgbClr val="A3AAB6"/>
-          </a:solidFill>
-          <a:ln w="12700">
-            <a:solidFill>
-              <a:srgbClr val="A3AAB6"/>
-            </a:solidFill>
-            <a:prstDash val="solid"/>
-          </a:ln>
-        </p:spPr>
-      </p:sp>
-      <p:pic>
-        <p:nvPicPr>
-          <p:cNvPr id="21" name="Image 5" descr="preencoded.png">    </p:cNvPr>
-          <p:cNvPicPr>
-            <a:picLocks noChangeAspect="1"/>
-          </p:cNvPicPr>
-          <p:nvPr/>
-        </p:nvPicPr>
-        <p:blipFill>
-          <a:blip r:embed="rId6"/>
-          <a:stretch>
-            <a:fillRect/>
-          </a:stretch>
-        </p:blipFill>
-        <p:spPr>
-          <a:xfrm>
-            <a:off x="551017" y="3678265"/>
-            <a:ext cx="159837" cy="159837"/>
-          </a:xfrm>
-          <a:prstGeom prst="rect">
-            <a:avLst/>
-          </a:prstGeom>
-        </p:spPr>
-      </p:pic>
-      <p:sp>
-        <p:nvSpPr>
-          <p:cNvPr id="22" name="Text 13"/>
-          <p:cNvSpPr txBox="1"/>
-          <p:nvPr/>
-        </p:nvSpPr>
-        <p:spPr>
-          <a:xfrm>
-            <a:off x="1005840" y="3639312"/>
-            <a:ext cx="4480560" cy="365760"/>
-          </a:xfrm>
-          <a:prstGeom prst="rect">
-            <a:avLst/>
-          </a:prstGeom>
-          <a:noFill/>
-          <a:ln/>
-        </p:spPr>
-        <p:txBody>
-          <a:bodyPr wrap="square" lIns="0" tIns="0" rIns="0" bIns="0" rtlCol="0" anchor="t"/>
-          <a:lstStyle/>
-          <a:p>
-            <a:pPr indent="0" marL="0">
-              <a:buNone/>
-            </a:pPr>
-            <a:r>
-              <a:rPr lang="en-US" sz="1400" dirty="0">
-                <a:solidFill>
-                  <a:srgbClr val="1F2937"/>
-                </a:solidFill>
-                <a:latin typeface="Calibri" pitchFamily="34" charset="0"/>
-                <a:ea typeface="Calibri" pitchFamily="34" charset="-122"/>
-                <a:cs typeface="Calibri" pitchFamily="34" charset="-120"/>
-              </a:rPr>
-              <a:t>Women of child-bearing potential</a:t>
-            </a:r>
-            <a:endParaRPr lang="en-US" sz="1400" dirty="0"/>
-          </a:p>
-        </p:txBody>
-      </p:sp>
-      <p:sp>
-        <p:nvSpPr>
-          <p:cNvPr id="23" name="Shape 14"/>
-          <p:cNvSpPr/>
-          <p:nvPr/>
-        </p:nvSpPr>
-        <p:spPr>
-          <a:xfrm>
-            <a:off x="457200" y="4041648"/>
-            <a:ext cx="347472" cy="347472"/>
-          </a:xfrm>
-          <a:prstGeom prst="ellipse">
-            <a:avLst/>
-          </a:prstGeom>
-          <a:solidFill>
-            <a:srgbClr val="A3AAB6"/>
-          </a:solidFill>
-          <a:ln w="12700">
-            <a:solidFill>
-              <a:srgbClr val="A3AAB6"/>
-            </a:solidFill>
-            <a:prstDash val="solid"/>
-          </a:ln>
-        </p:spPr>
-      </p:sp>
-      <p:pic>
-        <p:nvPicPr>
-          <p:cNvPr id="24" name="Image 6" descr="preencoded.png">    </p:cNvPr>
-          <p:cNvPicPr>
-            <a:picLocks noChangeAspect="1"/>
-          </p:cNvPicPr>
-          <p:nvPr/>
-        </p:nvPicPr>
-        <p:blipFill>
-          <a:blip r:embed="rId7"/>
-          <a:stretch>
-            <a:fillRect/>
-          </a:stretch>
-        </p:blipFill>
-        <p:spPr>
-          <a:xfrm>
-            <a:off x="551017" y="4135465"/>
-            <a:ext cx="159837" cy="159837"/>
-          </a:xfrm>
-          <a:prstGeom prst="rect">
-            <a:avLst/>
-          </a:prstGeom>
-        </p:spPr>
-      </p:pic>
-      <p:sp>
-        <p:nvSpPr>
-          <p:cNvPr id="25" name="Text 15"/>
-          <p:cNvSpPr txBox="1"/>
-          <p:nvPr/>
-        </p:nvSpPr>
-        <p:spPr>
-          <a:xfrm>
-            <a:off x="1005840" y="4096512"/>
-            <a:ext cx="4480560" cy="365760"/>
-          </a:xfrm>
-          <a:prstGeom prst="rect">
-            <a:avLst/>
-          </a:prstGeom>
-          <a:noFill/>
-          <a:ln/>
-        </p:spPr>
-        <p:txBody>
-          <a:bodyPr wrap="square" lIns="0" tIns="0" rIns="0" bIns="0" rtlCol="0" anchor="t"/>
-          <a:lstStyle/>
-          <a:p>
-            <a:pPr indent="0" marL="0">
-              <a:buNone/>
-            </a:pPr>
-            <a:r>
-              <a:rPr lang="en-US" sz="1400" dirty="0">
-                <a:solidFill>
-                  <a:srgbClr val="1F2937"/>
-                </a:solidFill>
-                <a:latin typeface="Calibri" pitchFamily="34" charset="0"/>
-                <a:ea typeface="Calibri" pitchFamily="34" charset="-122"/>
-                <a:cs typeface="Calibri" pitchFamily="34" charset="-120"/>
-              </a:rPr>
-              <a:t>Participation in another interventional trial</a:t>
-            </a:r>
-            <a:endParaRPr lang="en-US" sz="1400" dirty="0"/>
-          </a:p>
-        </p:txBody>
-      </p:sp>
-      <p:sp>
-        <p:nvSpPr>
-          <p:cNvPr id="26" name="Shape 16"/>
           <p:cNvSpPr/>
           <p:nvPr/>
         </p:nvSpPr>
@@ -10706,14 +10524,14 @@
       </p:sp>
       <p:pic>
         <p:nvPicPr>
-          <p:cNvPr id="27" name="Image 7" descr="preencoded.png">    </p:cNvPr>
+          <p:cNvPr id="21" name="Image 5" descr="preencoded.png">    </p:cNvPr>
           <p:cNvPicPr>
             <a:picLocks noChangeAspect="1"/>
           </p:cNvPicPr>
           <p:nvPr/>
         </p:nvPicPr>
         <p:blipFill>
-          <a:blip r:embed="rId8"/>
+          <a:blip r:embed="rId6"/>
           <a:stretch>
             <a:fillRect/>
           </a:stretch>
@@ -10730,14 +10548,14 @@
       </p:pic>
       <p:sp>
         <p:nvSpPr>
-          <p:cNvPr id="28" name="Text 17"/>
+          <p:cNvPr id="22" name="Text 13"/>
           <p:cNvSpPr txBox="1"/>
           <p:nvPr/>
         </p:nvSpPr>
         <p:spPr>
           <a:xfrm>
             <a:off x="6537960" y="1298448"/>
-            <a:ext cx="2103120" cy="347472"/>
+            <a:ext cx="2011680" cy="347472"/>
           </a:xfrm>
           <a:prstGeom prst="rect">
             <a:avLst/>
@@ -10761,7 +10579,7 @@
                 <a:ea typeface="Cambria" pitchFamily="34" charset="-122"/>
                 <a:cs typeface="Cambria" pitchFamily="34" charset="-120"/>
               </a:rPr>
-              <a:t>Why these exclusions?</a:t>
+              <a:t>Key point</a:t>
             </a:r>
             <a:endParaRPr lang="en-US" sz="1500" dirty="0"/>
           </a:p>
@@ -10769,14 +10587,53 @@
       </p:sp>
       <p:sp>
         <p:nvSpPr>
-          <p:cNvPr id="29" name="Text 18"/>
+          <p:cNvPr id="23" name="Text 14"/>
           <p:cNvSpPr txBox="1"/>
           <p:nvPr/>
         </p:nvSpPr>
         <p:spPr>
           <a:xfrm>
             <a:off x="6080760" y="1828800"/>
-            <a:ext cx="2423160" cy="2468880"/>
+            <a:ext cx="2468880" cy="365760"/>
+          </a:xfrm>
+          <a:prstGeom prst="rect">
+            <a:avLst/>
+          </a:prstGeom>
+          <a:noFill/>
+          <a:ln/>
+        </p:spPr>
+        <p:txBody>
+          <a:bodyPr wrap="square" lIns="0" tIns="0" rIns="0" bIns="0" rtlCol="0" anchor="ctr"/>
+          <a:lstStyle/>
+          <a:p>
+            <a:pPr indent="0" marL="0">
+              <a:buNone/>
+            </a:pPr>
+            <a:r>
+              <a:rPr lang="en-US" sz="1700" b="1" dirty="0">
+                <a:solidFill>
+                  <a:srgbClr val="1F2937"/>
+                </a:solidFill>
+                <a:latin typeface="Cambria" pitchFamily="34" charset="0"/>
+                <a:ea typeface="Cambria" pitchFamily="34" charset="-122"/>
+                <a:cs typeface="Cambria" pitchFamily="34" charset="-120"/>
+              </a:rPr>
+              <a:t>TIMI thrombus grade ≥ 3</a:t>
+            </a:r>
+            <a:endParaRPr lang="en-US" sz="1700" dirty="0"/>
+          </a:p>
+        </p:txBody>
+      </p:sp>
+      <p:sp>
+        <p:nvSpPr>
+          <p:cNvPr id="24" name="Text 15"/>
+          <p:cNvSpPr txBox="1"/>
+          <p:nvPr/>
+        </p:nvSpPr>
+        <p:spPr>
+          <a:xfrm>
+            <a:off x="6080760" y="2286000"/>
+            <a:ext cx="2423160" cy="2011680"/>
           </a:xfrm>
           <a:prstGeom prst="rect">
             <a:avLst/>
@@ -10788,12 +10645,8 @@
           <a:bodyPr wrap="square" lIns="0" tIns="0" rIns="0" bIns="0" rtlCol="0" anchor="t"/>
           <a:lstStyle/>
           <a:p>
-            <a:pPr marL="342900" indent="-342900">
-              <a:spcAft>
-                <a:spcPts val="800"/>
-              </a:spcAft>
-              <a:buSzPct val="100000"/>
-              <a:buChar char="•"/>
+            <a:pPr indent="0" marL="0">
+              <a:buNone/>
             </a:pPr>
             <a:r>
               <a:rPr lang="en-US" sz="1300" dirty="0">
@@ -10804,28 +10657,7 @@
                 <a:ea typeface="Calibri" pitchFamily="34" charset="-122"/>
                 <a:cs typeface="Calibri" pitchFamily="34" charset="-120"/>
               </a:rPr>
-              <a:t>Small, calcified or tortuous vessels: hard to deliver a retriever safely</a:t>
-            </a:r>
-            <a:endParaRPr lang="en-US" sz="1300" dirty="0"/>
-          </a:p>
-          <a:p>
-            <a:pPr marL="342900" indent="-342900">
-              <a:spcAft>
-                <a:spcPts val="800"/>
-              </a:spcAft>
-              <a:buSzPct val="100000"/>
-              <a:buChar char="•"/>
-            </a:pPr>
-            <a:r>
-              <a:rPr lang="en-US" sz="1300" dirty="0">
-                <a:solidFill>
-                  <a:srgbClr val="1F2937"/>
-                </a:solidFill>
-                <a:latin typeface="Calibri" pitchFamily="34" charset="0"/>
-                <a:ea typeface="Calibri" pitchFamily="34" charset="-122"/>
-                <a:cs typeface="Calibri" pitchFamily="34" charset="-120"/>
-              </a:rPr>
-              <a:t>Stent thrombosis and prior MI in the same territory would confound infarct size</a:t>
+              <a:t>A definite clot longer than half the vessel diameter. These patients are the most likely to embolise clot during PCI, so they have the most to gain from thrombectomy.</a:t>
             </a:r>
             <a:endParaRPr lang="en-US" sz="1300" dirty="0"/>
           </a:p>
@@ -10896,7 +10728,7 @@
                 <a:ea typeface="Cambria" pitchFamily="34" charset="-122"/>
                 <a:cs typeface="Cambria" pitchFamily="34" charset="-120"/>
               </a:rPr>
-              <a:t>Endpoints</a:t>
+              <a:t>Exclusion criteria</a:t>
             </a:r>
             <a:endParaRPr lang="en-US" sz="2800" dirty="0"/>
           </a:p>
@@ -10949,12 +10781,628 @@
         </p:nvSpPr>
         <p:spPr>
           <a:xfrm>
-            <a:off x="457200" y="1188720"/>
-            <a:ext cx="2606040" cy="2514600"/>
+            <a:off x="457200" y="1097280"/>
+            <a:ext cx="347472" cy="347472"/>
+          </a:xfrm>
+          <a:prstGeom prst="ellipse">
+            <a:avLst/>
+          </a:prstGeom>
+          <a:solidFill>
+            <a:srgbClr val="A3AAB6"/>
+          </a:solidFill>
+          <a:ln w="12700">
+            <a:solidFill>
+              <a:srgbClr val="A3AAB6"/>
+            </a:solidFill>
+            <a:prstDash val="solid"/>
+          </a:ln>
+        </p:spPr>
+      </p:sp>
+      <p:pic>
+        <p:nvPicPr>
+          <p:cNvPr id="6" name="Image 0" descr="preencoded.png">    </p:cNvPr>
+          <p:cNvPicPr>
+            <a:picLocks noChangeAspect="1"/>
+          </p:cNvPicPr>
+          <p:nvPr/>
+        </p:nvPicPr>
+        <p:blipFill>
+          <a:blip r:embed="rId1"/>
+          <a:stretch>
+            <a:fillRect/>
+          </a:stretch>
+        </p:blipFill>
+        <p:spPr>
+          <a:xfrm>
+            <a:off x="551017" y="1191097"/>
+            <a:ext cx="159837" cy="159837"/>
+          </a:xfrm>
+          <a:prstGeom prst="rect">
+            <a:avLst/>
+          </a:prstGeom>
+        </p:spPr>
+      </p:pic>
+      <p:sp>
+        <p:nvSpPr>
+          <p:cNvPr id="7" name="Text 3"/>
+          <p:cNvSpPr txBox="1"/>
+          <p:nvPr/>
+        </p:nvSpPr>
+        <p:spPr>
+          <a:xfrm>
+            <a:off x="1005840" y="1152144"/>
+            <a:ext cx="4480560" cy="365760"/>
+          </a:xfrm>
+          <a:prstGeom prst="rect">
+            <a:avLst/>
+          </a:prstGeom>
+          <a:noFill/>
+          <a:ln/>
+        </p:spPr>
+        <p:txBody>
+          <a:bodyPr wrap="square" lIns="0" tIns="0" rIns="0" bIns="0" rtlCol="0" anchor="t"/>
+          <a:lstStyle/>
+          <a:p>
+            <a:pPr indent="0" marL="0">
+              <a:buNone/>
+            </a:pPr>
+            <a:r>
+              <a:rPr lang="en-US" sz="1400" dirty="0">
+                <a:solidFill>
+                  <a:srgbClr val="1F2937"/>
+                </a:solidFill>
+                <a:latin typeface="Calibri" pitchFamily="34" charset="0"/>
+                <a:ea typeface="Calibri" pitchFamily="34" charset="-122"/>
+                <a:cs typeface="Calibri" pitchFamily="34" charset="-120"/>
+              </a:rPr>
+              <a:t>Unconscious patient</a:t>
+            </a:r>
+            <a:endParaRPr lang="en-US" sz="1400" dirty="0"/>
+          </a:p>
+        </p:txBody>
+      </p:sp>
+      <p:sp>
+        <p:nvSpPr>
+          <p:cNvPr id="8" name="Shape 4"/>
+          <p:cNvSpPr/>
+          <p:nvPr/>
+        </p:nvSpPr>
+        <p:spPr>
+          <a:xfrm>
+            <a:off x="457200" y="1554480"/>
+            <a:ext cx="347472" cy="347472"/>
+          </a:xfrm>
+          <a:prstGeom prst="ellipse">
+            <a:avLst/>
+          </a:prstGeom>
+          <a:solidFill>
+            <a:srgbClr val="A3AAB6"/>
+          </a:solidFill>
+          <a:ln w="12700">
+            <a:solidFill>
+              <a:srgbClr val="A3AAB6"/>
+            </a:solidFill>
+            <a:prstDash val="solid"/>
+          </a:ln>
+        </p:spPr>
+      </p:sp>
+      <p:pic>
+        <p:nvPicPr>
+          <p:cNvPr id="9" name="Image 1" descr="preencoded.png">    </p:cNvPr>
+          <p:cNvPicPr>
+            <a:picLocks noChangeAspect="1"/>
+          </p:cNvPicPr>
+          <p:nvPr/>
+        </p:nvPicPr>
+        <p:blipFill>
+          <a:blip r:embed="rId2"/>
+          <a:stretch>
+            <a:fillRect/>
+          </a:stretch>
+        </p:blipFill>
+        <p:spPr>
+          <a:xfrm>
+            <a:off x="551017" y="1648297"/>
+            <a:ext cx="159837" cy="159837"/>
+          </a:xfrm>
+          <a:prstGeom prst="rect">
+            <a:avLst/>
+          </a:prstGeom>
+        </p:spPr>
+      </p:pic>
+      <p:sp>
+        <p:nvSpPr>
+          <p:cNvPr id="10" name="Text 5"/>
+          <p:cNvSpPr txBox="1"/>
+          <p:nvPr/>
+        </p:nvSpPr>
+        <p:spPr>
+          <a:xfrm>
+            <a:off x="1005840" y="1609344"/>
+            <a:ext cx="4480560" cy="365760"/>
+          </a:xfrm>
+          <a:prstGeom prst="rect">
+            <a:avLst/>
+          </a:prstGeom>
+          <a:noFill/>
+          <a:ln/>
+        </p:spPr>
+        <p:txBody>
+          <a:bodyPr wrap="square" lIns="0" tIns="0" rIns="0" bIns="0" rtlCol="0" anchor="t"/>
+          <a:lstStyle/>
+          <a:p>
+            <a:pPr indent="0" marL="0">
+              <a:buNone/>
+            </a:pPr>
+            <a:r>
+              <a:rPr lang="en-US" sz="1400" dirty="0">
+                <a:solidFill>
+                  <a:srgbClr val="1F2937"/>
+                </a:solidFill>
+                <a:latin typeface="Calibri" pitchFamily="34" charset="0"/>
+                <a:ea typeface="Calibri" pitchFamily="34" charset="-122"/>
+                <a:cs typeface="Calibri" pitchFamily="34" charset="-120"/>
+              </a:rPr>
+              <a:t>Infarct-related artery &lt; 2.5 mm (visual estimate)</a:t>
+            </a:r>
+            <a:endParaRPr lang="en-US" sz="1400" dirty="0"/>
+          </a:p>
+        </p:txBody>
+      </p:sp>
+      <p:sp>
+        <p:nvSpPr>
+          <p:cNvPr id="11" name="Shape 6"/>
+          <p:cNvSpPr/>
+          <p:nvPr/>
+        </p:nvSpPr>
+        <p:spPr>
+          <a:xfrm>
+            <a:off x="457200" y="2011680"/>
+            <a:ext cx="347472" cy="347472"/>
+          </a:xfrm>
+          <a:prstGeom prst="ellipse">
+            <a:avLst/>
+          </a:prstGeom>
+          <a:solidFill>
+            <a:srgbClr val="A3AAB6"/>
+          </a:solidFill>
+          <a:ln w="12700">
+            <a:solidFill>
+              <a:srgbClr val="A3AAB6"/>
+            </a:solidFill>
+            <a:prstDash val="solid"/>
+          </a:ln>
+        </p:spPr>
+      </p:sp>
+      <p:pic>
+        <p:nvPicPr>
+          <p:cNvPr id="12" name="Image 2" descr="preencoded.png">    </p:cNvPr>
+          <p:cNvPicPr>
+            <a:picLocks noChangeAspect="1"/>
+          </p:cNvPicPr>
+          <p:nvPr/>
+        </p:nvPicPr>
+        <p:blipFill>
+          <a:blip r:embed="rId3"/>
+          <a:stretch>
+            <a:fillRect/>
+          </a:stretch>
+        </p:blipFill>
+        <p:spPr>
+          <a:xfrm>
+            <a:off x="551017" y="2105497"/>
+            <a:ext cx="159837" cy="159837"/>
+          </a:xfrm>
+          <a:prstGeom prst="rect">
+            <a:avLst/>
+          </a:prstGeom>
+        </p:spPr>
+      </p:pic>
+      <p:sp>
+        <p:nvSpPr>
+          <p:cNvPr id="13" name="Text 7"/>
+          <p:cNvSpPr txBox="1"/>
+          <p:nvPr/>
+        </p:nvSpPr>
+        <p:spPr>
+          <a:xfrm>
+            <a:off x="1005840" y="2066544"/>
+            <a:ext cx="4480560" cy="566928"/>
+          </a:xfrm>
+          <a:prstGeom prst="rect">
+            <a:avLst/>
+          </a:prstGeom>
+          <a:noFill/>
+          <a:ln/>
+        </p:spPr>
+        <p:txBody>
+          <a:bodyPr wrap="square" lIns="0" tIns="0" rIns="0" bIns="0" rtlCol="0" anchor="t"/>
+          <a:lstStyle/>
+          <a:p>
+            <a:pPr indent="0" marL="0">
+              <a:buNone/>
+            </a:pPr>
+            <a:r>
+              <a:rPr lang="en-US" sz="1400" dirty="0">
+                <a:solidFill>
+                  <a:srgbClr val="1F2937"/>
+                </a:solidFill>
+                <a:latin typeface="Calibri" pitchFamily="34" charset="0"/>
+                <a:ea typeface="Calibri" pitchFamily="34" charset="-122"/>
+                <a:cs typeface="Calibri" pitchFamily="34" charset="-120"/>
+              </a:rPr>
+              <a:t>Severe calcification or extreme tortuosity at or proximal to the culprit lesion</a:t>
+            </a:r>
+            <a:endParaRPr lang="en-US" sz="1400" dirty="0"/>
+          </a:p>
+        </p:txBody>
+      </p:sp>
+      <p:sp>
+        <p:nvSpPr>
+          <p:cNvPr id="14" name="Shape 8"/>
+          <p:cNvSpPr/>
+          <p:nvPr/>
+        </p:nvSpPr>
+        <p:spPr>
+          <a:xfrm>
+            <a:off x="457200" y="2670048"/>
+            <a:ext cx="347472" cy="347472"/>
+          </a:xfrm>
+          <a:prstGeom prst="ellipse">
+            <a:avLst/>
+          </a:prstGeom>
+          <a:solidFill>
+            <a:srgbClr val="A3AAB6"/>
+          </a:solidFill>
+          <a:ln w="12700">
+            <a:solidFill>
+              <a:srgbClr val="A3AAB6"/>
+            </a:solidFill>
+            <a:prstDash val="solid"/>
+          </a:ln>
+        </p:spPr>
+      </p:sp>
+      <p:pic>
+        <p:nvPicPr>
+          <p:cNvPr id="15" name="Image 3" descr="preencoded.png">    </p:cNvPr>
+          <p:cNvPicPr>
+            <a:picLocks noChangeAspect="1"/>
+          </p:cNvPicPr>
+          <p:nvPr/>
+        </p:nvPicPr>
+        <p:blipFill>
+          <a:blip r:embed="rId4"/>
+          <a:stretch>
+            <a:fillRect/>
+          </a:stretch>
+        </p:blipFill>
+        <p:spPr>
+          <a:xfrm>
+            <a:off x="551017" y="2763865"/>
+            <a:ext cx="159837" cy="159837"/>
+          </a:xfrm>
+          <a:prstGeom prst="rect">
+            <a:avLst/>
+          </a:prstGeom>
+        </p:spPr>
+      </p:pic>
+      <p:sp>
+        <p:nvSpPr>
+          <p:cNvPr id="16" name="Text 9"/>
+          <p:cNvSpPr txBox="1"/>
+          <p:nvPr/>
+        </p:nvSpPr>
+        <p:spPr>
+          <a:xfrm>
+            <a:off x="1005840" y="2724912"/>
+            <a:ext cx="4480560" cy="365760"/>
+          </a:xfrm>
+          <a:prstGeom prst="rect">
+            <a:avLst/>
+          </a:prstGeom>
+          <a:noFill/>
+          <a:ln/>
+        </p:spPr>
+        <p:txBody>
+          <a:bodyPr wrap="square" lIns="0" tIns="0" rIns="0" bIns="0" rtlCol="0" anchor="t"/>
+          <a:lstStyle/>
+          <a:p>
+            <a:pPr indent="0" marL="0">
+              <a:buNone/>
+            </a:pPr>
+            <a:r>
+              <a:rPr lang="en-US" sz="1400" dirty="0">
+                <a:solidFill>
+                  <a:srgbClr val="1F2937"/>
+                </a:solidFill>
+                <a:latin typeface="Calibri" pitchFamily="34" charset="0"/>
+                <a:ea typeface="Calibri" pitchFamily="34" charset="-122"/>
+                <a:cs typeface="Calibri" pitchFamily="34" charset="-120"/>
+              </a:rPr>
+              <a:t>Stent thrombosis as the culprit lesion</a:t>
+            </a:r>
+            <a:endParaRPr lang="en-US" sz="1400" dirty="0"/>
+          </a:p>
+        </p:txBody>
+      </p:sp>
+      <p:sp>
+        <p:nvSpPr>
+          <p:cNvPr id="17" name="Shape 10"/>
+          <p:cNvSpPr/>
+          <p:nvPr/>
+        </p:nvSpPr>
+        <p:spPr>
+          <a:xfrm>
+            <a:off x="457200" y="3127248"/>
+            <a:ext cx="347472" cy="347472"/>
+          </a:xfrm>
+          <a:prstGeom prst="ellipse">
+            <a:avLst/>
+          </a:prstGeom>
+          <a:solidFill>
+            <a:srgbClr val="A3AAB6"/>
+          </a:solidFill>
+          <a:ln w="12700">
+            <a:solidFill>
+              <a:srgbClr val="A3AAB6"/>
+            </a:solidFill>
+            <a:prstDash val="solid"/>
+          </a:ln>
+        </p:spPr>
+      </p:sp>
+      <p:pic>
+        <p:nvPicPr>
+          <p:cNvPr id="18" name="Image 4" descr="preencoded.png">    </p:cNvPr>
+          <p:cNvPicPr>
+            <a:picLocks noChangeAspect="1"/>
+          </p:cNvPicPr>
+          <p:nvPr/>
+        </p:nvPicPr>
+        <p:blipFill>
+          <a:blip r:embed="rId5"/>
+          <a:stretch>
+            <a:fillRect/>
+          </a:stretch>
+        </p:blipFill>
+        <p:spPr>
+          <a:xfrm>
+            <a:off x="551017" y="3221065"/>
+            <a:ext cx="159837" cy="159837"/>
+          </a:xfrm>
+          <a:prstGeom prst="rect">
+            <a:avLst/>
+          </a:prstGeom>
+        </p:spPr>
+      </p:pic>
+      <p:sp>
+        <p:nvSpPr>
+          <p:cNvPr id="19" name="Text 11"/>
+          <p:cNvSpPr txBox="1"/>
+          <p:nvPr/>
+        </p:nvSpPr>
+        <p:spPr>
+          <a:xfrm>
+            <a:off x="1005840" y="3182112"/>
+            <a:ext cx="4480560" cy="365760"/>
+          </a:xfrm>
+          <a:prstGeom prst="rect">
+            <a:avLst/>
+          </a:prstGeom>
+          <a:noFill/>
+          <a:ln/>
+        </p:spPr>
+        <p:txBody>
+          <a:bodyPr wrap="square" lIns="0" tIns="0" rIns="0" bIns="0" rtlCol="0" anchor="t"/>
+          <a:lstStyle/>
+          <a:p>
+            <a:pPr indent="0" marL="0">
+              <a:buNone/>
+            </a:pPr>
+            <a:r>
+              <a:rPr lang="en-US" sz="1400" dirty="0">
+                <a:solidFill>
+                  <a:srgbClr val="1F2937"/>
+                </a:solidFill>
+                <a:latin typeface="Calibri" pitchFamily="34" charset="0"/>
+                <a:ea typeface="Calibri" pitchFamily="34" charset="-122"/>
+                <a:cs typeface="Calibri" pitchFamily="34" charset="-120"/>
+              </a:rPr>
+              <a:t>Previous MI in the same territory</a:t>
+            </a:r>
+            <a:endParaRPr lang="en-US" sz="1400" dirty="0"/>
+          </a:p>
+        </p:txBody>
+      </p:sp>
+      <p:sp>
+        <p:nvSpPr>
+          <p:cNvPr id="20" name="Shape 12"/>
+          <p:cNvSpPr/>
+          <p:nvPr/>
+        </p:nvSpPr>
+        <p:spPr>
+          <a:xfrm>
+            <a:off x="457200" y="3584448"/>
+            <a:ext cx="347472" cy="347472"/>
+          </a:xfrm>
+          <a:prstGeom prst="ellipse">
+            <a:avLst/>
+          </a:prstGeom>
+          <a:solidFill>
+            <a:srgbClr val="A3AAB6"/>
+          </a:solidFill>
+          <a:ln w="12700">
+            <a:solidFill>
+              <a:srgbClr val="A3AAB6"/>
+            </a:solidFill>
+            <a:prstDash val="solid"/>
+          </a:ln>
+        </p:spPr>
+      </p:sp>
+      <p:pic>
+        <p:nvPicPr>
+          <p:cNvPr id="21" name="Image 5" descr="preencoded.png">    </p:cNvPr>
+          <p:cNvPicPr>
+            <a:picLocks noChangeAspect="1"/>
+          </p:cNvPicPr>
+          <p:nvPr/>
+        </p:nvPicPr>
+        <p:blipFill>
+          <a:blip r:embed="rId6"/>
+          <a:stretch>
+            <a:fillRect/>
+          </a:stretch>
+        </p:blipFill>
+        <p:spPr>
+          <a:xfrm>
+            <a:off x="551017" y="3678265"/>
+            <a:ext cx="159837" cy="159837"/>
+          </a:xfrm>
+          <a:prstGeom prst="rect">
+            <a:avLst/>
+          </a:prstGeom>
+        </p:spPr>
+      </p:pic>
+      <p:sp>
+        <p:nvSpPr>
+          <p:cNvPr id="22" name="Text 13"/>
+          <p:cNvSpPr txBox="1"/>
+          <p:nvPr/>
+        </p:nvSpPr>
+        <p:spPr>
+          <a:xfrm>
+            <a:off x="1005840" y="3639312"/>
+            <a:ext cx="4480560" cy="365760"/>
+          </a:xfrm>
+          <a:prstGeom prst="rect">
+            <a:avLst/>
+          </a:prstGeom>
+          <a:noFill/>
+          <a:ln/>
+        </p:spPr>
+        <p:txBody>
+          <a:bodyPr wrap="square" lIns="0" tIns="0" rIns="0" bIns="0" rtlCol="0" anchor="t"/>
+          <a:lstStyle/>
+          <a:p>
+            <a:pPr indent="0" marL="0">
+              <a:buNone/>
+            </a:pPr>
+            <a:r>
+              <a:rPr lang="en-US" sz="1400" dirty="0">
+                <a:solidFill>
+                  <a:srgbClr val="1F2937"/>
+                </a:solidFill>
+                <a:latin typeface="Calibri" pitchFamily="34" charset="0"/>
+                <a:ea typeface="Calibri" pitchFamily="34" charset="-122"/>
+                <a:cs typeface="Calibri" pitchFamily="34" charset="-120"/>
+              </a:rPr>
+              <a:t>Women of child-bearing potential</a:t>
+            </a:r>
+            <a:endParaRPr lang="en-US" sz="1400" dirty="0"/>
+          </a:p>
+        </p:txBody>
+      </p:sp>
+      <p:sp>
+        <p:nvSpPr>
+          <p:cNvPr id="23" name="Shape 14"/>
+          <p:cNvSpPr/>
+          <p:nvPr/>
+        </p:nvSpPr>
+        <p:spPr>
+          <a:xfrm>
+            <a:off x="457200" y="4041648"/>
+            <a:ext cx="347472" cy="347472"/>
+          </a:xfrm>
+          <a:prstGeom prst="ellipse">
+            <a:avLst/>
+          </a:prstGeom>
+          <a:solidFill>
+            <a:srgbClr val="A3AAB6"/>
+          </a:solidFill>
+          <a:ln w="12700">
+            <a:solidFill>
+              <a:srgbClr val="A3AAB6"/>
+            </a:solidFill>
+            <a:prstDash val="solid"/>
+          </a:ln>
+        </p:spPr>
+      </p:sp>
+      <p:pic>
+        <p:nvPicPr>
+          <p:cNvPr id="24" name="Image 6" descr="preencoded.png">    </p:cNvPr>
+          <p:cNvPicPr>
+            <a:picLocks noChangeAspect="1"/>
+          </p:cNvPicPr>
+          <p:nvPr/>
+        </p:nvPicPr>
+        <p:blipFill>
+          <a:blip r:embed="rId7"/>
+          <a:stretch>
+            <a:fillRect/>
+          </a:stretch>
+        </p:blipFill>
+        <p:spPr>
+          <a:xfrm>
+            <a:off x="551017" y="4135465"/>
+            <a:ext cx="159837" cy="159837"/>
+          </a:xfrm>
+          <a:prstGeom prst="rect">
+            <a:avLst/>
+          </a:prstGeom>
+        </p:spPr>
+      </p:pic>
+      <p:sp>
+        <p:nvSpPr>
+          <p:cNvPr id="25" name="Text 15"/>
+          <p:cNvSpPr txBox="1"/>
+          <p:nvPr/>
+        </p:nvSpPr>
+        <p:spPr>
+          <a:xfrm>
+            <a:off x="1005840" y="4096512"/>
+            <a:ext cx="4480560" cy="365760"/>
+          </a:xfrm>
+          <a:prstGeom prst="rect">
+            <a:avLst/>
+          </a:prstGeom>
+          <a:noFill/>
+          <a:ln/>
+        </p:spPr>
+        <p:txBody>
+          <a:bodyPr wrap="square" lIns="0" tIns="0" rIns="0" bIns="0" rtlCol="0" anchor="t"/>
+          <a:lstStyle/>
+          <a:p>
+            <a:pPr indent="0" marL="0">
+              <a:buNone/>
+            </a:pPr>
+            <a:r>
+              <a:rPr lang="en-US" sz="1400" dirty="0">
+                <a:solidFill>
+                  <a:srgbClr val="1F2937"/>
+                </a:solidFill>
+                <a:latin typeface="Calibri" pitchFamily="34" charset="0"/>
+                <a:ea typeface="Calibri" pitchFamily="34" charset="-122"/>
+                <a:cs typeface="Calibri" pitchFamily="34" charset="-120"/>
+              </a:rPr>
+              <a:t>Participation in another interventional trial</a:t>
+            </a:r>
+            <a:endParaRPr lang="en-US" sz="1400" dirty="0"/>
+          </a:p>
+        </p:txBody>
+      </p:sp>
+      <p:sp>
+        <p:nvSpPr>
+          <p:cNvPr id="26" name="Shape 16"/>
+          <p:cNvSpPr/>
+          <p:nvPr/>
+        </p:nvSpPr>
+        <p:spPr>
+          <a:xfrm>
+            <a:off x="5852160" y="1097280"/>
+            <a:ext cx="2834640" cy="3383280"/>
           </a:xfrm>
           <a:prstGeom prst="roundRect">
             <a:avLst>
-              <a:gd name="adj" fmla="val 2909"/>
+              <a:gd name="adj" fmla="val 2581"/>
             </a:avLst>
           </a:prstGeom>
           <a:solidFill>
@@ -10968,49 +11416,24 @@
           </a:ln>
         </p:spPr>
       </p:sp>
-      <p:sp>
-        <p:nvSpPr>
-          <p:cNvPr id="6" name="Shape 3"/>
-          <p:cNvSpPr/>
-          <p:nvPr/>
-        </p:nvSpPr>
-        <p:spPr>
-          <a:xfrm>
-            <a:off x="731520" y="1463040"/>
-            <a:ext cx="731520" cy="731520"/>
-          </a:xfrm>
-          <a:prstGeom prst="ellipse">
-            <a:avLst/>
-          </a:prstGeom>
-          <a:solidFill>
-            <a:srgbClr val="FFFFFF"/>
-          </a:solidFill>
-          <a:ln w="12700">
-            <a:solidFill>
-              <a:srgbClr val="FFFFFF"/>
-            </a:solidFill>
-            <a:prstDash val="solid"/>
-          </a:ln>
-        </p:spPr>
-      </p:sp>
       <p:pic>
         <p:nvPicPr>
-          <p:cNvPr id="7" name="Image 0" descr="preencoded.png">    </p:cNvPr>
+          <p:cNvPr id="27" name="Image 7" descr="preencoded.png">    </p:cNvPr>
           <p:cNvPicPr>
             <a:picLocks noChangeAspect="1"/>
           </p:cNvPicPr>
           <p:nvPr/>
         </p:nvPicPr>
         <p:blipFill>
-          <a:blip r:embed="rId1"/>
+          <a:blip r:embed="rId8"/>
           <a:stretch>
             <a:fillRect/>
           </a:stretch>
         </p:blipFill>
         <p:spPr>
           <a:xfrm>
-            <a:off x="914400" y="1645920"/>
-            <a:ext cx="365760" cy="365760"/>
+            <a:off x="6080760" y="1298448"/>
+            <a:ext cx="347472" cy="347472"/>
           </a:xfrm>
           <a:prstGeom prst="rect">
             <a:avLst/>
@@ -11019,14 +11442,14 @@
       </p:pic>
       <p:sp>
         <p:nvSpPr>
-          <p:cNvPr id="8" name="Text 4"/>
-          <p:cNvSpPr txBox="1"/>
-          <p:nvPr/>
-        </p:nvSpPr>
-        <p:spPr>
-          <a:xfrm>
-            <a:off x="731520" y="2423160"/>
-            <a:ext cx="2103120" cy="411480"/>
+          <p:cNvPr id="28" name="Text 17"/>
+          <p:cNvSpPr txBox="1"/>
+          <p:nvPr/>
+        </p:nvSpPr>
+        <p:spPr>
+          <a:xfrm>
+            <a:off x="6537960" y="1298448"/>
+            <a:ext cx="2103120" cy="347472"/>
           </a:xfrm>
           <a:prstGeom prst="rect">
             <a:avLst/>
@@ -11042,7 +11465,7 @@
               <a:buNone/>
             </a:pPr>
             <a:r>
-              <a:rPr lang="en-US" sz="2000" b="1" dirty="0">
+              <a:rPr lang="en-US" sz="1500" b="1" dirty="0">
                 <a:solidFill>
                   <a:srgbClr val="8C1D40"/>
                 </a:solidFill>
@@ -11050,22 +11473,22 @@
                 <a:ea typeface="Cambria" pitchFamily="34" charset="-122"/>
                 <a:cs typeface="Cambria" pitchFamily="34" charset="-120"/>
               </a:rPr>
-              <a:t>Primary</a:t>
-            </a:r>
-            <a:endParaRPr lang="en-US" sz="2000" dirty="0"/>
-          </a:p>
-        </p:txBody>
-      </p:sp>
-      <p:sp>
-        <p:nvSpPr>
-          <p:cNvPr id="9" name="Text 5"/>
-          <p:cNvSpPr txBox="1"/>
-          <p:nvPr/>
-        </p:nvSpPr>
-        <p:spPr>
-          <a:xfrm>
-            <a:off x="731520" y="2880360"/>
-            <a:ext cx="2103120" cy="1097280"/>
+              <a:t>Why these exclusions?</a:t>
+            </a:r>
+            <a:endParaRPr lang="en-US" sz="1500" dirty="0"/>
+          </a:p>
+        </p:txBody>
+      </p:sp>
+      <p:sp>
+        <p:nvSpPr>
+          <p:cNvPr id="29" name="Text 18"/>
+          <p:cNvSpPr txBox="1"/>
+          <p:nvPr/>
+        </p:nvSpPr>
+        <p:spPr>
+          <a:xfrm>
+            <a:off x="6080760" y="1828800"/>
+            <a:ext cx="2423160" cy="2468880"/>
           </a:xfrm>
           <a:prstGeom prst="rect">
             <a:avLst/>
@@ -11077,11 +11500,15 @@
           <a:bodyPr wrap="square" lIns="0" tIns="0" rIns="0" bIns="0" rtlCol="0" anchor="t"/>
           <a:lstStyle/>
           <a:p>
-            <a:pPr indent="0" marL="0">
-              <a:buNone/>
-            </a:pPr>
-            <a:r>
-              <a:rPr lang="en-US" sz="1400" dirty="0">
+            <a:pPr marL="342900" indent="-342900">
+              <a:spcAft>
+                <a:spcPts val="800"/>
+              </a:spcAft>
+              <a:buSzPct val="100000"/>
+              <a:buChar char="•"/>
+            </a:pPr>
+            <a:r>
+              <a:rPr lang="en-US" sz="1300" dirty="0">
                 <a:solidFill>
                   <a:srgbClr val="1F2937"/>
                 </a:solidFill>
@@ -11089,153 +11516,20 @@
                 <a:ea typeface="Calibri" pitchFamily="34" charset="-122"/>
                 <a:cs typeface="Calibri" pitchFamily="34" charset="-120"/>
               </a:rPr>
-              <a:t>Infarct size by CK-MB area under the curve</a:t>
-            </a:r>
-            <a:endParaRPr lang="en-US" sz="1400" dirty="0"/>
-          </a:p>
-        </p:txBody>
-      </p:sp>
-      <p:sp>
-        <p:nvSpPr>
-          <p:cNvPr id="10" name="Shape 6"/>
-          <p:cNvSpPr/>
-          <p:nvPr/>
-        </p:nvSpPr>
-        <p:spPr>
-          <a:xfrm>
-            <a:off x="3264408" y="1188720"/>
-            <a:ext cx="2606040" cy="2514600"/>
-          </a:xfrm>
-          <a:prstGeom prst="roundRect">
-            <a:avLst>
-              <a:gd name="adj" fmla="val 2909"/>
-            </a:avLst>
-          </a:prstGeom>
-          <a:solidFill>
-            <a:srgbClr val="F8F0F3"/>
-          </a:solidFill>
-          <a:ln w="12700">
-            <a:solidFill>
-              <a:srgbClr val="F8F0F3"/>
-            </a:solidFill>
-            <a:prstDash val="solid"/>
-          </a:ln>
-        </p:spPr>
-      </p:sp>
-      <p:sp>
-        <p:nvSpPr>
-          <p:cNvPr id="11" name="Shape 7"/>
-          <p:cNvSpPr/>
-          <p:nvPr/>
-        </p:nvSpPr>
-        <p:spPr>
-          <a:xfrm>
-            <a:off x="3538728" y="1463040"/>
-            <a:ext cx="731520" cy="731520"/>
-          </a:xfrm>
-          <a:prstGeom prst="ellipse">
-            <a:avLst/>
-          </a:prstGeom>
-          <a:solidFill>
-            <a:srgbClr val="FFFFFF"/>
-          </a:solidFill>
-          <a:ln w="12700">
-            <a:solidFill>
-              <a:srgbClr val="FFFFFF"/>
-            </a:solidFill>
-            <a:prstDash val="solid"/>
-          </a:ln>
-        </p:spPr>
-      </p:sp>
-      <p:pic>
-        <p:nvPicPr>
-          <p:cNvPr id="12" name="Image 1" descr="preencoded.png">    </p:cNvPr>
-          <p:cNvPicPr>
-            <a:picLocks noChangeAspect="1"/>
-          </p:cNvPicPr>
-          <p:nvPr/>
-        </p:nvPicPr>
-        <p:blipFill>
-          <a:blip r:embed="rId2"/>
-          <a:stretch>
-            <a:fillRect/>
-          </a:stretch>
-        </p:blipFill>
-        <p:spPr>
-          <a:xfrm>
-            <a:off x="3721608" y="1645920"/>
-            <a:ext cx="365760" cy="365760"/>
-          </a:xfrm>
-          <a:prstGeom prst="rect">
-            <a:avLst/>
-          </a:prstGeom>
-        </p:spPr>
-      </p:pic>
-      <p:sp>
-        <p:nvSpPr>
-          <p:cNvPr id="13" name="Text 8"/>
-          <p:cNvSpPr txBox="1"/>
-          <p:nvPr/>
-        </p:nvSpPr>
-        <p:spPr>
-          <a:xfrm>
-            <a:off x="3538728" y="2423160"/>
-            <a:ext cx="2103120" cy="411480"/>
-          </a:xfrm>
-          <a:prstGeom prst="rect">
-            <a:avLst/>
-          </a:prstGeom>
-          <a:noFill/>
-          <a:ln/>
-        </p:spPr>
-        <p:txBody>
-          <a:bodyPr wrap="square" lIns="0" tIns="0" rIns="0" bIns="0" rtlCol="0" anchor="ctr"/>
-          <a:lstStyle/>
-          <a:p>
-            <a:pPr indent="0" marL="0">
-              <a:buNone/>
-            </a:pPr>
-            <a:r>
-              <a:rPr lang="en-US" sz="2000" b="1" dirty="0">
-                <a:solidFill>
-                  <a:srgbClr val="8C1D40"/>
-                </a:solidFill>
-                <a:latin typeface="Cambria" pitchFamily="34" charset="0"/>
-                <a:ea typeface="Cambria" pitchFamily="34" charset="-122"/>
-                <a:cs typeface="Cambria" pitchFamily="34" charset="-120"/>
-              </a:rPr>
-              <a:t>Secondary</a:t>
-            </a:r>
-            <a:endParaRPr lang="en-US" sz="2000" dirty="0"/>
-          </a:p>
-        </p:txBody>
-      </p:sp>
-      <p:sp>
-        <p:nvSpPr>
-          <p:cNvPr id="14" name="Text 9"/>
-          <p:cNvSpPr txBox="1"/>
-          <p:nvPr/>
-        </p:nvSpPr>
-        <p:spPr>
-          <a:xfrm>
-            <a:off x="3538728" y="2880360"/>
-            <a:ext cx="2103120" cy="1097280"/>
-          </a:xfrm>
-          <a:prstGeom prst="rect">
-            <a:avLst/>
-          </a:prstGeom>
-          <a:noFill/>
-          <a:ln/>
-        </p:spPr>
-        <p:txBody>
-          <a:bodyPr wrap="square" lIns="0" tIns="0" rIns="0" bIns="0" rtlCol="0" anchor="t"/>
-          <a:lstStyle/>
-          <a:p>
-            <a:pPr indent="0" marL="0">
-              <a:buNone/>
-            </a:pPr>
-            <a:r>
-              <a:rPr lang="en-US" sz="1400" dirty="0">
+              <a:t>Small, calcified or tortuous vessels: hard to deliver a retriever safely</a:t>
+            </a:r>
+            <a:endParaRPr lang="en-US" sz="1300" dirty="0"/>
+          </a:p>
+          <a:p>
+            <a:pPr marL="342900" indent="-342900">
+              <a:spcAft>
+                <a:spcPts val="800"/>
+              </a:spcAft>
+              <a:buSzPct val="100000"/>
+              <a:buChar char="•"/>
+            </a:pPr>
+            <a:r>
+              <a:rPr lang="en-US" sz="1300" dirty="0">
                 <a:solidFill>
                   <a:srgbClr val="1F2937"/>
                 </a:solidFill>
@@ -11243,163 +11537,9 @@
                 <a:ea typeface="Calibri" pitchFamily="34" charset="-122"/>
                 <a:cs typeface="Calibri" pitchFamily="34" charset="-120"/>
               </a:rPr>
-              <a:t>Infarct size on cardiac MRI (% of LV mass) at day 3</a:t>
-            </a:r>
-            <a:endParaRPr lang="en-US" sz="1400" dirty="0"/>
-          </a:p>
-        </p:txBody>
-      </p:sp>
-      <p:sp>
-        <p:nvSpPr>
-          <p:cNvPr id="15" name="Shape 10"/>
-          <p:cNvSpPr/>
-          <p:nvPr/>
-        </p:nvSpPr>
-        <p:spPr>
-          <a:xfrm>
-            <a:off x="6071616" y="1188720"/>
-            <a:ext cx="2606040" cy="2514600"/>
-          </a:xfrm>
-          <a:prstGeom prst="roundRect">
-            <a:avLst>
-              <a:gd name="adj" fmla="val 2909"/>
-            </a:avLst>
-          </a:prstGeom>
-          <a:solidFill>
-            <a:srgbClr val="F8F0F3"/>
-          </a:solidFill>
-          <a:ln w="12700">
-            <a:solidFill>
-              <a:srgbClr val="F8F0F3"/>
-            </a:solidFill>
-            <a:prstDash val="solid"/>
-          </a:ln>
-        </p:spPr>
-      </p:sp>
-      <p:sp>
-        <p:nvSpPr>
-          <p:cNvPr id="16" name="Shape 11"/>
-          <p:cNvSpPr/>
-          <p:nvPr/>
-        </p:nvSpPr>
-        <p:spPr>
-          <a:xfrm>
-            <a:off x="6345936" y="1463040"/>
-            <a:ext cx="731520" cy="731520"/>
-          </a:xfrm>
-          <a:prstGeom prst="ellipse">
-            <a:avLst/>
-          </a:prstGeom>
-          <a:solidFill>
-            <a:srgbClr val="FFFFFF"/>
-          </a:solidFill>
-          <a:ln w="12700">
-            <a:solidFill>
-              <a:srgbClr val="FFFFFF"/>
-            </a:solidFill>
-            <a:prstDash val="solid"/>
-          </a:ln>
-        </p:spPr>
-      </p:sp>
-      <p:pic>
-        <p:nvPicPr>
-          <p:cNvPr id="17" name="Image 2" descr="preencoded.png">    </p:cNvPr>
-          <p:cNvPicPr>
-            <a:picLocks noChangeAspect="1"/>
-          </p:cNvPicPr>
-          <p:nvPr/>
-        </p:nvPicPr>
-        <p:blipFill>
-          <a:blip r:embed="rId3"/>
-          <a:stretch>
-            <a:fillRect/>
-          </a:stretch>
-        </p:blipFill>
-        <p:spPr>
-          <a:xfrm>
-            <a:off x="6528816" y="1645920"/>
-            <a:ext cx="365760" cy="365760"/>
-          </a:xfrm>
-          <a:prstGeom prst="rect">
-            <a:avLst/>
-          </a:prstGeom>
-        </p:spPr>
-      </p:pic>
-      <p:sp>
-        <p:nvSpPr>
-          <p:cNvPr id="18" name="Text 12"/>
-          <p:cNvSpPr txBox="1"/>
-          <p:nvPr/>
-        </p:nvSpPr>
-        <p:spPr>
-          <a:xfrm>
-            <a:off x="6345936" y="2423160"/>
-            <a:ext cx="2103120" cy="411480"/>
-          </a:xfrm>
-          <a:prstGeom prst="rect">
-            <a:avLst/>
-          </a:prstGeom>
-          <a:noFill/>
-          <a:ln/>
-        </p:spPr>
-        <p:txBody>
-          <a:bodyPr wrap="square" lIns="0" tIns="0" rIns="0" bIns="0" rtlCol="0" anchor="ctr"/>
-          <a:lstStyle/>
-          <a:p>
-            <a:pPr indent="0" marL="0">
-              <a:buNone/>
-            </a:pPr>
-            <a:r>
-              <a:rPr lang="en-US" sz="2000" b="1" dirty="0">
-                <a:solidFill>
-                  <a:srgbClr val="8C1D40"/>
-                </a:solidFill>
-                <a:latin typeface="Cambria" pitchFamily="34" charset="0"/>
-                <a:ea typeface="Cambria" pitchFamily="34" charset="-122"/>
-                <a:cs typeface="Cambria" pitchFamily="34" charset="-120"/>
-              </a:rPr>
-              <a:t>Safety</a:t>
-            </a:r>
-            <a:endParaRPr lang="en-US" sz="2000" dirty="0"/>
-          </a:p>
-        </p:txBody>
-      </p:sp>
-      <p:sp>
-        <p:nvSpPr>
-          <p:cNvPr id="19" name="Text 13"/>
-          <p:cNvSpPr txBox="1"/>
-          <p:nvPr/>
-        </p:nvSpPr>
-        <p:spPr>
-          <a:xfrm>
-            <a:off x="6345936" y="2880360"/>
-            <a:ext cx="2103120" cy="1097280"/>
-          </a:xfrm>
-          <a:prstGeom prst="rect">
-            <a:avLst/>
-          </a:prstGeom>
-          <a:noFill/>
-          <a:ln/>
-        </p:spPr>
-        <p:txBody>
-          <a:bodyPr wrap="square" lIns="0" tIns="0" rIns="0" bIns="0" rtlCol="0" anchor="t"/>
-          <a:lstStyle/>
-          <a:p>
-            <a:pPr indent="0" marL="0">
-              <a:buNone/>
-            </a:pPr>
-            <a:r>
-              <a:rPr lang="en-US" sz="1400" dirty="0">
-                <a:solidFill>
-                  <a:srgbClr val="1F2937"/>
-                </a:solidFill>
-                <a:latin typeface="Calibri" pitchFamily="34" charset="0"/>
-                <a:ea typeface="Calibri" pitchFamily="34" charset="-122"/>
-                <a:cs typeface="Calibri" pitchFamily="34" charset="-120"/>
-              </a:rPr>
-              <a:t>Death, stroke and MACE at 30 days</a:t>
-            </a:r>
-            <a:endParaRPr lang="en-US" sz="1400" dirty="0"/>
+              <a:t>Stent thrombosis and prior MI in the same territory would confound infarct size</a:t>
+            </a:r>
+            <a:endParaRPr lang="en-US" sz="1300" dirty="0"/>
           </a:p>
         </p:txBody>
       </p:sp>
@@ -11468,7 +11608,7 @@
                 <a:ea typeface="Cambria" pitchFamily="34" charset="-122"/>
                 <a:cs typeface="Cambria" pitchFamily="34" charset="-120"/>
               </a:rPr>
-              <a:t>Primary endpoint: met</a:t>
+              <a:t>Endpoints</a:t>
             </a:r>
             <a:endParaRPr lang="en-US" sz="2800" dirty="0"/>
           </a:p>
@@ -11515,96 +11655,18 @@
       </p:sp>
       <p:sp>
         <p:nvSpPr>
-          <p:cNvPr id="5" name="Text 2"/>
-          <p:cNvSpPr txBox="1"/>
-          <p:nvPr/>
-        </p:nvSpPr>
-        <p:spPr>
-          <a:xfrm>
-            <a:off x="457200" y="1234440"/>
-            <a:ext cx="3657600" cy="1097280"/>
-          </a:xfrm>
-          <a:prstGeom prst="rect">
-            <a:avLst/>
-          </a:prstGeom>
-          <a:noFill/>
-          <a:ln/>
-        </p:spPr>
-        <p:txBody>
-          <a:bodyPr wrap="square" lIns="0" tIns="0" rIns="0" bIns="0" rtlCol="0" anchor="ctr"/>
-          <a:lstStyle/>
-          <a:p>
-            <a:pPr indent="0" marL="0">
-              <a:buNone/>
-            </a:pPr>
-            <a:r>
-              <a:rPr lang="en-US" sz="8000" b="1" dirty="0">
-                <a:solidFill>
-                  <a:srgbClr val="8C1D40"/>
-                </a:solidFill>
-                <a:latin typeface="Cambria" pitchFamily="34" charset="0"/>
-                <a:ea typeface="Cambria" pitchFamily="34" charset="-122"/>
-                <a:cs typeface="Cambria" pitchFamily="34" charset="-120"/>
-              </a:rPr>
-              <a:t>26%</a:t>
-            </a:r>
-            <a:endParaRPr lang="en-US" sz="8000" dirty="0"/>
-          </a:p>
-        </p:txBody>
-      </p:sp>
-      <p:sp>
-        <p:nvSpPr>
-          <p:cNvPr id="6" name="Text 3"/>
-          <p:cNvSpPr txBox="1"/>
-          <p:nvPr/>
-        </p:nvSpPr>
-        <p:spPr>
-          <a:xfrm>
-            <a:off x="457200" y="2377440"/>
-            <a:ext cx="3566160" cy="685800"/>
-          </a:xfrm>
-          <a:prstGeom prst="rect">
-            <a:avLst/>
-          </a:prstGeom>
-          <a:noFill/>
-          <a:ln/>
-        </p:spPr>
-        <p:txBody>
-          <a:bodyPr wrap="square" lIns="0" tIns="0" rIns="0" bIns="0" rtlCol="0" anchor="t"/>
-          <a:lstStyle/>
-          <a:p>
-            <a:pPr indent="0" marL="0">
-              <a:buNone/>
-            </a:pPr>
-            <a:r>
-              <a:rPr lang="en-US" sz="1500" dirty="0">
-                <a:solidFill>
-                  <a:srgbClr val="1F2937"/>
-                </a:solidFill>
-                <a:latin typeface="Calibri" pitchFamily="34" charset="0"/>
-                <a:ea typeface="Calibri" pitchFamily="34" charset="-122"/>
-                <a:cs typeface="Calibri" pitchFamily="34" charset="-120"/>
-              </a:rPr>
-              <a:t>relative reduction in infarct size (CK-MB AUC) with enVast versus standard PCI</a:t>
-            </a:r>
-            <a:endParaRPr lang="en-US" sz="1500" dirty="0"/>
-          </a:p>
-        </p:txBody>
-      </p:sp>
-      <p:sp>
-        <p:nvSpPr>
-          <p:cNvPr id="7" name="Shape 4"/>
+          <p:cNvPr id="5" name="Shape 2"/>
           <p:cNvSpPr/>
           <p:nvPr/>
         </p:nvSpPr>
         <p:spPr>
           <a:xfrm>
-            <a:off x="457200" y="3291840"/>
-            <a:ext cx="1645920" cy="502920"/>
+            <a:off x="457200" y="1188720"/>
+            <a:ext cx="2606040" cy="2514600"/>
           </a:xfrm>
           <a:prstGeom prst="roundRect">
             <a:avLst>
-              <a:gd name="adj" fmla="val 14545"/>
+              <a:gd name="adj" fmla="val 2909"/>
             </a:avLst>
           </a:prstGeom>
           <a:solidFill>
@@ -11620,14 +11682,63 @@
       </p:sp>
       <p:sp>
         <p:nvSpPr>
-          <p:cNvPr id="8" name="Text 5"/>
-          <p:cNvSpPr txBox="1"/>
-          <p:nvPr/>
-        </p:nvSpPr>
-        <p:spPr>
-          <a:xfrm>
-            <a:off x="457200" y="3291840"/>
-            <a:ext cx="1645920" cy="502920"/>
+          <p:cNvPr id="6" name="Shape 3"/>
+          <p:cNvSpPr/>
+          <p:nvPr/>
+        </p:nvSpPr>
+        <p:spPr>
+          <a:xfrm>
+            <a:off x="731520" y="1463040"/>
+            <a:ext cx="731520" cy="731520"/>
+          </a:xfrm>
+          <a:prstGeom prst="ellipse">
+            <a:avLst/>
+          </a:prstGeom>
+          <a:solidFill>
+            <a:srgbClr val="FFFFFF"/>
+          </a:solidFill>
+          <a:ln w="12700">
+            <a:solidFill>
+              <a:srgbClr val="FFFFFF"/>
+            </a:solidFill>
+            <a:prstDash val="solid"/>
+          </a:ln>
+        </p:spPr>
+      </p:sp>
+      <p:pic>
+        <p:nvPicPr>
+          <p:cNvPr id="7" name="Image 0" descr="preencoded.png">    </p:cNvPr>
+          <p:cNvPicPr>
+            <a:picLocks noChangeAspect="1"/>
+          </p:cNvPicPr>
+          <p:nvPr/>
+        </p:nvPicPr>
+        <p:blipFill>
+          <a:blip r:embed="rId1"/>
+          <a:stretch>
+            <a:fillRect/>
+          </a:stretch>
+        </p:blipFill>
+        <p:spPr>
+          <a:xfrm>
+            <a:off x="914400" y="1645920"/>
+            <a:ext cx="365760" cy="365760"/>
+          </a:xfrm>
+          <a:prstGeom prst="rect">
+            <a:avLst/>
+          </a:prstGeom>
+        </p:spPr>
+      </p:pic>
+      <p:sp>
+        <p:nvSpPr>
+          <p:cNvPr id="8" name="Text 4"/>
+          <p:cNvSpPr txBox="1"/>
+          <p:nvPr/>
+        </p:nvSpPr>
+        <p:spPr>
+          <a:xfrm>
+            <a:off x="731520" y="2423160"/>
+            <a:ext cx="2103120" cy="411480"/>
           </a:xfrm>
           <a:prstGeom prst="rect">
             <a:avLst/>
@@ -11639,40 +11750,371 @@
           <a:bodyPr wrap="square" lIns="0" tIns="0" rIns="0" bIns="0" rtlCol="0" anchor="ctr"/>
           <a:lstStyle/>
           <a:p>
-            <a:pPr algn="ctr" indent="0" marL="0">
-              <a:buNone/>
-            </a:pPr>
-            <a:r>
-              <a:rPr lang="en-US" sz="1600" b="1" dirty="0">
+            <a:pPr indent="0" marL="0">
+              <a:buNone/>
+            </a:pPr>
+            <a:r>
+              <a:rPr lang="en-US" sz="2000" b="1" dirty="0">
                 <a:solidFill>
                   <a:srgbClr val="8C1D40"/>
+                </a:solidFill>
+                <a:latin typeface="Cambria" pitchFamily="34" charset="0"/>
+                <a:ea typeface="Cambria" pitchFamily="34" charset="-122"/>
+                <a:cs typeface="Cambria" pitchFamily="34" charset="-120"/>
+              </a:rPr>
+              <a:t>Primary</a:t>
+            </a:r>
+            <a:endParaRPr lang="en-US" sz="2000" dirty="0"/>
+          </a:p>
+        </p:txBody>
+      </p:sp>
+      <p:sp>
+        <p:nvSpPr>
+          <p:cNvPr id="9" name="Text 5"/>
+          <p:cNvSpPr txBox="1"/>
+          <p:nvPr/>
+        </p:nvSpPr>
+        <p:spPr>
+          <a:xfrm>
+            <a:off x="731520" y="2880360"/>
+            <a:ext cx="2103120" cy="1097280"/>
+          </a:xfrm>
+          <a:prstGeom prst="rect">
+            <a:avLst/>
+          </a:prstGeom>
+          <a:noFill/>
+          <a:ln/>
+        </p:spPr>
+        <p:txBody>
+          <a:bodyPr wrap="square" lIns="0" tIns="0" rIns="0" bIns="0" rtlCol="0" anchor="t"/>
+          <a:lstStyle/>
+          <a:p>
+            <a:pPr indent="0" marL="0">
+              <a:buNone/>
+            </a:pPr>
+            <a:r>
+              <a:rPr lang="en-US" sz="1400" dirty="0">
+                <a:solidFill>
+                  <a:srgbClr val="1F2937"/>
                 </a:solidFill>
                 <a:latin typeface="Calibri" pitchFamily="34" charset="0"/>
                 <a:ea typeface="Calibri" pitchFamily="34" charset="-122"/>
                 <a:cs typeface="Calibri" pitchFamily="34" charset="-120"/>
               </a:rPr>
-              <a:t>P = 0.001</a:t>
-            </a:r>
-            <a:endParaRPr lang="en-US" sz="1600" dirty="0"/>
-          </a:p>
-        </p:txBody>
-      </p:sp>
-      <p:graphicFrame>
-        <p:nvGraphicFramePr>
-          <p:cNvPr id="9" name="Chart 0" descr=""/>
-          <p:cNvGraphicFramePr/>
-          <p:nvPr/>
-        </p:nvGraphicFramePr>
-        <p:xfrm>
-          <a:off x="4572000" y="1097280"/>
-          <a:ext cx="4114800" cy="3383280"/>
-        </p:xfrm>
-        <a:graphic xmlns:a="http://schemas.openxmlformats.org/drawingml/2006/main">
-          <a:graphicData uri="http://schemas.openxmlformats.org/drawingml/2006/chart">
-            <c:chart xmlns:c="http://schemas.openxmlformats.org/drawingml/2006/chart" r:id="rId1"/>
-          </a:graphicData>
-        </a:graphic>
-      </p:graphicFrame>
+              <a:t>Infarct size by CK-MB area under the curve</a:t>
+            </a:r>
+            <a:endParaRPr lang="en-US" sz="1400" dirty="0"/>
+          </a:p>
+        </p:txBody>
+      </p:sp>
+      <p:sp>
+        <p:nvSpPr>
+          <p:cNvPr id="10" name="Shape 6"/>
+          <p:cNvSpPr/>
+          <p:nvPr/>
+        </p:nvSpPr>
+        <p:spPr>
+          <a:xfrm>
+            <a:off x="3264408" y="1188720"/>
+            <a:ext cx="2606040" cy="2514600"/>
+          </a:xfrm>
+          <a:prstGeom prst="roundRect">
+            <a:avLst>
+              <a:gd name="adj" fmla="val 2909"/>
+            </a:avLst>
+          </a:prstGeom>
+          <a:solidFill>
+            <a:srgbClr val="F8F0F3"/>
+          </a:solidFill>
+          <a:ln w="12700">
+            <a:solidFill>
+              <a:srgbClr val="F8F0F3"/>
+            </a:solidFill>
+            <a:prstDash val="solid"/>
+          </a:ln>
+        </p:spPr>
+      </p:sp>
+      <p:sp>
+        <p:nvSpPr>
+          <p:cNvPr id="11" name="Shape 7"/>
+          <p:cNvSpPr/>
+          <p:nvPr/>
+        </p:nvSpPr>
+        <p:spPr>
+          <a:xfrm>
+            <a:off x="3538728" y="1463040"/>
+            <a:ext cx="731520" cy="731520"/>
+          </a:xfrm>
+          <a:prstGeom prst="ellipse">
+            <a:avLst/>
+          </a:prstGeom>
+          <a:solidFill>
+            <a:srgbClr val="FFFFFF"/>
+          </a:solidFill>
+          <a:ln w="12700">
+            <a:solidFill>
+              <a:srgbClr val="FFFFFF"/>
+            </a:solidFill>
+            <a:prstDash val="solid"/>
+          </a:ln>
+        </p:spPr>
+      </p:sp>
+      <p:pic>
+        <p:nvPicPr>
+          <p:cNvPr id="12" name="Image 1" descr="preencoded.png">    </p:cNvPr>
+          <p:cNvPicPr>
+            <a:picLocks noChangeAspect="1"/>
+          </p:cNvPicPr>
+          <p:nvPr/>
+        </p:nvPicPr>
+        <p:blipFill>
+          <a:blip r:embed="rId2"/>
+          <a:stretch>
+            <a:fillRect/>
+          </a:stretch>
+        </p:blipFill>
+        <p:spPr>
+          <a:xfrm>
+            <a:off x="3721608" y="1645920"/>
+            <a:ext cx="365760" cy="365760"/>
+          </a:xfrm>
+          <a:prstGeom prst="rect">
+            <a:avLst/>
+          </a:prstGeom>
+        </p:spPr>
+      </p:pic>
+      <p:sp>
+        <p:nvSpPr>
+          <p:cNvPr id="13" name="Text 8"/>
+          <p:cNvSpPr txBox="1"/>
+          <p:nvPr/>
+        </p:nvSpPr>
+        <p:spPr>
+          <a:xfrm>
+            <a:off x="3538728" y="2423160"/>
+            <a:ext cx="2103120" cy="411480"/>
+          </a:xfrm>
+          <a:prstGeom prst="rect">
+            <a:avLst/>
+          </a:prstGeom>
+          <a:noFill/>
+          <a:ln/>
+        </p:spPr>
+        <p:txBody>
+          <a:bodyPr wrap="square" lIns="0" tIns="0" rIns="0" bIns="0" rtlCol="0" anchor="ctr"/>
+          <a:lstStyle/>
+          <a:p>
+            <a:pPr indent="0" marL="0">
+              <a:buNone/>
+            </a:pPr>
+            <a:r>
+              <a:rPr lang="en-US" sz="2000" b="1" dirty="0">
+                <a:solidFill>
+                  <a:srgbClr val="8C1D40"/>
+                </a:solidFill>
+                <a:latin typeface="Cambria" pitchFamily="34" charset="0"/>
+                <a:ea typeface="Cambria" pitchFamily="34" charset="-122"/>
+                <a:cs typeface="Cambria" pitchFamily="34" charset="-120"/>
+              </a:rPr>
+              <a:t>Secondary</a:t>
+            </a:r>
+            <a:endParaRPr lang="en-US" sz="2000" dirty="0"/>
+          </a:p>
+        </p:txBody>
+      </p:sp>
+      <p:sp>
+        <p:nvSpPr>
+          <p:cNvPr id="14" name="Text 9"/>
+          <p:cNvSpPr txBox="1"/>
+          <p:nvPr/>
+        </p:nvSpPr>
+        <p:spPr>
+          <a:xfrm>
+            <a:off x="3538728" y="2880360"/>
+            <a:ext cx="2103120" cy="1097280"/>
+          </a:xfrm>
+          <a:prstGeom prst="rect">
+            <a:avLst/>
+          </a:prstGeom>
+          <a:noFill/>
+          <a:ln/>
+        </p:spPr>
+        <p:txBody>
+          <a:bodyPr wrap="square" lIns="0" tIns="0" rIns="0" bIns="0" rtlCol="0" anchor="t"/>
+          <a:lstStyle/>
+          <a:p>
+            <a:pPr indent="0" marL="0">
+              <a:buNone/>
+            </a:pPr>
+            <a:r>
+              <a:rPr lang="en-US" sz="1400" dirty="0">
+                <a:solidFill>
+                  <a:srgbClr val="1F2937"/>
+                </a:solidFill>
+                <a:latin typeface="Calibri" pitchFamily="34" charset="0"/>
+                <a:ea typeface="Calibri" pitchFamily="34" charset="-122"/>
+                <a:cs typeface="Calibri" pitchFamily="34" charset="-120"/>
+              </a:rPr>
+              <a:t>Infarct size on cardiac MRI (% of LV mass) at day 3</a:t>
+            </a:r>
+            <a:endParaRPr lang="en-US" sz="1400" dirty="0"/>
+          </a:p>
+        </p:txBody>
+      </p:sp>
+      <p:sp>
+        <p:nvSpPr>
+          <p:cNvPr id="15" name="Shape 10"/>
+          <p:cNvSpPr/>
+          <p:nvPr/>
+        </p:nvSpPr>
+        <p:spPr>
+          <a:xfrm>
+            <a:off x="6071616" y="1188720"/>
+            <a:ext cx="2606040" cy="2514600"/>
+          </a:xfrm>
+          <a:prstGeom prst="roundRect">
+            <a:avLst>
+              <a:gd name="adj" fmla="val 2909"/>
+            </a:avLst>
+          </a:prstGeom>
+          <a:solidFill>
+            <a:srgbClr val="F8F0F3"/>
+          </a:solidFill>
+          <a:ln w="12700">
+            <a:solidFill>
+              <a:srgbClr val="F8F0F3"/>
+            </a:solidFill>
+            <a:prstDash val="solid"/>
+          </a:ln>
+        </p:spPr>
+      </p:sp>
+      <p:sp>
+        <p:nvSpPr>
+          <p:cNvPr id="16" name="Shape 11"/>
+          <p:cNvSpPr/>
+          <p:nvPr/>
+        </p:nvSpPr>
+        <p:spPr>
+          <a:xfrm>
+            <a:off x="6345936" y="1463040"/>
+            <a:ext cx="731520" cy="731520"/>
+          </a:xfrm>
+          <a:prstGeom prst="ellipse">
+            <a:avLst/>
+          </a:prstGeom>
+          <a:solidFill>
+            <a:srgbClr val="FFFFFF"/>
+          </a:solidFill>
+          <a:ln w="12700">
+            <a:solidFill>
+              <a:srgbClr val="FFFFFF"/>
+            </a:solidFill>
+            <a:prstDash val="solid"/>
+          </a:ln>
+        </p:spPr>
+      </p:sp>
+      <p:pic>
+        <p:nvPicPr>
+          <p:cNvPr id="17" name="Image 2" descr="preencoded.png">    </p:cNvPr>
+          <p:cNvPicPr>
+            <a:picLocks noChangeAspect="1"/>
+          </p:cNvPicPr>
+          <p:nvPr/>
+        </p:nvPicPr>
+        <p:blipFill>
+          <a:blip r:embed="rId3"/>
+          <a:stretch>
+            <a:fillRect/>
+          </a:stretch>
+        </p:blipFill>
+        <p:spPr>
+          <a:xfrm>
+            <a:off x="6528816" y="1645920"/>
+            <a:ext cx="365760" cy="365760"/>
+          </a:xfrm>
+          <a:prstGeom prst="rect">
+            <a:avLst/>
+          </a:prstGeom>
+        </p:spPr>
+      </p:pic>
+      <p:sp>
+        <p:nvSpPr>
+          <p:cNvPr id="18" name="Text 12"/>
+          <p:cNvSpPr txBox="1"/>
+          <p:nvPr/>
+        </p:nvSpPr>
+        <p:spPr>
+          <a:xfrm>
+            <a:off x="6345936" y="2423160"/>
+            <a:ext cx="2103120" cy="411480"/>
+          </a:xfrm>
+          <a:prstGeom prst="rect">
+            <a:avLst/>
+          </a:prstGeom>
+          <a:noFill/>
+          <a:ln/>
+        </p:spPr>
+        <p:txBody>
+          <a:bodyPr wrap="square" lIns="0" tIns="0" rIns="0" bIns="0" rtlCol="0" anchor="ctr"/>
+          <a:lstStyle/>
+          <a:p>
+            <a:pPr indent="0" marL="0">
+              <a:buNone/>
+            </a:pPr>
+            <a:r>
+              <a:rPr lang="en-US" sz="2000" b="1" dirty="0">
+                <a:solidFill>
+                  <a:srgbClr val="8C1D40"/>
+                </a:solidFill>
+                <a:latin typeface="Cambria" pitchFamily="34" charset="0"/>
+                <a:ea typeface="Cambria" pitchFamily="34" charset="-122"/>
+                <a:cs typeface="Cambria" pitchFamily="34" charset="-120"/>
+              </a:rPr>
+              <a:t>Safety</a:t>
+            </a:r>
+            <a:endParaRPr lang="en-US" sz="2000" dirty="0"/>
+          </a:p>
+        </p:txBody>
+      </p:sp>
+      <p:sp>
+        <p:nvSpPr>
+          <p:cNvPr id="19" name="Text 13"/>
+          <p:cNvSpPr txBox="1"/>
+          <p:nvPr/>
+        </p:nvSpPr>
+        <p:spPr>
+          <a:xfrm>
+            <a:off x="6345936" y="2880360"/>
+            <a:ext cx="2103120" cy="1097280"/>
+          </a:xfrm>
+          <a:prstGeom prst="rect">
+            <a:avLst/>
+          </a:prstGeom>
+          <a:noFill/>
+          <a:ln/>
+        </p:spPr>
+        <p:txBody>
+          <a:bodyPr wrap="square" lIns="0" tIns="0" rIns="0" bIns="0" rtlCol="0" anchor="t"/>
+          <a:lstStyle/>
+          <a:p>
+            <a:pPr indent="0" marL="0">
+              <a:buNone/>
+            </a:pPr>
+            <a:r>
+              <a:rPr lang="en-US" sz="1400" dirty="0">
+                <a:solidFill>
+                  <a:srgbClr val="1F2937"/>
+                </a:solidFill>
+                <a:latin typeface="Calibri" pitchFamily="34" charset="0"/>
+                <a:ea typeface="Calibri" pitchFamily="34" charset="-122"/>
+                <a:cs typeface="Calibri" pitchFamily="34" charset="-120"/>
+              </a:rPr>
+              <a:t>Death, stroke and MACE at 30 days</a:t>
+            </a:r>
+            <a:endParaRPr lang="en-US" sz="1400" dirty="0"/>
+          </a:p>
+        </p:txBody>
+      </p:sp>
     </p:spTree>
   </p:cSld>
   <p:clrMapOvr>
